--- a/Physics/Physics_Murders.pptx
+++ b/Physics/Physics_Murders.pptx
@@ -6,16 +6,17 @@
   </p:sldMasterIdLst>
   <p:sldIdLst>
     <p:sldId id="272" r:id="rId2"/>
-    <p:sldId id="273" r:id="rId3"/>
-    <p:sldId id="274" r:id="rId4"/>
-    <p:sldId id="275" r:id="rId5"/>
-    <p:sldId id="276" r:id="rId6"/>
-    <p:sldId id="277" r:id="rId7"/>
+    <p:sldId id="281" r:id="rId3"/>
+    <p:sldId id="273" r:id="rId4"/>
+    <p:sldId id="276" r:id="rId5"/>
+    <p:sldId id="277" r:id="rId6"/>
+    <p:sldId id="283" r:id="rId7"/>
     <p:sldId id="278" r:id="rId8"/>
     <p:sldId id="279" r:id="rId9"/>
     <p:sldId id="280" r:id="rId10"/>
-    <p:sldId id="281" r:id="rId11"/>
-    <p:sldId id="282" r:id="rId12"/>
+    <p:sldId id="282" r:id="rId11"/>
+    <p:sldId id="274" r:id="rId12"/>
+    <p:sldId id="275" r:id="rId13"/>
   </p:sldIdLst>
   <p:sldSz cx="12192000" cy="6858000"/>
   <p:notesSz cx="6858000" cy="9144000"/>
@@ -3336,6 +3337,53 @@
           <a:chExt cx="0" cy="0"/>
         </a:xfrm>
       </p:grpSpPr>
+      <p:pic>
+        <p:nvPicPr>
+          <p:cNvPr id="2" name="Picture 2" descr="The Silenced Spark: Dr. Amy Eskridge's Final Stand Against the Gravity of  Secrets | by Thumars | Medium">
+            <a:extLst>
+              <a:ext uri="{FF2B5EF4-FFF2-40B4-BE49-F238E27FC236}">
+                <a16:creationId xmlns:a16="http://schemas.microsoft.com/office/drawing/2014/main" id="{32955344-6D94-2946-0F8D-B5DD94CBE32B}"/>
+              </a:ext>
+            </a:extLst>
+          </p:cNvPr>
+          <p:cNvPicPr>
+            <a:picLocks noChangeAspect="1" noChangeArrowheads="1"/>
+          </p:cNvPicPr>
+          <p:nvPr/>
+        </p:nvPicPr>
+        <p:blipFill>
+          <a:blip r:embed="rId2">
+            <a:extLst>
+              <a:ext uri="{28A0092B-C50C-407E-A947-70E740481C1C}">
+                <a14:useLocalDpi xmlns:a14="http://schemas.microsoft.com/office/drawing/2010/main" val="0"/>
+              </a:ext>
+            </a:extLst>
+          </a:blip>
+          <a:srcRect/>
+          <a:stretch>
+            <a:fillRect/>
+          </a:stretch>
+        </p:blipFill>
+        <p:spPr bwMode="auto">
+          <a:xfrm>
+            <a:off x="7473985" y="1096340"/>
+            <a:ext cx="4668179" cy="3828846"/>
+          </a:xfrm>
+          <a:prstGeom prst="rect">
+            <a:avLst/>
+          </a:prstGeom>
+          <a:noFill/>
+          <a:extLst>
+            <a:ext uri="{909E8E84-426E-40DD-AFC4-6F175D3DCCD1}">
+              <a14:hiddenFill xmlns:a14="http://schemas.microsoft.com/office/drawing/2010/main">
+                <a:solidFill>
+                  <a:srgbClr val="FFFFFF"/>
+                </a:solidFill>
+              </a14:hiddenFill>
+            </a:ext>
+          </a:extLst>
+        </p:spPr>
+      </p:pic>
       <p:sp>
         <p:nvSpPr>
           <p:cNvPr id="15" name="TextBox 14">
@@ -3642,8 +3690,8 @@
         </p:nvSpPr>
         <p:spPr>
           <a:xfrm>
-            <a:off x="312431" y="2175372"/>
-            <a:ext cx="6987941" cy="3046988"/>
+            <a:off x="107300" y="1873037"/>
+            <a:ext cx="7564361" cy="3477875"/>
           </a:xfrm>
           <a:prstGeom prst="rect">
             <a:avLst/>
@@ -3668,6 +3716,7 @@
               <a:buChar char="•"/>
             </a:pPr>
             <a:r>
+              <a:rPr dirty="0"/>
               <a:t>DEAD at 34 in Huntsville, Alabama — a retired UK intelligence officer told Congress she was MURDERED with DIRECTED ENERGY WEAPONS.</a:t>
             </a:r>
           </a:p>
@@ -3680,6 +3729,7 @@
               <a:buChar char="•"/>
             </a:pPr>
             <a:r>
+              <a:rPr dirty="0"/>
               <a:t>Co-founded the Institute for Exotic Science researching ANTIGRAVITY, metamaterials, and gravity modification.</a:t>
             </a:r>
           </a:p>
@@ -3692,6 +3742,7 @@
               <a:buChar char="•"/>
             </a:pPr>
             <a:r>
+              <a:rPr dirty="0"/>
               <a:t>Her father was a retired NASA plasma physics engineer — she needed NASA APPROVAL before presenting her antigravity findings.</a:t>
             </a:r>
           </a:p>
@@ -3704,6 +3755,7 @@
               <a:buChar char="•"/>
             </a:pPr>
             <a:r>
+              <a:rPr dirty="0"/>
               <a:t>Based at University of Alabama in Huntsville — same campus where another antigravity researcher, Ning Li, was targeted and SILENCED.</a:t>
             </a:r>
           </a:p>
@@ -3716,35 +3768,12 @@
               <a:buChar char="•"/>
             </a:pPr>
             <a:r>
+              <a:rPr dirty="0"/>
               <a:t>She told colleagues she was ready to bring antigravity research "into the open." She never got the chance.</a:t>
             </a:r>
           </a:p>
         </p:txBody>
       </p:sp>
-      <p:pic>
-        <p:nvPicPr>
-          <p:cNvPr id="16" name="Picture 15" descr="Amy_Eskridge.jpg"/>
-          <p:cNvPicPr>
-            <a:picLocks noChangeAspect="1"/>
-          </p:cNvPicPr>
-          <p:nvPr/>
-        </p:nvPicPr>
-        <p:blipFill>
-          <a:blip r:embed="rId2"/>
-          <a:stretch>
-            <a:fillRect/>
-          </a:stretch>
-        </p:blipFill>
-        <p:spPr>
-          <a:xfrm>
-            <a:off x="8178304" y="1100088"/>
-            <a:ext cx="2925358" cy="3884876"/>
-          </a:xfrm>
-          <a:prstGeom prst="rect">
-            <a:avLst/>
-          </a:prstGeom>
-        </p:spPr>
-      </p:pic>
     </p:spTree>
   </p:cSld>
   <p:clrMapOvr>
@@ -3785,7 +3814,7 @@
         <p:spPr>
           <a:xfrm>
             <a:off x="312432" y="1288262"/>
-            <a:ext cx="6494294" cy="584775"/>
+            <a:ext cx="7488382" cy="584775"/>
           </a:xfrm>
           <a:prstGeom prst="rect">
             <a:avLst/>
@@ -3808,7 +3837,7 @@
                   <a:schemeClr val="accent5"/>
                 </a:solidFill>
               </a:rPr>
-              <a:t>Why / How they Nuno Loureiro:</a:t>
+              <a:t>Why / How they Stanton Friedman:</a:t>
             </a:r>
           </a:p>
         </p:txBody>
@@ -3934,12 +3963,121 @@
               <a:buNone/>
             </a:pPr>
             <a:r>
+              <a:rPr lang="en-US" sz="4400" dirty="0">
+                <a:solidFill>
+                  <a:schemeClr val="lt1"/>
+                </a:solidFill>
+              </a:rPr>
+              <a:t> 40+ Murdered: Physics Breakthroughs Hidden</a:t>
+            </a:r>
+            <a:endParaRPr sz="2800" b="0" i="0" u="none" strike="noStrike" cap="none" dirty="0">
+              <a:solidFill>
+                <a:srgbClr val="000000"/>
+              </a:solidFill>
+              <a:latin typeface="Arial"/>
+              <a:ea typeface="Arial"/>
+              <a:cs typeface="Arial"/>
+              <a:sym typeface="Arial"/>
+            </a:endParaRPr>
+          </a:p>
+        </p:txBody>
+      </p:sp>
+      <p:sp>
+        <p:nvSpPr>
+          <p:cNvPr id="4" name="TextBox 3">
+            <a:extLst>
+              <a:ext uri="{FF2B5EF4-FFF2-40B4-BE49-F238E27FC236}">
+                <a16:creationId xmlns:a16="http://schemas.microsoft.com/office/drawing/2014/main" id="{50D7621F-9D36-7894-7117-9F831EF5EFA6}"/>
+              </a:ext>
+            </a:extLst>
+          </p:cNvPr>
+          <p:cNvSpPr txBox="1"/>
+          <p:nvPr/>
+        </p:nvSpPr>
+        <p:spPr>
+          <a:xfrm>
+            <a:off x="107300" y="6229650"/>
+            <a:ext cx="11685989" cy="461665"/>
+          </a:xfrm>
+          <a:prstGeom prst="rect">
+            <a:avLst/>
+          </a:prstGeom>
+          <a:solidFill>
+            <a:schemeClr val="bg1">
+              <a:alpha val="84400"/>
+            </a:schemeClr>
+          </a:solidFill>
+        </p:spPr>
+        <p:txBody>
+          <a:bodyPr wrap="square" rtlCol="0">
+            <a:spAutoFit/>
+          </a:bodyPr>
+          <a:lstStyle/>
+          <a:p>
+            <a:r>
+              <a:rPr lang="en-US" sz="2400" dirty="0"/>
+              <a:t>https://uapmurders.com/physics</a:t>
+            </a:r>
+          </a:p>
+        </p:txBody>
+      </p:sp>
+      <p:sp>
+        <p:nvSpPr>
+          <p:cNvPr id="7" name="Google Shape;170;p31">
+            <a:extLst>
+              <a:ext uri="{FF2B5EF4-FFF2-40B4-BE49-F238E27FC236}">
+                <a16:creationId xmlns:a16="http://schemas.microsoft.com/office/drawing/2014/main" id="{4B582382-76AA-B49E-C611-39A37CE591B9}"/>
+              </a:ext>
+            </a:extLst>
+          </p:cNvPr>
+          <p:cNvSpPr/>
+          <p:nvPr/>
+        </p:nvSpPr>
+        <p:spPr>
+          <a:xfrm>
+            <a:off x="7666494" y="5180908"/>
+            <a:ext cx="4379731" cy="1677092"/>
+          </a:xfrm>
+          <a:prstGeom prst="rect">
+            <a:avLst/>
+          </a:prstGeom>
+          <a:solidFill>
+            <a:srgbClr val="C00000"/>
+          </a:solidFill>
+          <a:ln>
+            <a:noFill/>
+          </a:ln>
+        </p:spPr>
+        <p:txBody>
+          <a:bodyPr spcFirstLastPara="1" wrap="square" lIns="91425" tIns="45700" rIns="91425" bIns="45700" anchor="ctr" anchorCtr="0">
+            <a:noAutofit/>
+          </a:bodyPr>
+          <a:lstStyle/>
+          <a:p>
+            <a:pPr marL="0" marR="0" lvl="0" indent="0" algn="ctr" rtl="0">
+              <a:lnSpc>
+                <a:spcPct val="100000"/>
+              </a:lnSpc>
+              <a:spcBef>
+                <a:spcPts val="0"/>
+              </a:spcBef>
+              <a:spcAft>
+                <a:spcPts val="0"/>
+              </a:spcAft>
+              <a:buClr>
+                <a:srgbClr val="000000"/>
+              </a:buClr>
+              <a:buSzPts val="1600"/>
+              <a:buFont typeface="Arial"/>
+              <a:buNone/>
+            </a:pPr>
+            <a:r>
               <a:rPr lang="en-US" sz="4800" dirty="0">
                 <a:solidFill>
                   <a:schemeClr val="lt1"/>
                 </a:solidFill>
               </a:rPr>
-              <a:t> 40+ Murdered: Physics Breakthroughs Hidden</a:t>
+              <a:t>Stanton Friedman</a:t>
             </a:r>
             <a:endParaRPr sz="3200" b="0" i="0" u="none" strike="noStrike" cap="none" dirty="0">
               <a:solidFill>
@@ -3955,10 +4093,10 @@
       </p:sp>
       <p:sp>
         <p:nvSpPr>
-          <p:cNvPr id="4" name="TextBox 3">
-            <a:extLst>
-              <a:ext uri="{FF2B5EF4-FFF2-40B4-BE49-F238E27FC236}">
-                <a16:creationId xmlns:a16="http://schemas.microsoft.com/office/drawing/2014/main" id="{50D7621F-9D36-7894-7117-9F831EF5EFA6}"/>
+          <p:cNvPr id="10" name="TextBox 9">
+            <a:extLst>
+              <a:ext uri="{FF2B5EF4-FFF2-40B4-BE49-F238E27FC236}">
+                <a16:creationId xmlns:a16="http://schemas.microsoft.com/office/drawing/2014/main" id="{5FA0D8B2-6B55-D3DC-BCBB-6FEAD86B9E72}"/>
               </a:ext>
             </a:extLst>
           </p:cNvPr>
@@ -3967,8 +4105,8 @@
         </p:nvSpPr>
         <p:spPr>
           <a:xfrm>
-            <a:off x="107300" y="6229650"/>
-            <a:ext cx="11685989" cy="461665"/>
+            <a:off x="129030" y="2003478"/>
+            <a:ext cx="6987941" cy="3046988"/>
           </a:xfrm>
           <a:prstGeom prst="rect">
             <a:avLst/>
@@ -3985,115 +4123,6 @@
           </a:bodyPr>
           <a:lstStyle/>
           <a:p>
-            <a:r>
-              <a:rPr lang="en-US" sz="2400" dirty="0"/>
-              <a:t>https://uapmurders.com/physics</a:t>
-            </a:r>
-          </a:p>
-        </p:txBody>
-      </p:sp>
-      <p:sp>
-        <p:nvSpPr>
-          <p:cNvPr id="7" name="Google Shape;170;p31">
-            <a:extLst>
-              <a:ext uri="{FF2B5EF4-FFF2-40B4-BE49-F238E27FC236}">
-                <a16:creationId xmlns:a16="http://schemas.microsoft.com/office/drawing/2014/main" id="{4B582382-76AA-B49E-C611-39A37CE591B9}"/>
-              </a:ext>
-            </a:extLst>
-          </p:cNvPr>
-          <p:cNvSpPr/>
-          <p:nvPr/>
-        </p:nvSpPr>
-        <p:spPr>
-          <a:xfrm>
-            <a:off x="7506336" y="4925186"/>
-            <a:ext cx="4550222" cy="869505"/>
-          </a:xfrm>
-          <a:prstGeom prst="rect">
-            <a:avLst/>
-          </a:prstGeom>
-          <a:solidFill>
-            <a:srgbClr val="C00000"/>
-          </a:solidFill>
-          <a:ln>
-            <a:noFill/>
-          </a:ln>
-        </p:spPr>
-        <p:txBody>
-          <a:bodyPr spcFirstLastPara="1" wrap="square" lIns="91425" tIns="45700" rIns="91425" bIns="45700" anchor="ctr" anchorCtr="0">
-            <a:noAutofit/>
-          </a:bodyPr>
-          <a:lstStyle/>
-          <a:p>
-            <a:pPr marL="0" marR="0" lvl="0" indent="0" algn="ctr" rtl="0">
-              <a:lnSpc>
-                <a:spcPct val="100000"/>
-              </a:lnSpc>
-              <a:spcBef>
-                <a:spcPts val="0"/>
-              </a:spcBef>
-              <a:spcAft>
-                <a:spcPts val="0"/>
-              </a:spcAft>
-              <a:buClr>
-                <a:srgbClr val="000000"/>
-              </a:buClr>
-              <a:buSzPts val="1600"/>
-              <a:buFont typeface="Arial"/>
-              <a:buNone/>
-            </a:pPr>
-            <a:r>
-              <a:rPr lang="en-US" sz="4800" dirty="0">
-                <a:solidFill>
-                  <a:schemeClr val="lt1"/>
-                </a:solidFill>
-              </a:rPr>
-              <a:t>Nuno Loureiro</a:t>
-            </a:r>
-            <a:endParaRPr sz="3200" b="0" i="0" u="none" strike="noStrike" cap="none" dirty="0">
-              <a:solidFill>
-                <a:srgbClr val="000000"/>
-              </a:solidFill>
-              <a:latin typeface="Arial"/>
-              <a:ea typeface="Arial"/>
-              <a:cs typeface="Arial"/>
-              <a:sym typeface="Arial"/>
-            </a:endParaRPr>
-          </a:p>
-        </p:txBody>
-      </p:sp>
-      <p:sp>
-        <p:nvSpPr>
-          <p:cNvPr id="10" name="TextBox 9">
-            <a:extLst>
-              <a:ext uri="{FF2B5EF4-FFF2-40B4-BE49-F238E27FC236}">
-                <a16:creationId xmlns:a16="http://schemas.microsoft.com/office/drawing/2014/main" id="{5FA0D8B2-6B55-D3DC-BCBB-6FEAD86B9E72}"/>
-              </a:ext>
-            </a:extLst>
-          </p:cNvPr>
-          <p:cNvSpPr txBox="1"/>
-          <p:nvPr/>
-        </p:nvSpPr>
-        <p:spPr>
-          <a:xfrm>
-            <a:off x="312431" y="2175372"/>
-            <a:ext cx="6987941" cy="3046988"/>
-          </a:xfrm>
-          <a:prstGeom prst="rect">
-            <a:avLst/>
-          </a:prstGeom>
-          <a:solidFill>
-            <a:schemeClr val="bg1">
-              <a:alpha val="84400"/>
-            </a:schemeClr>
-          </a:solidFill>
-        </p:spPr>
-        <p:txBody>
-          <a:bodyPr wrap="square" rtlCol="0">
-            <a:spAutoFit/>
-          </a:bodyPr>
-          <a:lstStyle/>
-          <a:p>
             <a:pPr marL="285750" indent="-285750">
               <a:spcBef>
                 <a:spcPts val="1200"/>
@@ -4102,7 +4131,8 @@
               <a:buChar char="•"/>
             </a:pPr>
             <a:r>
-              <a:t>SHOT DEAD at his home in Brookline, Massachusetts on December 15, 2025. He was 47.</a:t>
+              <a:rPr dirty="0"/>
+              <a:t>DIED May 13, 2019, at age 84 — nuclear physicist who became the world's foremost SCIENTIFIC UFO researcher.</a:t>
             </a:r>
           </a:p>
           <a:p>
@@ -4114,7 +4144,8 @@
               <a:buChar char="•"/>
             </a:pPr>
             <a:r>
-              <a:t>Director of MIT's Plasma Science and Fusion Center — one of the world's LEADING fusion research facilities.</a:t>
+              <a:rPr dirty="0"/>
+              <a:t>Worked on CLASSIFIED fission and fusion rocket programs at GE, Westinghouse, McDonnell Douglas, and TRW.</a:t>
             </a:r>
           </a:p>
           <a:p>
@@ -4126,7 +4157,8 @@
               <a:buChar char="•"/>
             </a:pPr>
             <a:r>
-              <a:t>Received the Presidential Early Career Award from Joe Biden just months before his MURDER.</a:t>
+              <a:rPr dirty="0"/>
+              <a:t>Proposed magnetohydrodynamic propulsion as the physics behind UFO flight — based on his hands-on NUCLEAR experience.</a:t>
             </a:r>
           </a:p>
           <a:p>
@@ -4138,7 +4170,8 @@
               <a:buChar char="•"/>
             </a:pPr>
             <a:r>
-              <a:t>His breakthrough: proving that 50-year-old textbook physics on magnetic reconnection was FUNDAMENTALLY wrong.</a:t>
+              <a:rPr dirty="0"/>
+              <a:t>Testified before Congress in 1968: "The evidence is OVERWHELMING that Earth is being visited."</a:t>
             </a:r>
           </a:p>
           <a:p>
@@ -4150,14 +4183,15 @@
               <a:buChar char="•"/>
             </a:pPr>
             <a:r>
-              <a:t>Survived by his wife and children. Portuguese-born, Herman Feshbach Professor of Physics at MIT.</a:t>
+              <a:rPr dirty="0"/>
+              <a:t>Gave over 700 lectures at colleges and conferences. The original Roswell researcher. Natural causes at 84.</a:t>
             </a:r>
           </a:p>
         </p:txBody>
       </p:sp>
       <p:pic>
         <p:nvPicPr>
-          <p:cNvPr id="16" name="Picture 15" descr="Nuno_Loureiro.jpg"/>
+          <p:cNvPr id="16" name="Picture 15" descr="Stanton_Friedman.jpg"/>
           <p:cNvPicPr>
             <a:picLocks noChangeAspect="1"/>
           </p:cNvPicPr>
@@ -4171,8 +4205,8 @@
         </p:blipFill>
         <p:spPr>
           <a:xfrm>
-            <a:off x="7051066" y="1100088"/>
-            <a:ext cx="5179834" cy="3884876"/>
+            <a:off x="8059838" y="1100088"/>
+            <a:ext cx="3162289" cy="3884876"/>
           </a:xfrm>
           <a:prstGeom prst="rect">
             <a:avLst/>
@@ -4242,7 +4276,7 @@
                   <a:schemeClr val="accent5"/>
                 </a:solidFill>
               </a:rPr>
-              <a:t>Why / How they Stanton Friedman:</a:t>
+              <a:t>Why / How they Harald Malmgren:</a:t>
             </a:r>
           </a:p>
         </p:txBody>
@@ -4428,76 +4462,6 @@
       </p:sp>
       <p:sp>
         <p:nvSpPr>
-          <p:cNvPr id="7" name="Google Shape;170;p31">
-            <a:extLst>
-              <a:ext uri="{FF2B5EF4-FFF2-40B4-BE49-F238E27FC236}">
-                <a16:creationId xmlns:a16="http://schemas.microsoft.com/office/drawing/2014/main" id="{4B582382-76AA-B49E-C611-39A37CE591B9}"/>
-              </a:ext>
-            </a:extLst>
-          </p:cNvPr>
-          <p:cNvSpPr/>
-          <p:nvPr/>
-        </p:nvSpPr>
-        <p:spPr>
-          <a:xfrm>
-            <a:off x="7506336" y="4925186"/>
-            <a:ext cx="4550222" cy="869505"/>
-          </a:xfrm>
-          <a:prstGeom prst="rect">
-            <a:avLst/>
-          </a:prstGeom>
-          <a:solidFill>
-            <a:srgbClr val="C00000"/>
-          </a:solidFill>
-          <a:ln>
-            <a:noFill/>
-          </a:ln>
-        </p:spPr>
-        <p:txBody>
-          <a:bodyPr spcFirstLastPara="1" wrap="square" lIns="91425" tIns="45700" rIns="91425" bIns="45700" anchor="ctr" anchorCtr="0">
-            <a:noAutofit/>
-          </a:bodyPr>
-          <a:lstStyle/>
-          <a:p>
-            <a:pPr marL="0" marR="0" lvl="0" indent="0" algn="ctr" rtl="0">
-              <a:lnSpc>
-                <a:spcPct val="100000"/>
-              </a:lnSpc>
-              <a:spcBef>
-                <a:spcPts val="0"/>
-              </a:spcBef>
-              <a:spcAft>
-                <a:spcPts val="0"/>
-              </a:spcAft>
-              <a:buClr>
-                <a:srgbClr val="000000"/>
-              </a:buClr>
-              <a:buSzPts val="1600"/>
-              <a:buFont typeface="Arial"/>
-              <a:buNone/>
-            </a:pPr>
-            <a:r>
-              <a:rPr lang="en-US" sz="4800" dirty="0">
-                <a:solidFill>
-                  <a:schemeClr val="lt1"/>
-                </a:solidFill>
-              </a:rPr>
-              <a:t>Stanton Friedman</a:t>
-            </a:r>
-            <a:endParaRPr sz="3200" b="0" i="0" u="none" strike="noStrike" cap="none" dirty="0">
-              <a:solidFill>
-                <a:srgbClr val="000000"/>
-              </a:solidFill>
-              <a:latin typeface="Arial"/>
-              <a:ea typeface="Arial"/>
-              <a:cs typeface="Arial"/>
-              <a:sym typeface="Arial"/>
-            </a:endParaRPr>
-          </a:p>
-        </p:txBody>
-      </p:sp>
-      <p:sp>
-        <p:nvSpPr>
           <p:cNvPr id="10" name="TextBox 9">
             <a:extLst>
               <a:ext uri="{FF2B5EF4-FFF2-40B4-BE49-F238E27FC236}">
@@ -4510,8 +4474,8 @@
         </p:nvSpPr>
         <p:spPr>
           <a:xfrm>
-            <a:off x="312431" y="2175372"/>
-            <a:ext cx="6987941" cy="3046988"/>
+            <a:off x="237466" y="1937976"/>
+            <a:ext cx="8219442" cy="3477875"/>
           </a:xfrm>
           <a:prstGeom prst="rect">
             <a:avLst/>
@@ -4536,7 +4500,8 @@
               <a:buChar char="•"/>
             </a:pPr>
             <a:r>
-              <a:t>DIED May 13, 2019, at age 84 — nuclear physicist who became the world's foremost SCIENTIFIC UFO researcher.</a:t>
+              <a:rPr dirty="0"/>
+              <a:t>DIED February 13, 2025 — served four US presidents as economist and diplomat.</a:t>
             </a:r>
           </a:p>
           <a:p>
@@ -4548,7 +4513,8 @@
               <a:buChar char="•"/>
             </a:pPr>
             <a:r>
-              <a:t>Worked on CLASSIFIED fission and fusion rocket programs at GE, Westinghouse, McDonnell Douglas, and TRW.</a:t>
+              <a:rPr dirty="0"/>
+              <a:t>In his final year, claimed he personally HANDLED debris from a crashed UFO and witnessed a 1962 craft SHOOT-DOWN.</a:t>
             </a:r>
           </a:p>
           <a:p>
@@ -4560,7 +4526,8 @@
               <a:buChar char="•"/>
             </a:pPr>
             <a:r>
-              <a:t>Proposed magnetohydrodynamic propulsion as the physics behind UFO flight — based on his hands-on NUCLEAR experience.</a:t>
+              <a:rPr dirty="0"/>
+              <a:t>Said he held an Atomic Energy Commission Q-CLEARANCE — the highest level for nuclear and physics secrets.</a:t>
             </a:r>
           </a:p>
           <a:p>
@@ -4572,7 +4539,8 @@
               <a:buChar char="•"/>
             </a:pPr>
             <a:r>
-              <a:t>Testified before Congress in 1968: "The evidence is OVERWHELMING that Earth is being visited."</a:t>
+              <a:rPr dirty="0"/>
+              <a:t>DEBUNKED after death: declassified FBI files proved he NEVER held a Q-clearance and FABRICATED key claims.</a:t>
             </a:r>
           </a:p>
           <a:p>
@@ -4584,14 +4552,15 @@
               <a:buChar char="•"/>
             </a:pPr>
             <a:r>
-              <a:t>Gave over 700 lectures at colleges and conferences. The original Roswell researcher. Natural causes at 84.</a:t>
+              <a:rPr dirty="0"/>
+              <a:t>Cautionary tale: even credentialed officials can introduce FALSE data points into the UAP evidence base.</a:t>
             </a:r>
           </a:p>
         </p:txBody>
       </p:sp>
       <p:pic>
         <p:nvPicPr>
-          <p:cNvPr id="16" name="Picture 15" descr="Stanton_Friedman.jpg"/>
+          <p:cNvPr id="16" name="Picture 15" descr="Harald_Malmgren.jpg"/>
           <p:cNvPicPr>
             <a:picLocks noChangeAspect="1"/>
           </p:cNvPicPr>
@@ -4605,8 +4574,592 @@
         </p:blipFill>
         <p:spPr>
           <a:xfrm>
-            <a:off x="8059838" y="1100088"/>
-            <a:ext cx="3162289" cy="3884876"/>
+            <a:off x="9467849" y="1070199"/>
+            <a:ext cx="2526361" cy="3884876"/>
+          </a:xfrm>
+          <a:prstGeom prst="rect">
+            <a:avLst/>
+          </a:prstGeom>
+        </p:spPr>
+      </p:pic>
+      <p:sp>
+        <p:nvSpPr>
+          <p:cNvPr id="7" name="Google Shape;170;p31">
+            <a:extLst>
+              <a:ext uri="{FF2B5EF4-FFF2-40B4-BE49-F238E27FC236}">
+                <a16:creationId xmlns:a16="http://schemas.microsoft.com/office/drawing/2014/main" id="{4B582382-76AA-B49E-C611-39A37CE591B9}"/>
+              </a:ext>
+            </a:extLst>
+          </p:cNvPr>
+          <p:cNvSpPr/>
+          <p:nvPr/>
+        </p:nvSpPr>
+        <p:spPr>
+          <a:xfrm>
+            <a:off x="7521834" y="5187287"/>
+            <a:ext cx="4550222" cy="869505"/>
+          </a:xfrm>
+          <a:prstGeom prst="rect">
+            <a:avLst/>
+          </a:prstGeom>
+          <a:solidFill>
+            <a:srgbClr val="C00000"/>
+          </a:solidFill>
+          <a:ln>
+            <a:noFill/>
+          </a:ln>
+        </p:spPr>
+        <p:txBody>
+          <a:bodyPr spcFirstLastPara="1" wrap="square" lIns="91425" tIns="45700" rIns="91425" bIns="45700" anchor="ctr" anchorCtr="0">
+            <a:noAutofit/>
+          </a:bodyPr>
+          <a:lstStyle/>
+          <a:p>
+            <a:pPr marL="0" marR="0" lvl="0" indent="0" algn="ctr" rtl="0">
+              <a:lnSpc>
+                <a:spcPct val="100000"/>
+              </a:lnSpc>
+              <a:spcBef>
+                <a:spcPts val="0"/>
+              </a:spcBef>
+              <a:spcAft>
+                <a:spcPts val="0"/>
+              </a:spcAft>
+              <a:buClr>
+                <a:srgbClr val="000000"/>
+              </a:buClr>
+              <a:buSzPts val="1600"/>
+              <a:buFont typeface="Arial"/>
+              <a:buNone/>
+            </a:pPr>
+            <a:r>
+              <a:rPr lang="en-US" sz="4400" dirty="0">
+                <a:solidFill>
+                  <a:schemeClr val="lt1"/>
+                </a:solidFill>
+              </a:rPr>
+              <a:t>Harald Malmgren</a:t>
+            </a:r>
+            <a:endParaRPr sz="2800" b="0" i="0" u="none" strike="noStrike" cap="none" dirty="0">
+              <a:solidFill>
+                <a:srgbClr val="000000"/>
+              </a:solidFill>
+              <a:latin typeface="Arial"/>
+              <a:ea typeface="Arial"/>
+              <a:cs typeface="Arial"/>
+              <a:sym typeface="Arial"/>
+            </a:endParaRPr>
+          </a:p>
+        </p:txBody>
+      </p:sp>
+    </p:spTree>
+    <p:extLst>
+      <p:ext uri="{BB962C8B-B14F-4D97-AF65-F5344CB8AC3E}">
+        <p14:creationId xmlns:p14="http://schemas.microsoft.com/office/powerpoint/2010/main" val="3610826668"/>
+      </p:ext>
+    </p:extLst>
+  </p:cSld>
+  <p:clrMapOvr>
+    <a:masterClrMapping/>
+  </p:clrMapOvr>
+</p:sld>
+</file>
+
+<file path=ppt/slides/slide12.xml><?xml version="1.0" encoding="utf-8"?>
+<p:sld xmlns:a="http://schemas.openxmlformats.org/drawingml/2006/main" xmlns:r="http://schemas.openxmlformats.org/officeDocument/2006/relationships" xmlns:p="http://schemas.openxmlformats.org/presentationml/2006/main">
+  <p:cSld>
+    <p:spTree>
+      <p:nvGrpSpPr>
+        <p:cNvPr id="1" name=""/>
+        <p:cNvGrpSpPr/>
+        <p:nvPr/>
+      </p:nvGrpSpPr>
+      <p:grpSpPr>
+        <a:xfrm>
+          <a:off x="0" y="0"/>
+          <a:ext cx="0" cy="0"/>
+          <a:chOff x="0" y="0"/>
+          <a:chExt cx="0" cy="0"/>
+        </a:xfrm>
+      </p:grpSpPr>
+      <p:sp>
+        <p:nvSpPr>
+          <p:cNvPr id="15" name="TextBox 14">
+            <a:extLst>
+              <a:ext uri="{FF2B5EF4-FFF2-40B4-BE49-F238E27FC236}">
+                <a16:creationId xmlns:a16="http://schemas.microsoft.com/office/drawing/2014/main" id="{E478240E-251B-5BA6-3C45-7E6620400769}"/>
+              </a:ext>
+            </a:extLst>
+          </p:cNvPr>
+          <p:cNvSpPr txBox="1"/>
+          <p:nvPr/>
+        </p:nvSpPr>
+        <p:spPr>
+          <a:xfrm>
+            <a:off x="312432" y="1288262"/>
+            <a:ext cx="6494294" cy="584775"/>
+          </a:xfrm>
+          <a:prstGeom prst="rect">
+            <a:avLst/>
+          </a:prstGeom>
+          <a:solidFill>
+            <a:schemeClr val="bg1">
+              <a:alpha val="84400"/>
+            </a:schemeClr>
+          </a:solidFill>
+        </p:spPr>
+        <p:txBody>
+          <a:bodyPr wrap="square" rtlCol="0">
+            <a:spAutoFit/>
+          </a:bodyPr>
+          <a:lstStyle/>
+          <a:p>
+            <a:r>
+              <a:rPr lang="en-US" sz="3200" b="1" dirty="0">
+                <a:solidFill>
+                  <a:schemeClr val="accent5"/>
+                </a:solidFill>
+              </a:rPr>
+              <a:t>Why / How they John Bedini:</a:t>
+            </a:r>
+          </a:p>
+        </p:txBody>
+      </p:sp>
+      <p:sp>
+        <p:nvSpPr>
+          <p:cNvPr id="3" name="Google Shape;170;p31">
+            <a:extLst>
+              <a:ext uri="{FF2B5EF4-FFF2-40B4-BE49-F238E27FC236}">
+                <a16:creationId xmlns:a16="http://schemas.microsoft.com/office/drawing/2014/main" id="{A4695FE5-0AA5-AB05-98B1-B5B8E3FA8CBE}"/>
+              </a:ext>
+            </a:extLst>
+          </p:cNvPr>
+          <p:cNvSpPr/>
+          <p:nvPr/>
+        </p:nvSpPr>
+        <p:spPr>
+          <a:xfrm>
+            <a:off x="191731" y="5732890"/>
+            <a:ext cx="3431270" cy="496760"/>
+          </a:xfrm>
+          <a:prstGeom prst="rect">
+            <a:avLst/>
+          </a:prstGeom>
+          <a:solidFill>
+            <a:schemeClr val="accent5"/>
+          </a:solidFill>
+          <a:ln>
+            <a:noFill/>
+          </a:ln>
+        </p:spPr>
+        <p:txBody>
+          <a:bodyPr spcFirstLastPara="1" wrap="square" lIns="91425" tIns="45700" rIns="91425" bIns="45700" anchor="ctr" anchorCtr="0">
+            <a:noAutofit/>
+          </a:bodyPr>
+          <a:lstStyle/>
+          <a:p>
+            <a:pPr marL="0" marR="0" lvl="0" indent="0" algn="ctr" rtl="0">
+              <a:lnSpc>
+                <a:spcPct val="100000"/>
+              </a:lnSpc>
+              <a:spcBef>
+                <a:spcPts val="0"/>
+              </a:spcBef>
+              <a:spcAft>
+                <a:spcPts val="0"/>
+              </a:spcAft>
+              <a:buClr>
+                <a:srgbClr val="000000"/>
+              </a:buClr>
+              <a:buSzPts val="1600"/>
+              <a:buFont typeface="Arial"/>
+              <a:buNone/>
+            </a:pPr>
+            <a:r>
+              <a:rPr lang="en-US" sz="3600" dirty="0">
+                <a:solidFill>
+                  <a:schemeClr val="lt1"/>
+                </a:solidFill>
+              </a:rPr>
+              <a:t>Read List Here:</a:t>
+            </a:r>
+            <a:endParaRPr sz="2000" b="0" i="0" u="none" strike="noStrike" cap="none" dirty="0">
+              <a:solidFill>
+                <a:srgbClr val="000000"/>
+              </a:solidFill>
+              <a:latin typeface="Arial"/>
+              <a:ea typeface="Arial"/>
+              <a:cs typeface="Arial"/>
+              <a:sym typeface="Arial"/>
+            </a:endParaRPr>
+          </a:p>
+        </p:txBody>
+      </p:sp>
+      <p:sp>
+        <p:nvSpPr>
+          <p:cNvPr id="5" name="Google Shape;170;p31">
+            <a:extLst>
+              <a:ext uri="{FF2B5EF4-FFF2-40B4-BE49-F238E27FC236}">
+                <a16:creationId xmlns:a16="http://schemas.microsoft.com/office/drawing/2014/main" id="{98132413-6ED2-8B36-74B6-3C503B1A4634}"/>
+              </a:ext>
+            </a:extLst>
+          </p:cNvPr>
+          <p:cNvSpPr/>
+          <p:nvPr/>
+        </p:nvSpPr>
+        <p:spPr>
+          <a:xfrm>
+            <a:off x="0" y="-31518"/>
+            <a:ext cx="12192000" cy="1131606"/>
+          </a:xfrm>
+          <a:prstGeom prst="rect">
+            <a:avLst/>
+          </a:prstGeom>
+          <a:solidFill>
+            <a:srgbClr val="C00000"/>
+          </a:solidFill>
+          <a:ln>
+            <a:noFill/>
+          </a:ln>
+        </p:spPr>
+        <p:txBody>
+          <a:bodyPr spcFirstLastPara="1" wrap="square" lIns="91425" tIns="45700" rIns="91425" bIns="45700" anchor="ctr" anchorCtr="0">
+            <a:noAutofit/>
+          </a:bodyPr>
+          <a:lstStyle/>
+          <a:p>
+            <a:pPr marL="0" marR="0" lvl="0" indent="0" rtl="0">
+              <a:lnSpc>
+                <a:spcPct val="100000"/>
+              </a:lnSpc>
+              <a:spcBef>
+                <a:spcPts val="0"/>
+              </a:spcBef>
+              <a:spcAft>
+                <a:spcPts val="0"/>
+              </a:spcAft>
+              <a:buClr>
+                <a:srgbClr val="000000"/>
+              </a:buClr>
+              <a:buSzPts val="1600"/>
+              <a:buFont typeface="Arial"/>
+              <a:buNone/>
+            </a:pPr>
+            <a:r>
+              <a:rPr lang="en-US" sz="4400" dirty="0">
+                <a:solidFill>
+                  <a:schemeClr val="lt1"/>
+                </a:solidFill>
+              </a:rPr>
+              <a:t> 40+ Murdered: Physics Breakthroughs Hidden</a:t>
+            </a:r>
+            <a:endParaRPr sz="2800" b="0" i="0" u="none" strike="noStrike" cap="none" dirty="0">
+              <a:solidFill>
+                <a:srgbClr val="000000"/>
+              </a:solidFill>
+              <a:latin typeface="Arial"/>
+              <a:ea typeface="Arial"/>
+              <a:cs typeface="Arial"/>
+              <a:sym typeface="Arial"/>
+            </a:endParaRPr>
+          </a:p>
+        </p:txBody>
+      </p:sp>
+      <p:sp>
+        <p:nvSpPr>
+          <p:cNvPr id="4" name="TextBox 3">
+            <a:extLst>
+              <a:ext uri="{FF2B5EF4-FFF2-40B4-BE49-F238E27FC236}">
+                <a16:creationId xmlns:a16="http://schemas.microsoft.com/office/drawing/2014/main" id="{50D7621F-9D36-7894-7117-9F831EF5EFA6}"/>
+              </a:ext>
+            </a:extLst>
+          </p:cNvPr>
+          <p:cNvSpPr txBox="1"/>
+          <p:nvPr/>
+        </p:nvSpPr>
+        <p:spPr>
+          <a:xfrm>
+            <a:off x="107300" y="6229650"/>
+            <a:ext cx="11685989" cy="461665"/>
+          </a:xfrm>
+          <a:prstGeom prst="rect">
+            <a:avLst/>
+          </a:prstGeom>
+          <a:solidFill>
+            <a:schemeClr val="bg1">
+              <a:alpha val="84400"/>
+            </a:schemeClr>
+          </a:solidFill>
+        </p:spPr>
+        <p:txBody>
+          <a:bodyPr wrap="square" rtlCol="0">
+            <a:spAutoFit/>
+          </a:bodyPr>
+          <a:lstStyle/>
+          <a:p>
+            <a:r>
+              <a:rPr lang="en-US" sz="2400" dirty="0"/>
+              <a:t>https://uapmurders.com/physics</a:t>
+            </a:r>
+          </a:p>
+        </p:txBody>
+      </p:sp>
+      <p:sp>
+        <p:nvSpPr>
+          <p:cNvPr id="7" name="Google Shape;170;p31">
+            <a:extLst>
+              <a:ext uri="{FF2B5EF4-FFF2-40B4-BE49-F238E27FC236}">
+                <a16:creationId xmlns:a16="http://schemas.microsoft.com/office/drawing/2014/main" id="{4B582382-76AA-B49E-C611-39A37CE591B9}"/>
+              </a:ext>
+            </a:extLst>
+          </p:cNvPr>
+          <p:cNvSpPr/>
+          <p:nvPr/>
+        </p:nvSpPr>
+        <p:spPr>
+          <a:xfrm>
+            <a:off x="7506336" y="4925186"/>
+            <a:ext cx="4550222" cy="869505"/>
+          </a:xfrm>
+          <a:prstGeom prst="rect">
+            <a:avLst/>
+          </a:prstGeom>
+          <a:solidFill>
+            <a:srgbClr val="C00000"/>
+          </a:solidFill>
+          <a:ln>
+            <a:noFill/>
+          </a:ln>
+        </p:spPr>
+        <p:txBody>
+          <a:bodyPr spcFirstLastPara="1" wrap="square" lIns="91425" tIns="45700" rIns="91425" bIns="45700" anchor="ctr" anchorCtr="0">
+            <a:noAutofit/>
+          </a:bodyPr>
+          <a:lstStyle/>
+          <a:p>
+            <a:pPr marL="0" marR="0" lvl="0" indent="0" algn="ctr" rtl="0">
+              <a:lnSpc>
+                <a:spcPct val="100000"/>
+              </a:lnSpc>
+              <a:spcBef>
+                <a:spcPts val="0"/>
+              </a:spcBef>
+              <a:spcAft>
+                <a:spcPts val="0"/>
+              </a:spcAft>
+              <a:buClr>
+                <a:srgbClr val="000000"/>
+              </a:buClr>
+              <a:buSzPts val="1600"/>
+              <a:buFont typeface="Arial"/>
+              <a:buNone/>
+            </a:pPr>
+            <a:r>
+              <a:rPr lang="en-US" sz="4800" dirty="0">
+                <a:solidFill>
+                  <a:schemeClr val="lt1"/>
+                </a:solidFill>
+              </a:rPr>
+              <a:t>John Bedini</a:t>
+            </a:r>
+            <a:endParaRPr sz="3200" b="0" i="0" u="none" strike="noStrike" cap="none" dirty="0">
+              <a:solidFill>
+                <a:srgbClr val="000000"/>
+              </a:solidFill>
+              <a:latin typeface="Arial"/>
+              <a:ea typeface="Arial"/>
+              <a:cs typeface="Arial"/>
+              <a:sym typeface="Arial"/>
+            </a:endParaRPr>
+          </a:p>
+        </p:txBody>
+      </p:sp>
+      <p:sp>
+        <p:nvSpPr>
+          <p:cNvPr id="8" name="Google Shape;170;p31">
+            <a:extLst>
+              <a:ext uri="{FF2B5EF4-FFF2-40B4-BE49-F238E27FC236}">
+                <a16:creationId xmlns:a16="http://schemas.microsoft.com/office/drawing/2014/main" id="{D328ABDE-E232-3EB7-C3F2-B4BB7B64262F}"/>
+              </a:ext>
+            </a:extLst>
+          </p:cNvPr>
+          <p:cNvSpPr/>
+          <p:nvPr/>
+        </p:nvSpPr>
+        <p:spPr>
+          <a:xfrm>
+            <a:off x="7526107" y="5681420"/>
+            <a:ext cx="4550222" cy="548230"/>
+          </a:xfrm>
+          <a:prstGeom prst="rect">
+            <a:avLst/>
+          </a:prstGeom>
+          <a:solidFill>
+            <a:srgbClr val="C00000"/>
+          </a:solidFill>
+          <a:ln>
+            <a:noFill/>
+          </a:ln>
+        </p:spPr>
+        <p:txBody>
+          <a:bodyPr spcFirstLastPara="1" wrap="square" lIns="91425" tIns="45700" rIns="91425" bIns="45700" anchor="ctr" anchorCtr="0">
+            <a:noAutofit/>
+          </a:bodyPr>
+          <a:lstStyle/>
+          <a:p>
+            <a:pPr marL="0" marR="0" lvl="0" indent="0" algn="ctr" rtl="0">
+              <a:lnSpc>
+                <a:spcPct val="100000"/>
+              </a:lnSpc>
+              <a:spcBef>
+                <a:spcPts val="0"/>
+              </a:spcBef>
+              <a:spcAft>
+                <a:spcPts val="0"/>
+              </a:spcAft>
+              <a:buClr>
+                <a:srgbClr val="000000"/>
+              </a:buClr>
+              <a:buSzPts val="1600"/>
+              <a:buFont typeface="Arial"/>
+              <a:buNone/>
+            </a:pPr>
+            <a:r>
+              <a:rPr lang="en-US" sz="3600" dirty="0">
+                <a:solidFill>
+                  <a:schemeClr val="lt1"/>
+                </a:solidFill>
+              </a:rPr>
+              <a:t>Dead at Age 67</a:t>
+            </a:r>
+            <a:endParaRPr sz="2000" b="0" i="0" u="none" strike="noStrike" cap="none" dirty="0">
+              <a:solidFill>
+                <a:srgbClr val="000000"/>
+              </a:solidFill>
+              <a:latin typeface="Arial"/>
+              <a:ea typeface="Arial"/>
+              <a:cs typeface="Arial"/>
+              <a:sym typeface="Arial"/>
+            </a:endParaRPr>
+          </a:p>
+        </p:txBody>
+      </p:sp>
+      <p:sp>
+        <p:nvSpPr>
+          <p:cNvPr id="10" name="TextBox 9">
+            <a:extLst>
+              <a:ext uri="{FF2B5EF4-FFF2-40B4-BE49-F238E27FC236}">
+                <a16:creationId xmlns:a16="http://schemas.microsoft.com/office/drawing/2014/main" id="{5FA0D8B2-6B55-D3DC-BCBB-6FEAD86B9E72}"/>
+              </a:ext>
+            </a:extLst>
+          </p:cNvPr>
+          <p:cNvSpPr txBox="1"/>
+          <p:nvPr/>
+        </p:nvSpPr>
+        <p:spPr>
+          <a:xfrm>
+            <a:off x="107300" y="1878198"/>
+            <a:ext cx="7863995" cy="3477875"/>
+          </a:xfrm>
+          <a:prstGeom prst="rect">
+            <a:avLst/>
+          </a:prstGeom>
+          <a:solidFill>
+            <a:schemeClr val="bg1">
+              <a:alpha val="84400"/>
+            </a:schemeClr>
+          </a:solidFill>
+        </p:spPr>
+        <p:txBody>
+          <a:bodyPr wrap="square" rtlCol="0">
+            <a:spAutoFit/>
+          </a:bodyPr>
+          <a:lstStyle/>
+          <a:p>
+            <a:pPr marL="285750" indent="-285750">
+              <a:spcBef>
+                <a:spcPts val="1200"/>
+              </a:spcBef>
+              <a:buFont typeface="Arial" panose="020B0604020202020204" pitchFamily="34" charset="0"/>
+              <a:buChar char="•"/>
+            </a:pPr>
+            <a:r>
+              <a:rPr dirty="0"/>
+              <a:t>DIED November 5, 2016, at age 67 in Coeur d'Alene, Idaho — free energy inventor for four decades.</a:t>
+            </a:r>
+          </a:p>
+          <a:p>
+            <a:pPr marL="285750" indent="-285750">
+              <a:spcBef>
+                <a:spcPts val="1200"/>
+              </a:spcBef>
+              <a:buFont typeface="Arial" panose="020B0604020202020204" pitchFamily="34" charset="0"/>
+              <a:buChar char="•"/>
+            </a:pPr>
+            <a:r>
+              <a:rPr dirty="0"/>
+              <a:t>Built electromagnetic motor-generators that allegedly pulled energy from the QUANTUM VACUUM.</a:t>
+            </a:r>
+          </a:p>
+          <a:p>
+            <a:pPr marL="285750" indent="-285750">
+              <a:spcBef>
+                <a:spcPts val="1200"/>
+              </a:spcBef>
+              <a:buFont typeface="Arial" panose="020B0604020202020204" pitchFamily="34" charset="0"/>
+              <a:buChar char="•"/>
+            </a:pPr>
+            <a:r>
+              <a:rPr dirty="0"/>
+              <a:t>His Bedini Motor design was replicated by thousands of experimenters worldwide — the most OPEN-SOURCE free energy device ever.</a:t>
+            </a:r>
+          </a:p>
+          <a:p>
+            <a:pPr marL="285750" indent="-285750">
+              <a:spcBef>
+                <a:spcPts val="1200"/>
+              </a:spcBef>
+              <a:buFont typeface="Arial" panose="020B0604020202020204" pitchFamily="34" charset="0"/>
+              <a:buChar char="•"/>
+            </a:pPr>
+            <a:r>
+              <a:rPr dirty="0"/>
+              <a:t>Former audio engineer who founded Bedini Electronics — his amplifiers OUTPERFORMED the industry.</a:t>
+            </a:r>
+          </a:p>
+          <a:p>
+            <a:pPr marL="285750" indent="-285750">
+              <a:spcBef>
+                <a:spcPts val="1200"/>
+              </a:spcBef>
+              <a:buFont typeface="Arial" panose="020B0604020202020204" pitchFamily="34" charset="0"/>
+              <a:buChar char="•"/>
+            </a:pPr>
+            <a:r>
+              <a:rPr dirty="0"/>
+              <a:t>Collaborated with Tom Bearden on scalar electromagnetics. Claimed the energy establishment had SUPPRESSED radiant energy for a century.</a:t>
+            </a:r>
+          </a:p>
+        </p:txBody>
+      </p:sp>
+      <p:pic>
+        <p:nvPicPr>
+          <p:cNvPr id="16" name="Picture 15" descr="John_Bedini.jpg"/>
+          <p:cNvPicPr>
+            <a:picLocks noChangeAspect="1"/>
+          </p:cNvPicPr>
+          <p:nvPr/>
+        </p:nvPicPr>
+        <p:blipFill>
+          <a:blip r:embed="rId2"/>
+          <a:stretch>
+            <a:fillRect/>
+          </a:stretch>
+        </p:blipFill>
+        <p:spPr>
+          <a:xfrm>
+            <a:off x="7925048" y="1100088"/>
+            <a:ext cx="3431869" cy="3884876"/>
           </a:xfrm>
           <a:prstGeom prst="rect">
             <a:avLst/>
@@ -4614,6 +5167,11 @@
         </p:spPr>
       </p:pic>
     </p:spTree>
+    <p:extLst>
+      <p:ext uri="{BB962C8B-B14F-4D97-AF65-F5344CB8AC3E}">
+        <p14:creationId xmlns:p14="http://schemas.microsoft.com/office/powerpoint/2010/main" val="2813825107"/>
+      </p:ext>
+    </p:extLst>
   </p:cSld>
   <p:clrMapOvr>
     <a:masterClrMapping/>
@@ -4676,7 +5234,7 @@
                   <a:schemeClr val="accent5"/>
                 </a:solidFill>
               </a:rPr>
-              <a:t>Why / How they Dorothy Kilgallen:</a:t>
+              <a:t>Why / How they Nuno Loureiro:</a:t>
             </a:r>
           </a:p>
         </p:txBody>
@@ -4911,14 +5469,14 @@
               <a:buNone/>
             </a:pPr>
             <a:r>
-              <a:rPr lang="en-US" sz="4400" dirty="0">
+              <a:rPr lang="en-US" sz="4800" dirty="0">
                 <a:solidFill>
                   <a:schemeClr val="lt1"/>
                 </a:solidFill>
               </a:rPr>
-              <a:t>Dorothy Kilgallen</a:t>
-            </a:r>
-            <a:endParaRPr sz="2800" b="0" i="0" u="none" strike="noStrike" cap="none" dirty="0">
+              <a:t>Nuno Loureiro</a:t>
+            </a:r>
+            <a:endParaRPr sz="3200" b="0" i="0" u="none" strike="noStrike" cap="none" dirty="0">
               <a:solidFill>
                 <a:srgbClr val="000000"/>
               </a:solidFill>
@@ -4932,76 +5490,6 @@
       </p:sp>
       <p:sp>
         <p:nvSpPr>
-          <p:cNvPr id="8" name="Google Shape;170;p31">
-            <a:extLst>
-              <a:ext uri="{FF2B5EF4-FFF2-40B4-BE49-F238E27FC236}">
-                <a16:creationId xmlns:a16="http://schemas.microsoft.com/office/drawing/2014/main" id="{D328ABDE-E232-3EB7-C3F2-B4BB7B64262F}"/>
-              </a:ext>
-            </a:extLst>
-          </p:cNvPr>
-          <p:cNvSpPr/>
-          <p:nvPr/>
-        </p:nvSpPr>
-        <p:spPr>
-          <a:xfrm>
-            <a:off x="7526107" y="5681420"/>
-            <a:ext cx="4550222" cy="548230"/>
-          </a:xfrm>
-          <a:prstGeom prst="rect">
-            <a:avLst/>
-          </a:prstGeom>
-          <a:solidFill>
-            <a:srgbClr val="C00000"/>
-          </a:solidFill>
-          <a:ln>
-            <a:noFill/>
-          </a:ln>
-        </p:spPr>
-        <p:txBody>
-          <a:bodyPr spcFirstLastPara="1" wrap="square" lIns="91425" tIns="45700" rIns="91425" bIns="45700" anchor="ctr" anchorCtr="0">
-            <a:noAutofit/>
-          </a:bodyPr>
-          <a:lstStyle/>
-          <a:p>
-            <a:pPr marL="0" marR="0" lvl="0" indent="0" algn="ctr" rtl="0">
-              <a:lnSpc>
-                <a:spcPct val="100000"/>
-              </a:lnSpc>
-              <a:spcBef>
-                <a:spcPts val="0"/>
-              </a:spcBef>
-              <a:spcAft>
-                <a:spcPts val="0"/>
-              </a:spcAft>
-              <a:buClr>
-                <a:srgbClr val="000000"/>
-              </a:buClr>
-              <a:buSzPts val="1600"/>
-              <a:buFont typeface="Arial"/>
-              <a:buNone/>
-            </a:pPr>
-            <a:r>
-              <a:rPr lang="en-US" sz="3600" dirty="0">
-                <a:solidFill>
-                  <a:schemeClr val="lt1"/>
-                </a:solidFill>
-              </a:rPr>
-              <a:t>Dead at Age 52</a:t>
-            </a:r>
-            <a:endParaRPr sz="2000" b="0" i="0" u="none" strike="noStrike" cap="none" dirty="0">
-              <a:solidFill>
-                <a:srgbClr val="000000"/>
-              </a:solidFill>
-              <a:latin typeface="Arial"/>
-              <a:ea typeface="Arial"/>
-              <a:cs typeface="Arial"/>
-              <a:sym typeface="Arial"/>
-            </a:endParaRPr>
-          </a:p>
-        </p:txBody>
-      </p:sp>
-      <p:sp>
-        <p:nvSpPr>
           <p:cNvPr id="10" name="TextBox 9">
             <a:extLst>
               <a:ext uri="{FF2B5EF4-FFF2-40B4-BE49-F238E27FC236}">
@@ -5014,7 +5502,7 @@
         </p:nvSpPr>
         <p:spPr>
           <a:xfrm>
-            <a:off x="312431" y="2175372"/>
+            <a:off x="135442" y="1878198"/>
             <a:ext cx="6987941" cy="3046988"/>
           </a:xfrm>
           <a:prstGeom prst="rect">
@@ -5040,7 +5528,8 @@
               <a:buChar char="•"/>
             </a:pPr>
             <a:r>
-              <a:t>DEAD at 52 — found in her Manhattan townhouse. Ruled "CIRCUMSTANCES UNDETERMINED" by the medical examiner.</a:t>
+              <a:rPr dirty="0"/>
+              <a:t>SHOT DEAD at his home in Brookline, Massachusetts on December 15, 2025. He was 47.</a:t>
             </a:r>
           </a:p>
           <a:p>
@@ -5052,7 +5541,8 @@
               <a:buChar char="•"/>
             </a:pPr>
             <a:r>
-              <a:t>America's most famous female journalist — 20 MILLION readers, CBS star of What's My Line? for 15 years.</a:t>
+              <a:rPr dirty="0"/>
+              <a:t>Director of MIT's Plasma Science and Fusion Center — one of the world's LEADING fusion research facilities.</a:t>
             </a:r>
           </a:p>
           <a:p>
@@ -5064,7 +5554,8 @@
               <a:buChar char="•"/>
             </a:pPr>
             <a:r>
-              <a:t>In 1955 she published a front-page story: a British Cabinet official confirmed UFOs were REAL and had been examined.</a:t>
+              <a:rPr dirty="0"/>
+              <a:t>Received the Presidential Early Career Award from Joe Biden just months before his MURDER.</a:t>
             </a:r>
           </a:p>
           <a:p>
@@ -5076,7 +5567,8 @@
               <a:buChar char="•"/>
             </a:pPr>
             <a:r>
-              <a:t>She was also investigating the JFK ASSASSINATION and had a private interview with Jack Ruby.</a:t>
+              <a:rPr dirty="0"/>
+              <a:t>His breakthrough: proving that 50-year-old textbook physics on magnetic reconnection was FUNDAMENTALLY wrong.</a:t>
             </a:r>
           </a:p>
           <a:p>
@@ -5088,14 +5580,23 @@
               <a:buChar char="•"/>
             </a:pPr>
             <a:r>
-              <a:t>Told her lawyer: "I'm going to break the real story and have the biggest SCOOP of the century." She never did.</a:t>
+              <a:rPr dirty="0"/>
+              <a:t>Survived by his wife and children. Portuguese-born, Herman </a:t>
+            </a:r>
+            <a:r>
+              <a:rPr dirty="0" err="1"/>
+              <a:t>Feshbach</a:t>
+            </a:r>
+            <a:r>
+              <a:rPr dirty="0"/>
+              <a:t> Professor of Physics at MIT.</a:t>
             </a:r>
           </a:p>
         </p:txBody>
       </p:sp>
       <p:pic>
         <p:nvPicPr>
-          <p:cNvPr id="16" name="Picture 15" descr="Dorothy_Kilgallen.jpg"/>
+          <p:cNvPr id="16" name="Picture 15" descr="Nuno_Loureiro.jpg"/>
           <p:cNvPicPr>
             <a:picLocks noChangeAspect="1"/>
           </p:cNvPicPr>
@@ -5109,8 +5610,8 @@
         </p:blipFill>
         <p:spPr>
           <a:xfrm>
-            <a:off x="7682880" y="1100088"/>
-            <a:ext cx="3916205" cy="3884876"/>
+            <a:off x="7051066" y="1100088"/>
+            <a:ext cx="5179834" cy="3884876"/>
           </a:xfrm>
           <a:prstGeom prst="rect">
             <a:avLst/>
@@ -5180,7 +5681,7 @@
                   <a:schemeClr val="accent5"/>
                 </a:solidFill>
               </a:rPr>
-              <a:t>Why / How they Harald Malmgren:</a:t>
+              <a:t>Why / How they Dorothy Kilgallen:</a:t>
             </a:r>
           </a:p>
         </p:txBody>
@@ -5420,7 +5921,7 @@
                   <a:schemeClr val="lt1"/>
                 </a:solidFill>
               </a:rPr>
-              <a:t>Harald Malmgren</a:t>
+              <a:t>Dorothy Kilgallen</a:t>
             </a:r>
             <a:endParaRPr sz="2800" b="0" i="0" u="none" strike="noStrike" cap="none" dirty="0">
               <a:solidFill>
@@ -5436,6 +5937,76 @@
       </p:sp>
       <p:sp>
         <p:nvSpPr>
+          <p:cNvPr id="8" name="Google Shape;170;p31">
+            <a:extLst>
+              <a:ext uri="{FF2B5EF4-FFF2-40B4-BE49-F238E27FC236}">
+                <a16:creationId xmlns:a16="http://schemas.microsoft.com/office/drawing/2014/main" id="{D328ABDE-E232-3EB7-C3F2-B4BB7B64262F}"/>
+              </a:ext>
+            </a:extLst>
+          </p:cNvPr>
+          <p:cNvSpPr/>
+          <p:nvPr/>
+        </p:nvSpPr>
+        <p:spPr>
+          <a:xfrm>
+            <a:off x="7526107" y="5681420"/>
+            <a:ext cx="4550222" cy="548230"/>
+          </a:xfrm>
+          <a:prstGeom prst="rect">
+            <a:avLst/>
+          </a:prstGeom>
+          <a:solidFill>
+            <a:srgbClr val="C00000"/>
+          </a:solidFill>
+          <a:ln>
+            <a:noFill/>
+          </a:ln>
+        </p:spPr>
+        <p:txBody>
+          <a:bodyPr spcFirstLastPara="1" wrap="square" lIns="91425" tIns="45700" rIns="91425" bIns="45700" anchor="ctr" anchorCtr="0">
+            <a:noAutofit/>
+          </a:bodyPr>
+          <a:lstStyle/>
+          <a:p>
+            <a:pPr marL="0" marR="0" lvl="0" indent="0" algn="ctr" rtl="0">
+              <a:lnSpc>
+                <a:spcPct val="100000"/>
+              </a:lnSpc>
+              <a:spcBef>
+                <a:spcPts val="0"/>
+              </a:spcBef>
+              <a:spcAft>
+                <a:spcPts val="0"/>
+              </a:spcAft>
+              <a:buClr>
+                <a:srgbClr val="000000"/>
+              </a:buClr>
+              <a:buSzPts val="1600"/>
+              <a:buFont typeface="Arial"/>
+              <a:buNone/>
+            </a:pPr>
+            <a:r>
+              <a:rPr lang="en-US" sz="3600" dirty="0">
+                <a:solidFill>
+                  <a:schemeClr val="lt1"/>
+                </a:solidFill>
+              </a:rPr>
+              <a:t>Dead at Age 52</a:t>
+            </a:r>
+            <a:endParaRPr sz="2000" b="0" i="0" u="none" strike="noStrike" cap="none" dirty="0">
+              <a:solidFill>
+                <a:srgbClr val="000000"/>
+              </a:solidFill>
+              <a:latin typeface="Arial"/>
+              <a:ea typeface="Arial"/>
+              <a:cs typeface="Arial"/>
+              <a:sym typeface="Arial"/>
+            </a:endParaRPr>
+          </a:p>
+        </p:txBody>
+      </p:sp>
+      <p:sp>
+        <p:nvSpPr>
           <p:cNvPr id="10" name="TextBox 9">
             <a:extLst>
               <a:ext uri="{FF2B5EF4-FFF2-40B4-BE49-F238E27FC236}">
@@ -5474,7 +6045,7 @@
               <a:buChar char="•"/>
             </a:pPr>
             <a:r>
-              <a:t>DIED February 13, 2025 — served four US presidents as economist and diplomat.</a:t>
+              <a:t>DEAD at 52 — found in her Manhattan townhouse. Ruled "CIRCUMSTANCES UNDETERMINED" by the medical examiner.</a:t>
             </a:r>
           </a:p>
           <a:p>
@@ -5486,7 +6057,7 @@
               <a:buChar char="•"/>
             </a:pPr>
             <a:r>
-              <a:t>In his final year, claimed he personally HANDLED debris from a crashed UFO and witnessed a 1962 craft SHOOT-DOWN.</a:t>
+              <a:t>America's most famous female journalist — 20 MILLION readers, CBS star of What's My Line? for 15 years.</a:t>
             </a:r>
           </a:p>
           <a:p>
@@ -5498,7 +6069,7 @@
               <a:buChar char="•"/>
             </a:pPr>
             <a:r>
-              <a:t>Said he held an Atomic Energy Commission Q-CLEARANCE — the highest level for nuclear and physics secrets.</a:t>
+              <a:t>In 1955 she published a front-page story: a British Cabinet official confirmed UFOs were REAL and had been examined.</a:t>
             </a:r>
           </a:p>
           <a:p>
@@ -5510,7 +6081,7 @@
               <a:buChar char="•"/>
             </a:pPr>
             <a:r>
-              <a:t>DEBUNKED after death: declassified FBI files proved he NEVER held a Q-clearance and FABRICATED key claims.</a:t>
+              <a:t>She was also investigating the JFK ASSASSINATION and had a private interview with Jack Ruby.</a:t>
             </a:r>
           </a:p>
           <a:p>
@@ -5522,14 +6093,14 @@
               <a:buChar char="•"/>
             </a:pPr>
             <a:r>
-              <a:t>Cautionary tale: even credentialed officials can introduce FALSE data points into the UAP evidence base.</a:t>
+              <a:t>Told her lawyer: "I'm going to break the real story and have the biggest SCOOP of the century." She never did.</a:t>
             </a:r>
           </a:p>
         </p:txBody>
       </p:sp>
       <p:pic>
         <p:nvPicPr>
-          <p:cNvPr id="16" name="Picture 15" descr="Harald_Malmgren.jpg"/>
+          <p:cNvPr id="16" name="Picture 15" descr="Dorothy_Kilgallen.jpg"/>
           <p:cNvPicPr>
             <a:picLocks noChangeAspect="1"/>
           </p:cNvPicPr>
@@ -5543,8 +6114,8 @@
         </p:blipFill>
         <p:spPr>
           <a:xfrm>
-            <a:off x="8377802" y="1100088"/>
-            <a:ext cx="2526361" cy="3884876"/>
+            <a:off x="7682880" y="1100088"/>
+            <a:ext cx="3916205" cy="3884876"/>
           </a:xfrm>
           <a:prstGeom prst="rect">
             <a:avLst/>
@@ -5614,7 +6185,7 @@
                   <a:schemeClr val="accent5"/>
                 </a:solidFill>
               </a:rPr>
-              <a:t>Why / How they John Bedini:</a:t>
+              <a:t>Why / How they Karl Wolfe:</a:t>
             </a:r>
           </a:p>
         </p:txBody>
@@ -5854,7 +6425,7 @@
                   <a:schemeClr val="lt1"/>
                 </a:solidFill>
               </a:rPr>
-              <a:t>John Bedini</a:t>
+              <a:t>Karl Wolfe</a:t>
             </a:r>
             <a:endParaRPr sz="3200" b="0" i="0" u="none" strike="noStrike" cap="none" dirty="0">
               <a:solidFill>
@@ -5924,7 +6495,7 @@
                   <a:schemeClr val="lt1"/>
                 </a:solidFill>
               </a:rPr>
-              <a:t>Dead at Age 67</a:t>
+              <a:t>Dead at Age 74</a:t>
             </a:r>
             <a:endParaRPr sz="2000" b="0" i="0" u="none" strike="noStrike" cap="none" dirty="0">
               <a:solidFill>
@@ -5978,7 +6549,7 @@
               <a:buChar char="•"/>
             </a:pPr>
             <a:r>
-              <a:t>DIED November 5, 2016, at age 67 in Coeur d'Alene, Idaho — free energy inventor for four decades.</a:t>
+              <a:t>STRUCK AND KILLED by a tractor-trailer while cycling on October 10, 2018. He was 74.</a:t>
             </a:r>
           </a:p>
           <a:p>
@@ -5990,7 +6561,7 @@
               <a:buChar char="•"/>
             </a:pPr>
             <a:r>
-              <a:t>Built electromagnetic motor-generators that allegedly pulled energy from the QUANTUM VACUUM.</a:t>
+              <a:t>Former Air Force sergeant with TOP SECRET CRYPTO clearance who testified about structures on the far side of the MOON.</a:t>
             </a:r>
           </a:p>
           <a:p>
@@ -6002,7 +6573,7 @@
               <a:buChar char="•"/>
             </a:pPr>
             <a:r>
-              <a:t>His Bedini Motor design was replicated by thousands of experimenters worldwide — the most OPEN-SOURCE free energy device ever.</a:t>
+              <a:t>At the 2001 Disclosure Project, he swore under oath that he was shown NASA Lunar Orbiter photos of ARTIFICIAL structures.</a:t>
             </a:r>
           </a:p>
           <a:p>
@@ -6014,7 +6585,7 @@
               <a:buChar char="•"/>
             </a:pPr>
             <a:r>
-              <a:t>Former audio engineer who founded Bedini Electronics — his amplifiers OUTPERFORMED the industry.</a:t>
+              <a:t>Worked as a precision electronics technician at Langley Air Force Base processing CLASSIFIED imagery.</a:t>
             </a:r>
           </a:p>
           <a:p>
@@ -6026,14 +6597,14 @@
               <a:buChar char="•"/>
             </a:pPr>
             <a:r>
-              <a:t>Collaborated with Tom Bearden on scalar electromagnetics. Claimed the energy establishment had SUPPRESSED radiant energy for a century.</a:t>
+              <a:t>Born and raised in Lansing, New York — killed in Lansing, New York. Youngest of seven children.</a:t>
             </a:r>
           </a:p>
         </p:txBody>
       </p:sp>
       <p:pic>
         <p:nvPicPr>
-          <p:cNvPr id="16" name="Picture 15" descr="John_Bedini.jpg"/>
+          <p:cNvPr id="16" name="Picture 15" descr="Karl_Wolfe.jpg"/>
           <p:cNvPicPr>
             <a:picLocks noChangeAspect="1"/>
           </p:cNvPicPr>
@@ -6047,8 +6618,8 @@
         </p:blipFill>
         <p:spPr>
           <a:xfrm>
-            <a:off x="7925048" y="1100088"/>
-            <a:ext cx="3431869" cy="3884876"/>
+            <a:off x="8459451" y="1100088"/>
+            <a:ext cx="2363063" cy="3884876"/>
           </a:xfrm>
           <a:prstGeom prst="rect">
             <a:avLst/>
@@ -6080,464 +6651,15 @@
           <a:chExt cx="0" cy="0"/>
         </a:xfrm>
       </p:grpSpPr>
-      <p:sp>
-        <p:nvSpPr>
-          <p:cNvPr id="15" name="TextBox 14">
-            <a:extLst>
-              <a:ext uri="{FF2B5EF4-FFF2-40B4-BE49-F238E27FC236}">
-                <a16:creationId xmlns:a16="http://schemas.microsoft.com/office/drawing/2014/main" id="{E478240E-251B-5BA6-3C45-7E6620400769}"/>
-              </a:ext>
-            </a:extLst>
-          </p:cNvPr>
-          <p:cNvSpPr txBox="1"/>
-          <p:nvPr/>
-        </p:nvSpPr>
-        <p:spPr>
-          <a:xfrm>
-            <a:off x="312432" y="1288262"/>
-            <a:ext cx="6494294" cy="584775"/>
-          </a:xfrm>
-          <a:prstGeom prst="rect">
-            <a:avLst/>
-          </a:prstGeom>
-          <a:solidFill>
-            <a:schemeClr val="bg1">
-              <a:alpha val="84400"/>
-            </a:schemeClr>
-          </a:solidFill>
-        </p:spPr>
-        <p:txBody>
-          <a:bodyPr wrap="square" rtlCol="0">
-            <a:spAutoFit/>
-          </a:bodyPr>
-          <a:lstStyle/>
-          <a:p>
-            <a:r>
-              <a:rPr lang="en-US" sz="3200" b="1" dirty="0">
-                <a:solidFill>
-                  <a:schemeClr val="accent5"/>
-                </a:solidFill>
-              </a:rPr>
-              <a:t>Why / How they Karl Wolfe:</a:t>
-            </a:r>
-          </a:p>
-        </p:txBody>
-      </p:sp>
-      <p:sp>
-        <p:nvSpPr>
-          <p:cNvPr id="3" name="Google Shape;170;p31">
-            <a:extLst>
-              <a:ext uri="{FF2B5EF4-FFF2-40B4-BE49-F238E27FC236}">
-                <a16:creationId xmlns:a16="http://schemas.microsoft.com/office/drawing/2014/main" id="{A4695FE5-0AA5-AB05-98B1-B5B8E3FA8CBE}"/>
-              </a:ext>
-            </a:extLst>
-          </p:cNvPr>
-          <p:cNvSpPr/>
-          <p:nvPr/>
-        </p:nvSpPr>
-        <p:spPr>
-          <a:xfrm>
-            <a:off x="191731" y="5732890"/>
-            <a:ext cx="3431270" cy="496760"/>
-          </a:xfrm>
-          <a:prstGeom prst="rect">
-            <a:avLst/>
-          </a:prstGeom>
-          <a:solidFill>
-            <a:schemeClr val="accent5"/>
-          </a:solidFill>
-          <a:ln>
-            <a:noFill/>
-          </a:ln>
-        </p:spPr>
-        <p:txBody>
-          <a:bodyPr spcFirstLastPara="1" wrap="square" lIns="91425" tIns="45700" rIns="91425" bIns="45700" anchor="ctr" anchorCtr="0">
-            <a:noAutofit/>
-          </a:bodyPr>
-          <a:lstStyle/>
-          <a:p>
-            <a:pPr marL="0" marR="0" lvl="0" indent="0" algn="ctr" rtl="0">
-              <a:lnSpc>
-                <a:spcPct val="100000"/>
-              </a:lnSpc>
-              <a:spcBef>
-                <a:spcPts val="0"/>
-              </a:spcBef>
-              <a:spcAft>
-                <a:spcPts val="0"/>
-              </a:spcAft>
-              <a:buClr>
-                <a:srgbClr val="000000"/>
-              </a:buClr>
-              <a:buSzPts val="1600"/>
-              <a:buFont typeface="Arial"/>
-              <a:buNone/>
-            </a:pPr>
-            <a:r>
-              <a:rPr lang="en-US" sz="3600" dirty="0">
-                <a:solidFill>
-                  <a:schemeClr val="lt1"/>
-                </a:solidFill>
-              </a:rPr>
-              <a:t>Read List Here:</a:t>
-            </a:r>
-            <a:endParaRPr sz="2000" b="0" i="0" u="none" strike="noStrike" cap="none" dirty="0">
-              <a:solidFill>
-                <a:srgbClr val="000000"/>
-              </a:solidFill>
-              <a:latin typeface="Arial"/>
-              <a:ea typeface="Arial"/>
-              <a:cs typeface="Arial"/>
-              <a:sym typeface="Arial"/>
-            </a:endParaRPr>
-          </a:p>
-        </p:txBody>
-      </p:sp>
-      <p:sp>
-        <p:nvSpPr>
-          <p:cNvPr id="5" name="Google Shape;170;p31">
-            <a:extLst>
-              <a:ext uri="{FF2B5EF4-FFF2-40B4-BE49-F238E27FC236}">
-                <a16:creationId xmlns:a16="http://schemas.microsoft.com/office/drawing/2014/main" id="{98132413-6ED2-8B36-74B6-3C503B1A4634}"/>
-              </a:ext>
-            </a:extLst>
-          </p:cNvPr>
-          <p:cNvSpPr/>
-          <p:nvPr/>
-        </p:nvSpPr>
-        <p:spPr>
-          <a:xfrm>
-            <a:off x="0" y="-31518"/>
-            <a:ext cx="12192000" cy="1131606"/>
-          </a:xfrm>
-          <a:prstGeom prst="rect">
-            <a:avLst/>
-          </a:prstGeom>
-          <a:solidFill>
-            <a:srgbClr val="C00000"/>
-          </a:solidFill>
-          <a:ln>
-            <a:noFill/>
-          </a:ln>
-        </p:spPr>
-        <p:txBody>
-          <a:bodyPr spcFirstLastPara="1" wrap="square" lIns="91425" tIns="45700" rIns="91425" bIns="45700" anchor="ctr" anchorCtr="0">
-            <a:noAutofit/>
-          </a:bodyPr>
-          <a:lstStyle/>
-          <a:p>
-            <a:pPr marL="0" marR="0" lvl="0" indent="0" rtl="0">
-              <a:lnSpc>
-                <a:spcPct val="100000"/>
-              </a:lnSpc>
-              <a:spcBef>
-                <a:spcPts val="0"/>
-              </a:spcBef>
-              <a:spcAft>
-                <a:spcPts val="0"/>
-              </a:spcAft>
-              <a:buClr>
-                <a:srgbClr val="000000"/>
-              </a:buClr>
-              <a:buSzPts val="1600"/>
-              <a:buFont typeface="Arial"/>
-              <a:buNone/>
-            </a:pPr>
-            <a:r>
-              <a:rPr lang="en-US" sz="4400" dirty="0">
-                <a:solidFill>
-                  <a:schemeClr val="lt1"/>
-                </a:solidFill>
-              </a:rPr>
-              <a:t> 40+ Murdered: Physics Breakthroughs Hidden</a:t>
-            </a:r>
-            <a:endParaRPr sz="2800" b="0" i="0" u="none" strike="noStrike" cap="none" dirty="0">
-              <a:solidFill>
-                <a:srgbClr val="000000"/>
-              </a:solidFill>
-              <a:latin typeface="Arial"/>
-              <a:ea typeface="Arial"/>
-              <a:cs typeface="Arial"/>
-              <a:sym typeface="Arial"/>
-            </a:endParaRPr>
-          </a:p>
-        </p:txBody>
-      </p:sp>
-      <p:sp>
-        <p:nvSpPr>
-          <p:cNvPr id="4" name="TextBox 3">
-            <a:extLst>
-              <a:ext uri="{FF2B5EF4-FFF2-40B4-BE49-F238E27FC236}">
-                <a16:creationId xmlns:a16="http://schemas.microsoft.com/office/drawing/2014/main" id="{50D7621F-9D36-7894-7117-9F831EF5EFA6}"/>
-              </a:ext>
-            </a:extLst>
-          </p:cNvPr>
-          <p:cNvSpPr txBox="1"/>
-          <p:nvPr/>
-        </p:nvSpPr>
-        <p:spPr>
-          <a:xfrm>
-            <a:off x="107300" y="6229650"/>
-            <a:ext cx="11685989" cy="461665"/>
-          </a:xfrm>
-          <a:prstGeom prst="rect">
-            <a:avLst/>
-          </a:prstGeom>
-          <a:solidFill>
-            <a:schemeClr val="bg1">
-              <a:alpha val="84400"/>
-            </a:schemeClr>
-          </a:solidFill>
-        </p:spPr>
-        <p:txBody>
-          <a:bodyPr wrap="square" rtlCol="0">
-            <a:spAutoFit/>
-          </a:bodyPr>
-          <a:lstStyle/>
-          <a:p>
-            <a:r>
-              <a:rPr lang="en-US" sz="2400" dirty="0"/>
-              <a:t>https://uapmurders.com/physics</a:t>
-            </a:r>
-          </a:p>
-        </p:txBody>
-      </p:sp>
-      <p:sp>
-        <p:nvSpPr>
-          <p:cNvPr id="7" name="Google Shape;170;p31">
-            <a:extLst>
-              <a:ext uri="{FF2B5EF4-FFF2-40B4-BE49-F238E27FC236}">
-                <a16:creationId xmlns:a16="http://schemas.microsoft.com/office/drawing/2014/main" id="{4B582382-76AA-B49E-C611-39A37CE591B9}"/>
-              </a:ext>
-            </a:extLst>
-          </p:cNvPr>
-          <p:cNvSpPr/>
-          <p:nvPr/>
-        </p:nvSpPr>
-        <p:spPr>
-          <a:xfrm>
-            <a:off x="7506336" y="4925186"/>
-            <a:ext cx="4550222" cy="869505"/>
-          </a:xfrm>
-          <a:prstGeom prst="rect">
-            <a:avLst/>
-          </a:prstGeom>
-          <a:solidFill>
-            <a:srgbClr val="C00000"/>
-          </a:solidFill>
-          <a:ln>
-            <a:noFill/>
-          </a:ln>
-        </p:spPr>
-        <p:txBody>
-          <a:bodyPr spcFirstLastPara="1" wrap="square" lIns="91425" tIns="45700" rIns="91425" bIns="45700" anchor="ctr" anchorCtr="0">
-            <a:noAutofit/>
-          </a:bodyPr>
-          <a:lstStyle/>
-          <a:p>
-            <a:pPr marL="0" marR="0" lvl="0" indent="0" algn="ctr" rtl="0">
-              <a:lnSpc>
-                <a:spcPct val="100000"/>
-              </a:lnSpc>
-              <a:spcBef>
-                <a:spcPts val="0"/>
-              </a:spcBef>
-              <a:spcAft>
-                <a:spcPts val="0"/>
-              </a:spcAft>
-              <a:buClr>
-                <a:srgbClr val="000000"/>
-              </a:buClr>
-              <a:buSzPts val="1600"/>
-              <a:buFont typeface="Arial"/>
-              <a:buNone/>
-            </a:pPr>
-            <a:r>
-              <a:rPr lang="en-US" sz="4800" dirty="0">
-                <a:solidFill>
-                  <a:schemeClr val="lt1"/>
-                </a:solidFill>
-              </a:rPr>
-              <a:t>Karl Wolfe</a:t>
-            </a:r>
-            <a:endParaRPr sz="3200" b="0" i="0" u="none" strike="noStrike" cap="none" dirty="0">
-              <a:solidFill>
-                <a:srgbClr val="000000"/>
-              </a:solidFill>
-              <a:latin typeface="Arial"/>
-              <a:ea typeface="Arial"/>
-              <a:cs typeface="Arial"/>
-              <a:sym typeface="Arial"/>
-            </a:endParaRPr>
-          </a:p>
-        </p:txBody>
-      </p:sp>
-      <p:sp>
-        <p:nvSpPr>
-          <p:cNvPr id="8" name="Google Shape;170;p31">
-            <a:extLst>
-              <a:ext uri="{FF2B5EF4-FFF2-40B4-BE49-F238E27FC236}">
-                <a16:creationId xmlns:a16="http://schemas.microsoft.com/office/drawing/2014/main" id="{D328ABDE-E232-3EB7-C3F2-B4BB7B64262F}"/>
-              </a:ext>
-            </a:extLst>
-          </p:cNvPr>
-          <p:cNvSpPr/>
-          <p:nvPr/>
-        </p:nvSpPr>
-        <p:spPr>
-          <a:xfrm>
-            <a:off x="7526107" y="5681420"/>
-            <a:ext cx="4550222" cy="548230"/>
-          </a:xfrm>
-          <a:prstGeom prst="rect">
-            <a:avLst/>
-          </a:prstGeom>
-          <a:solidFill>
-            <a:srgbClr val="C00000"/>
-          </a:solidFill>
-          <a:ln>
-            <a:noFill/>
-          </a:ln>
-        </p:spPr>
-        <p:txBody>
-          <a:bodyPr spcFirstLastPara="1" wrap="square" lIns="91425" tIns="45700" rIns="91425" bIns="45700" anchor="ctr" anchorCtr="0">
-            <a:noAutofit/>
-          </a:bodyPr>
-          <a:lstStyle/>
-          <a:p>
-            <a:pPr marL="0" marR="0" lvl="0" indent="0" algn="ctr" rtl="0">
-              <a:lnSpc>
-                <a:spcPct val="100000"/>
-              </a:lnSpc>
-              <a:spcBef>
-                <a:spcPts val="0"/>
-              </a:spcBef>
-              <a:spcAft>
-                <a:spcPts val="0"/>
-              </a:spcAft>
-              <a:buClr>
-                <a:srgbClr val="000000"/>
-              </a:buClr>
-              <a:buSzPts val="1600"/>
-              <a:buFont typeface="Arial"/>
-              <a:buNone/>
-            </a:pPr>
-            <a:r>
-              <a:rPr lang="en-US" sz="3600" dirty="0">
-                <a:solidFill>
-                  <a:schemeClr val="lt1"/>
-                </a:solidFill>
-              </a:rPr>
-              <a:t>Dead at Age 74</a:t>
-            </a:r>
-            <a:endParaRPr sz="2000" b="0" i="0" u="none" strike="noStrike" cap="none" dirty="0">
-              <a:solidFill>
-                <a:srgbClr val="000000"/>
-              </a:solidFill>
-              <a:latin typeface="Arial"/>
-              <a:ea typeface="Arial"/>
-              <a:cs typeface="Arial"/>
-              <a:sym typeface="Arial"/>
-            </a:endParaRPr>
-          </a:p>
-        </p:txBody>
-      </p:sp>
-      <p:sp>
-        <p:nvSpPr>
-          <p:cNvPr id="10" name="TextBox 9">
-            <a:extLst>
-              <a:ext uri="{FF2B5EF4-FFF2-40B4-BE49-F238E27FC236}">
-                <a16:creationId xmlns:a16="http://schemas.microsoft.com/office/drawing/2014/main" id="{5FA0D8B2-6B55-D3DC-BCBB-6FEAD86B9E72}"/>
-              </a:ext>
-            </a:extLst>
-          </p:cNvPr>
-          <p:cNvSpPr txBox="1"/>
-          <p:nvPr/>
-        </p:nvSpPr>
-        <p:spPr>
-          <a:xfrm>
-            <a:off x="312431" y="2175372"/>
-            <a:ext cx="6987941" cy="3046988"/>
-          </a:xfrm>
-          <a:prstGeom prst="rect">
-            <a:avLst/>
-          </a:prstGeom>
-          <a:solidFill>
-            <a:schemeClr val="bg1">
-              <a:alpha val="84400"/>
-            </a:schemeClr>
-          </a:solidFill>
-        </p:spPr>
-        <p:txBody>
-          <a:bodyPr wrap="square" rtlCol="0">
-            <a:spAutoFit/>
-          </a:bodyPr>
-          <a:lstStyle/>
-          <a:p>
-            <a:pPr marL="285750" indent="-285750">
-              <a:spcBef>
-                <a:spcPts val="1200"/>
-              </a:spcBef>
-              <a:buFont typeface="Arial" panose="020B0604020202020204" pitchFamily="34" charset="0"/>
-              <a:buChar char="•"/>
-            </a:pPr>
-            <a:r>
-              <a:t>STRUCK AND KILLED by a tractor-trailer while cycling on October 10, 2018. He was 74.</a:t>
-            </a:r>
-          </a:p>
-          <a:p>
-            <a:pPr marL="285750" indent="-285750">
-              <a:spcBef>
-                <a:spcPts val="1200"/>
-              </a:spcBef>
-              <a:buFont typeface="Arial" panose="020B0604020202020204" pitchFamily="34" charset="0"/>
-              <a:buChar char="•"/>
-            </a:pPr>
-            <a:r>
-              <a:t>Former Air Force sergeant with TOP SECRET CRYPTO clearance who testified about structures on the far side of the MOON.</a:t>
-            </a:r>
-          </a:p>
-          <a:p>
-            <a:pPr marL="285750" indent="-285750">
-              <a:spcBef>
-                <a:spcPts val="1200"/>
-              </a:spcBef>
-              <a:buFont typeface="Arial" panose="020B0604020202020204" pitchFamily="34" charset="0"/>
-              <a:buChar char="•"/>
-            </a:pPr>
-            <a:r>
-              <a:t>At the 2001 Disclosure Project, he swore under oath that he was shown NASA Lunar Orbiter photos of ARTIFICIAL structures.</a:t>
-            </a:r>
-          </a:p>
-          <a:p>
-            <a:pPr marL="285750" indent="-285750">
-              <a:spcBef>
-                <a:spcPts val="1200"/>
-              </a:spcBef>
-              <a:buFont typeface="Arial" panose="020B0604020202020204" pitchFamily="34" charset="0"/>
-              <a:buChar char="•"/>
-            </a:pPr>
-            <a:r>
-              <a:t>Worked as a precision electronics technician at Langley Air Force Base processing CLASSIFIED imagery.</a:t>
-            </a:r>
-          </a:p>
-          <a:p>
-            <a:pPr marL="285750" indent="-285750">
-              <a:spcBef>
-                <a:spcPts val="1200"/>
-              </a:spcBef>
-              <a:buFont typeface="Arial" panose="020B0604020202020204" pitchFamily="34" charset="0"/>
-              <a:buChar char="•"/>
-            </a:pPr>
-            <a:r>
-              <a:t>Born and raised in Lansing, New York — killed in Lansing, New York. Youngest of seven children.</a:t>
-            </a:r>
-          </a:p>
-        </p:txBody>
-      </p:sp>
       <p:pic>
         <p:nvPicPr>
-          <p:cNvPr id="16" name="Picture 15" descr="Karl_Wolfe.jpg"/>
+          <p:cNvPr id="2" name="Picture 1">
+            <a:extLst>
+              <a:ext uri="{FF2B5EF4-FFF2-40B4-BE49-F238E27FC236}">
+                <a16:creationId xmlns:a16="http://schemas.microsoft.com/office/drawing/2014/main" id="{B39D3A02-22EC-4ADF-B31F-B6A75E9DC52A}"/>
+              </a:ext>
+            </a:extLst>
+          </p:cNvPr>
           <p:cNvPicPr>
             <a:picLocks noChangeAspect="1"/>
           </p:cNvPicPr>
@@ -6551,14 +6673,474 @@
         </p:blipFill>
         <p:spPr>
           <a:xfrm>
-            <a:off x="8459451" y="1100088"/>
-            <a:ext cx="2363063" cy="3884876"/>
+            <a:off x="6672664" y="1095064"/>
+            <a:ext cx="5524359" cy="3105147"/>
           </a:xfrm>
           <a:prstGeom prst="rect">
             <a:avLst/>
           </a:prstGeom>
         </p:spPr>
       </p:pic>
+      <p:sp>
+        <p:nvSpPr>
+          <p:cNvPr id="15" name="TextBox 14">
+            <a:extLst>
+              <a:ext uri="{FF2B5EF4-FFF2-40B4-BE49-F238E27FC236}">
+                <a16:creationId xmlns:a16="http://schemas.microsoft.com/office/drawing/2014/main" id="{E478240E-251B-5BA6-3C45-7E6620400769}"/>
+              </a:ext>
+            </a:extLst>
+          </p:cNvPr>
+          <p:cNvSpPr txBox="1"/>
+          <p:nvPr/>
+        </p:nvSpPr>
+        <p:spPr>
+          <a:xfrm>
+            <a:off x="312432" y="1288262"/>
+            <a:ext cx="6494294" cy="584775"/>
+          </a:xfrm>
+          <a:prstGeom prst="rect">
+            <a:avLst/>
+          </a:prstGeom>
+          <a:solidFill>
+            <a:schemeClr val="bg1">
+              <a:alpha val="84400"/>
+            </a:schemeClr>
+          </a:solidFill>
+        </p:spPr>
+        <p:txBody>
+          <a:bodyPr wrap="square" rtlCol="0">
+            <a:spAutoFit/>
+          </a:bodyPr>
+          <a:lstStyle/>
+          <a:p>
+            <a:r>
+              <a:rPr lang="en-US" sz="3200" b="1" dirty="0">
+                <a:solidFill>
+                  <a:schemeClr val="accent5"/>
+                </a:solidFill>
+              </a:rPr>
+              <a:t>Why / How they Mark McCandlish:</a:t>
+            </a:r>
+          </a:p>
+        </p:txBody>
+      </p:sp>
+      <p:sp>
+        <p:nvSpPr>
+          <p:cNvPr id="3" name="Google Shape;170;p31">
+            <a:extLst>
+              <a:ext uri="{FF2B5EF4-FFF2-40B4-BE49-F238E27FC236}">
+                <a16:creationId xmlns:a16="http://schemas.microsoft.com/office/drawing/2014/main" id="{A4695FE5-0AA5-AB05-98B1-B5B8E3FA8CBE}"/>
+              </a:ext>
+            </a:extLst>
+          </p:cNvPr>
+          <p:cNvSpPr/>
+          <p:nvPr/>
+        </p:nvSpPr>
+        <p:spPr>
+          <a:xfrm>
+            <a:off x="191731" y="5732890"/>
+            <a:ext cx="3431270" cy="496760"/>
+          </a:xfrm>
+          <a:prstGeom prst="rect">
+            <a:avLst/>
+          </a:prstGeom>
+          <a:solidFill>
+            <a:schemeClr val="accent5"/>
+          </a:solidFill>
+          <a:ln>
+            <a:noFill/>
+          </a:ln>
+        </p:spPr>
+        <p:txBody>
+          <a:bodyPr spcFirstLastPara="1" wrap="square" lIns="91425" tIns="45700" rIns="91425" bIns="45700" anchor="ctr" anchorCtr="0">
+            <a:noAutofit/>
+          </a:bodyPr>
+          <a:lstStyle/>
+          <a:p>
+            <a:pPr marL="0" marR="0" lvl="0" indent="0" algn="ctr" rtl="0">
+              <a:lnSpc>
+                <a:spcPct val="100000"/>
+              </a:lnSpc>
+              <a:spcBef>
+                <a:spcPts val="0"/>
+              </a:spcBef>
+              <a:spcAft>
+                <a:spcPts val="0"/>
+              </a:spcAft>
+              <a:buClr>
+                <a:srgbClr val="000000"/>
+              </a:buClr>
+              <a:buSzPts val="1600"/>
+              <a:buFont typeface="Arial"/>
+              <a:buNone/>
+            </a:pPr>
+            <a:r>
+              <a:rPr lang="en-US" sz="3600" dirty="0">
+                <a:solidFill>
+                  <a:schemeClr val="lt1"/>
+                </a:solidFill>
+              </a:rPr>
+              <a:t>Read List Here:</a:t>
+            </a:r>
+            <a:endParaRPr sz="2000" b="0" i="0" u="none" strike="noStrike" cap="none" dirty="0">
+              <a:solidFill>
+                <a:srgbClr val="000000"/>
+              </a:solidFill>
+              <a:latin typeface="Arial"/>
+              <a:ea typeface="Arial"/>
+              <a:cs typeface="Arial"/>
+              <a:sym typeface="Arial"/>
+            </a:endParaRPr>
+          </a:p>
+        </p:txBody>
+      </p:sp>
+      <p:sp>
+        <p:nvSpPr>
+          <p:cNvPr id="5" name="Google Shape;170;p31">
+            <a:extLst>
+              <a:ext uri="{FF2B5EF4-FFF2-40B4-BE49-F238E27FC236}">
+                <a16:creationId xmlns:a16="http://schemas.microsoft.com/office/drawing/2014/main" id="{98132413-6ED2-8B36-74B6-3C503B1A4634}"/>
+              </a:ext>
+            </a:extLst>
+          </p:cNvPr>
+          <p:cNvSpPr/>
+          <p:nvPr/>
+        </p:nvSpPr>
+        <p:spPr>
+          <a:xfrm>
+            <a:off x="0" y="-31518"/>
+            <a:ext cx="12192000" cy="1131606"/>
+          </a:xfrm>
+          <a:prstGeom prst="rect">
+            <a:avLst/>
+          </a:prstGeom>
+          <a:solidFill>
+            <a:srgbClr val="C00000"/>
+          </a:solidFill>
+          <a:ln>
+            <a:noFill/>
+          </a:ln>
+        </p:spPr>
+        <p:txBody>
+          <a:bodyPr spcFirstLastPara="1" wrap="square" lIns="91425" tIns="45700" rIns="91425" bIns="45700" anchor="ctr" anchorCtr="0">
+            <a:noAutofit/>
+          </a:bodyPr>
+          <a:lstStyle/>
+          <a:p>
+            <a:pPr marL="0" marR="0" lvl="0" indent="0" rtl="0">
+              <a:lnSpc>
+                <a:spcPct val="100000"/>
+              </a:lnSpc>
+              <a:spcBef>
+                <a:spcPts val="0"/>
+              </a:spcBef>
+              <a:spcAft>
+                <a:spcPts val="0"/>
+              </a:spcAft>
+              <a:buClr>
+                <a:srgbClr val="000000"/>
+              </a:buClr>
+              <a:buSzPts val="1600"/>
+              <a:buFont typeface="Arial"/>
+              <a:buNone/>
+            </a:pPr>
+            <a:r>
+              <a:rPr lang="en-US" sz="4400" dirty="0">
+                <a:solidFill>
+                  <a:schemeClr val="lt1"/>
+                </a:solidFill>
+              </a:rPr>
+              <a:t> 40+ Murdered: Physics Breakthroughs Hidden</a:t>
+            </a:r>
+            <a:endParaRPr sz="2800" b="0" i="0" u="none" strike="noStrike" cap="none" dirty="0">
+              <a:solidFill>
+                <a:srgbClr val="000000"/>
+              </a:solidFill>
+              <a:latin typeface="Arial"/>
+              <a:ea typeface="Arial"/>
+              <a:cs typeface="Arial"/>
+              <a:sym typeface="Arial"/>
+            </a:endParaRPr>
+          </a:p>
+        </p:txBody>
+      </p:sp>
+      <p:sp>
+        <p:nvSpPr>
+          <p:cNvPr id="4" name="TextBox 3">
+            <a:extLst>
+              <a:ext uri="{FF2B5EF4-FFF2-40B4-BE49-F238E27FC236}">
+                <a16:creationId xmlns:a16="http://schemas.microsoft.com/office/drawing/2014/main" id="{50D7621F-9D36-7894-7117-9F831EF5EFA6}"/>
+              </a:ext>
+            </a:extLst>
+          </p:cNvPr>
+          <p:cNvSpPr txBox="1"/>
+          <p:nvPr/>
+        </p:nvSpPr>
+        <p:spPr>
+          <a:xfrm>
+            <a:off x="107300" y="6229650"/>
+            <a:ext cx="11685989" cy="461665"/>
+          </a:xfrm>
+          <a:prstGeom prst="rect">
+            <a:avLst/>
+          </a:prstGeom>
+          <a:solidFill>
+            <a:schemeClr val="bg1">
+              <a:alpha val="84400"/>
+            </a:schemeClr>
+          </a:solidFill>
+        </p:spPr>
+        <p:txBody>
+          <a:bodyPr wrap="square" rtlCol="0">
+            <a:spAutoFit/>
+          </a:bodyPr>
+          <a:lstStyle/>
+          <a:p>
+            <a:r>
+              <a:rPr lang="en-US" sz="2400" dirty="0"/>
+              <a:t>https://uapmurders.com/physics</a:t>
+            </a:r>
+          </a:p>
+        </p:txBody>
+      </p:sp>
+      <p:sp>
+        <p:nvSpPr>
+          <p:cNvPr id="7" name="Google Shape;170;p31">
+            <a:extLst>
+              <a:ext uri="{FF2B5EF4-FFF2-40B4-BE49-F238E27FC236}">
+                <a16:creationId xmlns:a16="http://schemas.microsoft.com/office/drawing/2014/main" id="{4B582382-76AA-B49E-C611-39A37CE591B9}"/>
+              </a:ext>
+            </a:extLst>
+          </p:cNvPr>
+          <p:cNvSpPr/>
+          <p:nvPr/>
+        </p:nvSpPr>
+        <p:spPr>
+          <a:xfrm>
+            <a:off x="7506336" y="4925186"/>
+            <a:ext cx="4550222" cy="869505"/>
+          </a:xfrm>
+          <a:prstGeom prst="rect">
+            <a:avLst/>
+          </a:prstGeom>
+          <a:solidFill>
+            <a:srgbClr val="C00000"/>
+          </a:solidFill>
+          <a:ln>
+            <a:noFill/>
+          </a:ln>
+        </p:spPr>
+        <p:txBody>
+          <a:bodyPr spcFirstLastPara="1" wrap="square" lIns="91425" tIns="45700" rIns="91425" bIns="45700" anchor="ctr" anchorCtr="0">
+            <a:noAutofit/>
+          </a:bodyPr>
+          <a:lstStyle/>
+          <a:p>
+            <a:pPr marL="0" marR="0" lvl="0" indent="0" algn="ctr" rtl="0">
+              <a:lnSpc>
+                <a:spcPct val="100000"/>
+              </a:lnSpc>
+              <a:spcBef>
+                <a:spcPts val="0"/>
+              </a:spcBef>
+              <a:spcAft>
+                <a:spcPts val="0"/>
+              </a:spcAft>
+              <a:buClr>
+                <a:srgbClr val="000000"/>
+              </a:buClr>
+              <a:buSzPts val="1600"/>
+              <a:buFont typeface="Arial"/>
+              <a:buNone/>
+            </a:pPr>
+            <a:r>
+              <a:rPr lang="en-US" sz="4400" dirty="0">
+                <a:solidFill>
+                  <a:schemeClr val="lt1"/>
+                </a:solidFill>
+              </a:rPr>
+              <a:t>Mark McCandlish</a:t>
+            </a:r>
+            <a:endParaRPr sz="2800" b="0" i="0" u="none" strike="noStrike" cap="none" dirty="0">
+              <a:solidFill>
+                <a:srgbClr val="000000"/>
+              </a:solidFill>
+              <a:latin typeface="Arial"/>
+              <a:ea typeface="Arial"/>
+              <a:cs typeface="Arial"/>
+              <a:sym typeface="Arial"/>
+            </a:endParaRPr>
+          </a:p>
+        </p:txBody>
+      </p:sp>
+      <p:sp>
+        <p:nvSpPr>
+          <p:cNvPr id="8" name="Google Shape;170;p31">
+            <a:extLst>
+              <a:ext uri="{FF2B5EF4-FFF2-40B4-BE49-F238E27FC236}">
+                <a16:creationId xmlns:a16="http://schemas.microsoft.com/office/drawing/2014/main" id="{D328ABDE-E232-3EB7-C3F2-B4BB7B64262F}"/>
+              </a:ext>
+            </a:extLst>
+          </p:cNvPr>
+          <p:cNvSpPr/>
+          <p:nvPr/>
+        </p:nvSpPr>
+        <p:spPr>
+          <a:xfrm>
+            <a:off x="7526107" y="5681420"/>
+            <a:ext cx="4550222" cy="548230"/>
+          </a:xfrm>
+          <a:prstGeom prst="rect">
+            <a:avLst/>
+          </a:prstGeom>
+          <a:solidFill>
+            <a:srgbClr val="C00000"/>
+          </a:solidFill>
+          <a:ln>
+            <a:noFill/>
+          </a:ln>
+        </p:spPr>
+        <p:txBody>
+          <a:bodyPr spcFirstLastPara="1" wrap="square" lIns="91425" tIns="45700" rIns="91425" bIns="45700" anchor="ctr" anchorCtr="0">
+            <a:noAutofit/>
+          </a:bodyPr>
+          <a:lstStyle/>
+          <a:p>
+            <a:pPr marL="0" marR="0" lvl="0" indent="0" algn="ctr" rtl="0">
+              <a:lnSpc>
+                <a:spcPct val="100000"/>
+              </a:lnSpc>
+              <a:spcBef>
+                <a:spcPts val="0"/>
+              </a:spcBef>
+              <a:spcAft>
+                <a:spcPts val="0"/>
+              </a:spcAft>
+              <a:buClr>
+                <a:srgbClr val="000000"/>
+              </a:buClr>
+              <a:buSzPts val="1600"/>
+              <a:buFont typeface="Arial"/>
+              <a:buNone/>
+            </a:pPr>
+            <a:r>
+              <a:rPr lang="en-US" sz="3600" dirty="0">
+                <a:solidFill>
+                  <a:schemeClr val="lt1"/>
+                </a:solidFill>
+              </a:rPr>
+              <a:t>Dead at Age 66</a:t>
+            </a:r>
+            <a:endParaRPr sz="2000" b="0" i="0" u="none" strike="noStrike" cap="none" dirty="0">
+              <a:solidFill>
+                <a:srgbClr val="000000"/>
+              </a:solidFill>
+              <a:latin typeface="Arial"/>
+              <a:ea typeface="Arial"/>
+              <a:cs typeface="Arial"/>
+              <a:sym typeface="Arial"/>
+            </a:endParaRPr>
+          </a:p>
+        </p:txBody>
+      </p:sp>
+      <p:sp>
+        <p:nvSpPr>
+          <p:cNvPr id="10" name="TextBox 9">
+            <a:extLst>
+              <a:ext uri="{FF2B5EF4-FFF2-40B4-BE49-F238E27FC236}">
+                <a16:creationId xmlns:a16="http://schemas.microsoft.com/office/drawing/2014/main" id="{5FA0D8B2-6B55-D3DC-BCBB-6FEAD86B9E72}"/>
+              </a:ext>
+            </a:extLst>
+          </p:cNvPr>
+          <p:cNvSpPr txBox="1"/>
+          <p:nvPr/>
+        </p:nvSpPr>
+        <p:spPr>
+          <a:xfrm>
+            <a:off x="276331" y="1813727"/>
+            <a:ext cx="7024042" cy="3754874"/>
+          </a:xfrm>
+          <a:prstGeom prst="rect">
+            <a:avLst/>
+          </a:prstGeom>
+          <a:solidFill>
+            <a:schemeClr val="bg1">
+              <a:alpha val="84400"/>
+            </a:schemeClr>
+          </a:solidFill>
+        </p:spPr>
+        <p:txBody>
+          <a:bodyPr wrap="square" rtlCol="0">
+            <a:spAutoFit/>
+          </a:bodyPr>
+          <a:lstStyle/>
+          <a:p>
+            <a:pPr marL="285750" indent="-285750">
+              <a:spcBef>
+                <a:spcPts val="1200"/>
+              </a:spcBef>
+              <a:buFont typeface="Arial" panose="020B0604020202020204" pitchFamily="34" charset="0"/>
+              <a:buChar char="•"/>
+            </a:pPr>
+            <a:r>
+              <a:rPr dirty="0"/>
+              <a:t>DEAD from a GUNSHOT wound on April 13, 2021 — after reportedly offering to testify before the Senate Intelligence Committee.</a:t>
+            </a:r>
+          </a:p>
+          <a:p>
+            <a:pPr marL="285750" indent="-285750">
+              <a:spcBef>
+                <a:spcPts val="1200"/>
+              </a:spcBef>
+              <a:buFont typeface="Arial" panose="020B0604020202020204" pitchFamily="34" charset="0"/>
+              <a:buChar char="•"/>
+            </a:pPr>
+            <a:r>
+              <a:rPr dirty="0"/>
+              <a:t>Aerospace illustrator who spent 30 years producing the most detailed engineering analysis of a US-built ANTIGRAVITY craft.</a:t>
+            </a:r>
+          </a:p>
+          <a:p>
+            <a:pPr marL="285750" indent="-285750">
+              <a:spcBef>
+                <a:spcPts val="1200"/>
+              </a:spcBef>
+              <a:buFont typeface="Arial" panose="020B0604020202020204" pitchFamily="34" charset="0"/>
+              <a:buChar char="•"/>
+            </a:pPr>
+            <a:r>
+              <a:rPr dirty="0"/>
+              <a:t>His source saw THREE disc-shaped craft HOVERING silently at Norton Air Force Base in 1988.</a:t>
+            </a:r>
+          </a:p>
+          <a:p>
+            <a:pPr marL="285750" indent="-285750">
+              <a:spcBef>
+                <a:spcPts val="1200"/>
+              </a:spcBef>
+              <a:buFont typeface="Arial" panose="020B0604020202020204" pitchFamily="34" charset="0"/>
+              <a:buChar char="•"/>
+            </a:pPr>
+            <a:r>
+              <a:rPr dirty="0"/>
+              <a:t>Testified at the 2001 Disclosure Project describing the Alien Reproduction Vehicle with precise TECHNICAL specifications.</a:t>
+            </a:r>
+          </a:p>
+          <a:p>
+            <a:pPr marL="285750" indent="-285750">
+              <a:spcBef>
+                <a:spcPts val="1200"/>
+              </a:spcBef>
+              <a:buFont typeface="Arial" panose="020B0604020202020204" pitchFamily="34" charset="0"/>
+              <a:buChar char="•"/>
+            </a:pPr>
+            <a:r>
+              <a:rPr dirty="0"/>
+              <a:t>Killed in Redding, California. He had just presented his most detailed breakdown of the craft's CAPACITOR propulsion system.</a:t>
+            </a:r>
+          </a:p>
+        </p:txBody>
+      </p:sp>
     </p:spTree>
   </p:cSld>
   <p:clrMapOvr>
@@ -6586,32 +7168,49 @@
       </p:grpSpPr>
       <p:pic>
         <p:nvPicPr>
-          <p:cNvPr id="2" name="Picture 1">
-            <a:extLst>
-              <a:ext uri="{FF2B5EF4-FFF2-40B4-BE49-F238E27FC236}">
-                <a16:creationId xmlns:a16="http://schemas.microsoft.com/office/drawing/2014/main" id="{B39D3A02-22EC-4ADF-B31F-B6A75E9DC52A}"/>
+          <p:cNvPr id="2050" name="Picture 2" descr="Christopher Fallen Profile Photo">
+            <a:extLst>
+              <a:ext uri="{FF2B5EF4-FFF2-40B4-BE49-F238E27FC236}">
+                <a16:creationId xmlns:a16="http://schemas.microsoft.com/office/drawing/2014/main" id="{B2AC06A7-2885-3C42-1FE4-2866A7130DFC}"/>
               </a:ext>
             </a:extLst>
           </p:cNvPr>
           <p:cNvPicPr>
-            <a:picLocks noChangeAspect="1"/>
+            <a:picLocks noChangeAspect="1" noChangeArrowheads="1"/>
           </p:cNvPicPr>
           <p:nvPr/>
         </p:nvPicPr>
         <p:blipFill>
-          <a:blip r:embed="rId2"/>
+          <a:blip r:embed="rId2">
+            <a:extLst>
+              <a:ext uri="{28A0092B-C50C-407E-A947-70E740481C1C}">
+                <a14:useLocalDpi xmlns:a14="http://schemas.microsoft.com/office/drawing/2010/main" val="0"/>
+              </a:ext>
+            </a:extLst>
+          </a:blip>
+          <a:srcRect/>
           <a:stretch>
             <a:fillRect/>
           </a:stretch>
         </p:blipFill>
-        <p:spPr>
-          <a:xfrm>
-            <a:off x="6672664" y="1095064"/>
-            <a:ext cx="5524359" cy="3105147"/>
-          </a:xfrm>
-          <a:prstGeom prst="rect">
-            <a:avLst/>
-          </a:prstGeom>
+        <p:spPr bwMode="auto">
+          <a:xfrm>
+            <a:off x="9013594" y="1100088"/>
+            <a:ext cx="3062736" cy="3825098"/>
+          </a:xfrm>
+          <a:prstGeom prst="rect">
+            <a:avLst/>
+          </a:prstGeom>
+          <a:noFill/>
+          <a:extLst>
+            <a:ext uri="{909E8E84-426E-40DD-AFC4-6F175D3DCCD1}">
+              <a14:hiddenFill xmlns:a14="http://schemas.microsoft.com/office/drawing/2010/main">
+                <a:solidFill>
+                  <a:srgbClr val="FFFFFF"/>
+                </a:solidFill>
+              </a14:hiddenFill>
+            </a:ext>
+          </a:extLst>
         </p:spPr>
       </p:pic>
       <p:sp>
@@ -6628,8 +7227,8 @@
         </p:nvSpPr>
         <p:spPr>
           <a:xfrm>
-            <a:off x="312432" y="1288262"/>
-            <a:ext cx="6494294" cy="584775"/>
+            <a:off x="312431" y="1288262"/>
+            <a:ext cx="7213675" cy="584775"/>
           </a:xfrm>
           <a:prstGeom prst="rect">
             <a:avLst/>
@@ -6652,7 +7251,7 @@
                   <a:schemeClr val="accent5"/>
                 </a:solidFill>
               </a:rPr>
-              <a:t>Why / How they Mark McCandlish:</a:t>
+              <a:t>Why / How they Christopher Fallen:</a:t>
             </a:r>
           </a:p>
         </p:txBody>
@@ -6778,14 +7377,14 @@
               <a:buNone/>
             </a:pPr>
             <a:r>
-              <a:rPr lang="en-US" sz="4400" dirty="0">
+              <a:rPr lang="en-US" sz="4800" dirty="0">
                 <a:solidFill>
                   <a:schemeClr val="lt1"/>
                 </a:solidFill>
               </a:rPr>
-              <a:t> 40+ Murdered: Physics Breakthroughs Hidden</a:t>
-            </a:r>
-            <a:endParaRPr sz="2800" b="0" i="0" u="none" strike="noStrike" cap="none" dirty="0">
+              <a:t> 150+ Murdered: by Intelligence Services</a:t>
+            </a:r>
+            <a:endParaRPr sz="3200" b="0" i="0" u="none" strike="noStrike" cap="none" dirty="0">
               <a:solidFill>
                 <a:srgbClr val="000000"/>
               </a:solidFill>
@@ -6831,17 +7430,17 @@
           <a:p>
             <a:r>
               <a:rPr lang="en-US" sz="2400" dirty="0"/>
-              <a:t>https://uapmurders.com/physics</a:t>
-            </a:r>
-          </a:p>
-        </p:txBody>
-      </p:sp>
-      <p:sp>
-        <p:nvSpPr>
-          <p:cNvPr id="7" name="Google Shape;170;p31">
-            <a:extLst>
-              <a:ext uri="{FF2B5EF4-FFF2-40B4-BE49-F238E27FC236}">
-                <a16:creationId xmlns:a16="http://schemas.microsoft.com/office/drawing/2014/main" id="{4B582382-76AA-B49E-C611-39A37CE591B9}"/>
+              <a:t>https://intelligencemurders.com/intel</a:t>
+            </a:r>
+          </a:p>
+        </p:txBody>
+      </p:sp>
+      <p:sp>
+        <p:nvSpPr>
+          <p:cNvPr id="8" name="Google Shape;170;p31">
+            <a:extLst>
+              <a:ext uri="{FF2B5EF4-FFF2-40B4-BE49-F238E27FC236}">
+                <a16:creationId xmlns:a16="http://schemas.microsoft.com/office/drawing/2014/main" id="{D328ABDE-E232-3EB7-C3F2-B4BB7B64262F}"/>
               </a:ext>
             </a:extLst>
           </p:cNvPr>
@@ -6850,8 +7449,8 @@
         </p:nvSpPr>
         <p:spPr>
           <a:xfrm>
-            <a:off x="7506336" y="4925186"/>
-            <a:ext cx="4550222" cy="869505"/>
+            <a:off x="7526106" y="6291451"/>
+            <a:ext cx="4550222" cy="548230"/>
           </a:xfrm>
           <a:prstGeom prst="rect">
             <a:avLst/>
@@ -6887,82 +7486,12 @@
               <a:buNone/>
             </a:pPr>
             <a:r>
-              <a:rPr lang="en-US" sz="4400" dirty="0">
-                <a:solidFill>
-                  <a:schemeClr val="lt1"/>
-                </a:solidFill>
-              </a:rPr>
-              <a:t>Mark McCandlish</a:t>
-            </a:r>
-            <a:endParaRPr sz="2800" b="0" i="0" u="none" strike="noStrike" cap="none" dirty="0">
-              <a:solidFill>
-                <a:srgbClr val="000000"/>
-              </a:solidFill>
-              <a:latin typeface="Arial"/>
-              <a:ea typeface="Arial"/>
-              <a:cs typeface="Arial"/>
-              <a:sym typeface="Arial"/>
-            </a:endParaRPr>
-          </a:p>
-        </p:txBody>
-      </p:sp>
-      <p:sp>
-        <p:nvSpPr>
-          <p:cNvPr id="8" name="Google Shape;170;p31">
-            <a:extLst>
-              <a:ext uri="{FF2B5EF4-FFF2-40B4-BE49-F238E27FC236}">
-                <a16:creationId xmlns:a16="http://schemas.microsoft.com/office/drawing/2014/main" id="{D328ABDE-E232-3EB7-C3F2-B4BB7B64262F}"/>
-              </a:ext>
-            </a:extLst>
-          </p:cNvPr>
-          <p:cNvSpPr/>
-          <p:nvPr/>
-        </p:nvSpPr>
-        <p:spPr>
-          <a:xfrm>
-            <a:off x="7526107" y="5681420"/>
-            <a:ext cx="4550222" cy="548230"/>
-          </a:xfrm>
-          <a:prstGeom prst="rect">
-            <a:avLst/>
-          </a:prstGeom>
-          <a:solidFill>
-            <a:srgbClr val="C00000"/>
-          </a:solidFill>
-          <a:ln>
-            <a:noFill/>
-          </a:ln>
-        </p:spPr>
-        <p:txBody>
-          <a:bodyPr spcFirstLastPara="1" wrap="square" lIns="91425" tIns="45700" rIns="91425" bIns="45700" anchor="ctr" anchorCtr="0">
-            <a:noAutofit/>
-          </a:bodyPr>
-          <a:lstStyle/>
-          <a:p>
-            <a:pPr marL="0" marR="0" lvl="0" indent="0" algn="ctr" rtl="0">
-              <a:lnSpc>
-                <a:spcPct val="100000"/>
-              </a:lnSpc>
-              <a:spcBef>
-                <a:spcPts val="0"/>
-              </a:spcBef>
-              <a:spcAft>
-                <a:spcPts val="0"/>
-              </a:spcAft>
-              <a:buClr>
-                <a:srgbClr val="000000"/>
-              </a:buClr>
-              <a:buSzPts val="1600"/>
-              <a:buFont typeface="Arial"/>
-              <a:buNone/>
-            </a:pPr>
-            <a:r>
               <a:rPr lang="en-US" sz="3600" dirty="0">
                 <a:solidFill>
                   <a:schemeClr val="lt1"/>
                 </a:solidFill>
               </a:rPr>
-              <a:t>Dead at Age 66</a:t>
+              <a:t>Dead at Age 48</a:t>
             </a:r>
             <a:endParaRPr sz="2000" b="0" i="0" u="none" strike="noStrike" cap="none" dirty="0">
               <a:solidFill>
@@ -6990,8 +7519,8 @@
         </p:nvSpPr>
         <p:spPr>
           <a:xfrm>
-            <a:off x="312431" y="2175372"/>
-            <a:ext cx="6987941" cy="3046988"/>
+            <a:off x="135442" y="1937976"/>
+            <a:ext cx="8354040" cy="3477875"/>
           </a:xfrm>
           <a:prstGeom prst="rect">
             <a:avLst/>
@@ -7016,7 +7545,8 @@
               <a:buChar char="•"/>
             </a:pPr>
             <a:r>
-              <a:t>DEAD from a GUNSHOT wound on April 13, 2021 — after reportedly offering to testify before the Senate Intelligence Committee.</a:t>
+              <a:rPr dirty="0"/>
+              <a:t>Former HAARP chief scientist found BOUND with duct tape, belt around his neck, head wrapped in tape. ASPHYXIATED in his own home. Age 48.</a:t>
             </a:r>
           </a:p>
           <a:p>
@@ -7028,7 +7558,8 @@
               <a:buChar char="•"/>
             </a:pPr>
             <a:r>
-              <a:t>Aerospace illustrator who spent 30 years producing the most detailed engineering analysis of a US-built ANTIGRAVITY craft.</a:t>
+              <a:rPr dirty="0"/>
+              <a:t>Senior physicist at the Air Force Research Laboratory working on CLASSIFIED ionospheric and plasma weapons research.</a:t>
             </a:r>
           </a:p>
           <a:p>
@@ -7040,7 +7571,8 @@
               <a:buChar char="•"/>
             </a:pPr>
             <a:r>
-              <a:t>His source saw THREE disc-shaped craft HOVERING silently at Norton Air Force Base in 1988.</a:t>
+              <a:rPr dirty="0"/>
+              <a:t>One suspect convicted of FIRST-DEGREE murder. The co-defendant fled to El Paso and died of an OVERDOSE before trial.</a:t>
             </a:r>
           </a:p>
           <a:p>
@@ -7052,7 +7584,8 @@
               <a:buChar char="•"/>
             </a:pPr>
             <a:r>
-              <a:t>Testified at the 2001 Disclosure Project describing the Alien Reproduction Vehicle with precise TECHNICAL specifications.</a:t>
+              <a:rPr dirty="0"/>
+              <a:t>His death was the FIRST in a cluster of defense scientist deaths across New Mexico in 2024.</a:t>
             </a:r>
           </a:p>
           <a:p>
@@ -7064,8 +7597,79 @@
               <a:buChar char="•"/>
             </a:pPr>
             <a:r>
-              <a:t>Killed in Redding, California. He had just presented his most detailed breakdown of the craft's CAPACITOR propulsion system.</a:t>
-            </a:r>
+              <a:rPr dirty="0"/>
+              <a:t>Worked at Kirtland Air Force Base — home to directed energy weapons, space vehicles, and some of America's most SECRET programs.</a:t>
+            </a:r>
+          </a:p>
+        </p:txBody>
+      </p:sp>
+      <p:sp>
+        <p:nvSpPr>
+          <p:cNvPr id="7" name="Google Shape;170;p31">
+            <a:extLst>
+              <a:ext uri="{FF2B5EF4-FFF2-40B4-BE49-F238E27FC236}">
+                <a16:creationId xmlns:a16="http://schemas.microsoft.com/office/drawing/2014/main" id="{4B582382-76AA-B49E-C611-39A37CE591B9}"/>
+              </a:ext>
+            </a:extLst>
+          </p:cNvPr>
+          <p:cNvSpPr/>
+          <p:nvPr/>
+        </p:nvSpPr>
+        <p:spPr>
+          <a:xfrm>
+            <a:off x="7506336" y="5055282"/>
+            <a:ext cx="4550222" cy="1236169"/>
+          </a:xfrm>
+          <a:prstGeom prst="rect">
+            <a:avLst/>
+          </a:prstGeom>
+          <a:solidFill>
+            <a:srgbClr val="C00000"/>
+          </a:solidFill>
+          <a:ln>
+            <a:noFill/>
+          </a:ln>
+        </p:spPr>
+        <p:txBody>
+          <a:bodyPr spcFirstLastPara="1" wrap="square" lIns="91425" tIns="45700" rIns="91425" bIns="45700" anchor="ctr" anchorCtr="0">
+            <a:noAutofit/>
+          </a:bodyPr>
+          <a:lstStyle/>
+          <a:p>
+            <a:pPr marL="0" marR="0" lvl="0" indent="0" algn="ctr" rtl="0">
+              <a:lnSpc>
+                <a:spcPct val="100000"/>
+              </a:lnSpc>
+              <a:spcBef>
+                <a:spcPts val="0"/>
+              </a:spcBef>
+              <a:spcAft>
+                <a:spcPts val="0"/>
+              </a:spcAft>
+              <a:buClr>
+                <a:srgbClr val="000000"/>
+              </a:buClr>
+              <a:buSzPts val="1600"/>
+              <a:buFont typeface="Arial"/>
+              <a:buNone/>
+            </a:pPr>
+            <a:r>
+              <a:rPr lang="en-US" sz="4800" dirty="0">
+                <a:solidFill>
+                  <a:schemeClr val="lt1"/>
+                </a:solidFill>
+              </a:rPr>
+              <a:t>Christopher Fallen</a:t>
+            </a:r>
+            <a:endParaRPr sz="3200" b="0" i="0" u="none" strike="noStrike" cap="none" dirty="0">
+              <a:solidFill>
+                <a:srgbClr val="000000"/>
+              </a:solidFill>
+              <a:latin typeface="Arial"/>
+              <a:ea typeface="Arial"/>
+              <a:cs typeface="Arial"/>
+              <a:sym typeface="Arial"/>
+            </a:endParaRPr>
           </a:p>
         </p:txBody>
       </p:sp>
@@ -8082,7 +8686,7 @@
         </p:blipFill>
         <p:spPr>
           <a:xfrm>
-            <a:off x="8191402" y="1100088"/>
+            <a:off x="9177168" y="1100088"/>
             <a:ext cx="2899161" cy="3884876"/>
           </a:xfrm>
           <a:prstGeom prst="rect">
@@ -8538,8 +9142,8 @@
         </p:nvSpPr>
         <p:spPr>
           <a:xfrm>
-            <a:off x="312431" y="2175372"/>
-            <a:ext cx="6987941" cy="3046988"/>
+            <a:off x="191731" y="1992069"/>
+            <a:ext cx="8575144" cy="3477875"/>
           </a:xfrm>
           <a:prstGeom prst="rect">
             <a:avLst/>
@@ -8564,6 +9168,7 @@
               <a:buChar char="•"/>
             </a:pPr>
             <a:r>
+              <a:rPr dirty="0"/>
               <a:t>DIED July 27, 2021 — physicist who published PEER-REVIEWED theory on generating gravity using superconductors.</a:t>
             </a:r>
           </a:p>
@@ -8576,6 +9181,7 @@
               <a:buChar char="•"/>
             </a:pPr>
             <a:r>
+              <a:rPr dirty="0"/>
               <a:t>Received a 48,970 Department of Defense GRANT for antigravity research. Results were NEVER published.</a:t>
             </a:r>
           </a:p>
@@ -8588,6 +9194,7 @@
               <a:buChar char="•"/>
             </a:pPr>
             <a:r>
+              <a:rPr dirty="0"/>
               <a:t>Her son confirmed she continued working for the DoD but stopped publishing after getting a TOP SECRET clearance.</a:t>
             </a:r>
           </a:p>
@@ -8600,6 +9207,7 @@
               <a:buChar char="•"/>
             </a:pPr>
             <a:r>
+              <a:rPr dirty="0"/>
               <a:t>In 2014, a vehicle accident destroyed her COGNITIVE capacity — ending her ability to continue research.</a:t>
             </a:r>
           </a:p>
@@ -8612,6 +9220,7 @@
               <a:buChar char="•"/>
             </a:pPr>
             <a:r>
+              <a:rPr dirty="0"/>
               <a:t>Chinese-American physicist at University of Alabama in Huntsville. Her work was CLASSIFIED, not abandoned.</a:t>
             </a:r>
           </a:p>

--- a/Physics/Physics_Murders.pptx
+++ b/Physics/Physics_Murders.pptx
@@ -6,17 +6,18 @@
   </p:sldMasterIdLst>
   <p:sldIdLst>
     <p:sldId id="272" r:id="rId2"/>
-    <p:sldId id="281" r:id="rId3"/>
-    <p:sldId id="273" r:id="rId4"/>
-    <p:sldId id="276" r:id="rId5"/>
-    <p:sldId id="277" r:id="rId6"/>
-    <p:sldId id="283" r:id="rId7"/>
-    <p:sldId id="278" r:id="rId8"/>
-    <p:sldId id="279" r:id="rId9"/>
-    <p:sldId id="280" r:id="rId10"/>
-    <p:sldId id="282" r:id="rId11"/>
-    <p:sldId id="274" r:id="rId12"/>
-    <p:sldId id="275" r:id="rId13"/>
+    <p:sldId id="323" r:id="rId3"/>
+    <p:sldId id="281" r:id="rId4"/>
+    <p:sldId id="273" r:id="rId5"/>
+    <p:sldId id="276" r:id="rId6"/>
+    <p:sldId id="277" r:id="rId7"/>
+    <p:sldId id="283" r:id="rId8"/>
+    <p:sldId id="278" r:id="rId9"/>
+    <p:sldId id="279" r:id="rId10"/>
+    <p:sldId id="280" r:id="rId11"/>
+    <p:sldId id="282" r:id="rId12"/>
+    <p:sldId id="274" r:id="rId13"/>
+    <p:sldId id="275" r:id="rId14"/>
   </p:sldIdLst>
   <p:sldSz cx="12192000" cy="6858000"/>
   <p:notesSz cx="6858000" cy="9144000"/>
@@ -3799,6 +3800,53 @@
           <a:chExt cx="0" cy="0"/>
         </a:xfrm>
       </p:grpSpPr>
+      <p:pic>
+        <p:nvPicPr>
+          <p:cNvPr id="1028" name="Picture 4" descr="Do High Frequency Gravitational Waves Explain Li &amp; Podkletnov's  Experimental Results? | by Tim Ventura | Dialogue &amp; Discourse | Medium">
+            <a:extLst>
+              <a:ext uri="{FF2B5EF4-FFF2-40B4-BE49-F238E27FC236}">
+                <a16:creationId xmlns:a16="http://schemas.microsoft.com/office/drawing/2014/main" id="{D4FB9850-B35A-1E3D-AFEB-CBF6D07248F5}"/>
+              </a:ext>
+            </a:extLst>
+          </p:cNvPr>
+          <p:cNvPicPr>
+            <a:picLocks noChangeAspect="1" noChangeArrowheads="1"/>
+          </p:cNvPicPr>
+          <p:nvPr/>
+        </p:nvPicPr>
+        <p:blipFill rotWithShape="1">
+          <a:blip r:embed="rId2">
+            <a:extLst>
+              <a:ext uri="{28A0092B-C50C-407E-A947-70E740481C1C}">
+                <a14:useLocalDpi xmlns:a14="http://schemas.microsoft.com/office/drawing/2010/main" val="0"/>
+              </a:ext>
+            </a:extLst>
+          </a:blip>
+          <a:srcRect l="26864" r="32742"/>
+          <a:stretch>
+            <a:fillRect/>
+          </a:stretch>
+        </p:blipFill>
+        <p:spPr bwMode="auto">
+          <a:xfrm>
+            <a:off x="9167204" y="926960"/>
+            <a:ext cx="2907132" cy="5004079"/>
+          </a:xfrm>
+          <a:prstGeom prst="rect">
+            <a:avLst/>
+          </a:prstGeom>
+          <a:noFill/>
+          <a:extLst>
+            <a:ext uri="{909E8E84-426E-40DD-AFC4-6F175D3DCCD1}">
+              <a14:hiddenFill xmlns:a14="http://schemas.microsoft.com/office/drawing/2010/main">
+                <a:solidFill>
+                  <a:srgbClr val="FFFFFF"/>
+                </a:solidFill>
+              </a14:hiddenFill>
+            </a:ext>
+          </a:extLst>
+        </p:spPr>
+      </p:pic>
       <p:sp>
         <p:nvSpPr>
           <p:cNvPr id="15" name="TextBox 14">
@@ -3814,7 +3862,7 @@
         <p:spPr>
           <a:xfrm>
             <a:off x="312432" y="1288262"/>
-            <a:ext cx="7488382" cy="584775"/>
+            <a:ext cx="6494294" cy="584775"/>
           </a:xfrm>
           <a:prstGeom prst="rect">
             <a:avLst/>
@@ -3837,7 +3885,7 @@
                   <a:schemeClr val="accent5"/>
                 </a:solidFill>
               </a:rPr>
-              <a:t>Why / How they Stanton Friedman:</a:t>
+              <a:t>Why / How they Ning Li:</a:t>
             </a:r>
           </a:p>
         </p:txBody>
@@ -4035,8 +4083,8 @@
         </p:nvSpPr>
         <p:spPr>
           <a:xfrm>
-            <a:off x="7666494" y="5180908"/>
-            <a:ext cx="4379731" cy="1677092"/>
+            <a:off x="7437045" y="5409707"/>
+            <a:ext cx="4550222" cy="869505"/>
           </a:xfrm>
           <a:prstGeom prst="rect">
             <a:avLst/>
@@ -4077,7 +4125,7 @@
                   <a:schemeClr val="lt1"/>
                 </a:solidFill>
               </a:rPr>
-              <a:t>Stanton Friedman</a:t>
+              <a:t>Ning Li</a:t>
             </a:r>
             <a:endParaRPr sz="3200" b="0" i="0" u="none" strike="noStrike" cap="none" dirty="0">
               <a:solidFill>
@@ -4093,25 +4141,95 @@
       </p:sp>
       <p:sp>
         <p:nvSpPr>
-          <p:cNvPr id="10" name="TextBox 9">
-            <a:extLst>
-              <a:ext uri="{FF2B5EF4-FFF2-40B4-BE49-F238E27FC236}">
-                <a16:creationId xmlns:a16="http://schemas.microsoft.com/office/drawing/2014/main" id="{5FA0D8B2-6B55-D3DC-BCBB-6FEAD86B9E72}"/>
-              </a:ext>
-            </a:extLst>
-          </p:cNvPr>
-          <p:cNvSpPr txBox="1"/>
+          <p:cNvPr id="8" name="Google Shape;170;p31">
+            <a:extLst>
+              <a:ext uri="{FF2B5EF4-FFF2-40B4-BE49-F238E27FC236}">
+                <a16:creationId xmlns:a16="http://schemas.microsoft.com/office/drawing/2014/main" id="{D328ABDE-E232-3EB7-C3F2-B4BB7B64262F}"/>
+              </a:ext>
+            </a:extLst>
+          </p:cNvPr>
+          <p:cNvSpPr/>
           <p:nvPr/>
         </p:nvSpPr>
         <p:spPr>
           <a:xfrm>
-            <a:off x="129030" y="2003478"/>
-            <a:ext cx="6987941" cy="3046988"/>
+            <a:off x="7456816" y="6165941"/>
+            <a:ext cx="4550222" cy="548230"/>
           </a:xfrm>
           <a:prstGeom prst="rect">
             <a:avLst/>
           </a:prstGeom>
           <a:solidFill>
+            <a:srgbClr val="C00000"/>
+          </a:solidFill>
+          <a:ln>
+            <a:noFill/>
+          </a:ln>
+        </p:spPr>
+        <p:txBody>
+          <a:bodyPr spcFirstLastPara="1" wrap="square" lIns="91425" tIns="45700" rIns="91425" bIns="45700" anchor="ctr" anchorCtr="0">
+            <a:noAutofit/>
+          </a:bodyPr>
+          <a:lstStyle/>
+          <a:p>
+            <a:pPr marL="0" marR="0" lvl="0" indent="0" algn="ctr" rtl="0">
+              <a:lnSpc>
+                <a:spcPct val="100000"/>
+              </a:lnSpc>
+              <a:spcBef>
+                <a:spcPts val="0"/>
+              </a:spcBef>
+              <a:spcAft>
+                <a:spcPts val="0"/>
+              </a:spcAft>
+              <a:buClr>
+                <a:srgbClr val="000000"/>
+              </a:buClr>
+              <a:buSzPts val="1600"/>
+              <a:buFont typeface="Arial"/>
+              <a:buNone/>
+            </a:pPr>
+            <a:r>
+              <a:rPr lang="en-US" sz="3600" dirty="0">
+                <a:solidFill>
+                  <a:schemeClr val="lt1"/>
+                </a:solidFill>
+              </a:rPr>
+              <a:t>Dead at Age 78</a:t>
+            </a:r>
+            <a:endParaRPr sz="2000" b="0" i="0" u="none" strike="noStrike" cap="none" dirty="0">
+              <a:solidFill>
+                <a:srgbClr val="000000"/>
+              </a:solidFill>
+              <a:latin typeface="Arial"/>
+              <a:ea typeface="Arial"/>
+              <a:cs typeface="Arial"/>
+              <a:sym typeface="Arial"/>
+            </a:endParaRPr>
+          </a:p>
+        </p:txBody>
+      </p:sp>
+      <p:sp>
+        <p:nvSpPr>
+          <p:cNvPr id="10" name="TextBox 9">
+            <a:extLst>
+              <a:ext uri="{FF2B5EF4-FFF2-40B4-BE49-F238E27FC236}">
+                <a16:creationId xmlns:a16="http://schemas.microsoft.com/office/drawing/2014/main" id="{5FA0D8B2-6B55-D3DC-BCBB-6FEAD86B9E72}"/>
+              </a:ext>
+            </a:extLst>
+          </p:cNvPr>
+          <p:cNvSpPr txBox="1"/>
+          <p:nvPr/>
+        </p:nvSpPr>
+        <p:spPr>
+          <a:xfrm>
+            <a:off x="191731" y="1992069"/>
+            <a:ext cx="8575144" cy="3477875"/>
+          </a:xfrm>
+          <a:prstGeom prst="rect">
+            <a:avLst/>
+          </a:prstGeom>
+          <a:solidFill>
             <a:schemeClr val="bg1">
               <a:alpha val="84400"/>
             </a:schemeClr>
@@ -4132,7 +4250,7 @@
             </a:pPr>
             <a:r>
               <a:rPr dirty="0"/>
-              <a:t>DIED May 13, 2019, at age 84 — nuclear physicist who became the world's foremost SCIENTIFIC UFO researcher.</a:t>
+              <a:t>DIED July 27, 2021 — physicist who published PEER-REVIEWED theory on generating gravity using superconductors.</a:t>
             </a:r>
           </a:p>
           <a:p>
@@ -4145,7 +4263,7 @@
             </a:pPr>
             <a:r>
               <a:rPr dirty="0"/>
-              <a:t>Worked on CLASSIFIED fission and fusion rocket programs at GE, Westinghouse, McDonnell Douglas, and TRW.</a:t>
+              <a:t>Received a 48,970 Department of Defense GRANT for antigravity research. Results were NEVER published.</a:t>
             </a:r>
           </a:p>
           <a:p>
@@ -4158,7 +4276,7 @@
             </a:pPr>
             <a:r>
               <a:rPr dirty="0"/>
-              <a:t>Proposed magnetohydrodynamic propulsion as the physics behind UFO flight — based on his hands-on NUCLEAR experience.</a:t>
+              <a:t>Her son confirmed she continued working for the DoD but stopped publishing after getting a TOP SECRET clearance.</a:t>
             </a:r>
           </a:p>
           <a:p>
@@ -4171,7 +4289,7 @@
             </a:pPr>
             <a:r>
               <a:rPr dirty="0"/>
-              <a:t>Testified before Congress in 1968: "The evidence is OVERWHELMING that Earth is being visited."</a:t>
+              <a:t>In 2014, a vehicle accident destroyed her COGNITIVE capacity — ending her ability to continue research.</a:t>
             </a:r>
           </a:p>
           <a:p>
@@ -4184,35 +4302,11 @@
             </a:pPr>
             <a:r>
               <a:rPr dirty="0"/>
-              <a:t>Gave over 700 lectures at colleges and conferences. The original Roswell researcher. Natural causes at 84.</a:t>
-            </a:r>
-          </a:p>
-        </p:txBody>
-      </p:sp>
-      <p:pic>
-        <p:nvPicPr>
-          <p:cNvPr id="16" name="Picture 15" descr="Stanton_Friedman.jpg"/>
-          <p:cNvPicPr>
-            <a:picLocks noChangeAspect="1"/>
-          </p:cNvPicPr>
-          <p:nvPr/>
-        </p:nvPicPr>
-        <p:blipFill>
-          <a:blip r:embed="rId2"/>
-          <a:stretch>
-            <a:fillRect/>
-          </a:stretch>
-        </p:blipFill>
-        <p:spPr>
-          <a:xfrm>
-            <a:off x="8059838" y="1100088"/>
-            <a:ext cx="3162289" cy="3884876"/>
-          </a:xfrm>
-          <a:prstGeom prst="rect">
-            <a:avLst/>
-          </a:prstGeom>
-        </p:spPr>
-      </p:pic>
+              <a:t>Chinese-American physicist at University of Alabama in Huntsville. Her work was CLASSIFIED, not abandoned.</a:t>
+            </a:r>
+          </a:p>
+        </p:txBody>
+      </p:sp>
     </p:spTree>
   </p:cSld>
   <p:clrMapOvr>
@@ -4253,6 +4347,445 @@
         <p:spPr>
           <a:xfrm>
             <a:off x="312432" y="1288262"/>
+            <a:ext cx="7488382" cy="584775"/>
+          </a:xfrm>
+          <a:prstGeom prst="rect">
+            <a:avLst/>
+          </a:prstGeom>
+          <a:solidFill>
+            <a:schemeClr val="bg1">
+              <a:alpha val="84400"/>
+            </a:schemeClr>
+          </a:solidFill>
+        </p:spPr>
+        <p:txBody>
+          <a:bodyPr wrap="square" rtlCol="0">
+            <a:spAutoFit/>
+          </a:bodyPr>
+          <a:lstStyle/>
+          <a:p>
+            <a:r>
+              <a:rPr lang="en-US" sz="3200" b="1" dirty="0">
+                <a:solidFill>
+                  <a:schemeClr val="accent5"/>
+                </a:solidFill>
+              </a:rPr>
+              <a:t>Why / How they Stanton Friedman:</a:t>
+            </a:r>
+          </a:p>
+        </p:txBody>
+      </p:sp>
+      <p:sp>
+        <p:nvSpPr>
+          <p:cNvPr id="3" name="Google Shape;170;p31">
+            <a:extLst>
+              <a:ext uri="{FF2B5EF4-FFF2-40B4-BE49-F238E27FC236}">
+                <a16:creationId xmlns:a16="http://schemas.microsoft.com/office/drawing/2014/main" id="{A4695FE5-0AA5-AB05-98B1-B5B8E3FA8CBE}"/>
+              </a:ext>
+            </a:extLst>
+          </p:cNvPr>
+          <p:cNvSpPr/>
+          <p:nvPr/>
+        </p:nvSpPr>
+        <p:spPr>
+          <a:xfrm>
+            <a:off x="191731" y="5732890"/>
+            <a:ext cx="3431270" cy="496760"/>
+          </a:xfrm>
+          <a:prstGeom prst="rect">
+            <a:avLst/>
+          </a:prstGeom>
+          <a:solidFill>
+            <a:schemeClr val="accent5"/>
+          </a:solidFill>
+          <a:ln>
+            <a:noFill/>
+          </a:ln>
+        </p:spPr>
+        <p:txBody>
+          <a:bodyPr spcFirstLastPara="1" wrap="square" lIns="91425" tIns="45700" rIns="91425" bIns="45700" anchor="ctr" anchorCtr="0">
+            <a:noAutofit/>
+          </a:bodyPr>
+          <a:lstStyle/>
+          <a:p>
+            <a:pPr marL="0" marR="0" lvl="0" indent="0" algn="ctr" rtl="0">
+              <a:lnSpc>
+                <a:spcPct val="100000"/>
+              </a:lnSpc>
+              <a:spcBef>
+                <a:spcPts val="0"/>
+              </a:spcBef>
+              <a:spcAft>
+                <a:spcPts val="0"/>
+              </a:spcAft>
+              <a:buClr>
+                <a:srgbClr val="000000"/>
+              </a:buClr>
+              <a:buSzPts val="1600"/>
+              <a:buFont typeface="Arial"/>
+              <a:buNone/>
+            </a:pPr>
+            <a:r>
+              <a:rPr lang="en-US" sz="3600" dirty="0">
+                <a:solidFill>
+                  <a:schemeClr val="lt1"/>
+                </a:solidFill>
+              </a:rPr>
+              <a:t>Read List Here:</a:t>
+            </a:r>
+            <a:endParaRPr sz="2000" b="0" i="0" u="none" strike="noStrike" cap="none" dirty="0">
+              <a:solidFill>
+                <a:srgbClr val="000000"/>
+              </a:solidFill>
+              <a:latin typeface="Arial"/>
+              <a:ea typeface="Arial"/>
+              <a:cs typeface="Arial"/>
+              <a:sym typeface="Arial"/>
+            </a:endParaRPr>
+          </a:p>
+        </p:txBody>
+      </p:sp>
+      <p:sp>
+        <p:nvSpPr>
+          <p:cNvPr id="5" name="Google Shape;170;p31">
+            <a:extLst>
+              <a:ext uri="{FF2B5EF4-FFF2-40B4-BE49-F238E27FC236}">
+                <a16:creationId xmlns:a16="http://schemas.microsoft.com/office/drawing/2014/main" id="{98132413-6ED2-8B36-74B6-3C503B1A4634}"/>
+              </a:ext>
+            </a:extLst>
+          </p:cNvPr>
+          <p:cNvSpPr/>
+          <p:nvPr/>
+        </p:nvSpPr>
+        <p:spPr>
+          <a:xfrm>
+            <a:off x="0" y="-31518"/>
+            <a:ext cx="12192000" cy="1131606"/>
+          </a:xfrm>
+          <a:prstGeom prst="rect">
+            <a:avLst/>
+          </a:prstGeom>
+          <a:solidFill>
+            <a:srgbClr val="C00000"/>
+          </a:solidFill>
+          <a:ln>
+            <a:noFill/>
+          </a:ln>
+        </p:spPr>
+        <p:txBody>
+          <a:bodyPr spcFirstLastPara="1" wrap="square" lIns="91425" tIns="45700" rIns="91425" bIns="45700" anchor="ctr" anchorCtr="0">
+            <a:noAutofit/>
+          </a:bodyPr>
+          <a:lstStyle/>
+          <a:p>
+            <a:pPr marL="0" marR="0" lvl="0" indent="0" rtl="0">
+              <a:lnSpc>
+                <a:spcPct val="100000"/>
+              </a:lnSpc>
+              <a:spcBef>
+                <a:spcPts val="0"/>
+              </a:spcBef>
+              <a:spcAft>
+                <a:spcPts val="0"/>
+              </a:spcAft>
+              <a:buClr>
+                <a:srgbClr val="000000"/>
+              </a:buClr>
+              <a:buSzPts val="1600"/>
+              <a:buFont typeface="Arial"/>
+              <a:buNone/>
+            </a:pPr>
+            <a:r>
+              <a:rPr lang="en-US" sz="4400" dirty="0">
+                <a:solidFill>
+                  <a:schemeClr val="lt1"/>
+                </a:solidFill>
+              </a:rPr>
+              <a:t> 40+ Murdered: Physics Breakthroughs Hidden</a:t>
+            </a:r>
+            <a:endParaRPr sz="2800" b="0" i="0" u="none" strike="noStrike" cap="none" dirty="0">
+              <a:solidFill>
+                <a:srgbClr val="000000"/>
+              </a:solidFill>
+              <a:latin typeface="Arial"/>
+              <a:ea typeface="Arial"/>
+              <a:cs typeface="Arial"/>
+              <a:sym typeface="Arial"/>
+            </a:endParaRPr>
+          </a:p>
+        </p:txBody>
+      </p:sp>
+      <p:sp>
+        <p:nvSpPr>
+          <p:cNvPr id="4" name="TextBox 3">
+            <a:extLst>
+              <a:ext uri="{FF2B5EF4-FFF2-40B4-BE49-F238E27FC236}">
+                <a16:creationId xmlns:a16="http://schemas.microsoft.com/office/drawing/2014/main" id="{50D7621F-9D36-7894-7117-9F831EF5EFA6}"/>
+              </a:ext>
+            </a:extLst>
+          </p:cNvPr>
+          <p:cNvSpPr txBox="1"/>
+          <p:nvPr/>
+        </p:nvSpPr>
+        <p:spPr>
+          <a:xfrm>
+            <a:off x="107300" y="6229650"/>
+            <a:ext cx="11685989" cy="461665"/>
+          </a:xfrm>
+          <a:prstGeom prst="rect">
+            <a:avLst/>
+          </a:prstGeom>
+          <a:solidFill>
+            <a:schemeClr val="bg1">
+              <a:alpha val="84400"/>
+            </a:schemeClr>
+          </a:solidFill>
+        </p:spPr>
+        <p:txBody>
+          <a:bodyPr wrap="square" rtlCol="0">
+            <a:spAutoFit/>
+          </a:bodyPr>
+          <a:lstStyle/>
+          <a:p>
+            <a:r>
+              <a:rPr lang="en-US" sz="2400" dirty="0"/>
+              <a:t>https://uapmurders.com/physics</a:t>
+            </a:r>
+          </a:p>
+        </p:txBody>
+      </p:sp>
+      <p:sp>
+        <p:nvSpPr>
+          <p:cNvPr id="7" name="Google Shape;170;p31">
+            <a:extLst>
+              <a:ext uri="{FF2B5EF4-FFF2-40B4-BE49-F238E27FC236}">
+                <a16:creationId xmlns:a16="http://schemas.microsoft.com/office/drawing/2014/main" id="{4B582382-76AA-B49E-C611-39A37CE591B9}"/>
+              </a:ext>
+            </a:extLst>
+          </p:cNvPr>
+          <p:cNvSpPr/>
+          <p:nvPr/>
+        </p:nvSpPr>
+        <p:spPr>
+          <a:xfrm>
+            <a:off x="7666494" y="5180908"/>
+            <a:ext cx="4379731" cy="1677092"/>
+          </a:xfrm>
+          <a:prstGeom prst="rect">
+            <a:avLst/>
+          </a:prstGeom>
+          <a:solidFill>
+            <a:srgbClr val="C00000"/>
+          </a:solidFill>
+          <a:ln>
+            <a:noFill/>
+          </a:ln>
+        </p:spPr>
+        <p:txBody>
+          <a:bodyPr spcFirstLastPara="1" wrap="square" lIns="91425" tIns="45700" rIns="91425" bIns="45700" anchor="ctr" anchorCtr="0">
+            <a:noAutofit/>
+          </a:bodyPr>
+          <a:lstStyle/>
+          <a:p>
+            <a:pPr marL="0" marR="0" lvl="0" indent="0" algn="ctr" rtl="0">
+              <a:lnSpc>
+                <a:spcPct val="100000"/>
+              </a:lnSpc>
+              <a:spcBef>
+                <a:spcPts val="0"/>
+              </a:spcBef>
+              <a:spcAft>
+                <a:spcPts val="0"/>
+              </a:spcAft>
+              <a:buClr>
+                <a:srgbClr val="000000"/>
+              </a:buClr>
+              <a:buSzPts val="1600"/>
+              <a:buFont typeface="Arial"/>
+              <a:buNone/>
+            </a:pPr>
+            <a:r>
+              <a:rPr lang="en-US" sz="4800" dirty="0">
+                <a:solidFill>
+                  <a:schemeClr val="lt1"/>
+                </a:solidFill>
+              </a:rPr>
+              <a:t>Stanton Friedman</a:t>
+            </a:r>
+            <a:endParaRPr sz="3200" b="0" i="0" u="none" strike="noStrike" cap="none" dirty="0">
+              <a:solidFill>
+                <a:srgbClr val="000000"/>
+              </a:solidFill>
+              <a:latin typeface="Arial"/>
+              <a:ea typeface="Arial"/>
+              <a:cs typeface="Arial"/>
+              <a:sym typeface="Arial"/>
+            </a:endParaRPr>
+          </a:p>
+        </p:txBody>
+      </p:sp>
+      <p:sp>
+        <p:nvSpPr>
+          <p:cNvPr id="10" name="TextBox 9">
+            <a:extLst>
+              <a:ext uri="{FF2B5EF4-FFF2-40B4-BE49-F238E27FC236}">
+                <a16:creationId xmlns:a16="http://schemas.microsoft.com/office/drawing/2014/main" id="{5FA0D8B2-6B55-D3DC-BCBB-6FEAD86B9E72}"/>
+              </a:ext>
+            </a:extLst>
+          </p:cNvPr>
+          <p:cNvSpPr txBox="1"/>
+          <p:nvPr/>
+        </p:nvSpPr>
+        <p:spPr>
+          <a:xfrm>
+            <a:off x="129030" y="2003478"/>
+            <a:ext cx="6987941" cy="3046988"/>
+          </a:xfrm>
+          <a:prstGeom prst="rect">
+            <a:avLst/>
+          </a:prstGeom>
+          <a:solidFill>
+            <a:schemeClr val="bg1">
+              <a:alpha val="84400"/>
+            </a:schemeClr>
+          </a:solidFill>
+        </p:spPr>
+        <p:txBody>
+          <a:bodyPr wrap="square" rtlCol="0">
+            <a:spAutoFit/>
+          </a:bodyPr>
+          <a:lstStyle/>
+          <a:p>
+            <a:pPr marL="285750" indent="-285750">
+              <a:spcBef>
+                <a:spcPts val="1200"/>
+              </a:spcBef>
+              <a:buFont typeface="Arial" panose="020B0604020202020204" pitchFamily="34" charset="0"/>
+              <a:buChar char="•"/>
+            </a:pPr>
+            <a:r>
+              <a:rPr dirty="0"/>
+              <a:t>DIED May 13, 2019, at age 84 — nuclear physicist who became the world's foremost SCIENTIFIC UFO researcher.</a:t>
+            </a:r>
+          </a:p>
+          <a:p>
+            <a:pPr marL="285750" indent="-285750">
+              <a:spcBef>
+                <a:spcPts val="1200"/>
+              </a:spcBef>
+              <a:buFont typeface="Arial" panose="020B0604020202020204" pitchFamily="34" charset="0"/>
+              <a:buChar char="•"/>
+            </a:pPr>
+            <a:r>
+              <a:rPr dirty="0"/>
+              <a:t>Worked on CLASSIFIED fission and fusion rocket programs at GE, Westinghouse, McDonnell Douglas, and TRW.</a:t>
+            </a:r>
+          </a:p>
+          <a:p>
+            <a:pPr marL="285750" indent="-285750">
+              <a:spcBef>
+                <a:spcPts val="1200"/>
+              </a:spcBef>
+              <a:buFont typeface="Arial" panose="020B0604020202020204" pitchFamily="34" charset="0"/>
+              <a:buChar char="•"/>
+            </a:pPr>
+            <a:r>
+              <a:rPr dirty="0"/>
+              <a:t>Proposed magnetohydrodynamic propulsion as the physics behind UFO flight — based on his hands-on NUCLEAR experience.</a:t>
+            </a:r>
+          </a:p>
+          <a:p>
+            <a:pPr marL="285750" indent="-285750">
+              <a:spcBef>
+                <a:spcPts val="1200"/>
+              </a:spcBef>
+              <a:buFont typeface="Arial" panose="020B0604020202020204" pitchFamily="34" charset="0"/>
+              <a:buChar char="•"/>
+            </a:pPr>
+            <a:r>
+              <a:rPr dirty="0"/>
+              <a:t>Testified before Congress in 1968: "The evidence is OVERWHELMING that Earth is being visited."</a:t>
+            </a:r>
+          </a:p>
+          <a:p>
+            <a:pPr marL="285750" indent="-285750">
+              <a:spcBef>
+                <a:spcPts val="1200"/>
+              </a:spcBef>
+              <a:buFont typeface="Arial" panose="020B0604020202020204" pitchFamily="34" charset="0"/>
+              <a:buChar char="•"/>
+            </a:pPr>
+            <a:r>
+              <a:rPr dirty="0"/>
+              <a:t>Gave over 700 lectures at colleges and conferences. The original Roswell researcher. Natural causes at 84.</a:t>
+            </a:r>
+          </a:p>
+        </p:txBody>
+      </p:sp>
+      <p:pic>
+        <p:nvPicPr>
+          <p:cNvPr id="16" name="Picture 15" descr="Stanton_Friedman.jpg"/>
+          <p:cNvPicPr>
+            <a:picLocks noChangeAspect="1"/>
+          </p:cNvPicPr>
+          <p:nvPr/>
+        </p:nvPicPr>
+        <p:blipFill>
+          <a:blip r:embed="rId2"/>
+          <a:stretch>
+            <a:fillRect/>
+          </a:stretch>
+        </p:blipFill>
+        <p:spPr>
+          <a:xfrm>
+            <a:off x="8059838" y="1100088"/>
+            <a:ext cx="3162289" cy="3884876"/>
+          </a:xfrm>
+          <a:prstGeom prst="rect">
+            <a:avLst/>
+          </a:prstGeom>
+        </p:spPr>
+      </p:pic>
+    </p:spTree>
+  </p:cSld>
+  <p:clrMapOvr>
+    <a:masterClrMapping/>
+  </p:clrMapOvr>
+</p:sld>
+</file>
+
+<file path=ppt/slides/slide12.xml><?xml version="1.0" encoding="utf-8"?>
+<p:sld xmlns:a="http://schemas.openxmlformats.org/drawingml/2006/main" xmlns:r="http://schemas.openxmlformats.org/officeDocument/2006/relationships" xmlns:p="http://schemas.openxmlformats.org/presentationml/2006/main">
+  <p:cSld>
+    <p:spTree>
+      <p:nvGrpSpPr>
+        <p:cNvPr id="1" name=""/>
+        <p:cNvGrpSpPr/>
+        <p:nvPr/>
+      </p:nvGrpSpPr>
+      <p:grpSpPr>
+        <a:xfrm>
+          <a:off x="0" y="0"/>
+          <a:ext cx="0" cy="0"/>
+          <a:chOff x="0" y="0"/>
+          <a:chExt cx="0" cy="0"/>
+        </a:xfrm>
+      </p:grpSpPr>
+      <p:sp>
+        <p:nvSpPr>
+          <p:cNvPr id="15" name="TextBox 14">
+            <a:extLst>
+              <a:ext uri="{FF2B5EF4-FFF2-40B4-BE49-F238E27FC236}">
+                <a16:creationId xmlns:a16="http://schemas.microsoft.com/office/drawing/2014/main" id="{E478240E-251B-5BA6-3C45-7E6620400769}"/>
+              </a:ext>
+            </a:extLst>
+          </p:cNvPr>
+          <p:cNvSpPr txBox="1"/>
+          <p:nvPr/>
+        </p:nvSpPr>
+        <p:spPr>
+          <a:xfrm>
+            <a:off x="312432" y="1288262"/>
             <a:ext cx="6494294" cy="584775"/>
           </a:xfrm>
           <a:prstGeom prst="rect">
@@ -4665,7 +5198,7 @@
 </p:sld>
 </file>
 
-<file path=ppt/slides/slide12.xml><?xml version="1.0" encoding="utf-8"?>
+<file path=ppt/slides/slide13.xml><?xml version="1.0" encoding="utf-8"?>
 <p:sld xmlns:a="http://schemas.openxmlformats.org/drawingml/2006/main" xmlns:r="http://schemas.openxmlformats.org/officeDocument/2006/relationships" xmlns:p="http://schemas.openxmlformats.org/presentationml/2006/main">
   <p:cSld>
     <p:spTree>
@@ -5198,427 +5731,279 @@
       </p:grpSpPr>
       <p:sp>
         <p:nvSpPr>
-          <p:cNvPr id="15" name="TextBox 14">
-            <a:extLst>
-              <a:ext uri="{FF2B5EF4-FFF2-40B4-BE49-F238E27FC236}">
-                <a16:creationId xmlns:a16="http://schemas.microsoft.com/office/drawing/2014/main" id="{E478240E-251B-5BA6-3C45-7E6620400769}"/>
-              </a:ext>
-            </a:extLst>
-          </p:cNvPr>
-          <p:cNvSpPr txBox="1"/>
-          <p:nvPr/>
-        </p:nvSpPr>
-        <p:spPr>
-          <a:xfrm>
-            <a:off x="312432" y="1288262"/>
-            <a:ext cx="6494294" cy="584775"/>
-          </a:xfrm>
-          <a:prstGeom prst="rect">
-            <a:avLst/>
-          </a:prstGeom>
-          <a:solidFill>
-            <a:schemeClr val="bg1">
-              <a:alpha val="84400"/>
-            </a:schemeClr>
-          </a:solidFill>
-        </p:spPr>
-        <p:txBody>
-          <a:bodyPr wrap="square" rtlCol="0">
-            <a:spAutoFit/>
+          <p:cNvPr id="3" name="Content Placeholder 2">
+            <a:extLst>
+              <a:ext uri="{FF2B5EF4-FFF2-40B4-BE49-F238E27FC236}">
+                <a16:creationId xmlns:a16="http://schemas.microsoft.com/office/drawing/2014/main" id="{3613BEA2-2A1F-1374-02BD-E86A504A5BA9}"/>
+              </a:ext>
+            </a:extLst>
+          </p:cNvPr>
+          <p:cNvSpPr>
+            <a:spLocks noGrp="1"/>
+          </p:cNvSpPr>
+          <p:nvPr>
+            <p:ph idx="1"/>
+          </p:nvPr>
+        </p:nvSpPr>
+        <p:spPr>
+          <a:xfrm>
+            <a:off x="366409" y="113556"/>
+            <a:ext cx="10515600" cy="4351338"/>
+          </a:xfrm>
+        </p:spPr>
+        <p:txBody>
+          <a:bodyPr>
+            <a:normAutofit fontScale="25000" lnSpcReduction="20000"/>
           </a:bodyPr>
           <a:lstStyle/>
           <a:p>
             <a:r>
-              <a:rPr lang="en-US" sz="3200" b="1" dirty="0">
-                <a:solidFill>
-                  <a:schemeClr val="accent5"/>
-                </a:solidFill>
-              </a:rPr>
-              <a:t>Why / How they Nuno Loureiro:</a:t>
-            </a:r>
-          </a:p>
-        </p:txBody>
-      </p:sp>
-      <p:sp>
-        <p:nvSpPr>
-          <p:cNvPr id="3" name="Google Shape;170;p31">
-            <a:extLst>
-              <a:ext uri="{FF2B5EF4-FFF2-40B4-BE49-F238E27FC236}">
-                <a16:creationId xmlns:a16="http://schemas.microsoft.com/office/drawing/2014/main" id="{A4695FE5-0AA5-AB05-98B1-B5B8E3FA8CBE}"/>
-              </a:ext>
-            </a:extLst>
-          </p:cNvPr>
-          <p:cNvSpPr/>
-          <p:nvPr/>
-        </p:nvSpPr>
-        <p:spPr>
-          <a:xfrm>
-            <a:off x="191731" y="5732890"/>
-            <a:ext cx="3431270" cy="496760"/>
-          </a:xfrm>
-          <a:prstGeom prst="rect">
-            <a:avLst/>
-          </a:prstGeom>
-          <a:solidFill>
-            <a:schemeClr val="accent5"/>
-          </a:solidFill>
-          <a:ln>
-            <a:noFill/>
-          </a:ln>
-        </p:spPr>
-        <p:txBody>
-          <a:bodyPr spcFirstLastPara="1" wrap="square" lIns="91425" tIns="45700" rIns="91425" bIns="45700" anchor="ctr" anchorCtr="0">
-            <a:noAutofit/>
-          </a:bodyPr>
-          <a:lstStyle/>
-          <a:p>
-            <a:pPr marL="0" marR="0" lvl="0" indent="0" algn="ctr" rtl="0">
-              <a:lnSpc>
-                <a:spcPct val="100000"/>
-              </a:lnSpc>
-              <a:spcBef>
-                <a:spcPts val="0"/>
-              </a:spcBef>
-              <a:spcAft>
-                <a:spcPts val="0"/>
-              </a:spcAft>
-              <a:buClr>
-                <a:srgbClr val="000000"/>
-              </a:buClr>
-              <a:buSzPts val="1600"/>
-              <a:buFont typeface="Arial"/>
-              <a:buNone/>
-            </a:pPr>
-            <a:r>
-              <a:rPr lang="en-US" sz="3600" dirty="0">
-                <a:solidFill>
-                  <a:schemeClr val="lt1"/>
-                </a:solidFill>
-              </a:rPr>
-              <a:t>Read List Here:</a:t>
-            </a:r>
-            <a:endParaRPr sz="2000" b="0" i="0" u="none" strike="noStrike" cap="none" dirty="0">
-              <a:solidFill>
-                <a:srgbClr val="000000"/>
-              </a:solidFill>
-              <a:latin typeface="Arial"/>
-              <a:ea typeface="Arial"/>
-              <a:cs typeface="Arial"/>
-              <a:sym typeface="Arial"/>
-            </a:endParaRPr>
-          </a:p>
-        </p:txBody>
-      </p:sp>
-      <p:sp>
-        <p:nvSpPr>
-          <p:cNvPr id="5" name="Google Shape;170;p31">
-            <a:extLst>
-              <a:ext uri="{FF2B5EF4-FFF2-40B4-BE49-F238E27FC236}">
-                <a16:creationId xmlns:a16="http://schemas.microsoft.com/office/drawing/2014/main" id="{98132413-6ED2-8B36-74B6-3C503B1A4634}"/>
-              </a:ext>
-            </a:extLst>
-          </p:cNvPr>
-          <p:cNvSpPr/>
-          <p:nvPr/>
-        </p:nvSpPr>
-        <p:spPr>
-          <a:xfrm>
-            <a:off x="0" y="-31518"/>
-            <a:ext cx="12192000" cy="1131606"/>
-          </a:xfrm>
-          <a:prstGeom prst="rect">
-            <a:avLst/>
-          </a:prstGeom>
-          <a:solidFill>
-            <a:srgbClr val="C00000"/>
-          </a:solidFill>
-          <a:ln>
-            <a:noFill/>
-          </a:ln>
-        </p:spPr>
-        <p:txBody>
-          <a:bodyPr spcFirstLastPara="1" wrap="square" lIns="91425" tIns="45700" rIns="91425" bIns="45700" anchor="ctr" anchorCtr="0">
-            <a:noAutofit/>
-          </a:bodyPr>
-          <a:lstStyle/>
-          <a:p>
-            <a:pPr marL="0" marR="0" lvl="0" indent="0" rtl="0">
-              <a:lnSpc>
-                <a:spcPct val="100000"/>
-              </a:lnSpc>
-              <a:spcBef>
-                <a:spcPts val="0"/>
-              </a:spcBef>
-              <a:spcAft>
-                <a:spcPts val="0"/>
-              </a:spcAft>
-              <a:buClr>
-                <a:srgbClr val="000000"/>
-              </a:buClr>
-              <a:buSzPts val="1600"/>
-              <a:buFont typeface="Arial"/>
-              <a:buNone/>
-            </a:pPr>
-            <a:r>
-              <a:rPr lang="en-US" sz="4400" dirty="0">
-                <a:solidFill>
-                  <a:schemeClr val="lt1"/>
-                </a:solidFill>
-              </a:rPr>
-              <a:t> 40+ Murdered: Physics Breakthroughs Hidden</a:t>
-            </a:r>
-            <a:endParaRPr sz="2800" b="0" i="0" u="none" strike="noStrike" cap="none" dirty="0">
-              <a:solidFill>
-                <a:srgbClr val="000000"/>
-              </a:solidFill>
-              <a:latin typeface="Arial"/>
-              <a:ea typeface="Arial"/>
-              <a:cs typeface="Arial"/>
-              <a:sym typeface="Arial"/>
-            </a:endParaRPr>
-          </a:p>
-        </p:txBody>
-      </p:sp>
-      <p:sp>
-        <p:nvSpPr>
-          <p:cNvPr id="4" name="TextBox 3">
-            <a:extLst>
-              <a:ext uri="{FF2B5EF4-FFF2-40B4-BE49-F238E27FC236}">
-                <a16:creationId xmlns:a16="http://schemas.microsoft.com/office/drawing/2014/main" id="{50D7621F-9D36-7894-7117-9F831EF5EFA6}"/>
-              </a:ext>
-            </a:extLst>
-          </p:cNvPr>
-          <p:cNvSpPr txBox="1"/>
-          <p:nvPr/>
-        </p:nvSpPr>
-        <p:spPr>
-          <a:xfrm>
-            <a:off x="107300" y="6229650"/>
-            <a:ext cx="11685989" cy="461665"/>
-          </a:xfrm>
-          <a:prstGeom prst="rect">
-            <a:avLst/>
-          </a:prstGeom>
-          <a:solidFill>
-            <a:schemeClr val="bg1">
-              <a:alpha val="84400"/>
-            </a:schemeClr>
-          </a:solidFill>
-        </p:spPr>
-        <p:txBody>
-          <a:bodyPr wrap="square" rtlCol="0">
-            <a:spAutoFit/>
-          </a:bodyPr>
-          <a:lstStyle/>
-          <a:p>
-            <a:r>
-              <a:rPr lang="en-US" sz="2400" dirty="0"/>
-              <a:t>https://uapmurders.com/physics</a:t>
-            </a:r>
-          </a:p>
-        </p:txBody>
-      </p:sp>
-      <p:sp>
-        <p:nvSpPr>
-          <p:cNvPr id="7" name="Google Shape;170;p31">
-            <a:extLst>
-              <a:ext uri="{FF2B5EF4-FFF2-40B4-BE49-F238E27FC236}">
-                <a16:creationId xmlns:a16="http://schemas.microsoft.com/office/drawing/2014/main" id="{4B582382-76AA-B49E-C611-39A37CE591B9}"/>
-              </a:ext>
-            </a:extLst>
-          </p:cNvPr>
-          <p:cNvSpPr/>
-          <p:nvPr/>
-        </p:nvSpPr>
-        <p:spPr>
-          <a:xfrm>
-            <a:off x="7506336" y="4925186"/>
-            <a:ext cx="4550222" cy="869505"/>
-          </a:xfrm>
-          <a:prstGeom prst="rect">
-            <a:avLst/>
-          </a:prstGeom>
-          <a:solidFill>
-            <a:srgbClr val="C00000"/>
-          </a:solidFill>
-          <a:ln>
-            <a:noFill/>
-          </a:ln>
-        </p:spPr>
-        <p:txBody>
-          <a:bodyPr spcFirstLastPara="1" wrap="square" lIns="91425" tIns="45700" rIns="91425" bIns="45700" anchor="ctr" anchorCtr="0">
-            <a:noAutofit/>
-          </a:bodyPr>
-          <a:lstStyle/>
-          <a:p>
-            <a:pPr marL="0" marR="0" lvl="0" indent="0" algn="ctr" rtl="0">
-              <a:lnSpc>
-                <a:spcPct val="100000"/>
-              </a:lnSpc>
-              <a:spcBef>
-                <a:spcPts val="0"/>
-              </a:spcBef>
-              <a:spcAft>
-                <a:spcPts val="0"/>
-              </a:spcAft>
-              <a:buClr>
-                <a:srgbClr val="000000"/>
-              </a:buClr>
-              <a:buSzPts val="1600"/>
-              <a:buFont typeface="Arial"/>
-              <a:buNone/>
-            </a:pPr>
-            <a:r>
-              <a:rPr lang="en-US" sz="4800" dirty="0">
-                <a:solidFill>
-                  <a:schemeClr val="lt1"/>
-                </a:solidFill>
-              </a:rPr>
-              <a:t>Nuno Loureiro</a:t>
-            </a:r>
-            <a:endParaRPr sz="3200" b="0" i="0" u="none" strike="noStrike" cap="none" dirty="0">
-              <a:solidFill>
-                <a:srgbClr val="000000"/>
-              </a:solidFill>
-              <a:latin typeface="Arial"/>
-              <a:ea typeface="Arial"/>
-              <a:cs typeface="Arial"/>
-              <a:sym typeface="Arial"/>
-            </a:endParaRPr>
-          </a:p>
-        </p:txBody>
-      </p:sp>
-      <p:sp>
-        <p:nvSpPr>
-          <p:cNvPr id="10" name="TextBox 9">
-            <a:extLst>
-              <a:ext uri="{FF2B5EF4-FFF2-40B4-BE49-F238E27FC236}">
-                <a16:creationId xmlns:a16="http://schemas.microsoft.com/office/drawing/2014/main" id="{5FA0D8B2-6B55-D3DC-BCBB-6FEAD86B9E72}"/>
-              </a:ext>
-            </a:extLst>
-          </p:cNvPr>
-          <p:cNvSpPr txBox="1"/>
-          <p:nvPr/>
-        </p:nvSpPr>
-        <p:spPr>
-          <a:xfrm>
-            <a:off x="135442" y="1878198"/>
-            <a:ext cx="6987941" cy="3046988"/>
-          </a:xfrm>
-          <a:prstGeom prst="rect">
-            <a:avLst/>
-          </a:prstGeom>
-          <a:solidFill>
-            <a:schemeClr val="bg1">
-              <a:alpha val="84400"/>
-            </a:schemeClr>
-          </a:solidFill>
-        </p:spPr>
-        <p:txBody>
-          <a:bodyPr wrap="square" rtlCol="0">
-            <a:spAutoFit/>
-          </a:bodyPr>
-          <a:lstStyle/>
-          <a:p>
-            <a:pPr marL="285750" indent="-285750">
-              <a:spcBef>
-                <a:spcPts val="1200"/>
-              </a:spcBef>
-              <a:buFont typeface="Arial" panose="020B0604020202020204" pitchFamily="34" charset="0"/>
-              <a:buChar char="•"/>
-            </a:pPr>
-            <a:r>
-              <a:rPr dirty="0"/>
-              <a:t>SHOT DEAD at his home in Brookline, Massachusetts on December 15, 2025. He was 47.</a:t>
-            </a:r>
-          </a:p>
-          <a:p>
-            <a:pPr marL="285750" indent="-285750">
-              <a:spcBef>
-                <a:spcPts val="1200"/>
-              </a:spcBef>
-              <a:buFont typeface="Arial" panose="020B0604020202020204" pitchFamily="34" charset="0"/>
-              <a:buChar char="•"/>
-            </a:pPr>
-            <a:r>
-              <a:rPr dirty="0"/>
-              <a:t>Director of MIT's Plasma Science and Fusion Center — one of the world's LEADING fusion research facilities.</a:t>
-            </a:r>
-          </a:p>
-          <a:p>
-            <a:pPr marL="285750" indent="-285750">
-              <a:spcBef>
-                <a:spcPts val="1200"/>
-              </a:spcBef>
-              <a:buFont typeface="Arial" panose="020B0604020202020204" pitchFamily="34" charset="0"/>
-              <a:buChar char="•"/>
-            </a:pPr>
-            <a:r>
-              <a:rPr dirty="0"/>
-              <a:t>Received the Presidential Early Career Award from Joe Biden just months before his MURDER.</a:t>
-            </a:r>
-          </a:p>
-          <a:p>
-            <a:pPr marL="285750" indent="-285750">
-              <a:spcBef>
-                <a:spcPts val="1200"/>
-              </a:spcBef>
-              <a:buFont typeface="Arial" panose="020B0604020202020204" pitchFamily="34" charset="0"/>
-              <a:buChar char="•"/>
-            </a:pPr>
-            <a:r>
-              <a:rPr dirty="0"/>
-              <a:t>His breakthrough: proving that 50-year-old textbook physics on magnetic reconnection was FUNDAMENTALLY wrong.</a:t>
-            </a:r>
-          </a:p>
-          <a:p>
-            <a:pPr marL="285750" indent="-285750">
-              <a:spcBef>
-                <a:spcPts val="1200"/>
-              </a:spcBef>
-              <a:buFont typeface="Arial" panose="020B0604020202020204" pitchFamily="34" charset="0"/>
-              <a:buChar char="•"/>
-            </a:pPr>
-            <a:r>
-              <a:rPr dirty="0"/>
-              <a:t>Survived by his wife and children. Portuguese-born, Herman </a:t>
-            </a:r>
-            <a:r>
-              <a:rPr dirty="0" err="1"/>
-              <a:t>Feshbach</a:t>
-            </a:r>
-            <a:r>
-              <a:rPr dirty="0"/>
-              <a:t> Professor of Physics at MIT.</a:t>
-            </a:r>
-          </a:p>
-        </p:txBody>
-      </p:sp>
-      <p:pic>
-        <p:nvPicPr>
-          <p:cNvPr id="16" name="Picture 15" descr="Nuno_Loureiro.jpg"/>
-          <p:cNvPicPr>
-            <a:picLocks noChangeAspect="1"/>
-          </p:cNvPicPr>
-          <p:nvPr/>
-        </p:nvPicPr>
-        <p:blipFill>
-          <a:blip r:embed="rId2"/>
-          <a:stretch>
-            <a:fillRect/>
-          </a:stretch>
-        </p:blipFill>
-        <p:spPr>
-          <a:xfrm>
-            <a:off x="7051066" y="1100088"/>
-            <a:ext cx="5179834" cy="3884876"/>
-          </a:xfrm>
-          <a:prstGeom prst="rect">
-            <a:avLst/>
-          </a:prstGeom>
-        </p:spPr>
-      </p:pic>
+              <a:rPr lang="en-US" dirty="0"/>
+              <a:t> Amy Eskridge (~2020) — Antigravity researcher, officially ruled suicide but alleged</a:t>
+            </a:r>
+          </a:p>
+          <a:p>
+            <a:r>
+              <a:rPr lang="en-US" dirty="0"/>
+              <a:t>  murder via directed energy weapons per UK intelligence officer's testimony to Congress.</a:t>
+            </a:r>
+          </a:p>
+          <a:p>
+            <a:r>
+              <a:rPr lang="en-US" dirty="0"/>
+              <a:t>  Was planning to present novel antigravity findings that required NASA approval.</a:t>
+            </a:r>
+          </a:p>
+          <a:p>
+            <a:r>
+              <a:rPr lang="en-US" dirty="0"/>
+              <a:t>  - Mark McCandlish (2021) — Aerospace illustrator and Disclosure Project witness, gunshot</a:t>
+            </a:r>
+          </a:p>
+          <a:p>
+            <a:r>
+              <a:rPr lang="en-US" dirty="0"/>
+              <a:t>  wound ruled suicide. Was about to testify before the Senate Intelligence Committee about</a:t>
+            </a:r>
+          </a:p>
+          <a:p>
+            <a:r>
+              <a:rPr lang="en-US" dirty="0"/>
+              <a:t>  classified alien reproduction vehicle programs.</a:t>
+            </a:r>
+          </a:p>
+          <a:p>
+            <a:r>
+              <a:rPr lang="en-US" dirty="0"/>
+              <a:t>  - Karl Wolfe (2018) — USAF veteran with top secret crypto clearance, struck by</a:t>
+            </a:r>
+          </a:p>
+          <a:p>
+            <a:r>
+              <a:rPr lang="en-US" dirty="0"/>
+              <a:t>  tractor-trailer while cycling, no charges filed, driver never publicly identified.</a:t>
+            </a:r>
+          </a:p>
+          <a:p>
+            <a:r>
+              <a:rPr lang="en-US" dirty="0"/>
+              <a:t>  Testified under oath about artificial structures on the far side of the Moon in</a:t>
+            </a:r>
+          </a:p>
+          <a:p>
+            <a:r>
+              <a:rPr lang="en-US" dirty="0"/>
+              <a:t>  classified NASA imagery.</a:t>
+            </a:r>
+          </a:p>
+          <a:p>
+            <a:r>
+              <a:rPr lang="en-US" dirty="0"/>
+              <a:t>  - Jeffrey Bradstreet (2015) — Gunshot wound to chest, found in a river three days after</a:t>
+            </a:r>
+          </a:p>
+          <a:p>
+            <a:r>
+              <a:rPr lang="en-US" dirty="0"/>
+              <a:t>  the FDA raided his clinic, ruled suicide. </a:t>
+            </a:r>
+            <a:r>
+              <a:rPr lang="en-US" dirty="0" err="1"/>
+              <a:t>GcMAF</a:t>
+            </a:r>
+            <a:r>
+              <a:rPr lang="en-US" dirty="0"/>
+              <a:t>/</a:t>
+            </a:r>
+            <a:r>
+              <a:rPr lang="en-US" dirty="0" err="1"/>
+              <a:t>nagalase</a:t>
+            </a:r>
+            <a:r>
+              <a:rPr lang="en-US" dirty="0"/>
+              <a:t> researcher who testified before</a:t>
+            </a:r>
+          </a:p>
+          <a:p>
+            <a:r>
+              <a:rPr lang="en-US" dirty="0"/>
+              <a:t>  Congress on vaccine safety.</a:t>
+            </a:r>
+          </a:p>
+          <a:p>
+            <a:r>
+              <a:rPr lang="en-US" dirty="0"/>
+              <a:t>  - Mitchell Gaynor (2015) — Found dead in woods near his country home, ruled suicide.</a:t>
+            </a:r>
+          </a:p>
+          <a:p>
+            <a:r>
+              <a:rPr lang="en-US" dirty="0"/>
+              <a:t>  Cornell-affiliated oncologist pioneering integrative cancer therapy; 11th holistic doctor</a:t>
+            </a:r>
+          </a:p>
+          <a:p>
+            <a:r>
+              <a:rPr lang="en-US" dirty="0"/>
+              <a:t>   to die in a 90-day wave.</a:t>
+            </a:r>
+          </a:p>
+          <a:p>
+            <a:r>
+              <a:rPr lang="en-US" dirty="0"/>
+              <a:t>  - Nicholas Gonzalez (2015) — Apparent cardiac event but autopsy did NOT confirm heart</a:t>
+            </a:r>
+          </a:p>
+          <a:p>
+            <a:r>
+              <a:rPr lang="en-US" dirty="0"/>
+              <a:t>  attack, final cause never publicly clarified. Cornell-trained physician whose</a:t>
+            </a:r>
+          </a:p>
+          <a:p>
+            <a:r>
+              <a:rPr lang="en-US" dirty="0"/>
+              <a:t>  enzyme-based cancer protocol threatened pharmaceutical industry.</a:t>
+            </a:r>
+          </a:p>
+          <a:p>
+            <a:r>
+              <a:rPr lang="en-US" dirty="0"/>
+              <a:t>  - Timothy Cunningham (2018) — CDC epidemiologist found in the Chattahoochee River seven</a:t>
+            </a:r>
+          </a:p>
+          <a:p>
+            <a:r>
+              <a:rPr lang="en-US" dirty="0"/>
+              <a:t>  weeks after vanishing, ruled suicide. Left all belongings behind; police admitted they</a:t>
+            </a:r>
+          </a:p>
+          <a:p>
+            <a:r>
+              <a:rPr lang="en-US" dirty="0"/>
+              <a:t>  could not explain how his body got into the river.</a:t>
+            </a:r>
+          </a:p>
+          <a:p>
+            <a:r>
+              <a:rPr lang="en-US" dirty="0"/>
+              <a:t>  - Fred Bell (2011) — Nuclear physicist who died within 48 hours of filming an interview</a:t>
+            </a:r>
+          </a:p>
+          <a:p>
+            <a:r>
+              <a:rPr lang="en-US" dirty="0"/>
+              <a:t>  with Jesse Ventura about directed energy weapons and classified programs. Official cause</a:t>
+            </a:r>
+          </a:p>
+          <a:p>
+            <a:r>
+              <a:rPr lang="en-US" dirty="0"/>
+              <a:t>  was heart disease.</a:t>
+            </a:r>
+          </a:p>
+          <a:p>
+            <a:r>
+              <a:rPr lang="en-US" dirty="0"/>
+              <a:t>  - Monica Jacinto Reza (2025) — Vanished hiking, no trace found, declared dead four days</a:t>
+            </a:r>
+          </a:p>
+          <a:p>
+            <a:r>
+              <a:rPr lang="en-US" dirty="0"/>
+              <a:t>  later while search-and-rescue was still active. Co-inventor of the </a:t>
+            </a:r>
+            <a:r>
+              <a:rPr lang="en-US" dirty="0" err="1"/>
+              <a:t>Mondaloy</a:t>
+            </a:r>
+            <a:r>
+              <a:rPr lang="en-US" dirty="0"/>
+              <a:t> superalloy</a:t>
+            </a:r>
+          </a:p>
+          <a:p>
+            <a:r>
+              <a:rPr lang="en-US" dirty="0"/>
+              <a:t>  critical to national security rocket programs.</a:t>
+            </a:r>
+          </a:p>
+          <a:p>
+            <a:r>
+              <a:rPr lang="en-US" dirty="0"/>
+              <a:t>  - William McCasland (2026) — Retired USAF Major General, vanished from his Albuquerque</a:t>
+            </a:r>
+          </a:p>
+          <a:p>
+            <a:r>
+              <a:rPr lang="en-US" dirty="0"/>
+              <a:t>  home, FBI involved. Commanded Air Force Research Laboratory ($4.4B portfolio) spanning</a:t>
+            </a:r>
+          </a:p>
+          <a:p>
+            <a:r>
+              <a:rPr lang="en-US" dirty="0"/>
+              <a:t>  plasma science, directed energy, and advanced propulsion; connected to UAP disclosure via</a:t>
+            </a:r>
+          </a:p>
+          <a:p>
+            <a:r>
+              <a:rPr lang="en-US" dirty="0"/>
+              <a:t>   DeLonge/Podesta WikiLeaks emails.</a:t>
+            </a:r>
+          </a:p>
+          <a:p>
+            <a:r>
+              <a:rPr lang="en-US" dirty="0"/>
+              <a:t>  - Jason Thomas (2025) — Novartis assistant director, left home without phone, wallet, or</a:t>
+            </a:r>
+          </a:p>
+          <a:p>
+            <a:r>
+              <a:rPr lang="en-US" dirty="0"/>
+              <a:t>  coat; body found in a frozen lake three months later. Vanished three days before an MIT</a:t>
+            </a:r>
+          </a:p>
+          <a:p>
+            <a:r>
+              <a:rPr lang="en-US" dirty="0"/>
+              <a:t>  physicist was shot dead 10 miles away; part of the five-scientist cluster named by Rep.</a:t>
+            </a:r>
+          </a:p>
+          <a:p>
+            <a:r>
+              <a:rPr lang="en-US" dirty="0"/>
+              <a:t>  Tim Burchett.</a:t>
+            </a:r>
+          </a:p>
+        </p:txBody>
+      </p:sp>
     </p:spTree>
+    <p:extLst>
+      <p:ext uri="{BB962C8B-B14F-4D97-AF65-F5344CB8AC3E}">
+        <p14:creationId xmlns:p14="http://schemas.microsoft.com/office/powerpoint/2010/main" val="645651657"/>
+      </p:ext>
+    </p:extLst>
   </p:cSld>
   <p:clrMapOvr>
     <a:masterClrMapping/>
@@ -5681,7 +6066,7 @@
                   <a:schemeClr val="accent5"/>
                 </a:solidFill>
               </a:rPr>
-              <a:t>Why / How they Dorothy Kilgallen:</a:t>
+              <a:t>Why / How they Nuno Loureiro:</a:t>
             </a:r>
           </a:p>
         </p:txBody>
@@ -5916,14 +6301,14 @@
               <a:buNone/>
             </a:pPr>
             <a:r>
-              <a:rPr lang="en-US" sz="4400" dirty="0">
+              <a:rPr lang="en-US" sz="4800" dirty="0">
                 <a:solidFill>
                   <a:schemeClr val="lt1"/>
                 </a:solidFill>
               </a:rPr>
-              <a:t>Dorothy Kilgallen</a:t>
-            </a:r>
-            <a:endParaRPr sz="2800" b="0" i="0" u="none" strike="noStrike" cap="none" dirty="0">
+              <a:t>Nuno Loureiro</a:t>
+            </a:r>
+            <a:endParaRPr sz="3200" b="0" i="0" u="none" strike="noStrike" cap="none" dirty="0">
               <a:solidFill>
                 <a:srgbClr val="000000"/>
               </a:solidFill>
@@ -5937,95 +6322,25 @@
       </p:sp>
       <p:sp>
         <p:nvSpPr>
-          <p:cNvPr id="8" name="Google Shape;170;p31">
-            <a:extLst>
-              <a:ext uri="{FF2B5EF4-FFF2-40B4-BE49-F238E27FC236}">
-                <a16:creationId xmlns:a16="http://schemas.microsoft.com/office/drawing/2014/main" id="{D328ABDE-E232-3EB7-C3F2-B4BB7B64262F}"/>
-              </a:ext>
-            </a:extLst>
-          </p:cNvPr>
-          <p:cNvSpPr/>
+          <p:cNvPr id="10" name="TextBox 9">
+            <a:extLst>
+              <a:ext uri="{FF2B5EF4-FFF2-40B4-BE49-F238E27FC236}">
+                <a16:creationId xmlns:a16="http://schemas.microsoft.com/office/drawing/2014/main" id="{5FA0D8B2-6B55-D3DC-BCBB-6FEAD86B9E72}"/>
+              </a:ext>
+            </a:extLst>
+          </p:cNvPr>
+          <p:cNvSpPr txBox="1"/>
           <p:nvPr/>
         </p:nvSpPr>
         <p:spPr>
           <a:xfrm>
-            <a:off x="7526107" y="5681420"/>
-            <a:ext cx="4550222" cy="548230"/>
+            <a:off x="135442" y="1878198"/>
+            <a:ext cx="6987941" cy="3046988"/>
           </a:xfrm>
           <a:prstGeom prst="rect">
             <a:avLst/>
           </a:prstGeom>
           <a:solidFill>
-            <a:srgbClr val="C00000"/>
-          </a:solidFill>
-          <a:ln>
-            <a:noFill/>
-          </a:ln>
-        </p:spPr>
-        <p:txBody>
-          <a:bodyPr spcFirstLastPara="1" wrap="square" lIns="91425" tIns="45700" rIns="91425" bIns="45700" anchor="ctr" anchorCtr="0">
-            <a:noAutofit/>
-          </a:bodyPr>
-          <a:lstStyle/>
-          <a:p>
-            <a:pPr marL="0" marR="0" lvl="0" indent="0" algn="ctr" rtl="0">
-              <a:lnSpc>
-                <a:spcPct val="100000"/>
-              </a:lnSpc>
-              <a:spcBef>
-                <a:spcPts val="0"/>
-              </a:spcBef>
-              <a:spcAft>
-                <a:spcPts val="0"/>
-              </a:spcAft>
-              <a:buClr>
-                <a:srgbClr val="000000"/>
-              </a:buClr>
-              <a:buSzPts val="1600"/>
-              <a:buFont typeface="Arial"/>
-              <a:buNone/>
-            </a:pPr>
-            <a:r>
-              <a:rPr lang="en-US" sz="3600" dirty="0">
-                <a:solidFill>
-                  <a:schemeClr val="lt1"/>
-                </a:solidFill>
-              </a:rPr>
-              <a:t>Dead at Age 52</a:t>
-            </a:r>
-            <a:endParaRPr sz="2000" b="0" i="0" u="none" strike="noStrike" cap="none" dirty="0">
-              <a:solidFill>
-                <a:srgbClr val="000000"/>
-              </a:solidFill>
-              <a:latin typeface="Arial"/>
-              <a:ea typeface="Arial"/>
-              <a:cs typeface="Arial"/>
-              <a:sym typeface="Arial"/>
-            </a:endParaRPr>
-          </a:p>
-        </p:txBody>
-      </p:sp>
-      <p:sp>
-        <p:nvSpPr>
-          <p:cNvPr id="10" name="TextBox 9">
-            <a:extLst>
-              <a:ext uri="{FF2B5EF4-FFF2-40B4-BE49-F238E27FC236}">
-                <a16:creationId xmlns:a16="http://schemas.microsoft.com/office/drawing/2014/main" id="{5FA0D8B2-6B55-D3DC-BCBB-6FEAD86B9E72}"/>
-              </a:ext>
-            </a:extLst>
-          </p:cNvPr>
-          <p:cNvSpPr txBox="1"/>
-          <p:nvPr/>
-        </p:nvSpPr>
-        <p:spPr>
-          <a:xfrm>
-            <a:off x="312431" y="2175372"/>
-            <a:ext cx="6987941" cy="3046988"/>
-          </a:xfrm>
-          <a:prstGeom prst="rect">
-            <a:avLst/>
-          </a:prstGeom>
-          <a:solidFill>
             <a:schemeClr val="bg1">
               <a:alpha val="84400"/>
             </a:schemeClr>
@@ -6045,7 +6360,8 @@
               <a:buChar char="•"/>
             </a:pPr>
             <a:r>
-              <a:t>DEAD at 52 — found in her Manhattan townhouse. Ruled "CIRCUMSTANCES UNDETERMINED" by the medical examiner.</a:t>
+              <a:rPr dirty="0"/>
+              <a:t>SHOT DEAD at his home in Brookline, Massachusetts on December 15, 2025. He was 47.</a:t>
             </a:r>
           </a:p>
           <a:p>
@@ -6057,7 +6373,8 @@
               <a:buChar char="•"/>
             </a:pPr>
             <a:r>
-              <a:t>America's most famous female journalist — 20 MILLION readers, CBS star of What's My Line? for 15 years.</a:t>
+              <a:rPr dirty="0"/>
+              <a:t>Director of MIT's Plasma Science and Fusion Center — one of the world's LEADING fusion research facilities.</a:t>
             </a:r>
           </a:p>
           <a:p>
@@ -6069,7 +6386,8 @@
               <a:buChar char="•"/>
             </a:pPr>
             <a:r>
-              <a:t>In 1955 she published a front-page story: a British Cabinet official confirmed UFOs were REAL and had been examined.</a:t>
+              <a:rPr dirty="0"/>
+              <a:t>Received the Presidential Early Career Award from Joe Biden just months before his MURDER.</a:t>
             </a:r>
           </a:p>
           <a:p>
@@ -6081,7 +6399,8 @@
               <a:buChar char="•"/>
             </a:pPr>
             <a:r>
-              <a:t>She was also investigating the JFK ASSASSINATION and had a private interview with Jack Ruby.</a:t>
+              <a:rPr dirty="0"/>
+              <a:t>His breakthrough: proving that 50-year-old textbook physics on magnetic reconnection was FUNDAMENTALLY wrong.</a:t>
             </a:r>
           </a:p>
           <a:p>
@@ -6093,14 +6412,23 @@
               <a:buChar char="•"/>
             </a:pPr>
             <a:r>
-              <a:t>Told her lawyer: "I'm going to break the real story and have the biggest SCOOP of the century." She never did.</a:t>
+              <a:rPr dirty="0"/>
+              <a:t>Survived by his wife and children. Portuguese-born, Herman </a:t>
+            </a:r>
+            <a:r>
+              <a:rPr dirty="0" err="1"/>
+              <a:t>Feshbach</a:t>
+            </a:r>
+            <a:r>
+              <a:rPr dirty="0"/>
+              <a:t> Professor of Physics at MIT.</a:t>
             </a:r>
           </a:p>
         </p:txBody>
       </p:sp>
       <p:pic>
         <p:nvPicPr>
-          <p:cNvPr id="16" name="Picture 15" descr="Dorothy_Kilgallen.jpg"/>
+          <p:cNvPr id="16" name="Picture 15" descr="Nuno_Loureiro.jpg"/>
           <p:cNvPicPr>
             <a:picLocks noChangeAspect="1"/>
           </p:cNvPicPr>
@@ -6114,8 +6442,8 @@
         </p:blipFill>
         <p:spPr>
           <a:xfrm>
-            <a:off x="7682880" y="1100088"/>
-            <a:ext cx="3916205" cy="3884876"/>
+            <a:off x="7051066" y="1100088"/>
+            <a:ext cx="5179834" cy="3884876"/>
           </a:xfrm>
           <a:prstGeom prst="rect">
             <a:avLst/>
@@ -6185,7 +6513,7 @@
                   <a:schemeClr val="accent5"/>
                 </a:solidFill>
               </a:rPr>
-              <a:t>Why / How they Karl Wolfe:</a:t>
+              <a:t>Why / How they Dorothy Kilgallen:</a:t>
             </a:r>
           </a:p>
         </p:txBody>
@@ -6420,14 +6748,14 @@
               <a:buNone/>
             </a:pPr>
             <a:r>
-              <a:rPr lang="en-US" sz="4800" dirty="0">
+              <a:rPr lang="en-US" sz="4400" dirty="0">
                 <a:solidFill>
                   <a:schemeClr val="lt1"/>
                 </a:solidFill>
               </a:rPr>
-              <a:t>Karl Wolfe</a:t>
-            </a:r>
-            <a:endParaRPr sz="3200" b="0" i="0" u="none" strike="noStrike" cap="none" dirty="0">
+              <a:t>Dorothy Kilgallen</a:t>
+            </a:r>
+            <a:endParaRPr sz="2800" b="0" i="0" u="none" strike="noStrike" cap="none" dirty="0">
               <a:solidFill>
                 <a:srgbClr val="000000"/>
               </a:solidFill>
@@ -6495,7 +6823,7 @@
                   <a:schemeClr val="lt1"/>
                 </a:solidFill>
               </a:rPr>
-              <a:t>Dead at Age 74</a:t>
+              <a:t>Dead at Age 52</a:t>
             </a:r>
             <a:endParaRPr sz="2000" b="0" i="0" u="none" strike="noStrike" cap="none" dirty="0">
               <a:solidFill>
@@ -6549,7 +6877,7 @@
               <a:buChar char="•"/>
             </a:pPr>
             <a:r>
-              <a:t>STRUCK AND KILLED by a tractor-trailer while cycling on October 10, 2018. He was 74.</a:t>
+              <a:t>DEAD at 52 — found in her Manhattan townhouse. Ruled "CIRCUMSTANCES UNDETERMINED" by the medical examiner.</a:t>
             </a:r>
           </a:p>
           <a:p>
@@ -6561,7 +6889,7 @@
               <a:buChar char="•"/>
             </a:pPr>
             <a:r>
-              <a:t>Former Air Force sergeant with TOP SECRET CRYPTO clearance who testified about structures on the far side of the MOON.</a:t>
+              <a:t>America's most famous female journalist — 20 MILLION readers, CBS star of What's My Line? for 15 years.</a:t>
             </a:r>
           </a:p>
           <a:p>
@@ -6573,7 +6901,7 @@
               <a:buChar char="•"/>
             </a:pPr>
             <a:r>
-              <a:t>At the 2001 Disclosure Project, he swore under oath that he was shown NASA Lunar Orbiter photos of ARTIFICIAL structures.</a:t>
+              <a:t>In 1955 she published a front-page story: a British Cabinet official confirmed UFOs were REAL and had been examined.</a:t>
             </a:r>
           </a:p>
           <a:p>
@@ -6585,7 +6913,7 @@
               <a:buChar char="•"/>
             </a:pPr>
             <a:r>
-              <a:t>Worked as a precision electronics technician at Langley Air Force Base processing CLASSIFIED imagery.</a:t>
+              <a:t>She was also investigating the JFK ASSASSINATION and had a private interview with Jack Ruby.</a:t>
             </a:r>
           </a:p>
           <a:p>
@@ -6597,14 +6925,14 @@
               <a:buChar char="•"/>
             </a:pPr>
             <a:r>
-              <a:t>Born and raised in Lansing, New York — killed in Lansing, New York. Youngest of seven children.</a:t>
+              <a:t>Told her lawyer: "I'm going to break the real story and have the biggest SCOOP of the century." She never did.</a:t>
             </a:r>
           </a:p>
         </p:txBody>
       </p:sp>
       <p:pic>
         <p:nvPicPr>
-          <p:cNvPr id="16" name="Picture 15" descr="Karl_Wolfe.jpg"/>
+          <p:cNvPr id="16" name="Picture 15" descr="Dorothy_Kilgallen.jpg"/>
           <p:cNvPicPr>
             <a:picLocks noChangeAspect="1"/>
           </p:cNvPicPr>
@@ -6618,8 +6946,8 @@
         </p:blipFill>
         <p:spPr>
           <a:xfrm>
-            <a:off x="8459451" y="1100088"/>
-            <a:ext cx="2363063" cy="3884876"/>
+            <a:off x="7682880" y="1100088"/>
+            <a:ext cx="3916205" cy="3884876"/>
           </a:xfrm>
           <a:prstGeom prst="rect">
             <a:avLst/>
@@ -6651,15 +6979,464 @@
           <a:chExt cx="0" cy="0"/>
         </a:xfrm>
       </p:grpSpPr>
+      <p:sp>
+        <p:nvSpPr>
+          <p:cNvPr id="15" name="TextBox 14">
+            <a:extLst>
+              <a:ext uri="{FF2B5EF4-FFF2-40B4-BE49-F238E27FC236}">
+                <a16:creationId xmlns:a16="http://schemas.microsoft.com/office/drawing/2014/main" id="{E478240E-251B-5BA6-3C45-7E6620400769}"/>
+              </a:ext>
+            </a:extLst>
+          </p:cNvPr>
+          <p:cNvSpPr txBox="1"/>
+          <p:nvPr/>
+        </p:nvSpPr>
+        <p:spPr>
+          <a:xfrm>
+            <a:off x="312432" y="1288262"/>
+            <a:ext cx="6494294" cy="584775"/>
+          </a:xfrm>
+          <a:prstGeom prst="rect">
+            <a:avLst/>
+          </a:prstGeom>
+          <a:solidFill>
+            <a:schemeClr val="bg1">
+              <a:alpha val="84400"/>
+            </a:schemeClr>
+          </a:solidFill>
+        </p:spPr>
+        <p:txBody>
+          <a:bodyPr wrap="square" rtlCol="0">
+            <a:spAutoFit/>
+          </a:bodyPr>
+          <a:lstStyle/>
+          <a:p>
+            <a:r>
+              <a:rPr lang="en-US" sz="3200" b="1" dirty="0">
+                <a:solidFill>
+                  <a:schemeClr val="accent5"/>
+                </a:solidFill>
+              </a:rPr>
+              <a:t>Why / How they Karl Wolfe:</a:t>
+            </a:r>
+          </a:p>
+        </p:txBody>
+      </p:sp>
+      <p:sp>
+        <p:nvSpPr>
+          <p:cNvPr id="3" name="Google Shape;170;p31">
+            <a:extLst>
+              <a:ext uri="{FF2B5EF4-FFF2-40B4-BE49-F238E27FC236}">
+                <a16:creationId xmlns:a16="http://schemas.microsoft.com/office/drawing/2014/main" id="{A4695FE5-0AA5-AB05-98B1-B5B8E3FA8CBE}"/>
+              </a:ext>
+            </a:extLst>
+          </p:cNvPr>
+          <p:cNvSpPr/>
+          <p:nvPr/>
+        </p:nvSpPr>
+        <p:spPr>
+          <a:xfrm>
+            <a:off x="191731" y="5732890"/>
+            <a:ext cx="3431270" cy="496760"/>
+          </a:xfrm>
+          <a:prstGeom prst="rect">
+            <a:avLst/>
+          </a:prstGeom>
+          <a:solidFill>
+            <a:schemeClr val="accent5"/>
+          </a:solidFill>
+          <a:ln>
+            <a:noFill/>
+          </a:ln>
+        </p:spPr>
+        <p:txBody>
+          <a:bodyPr spcFirstLastPara="1" wrap="square" lIns="91425" tIns="45700" rIns="91425" bIns="45700" anchor="ctr" anchorCtr="0">
+            <a:noAutofit/>
+          </a:bodyPr>
+          <a:lstStyle/>
+          <a:p>
+            <a:pPr marL="0" marR="0" lvl="0" indent="0" algn="ctr" rtl="0">
+              <a:lnSpc>
+                <a:spcPct val="100000"/>
+              </a:lnSpc>
+              <a:spcBef>
+                <a:spcPts val="0"/>
+              </a:spcBef>
+              <a:spcAft>
+                <a:spcPts val="0"/>
+              </a:spcAft>
+              <a:buClr>
+                <a:srgbClr val="000000"/>
+              </a:buClr>
+              <a:buSzPts val="1600"/>
+              <a:buFont typeface="Arial"/>
+              <a:buNone/>
+            </a:pPr>
+            <a:r>
+              <a:rPr lang="en-US" sz="3600" dirty="0">
+                <a:solidFill>
+                  <a:schemeClr val="lt1"/>
+                </a:solidFill>
+              </a:rPr>
+              <a:t>Read List Here:</a:t>
+            </a:r>
+            <a:endParaRPr sz="2000" b="0" i="0" u="none" strike="noStrike" cap="none" dirty="0">
+              <a:solidFill>
+                <a:srgbClr val="000000"/>
+              </a:solidFill>
+              <a:latin typeface="Arial"/>
+              <a:ea typeface="Arial"/>
+              <a:cs typeface="Arial"/>
+              <a:sym typeface="Arial"/>
+            </a:endParaRPr>
+          </a:p>
+        </p:txBody>
+      </p:sp>
+      <p:sp>
+        <p:nvSpPr>
+          <p:cNvPr id="5" name="Google Shape;170;p31">
+            <a:extLst>
+              <a:ext uri="{FF2B5EF4-FFF2-40B4-BE49-F238E27FC236}">
+                <a16:creationId xmlns:a16="http://schemas.microsoft.com/office/drawing/2014/main" id="{98132413-6ED2-8B36-74B6-3C503B1A4634}"/>
+              </a:ext>
+            </a:extLst>
+          </p:cNvPr>
+          <p:cNvSpPr/>
+          <p:nvPr/>
+        </p:nvSpPr>
+        <p:spPr>
+          <a:xfrm>
+            <a:off x="0" y="-31518"/>
+            <a:ext cx="12192000" cy="1131606"/>
+          </a:xfrm>
+          <a:prstGeom prst="rect">
+            <a:avLst/>
+          </a:prstGeom>
+          <a:solidFill>
+            <a:srgbClr val="C00000"/>
+          </a:solidFill>
+          <a:ln>
+            <a:noFill/>
+          </a:ln>
+        </p:spPr>
+        <p:txBody>
+          <a:bodyPr spcFirstLastPara="1" wrap="square" lIns="91425" tIns="45700" rIns="91425" bIns="45700" anchor="ctr" anchorCtr="0">
+            <a:noAutofit/>
+          </a:bodyPr>
+          <a:lstStyle/>
+          <a:p>
+            <a:pPr marL="0" marR="0" lvl="0" indent="0" rtl="0">
+              <a:lnSpc>
+                <a:spcPct val="100000"/>
+              </a:lnSpc>
+              <a:spcBef>
+                <a:spcPts val="0"/>
+              </a:spcBef>
+              <a:spcAft>
+                <a:spcPts val="0"/>
+              </a:spcAft>
+              <a:buClr>
+                <a:srgbClr val="000000"/>
+              </a:buClr>
+              <a:buSzPts val="1600"/>
+              <a:buFont typeface="Arial"/>
+              <a:buNone/>
+            </a:pPr>
+            <a:r>
+              <a:rPr lang="en-US" sz="4400" dirty="0">
+                <a:solidFill>
+                  <a:schemeClr val="lt1"/>
+                </a:solidFill>
+              </a:rPr>
+              <a:t> 40+ Murdered: Physics Breakthroughs Hidden</a:t>
+            </a:r>
+            <a:endParaRPr sz="2800" b="0" i="0" u="none" strike="noStrike" cap="none" dirty="0">
+              <a:solidFill>
+                <a:srgbClr val="000000"/>
+              </a:solidFill>
+              <a:latin typeface="Arial"/>
+              <a:ea typeface="Arial"/>
+              <a:cs typeface="Arial"/>
+              <a:sym typeface="Arial"/>
+            </a:endParaRPr>
+          </a:p>
+        </p:txBody>
+      </p:sp>
+      <p:sp>
+        <p:nvSpPr>
+          <p:cNvPr id="4" name="TextBox 3">
+            <a:extLst>
+              <a:ext uri="{FF2B5EF4-FFF2-40B4-BE49-F238E27FC236}">
+                <a16:creationId xmlns:a16="http://schemas.microsoft.com/office/drawing/2014/main" id="{50D7621F-9D36-7894-7117-9F831EF5EFA6}"/>
+              </a:ext>
+            </a:extLst>
+          </p:cNvPr>
+          <p:cNvSpPr txBox="1"/>
+          <p:nvPr/>
+        </p:nvSpPr>
+        <p:spPr>
+          <a:xfrm>
+            <a:off x="107300" y="6229650"/>
+            <a:ext cx="11685989" cy="461665"/>
+          </a:xfrm>
+          <a:prstGeom prst="rect">
+            <a:avLst/>
+          </a:prstGeom>
+          <a:solidFill>
+            <a:schemeClr val="bg1">
+              <a:alpha val="84400"/>
+            </a:schemeClr>
+          </a:solidFill>
+        </p:spPr>
+        <p:txBody>
+          <a:bodyPr wrap="square" rtlCol="0">
+            <a:spAutoFit/>
+          </a:bodyPr>
+          <a:lstStyle/>
+          <a:p>
+            <a:r>
+              <a:rPr lang="en-US" sz="2400" dirty="0"/>
+              <a:t>https://uapmurders.com/physics</a:t>
+            </a:r>
+          </a:p>
+        </p:txBody>
+      </p:sp>
+      <p:sp>
+        <p:nvSpPr>
+          <p:cNvPr id="7" name="Google Shape;170;p31">
+            <a:extLst>
+              <a:ext uri="{FF2B5EF4-FFF2-40B4-BE49-F238E27FC236}">
+                <a16:creationId xmlns:a16="http://schemas.microsoft.com/office/drawing/2014/main" id="{4B582382-76AA-B49E-C611-39A37CE591B9}"/>
+              </a:ext>
+            </a:extLst>
+          </p:cNvPr>
+          <p:cNvSpPr/>
+          <p:nvPr/>
+        </p:nvSpPr>
+        <p:spPr>
+          <a:xfrm>
+            <a:off x="7506336" y="4925186"/>
+            <a:ext cx="4550222" cy="869505"/>
+          </a:xfrm>
+          <a:prstGeom prst="rect">
+            <a:avLst/>
+          </a:prstGeom>
+          <a:solidFill>
+            <a:srgbClr val="C00000"/>
+          </a:solidFill>
+          <a:ln>
+            <a:noFill/>
+          </a:ln>
+        </p:spPr>
+        <p:txBody>
+          <a:bodyPr spcFirstLastPara="1" wrap="square" lIns="91425" tIns="45700" rIns="91425" bIns="45700" anchor="ctr" anchorCtr="0">
+            <a:noAutofit/>
+          </a:bodyPr>
+          <a:lstStyle/>
+          <a:p>
+            <a:pPr marL="0" marR="0" lvl="0" indent="0" algn="ctr" rtl="0">
+              <a:lnSpc>
+                <a:spcPct val="100000"/>
+              </a:lnSpc>
+              <a:spcBef>
+                <a:spcPts val="0"/>
+              </a:spcBef>
+              <a:spcAft>
+                <a:spcPts val="0"/>
+              </a:spcAft>
+              <a:buClr>
+                <a:srgbClr val="000000"/>
+              </a:buClr>
+              <a:buSzPts val="1600"/>
+              <a:buFont typeface="Arial"/>
+              <a:buNone/>
+            </a:pPr>
+            <a:r>
+              <a:rPr lang="en-US" sz="4800" dirty="0">
+                <a:solidFill>
+                  <a:schemeClr val="lt1"/>
+                </a:solidFill>
+              </a:rPr>
+              <a:t>Karl Wolfe</a:t>
+            </a:r>
+            <a:endParaRPr sz="3200" b="0" i="0" u="none" strike="noStrike" cap="none" dirty="0">
+              <a:solidFill>
+                <a:srgbClr val="000000"/>
+              </a:solidFill>
+              <a:latin typeface="Arial"/>
+              <a:ea typeface="Arial"/>
+              <a:cs typeface="Arial"/>
+              <a:sym typeface="Arial"/>
+            </a:endParaRPr>
+          </a:p>
+        </p:txBody>
+      </p:sp>
+      <p:sp>
+        <p:nvSpPr>
+          <p:cNvPr id="8" name="Google Shape;170;p31">
+            <a:extLst>
+              <a:ext uri="{FF2B5EF4-FFF2-40B4-BE49-F238E27FC236}">
+                <a16:creationId xmlns:a16="http://schemas.microsoft.com/office/drawing/2014/main" id="{D328ABDE-E232-3EB7-C3F2-B4BB7B64262F}"/>
+              </a:ext>
+            </a:extLst>
+          </p:cNvPr>
+          <p:cNvSpPr/>
+          <p:nvPr/>
+        </p:nvSpPr>
+        <p:spPr>
+          <a:xfrm>
+            <a:off x="7526107" y="5681420"/>
+            <a:ext cx="4550222" cy="548230"/>
+          </a:xfrm>
+          <a:prstGeom prst="rect">
+            <a:avLst/>
+          </a:prstGeom>
+          <a:solidFill>
+            <a:srgbClr val="C00000"/>
+          </a:solidFill>
+          <a:ln>
+            <a:noFill/>
+          </a:ln>
+        </p:spPr>
+        <p:txBody>
+          <a:bodyPr spcFirstLastPara="1" wrap="square" lIns="91425" tIns="45700" rIns="91425" bIns="45700" anchor="ctr" anchorCtr="0">
+            <a:noAutofit/>
+          </a:bodyPr>
+          <a:lstStyle/>
+          <a:p>
+            <a:pPr marL="0" marR="0" lvl="0" indent="0" algn="ctr" rtl="0">
+              <a:lnSpc>
+                <a:spcPct val="100000"/>
+              </a:lnSpc>
+              <a:spcBef>
+                <a:spcPts val="0"/>
+              </a:spcBef>
+              <a:spcAft>
+                <a:spcPts val="0"/>
+              </a:spcAft>
+              <a:buClr>
+                <a:srgbClr val="000000"/>
+              </a:buClr>
+              <a:buSzPts val="1600"/>
+              <a:buFont typeface="Arial"/>
+              <a:buNone/>
+            </a:pPr>
+            <a:r>
+              <a:rPr lang="en-US" sz="3600" dirty="0">
+                <a:solidFill>
+                  <a:schemeClr val="lt1"/>
+                </a:solidFill>
+              </a:rPr>
+              <a:t>Dead at Age 74</a:t>
+            </a:r>
+            <a:endParaRPr sz="2000" b="0" i="0" u="none" strike="noStrike" cap="none" dirty="0">
+              <a:solidFill>
+                <a:srgbClr val="000000"/>
+              </a:solidFill>
+              <a:latin typeface="Arial"/>
+              <a:ea typeface="Arial"/>
+              <a:cs typeface="Arial"/>
+              <a:sym typeface="Arial"/>
+            </a:endParaRPr>
+          </a:p>
+        </p:txBody>
+      </p:sp>
+      <p:sp>
+        <p:nvSpPr>
+          <p:cNvPr id="10" name="TextBox 9">
+            <a:extLst>
+              <a:ext uri="{FF2B5EF4-FFF2-40B4-BE49-F238E27FC236}">
+                <a16:creationId xmlns:a16="http://schemas.microsoft.com/office/drawing/2014/main" id="{5FA0D8B2-6B55-D3DC-BCBB-6FEAD86B9E72}"/>
+              </a:ext>
+            </a:extLst>
+          </p:cNvPr>
+          <p:cNvSpPr txBox="1"/>
+          <p:nvPr/>
+        </p:nvSpPr>
+        <p:spPr>
+          <a:xfrm>
+            <a:off x="312431" y="2175372"/>
+            <a:ext cx="6987941" cy="3046988"/>
+          </a:xfrm>
+          <a:prstGeom prst="rect">
+            <a:avLst/>
+          </a:prstGeom>
+          <a:solidFill>
+            <a:schemeClr val="bg1">
+              <a:alpha val="84400"/>
+            </a:schemeClr>
+          </a:solidFill>
+        </p:spPr>
+        <p:txBody>
+          <a:bodyPr wrap="square" rtlCol="0">
+            <a:spAutoFit/>
+          </a:bodyPr>
+          <a:lstStyle/>
+          <a:p>
+            <a:pPr marL="285750" indent="-285750">
+              <a:spcBef>
+                <a:spcPts val="1200"/>
+              </a:spcBef>
+              <a:buFont typeface="Arial" panose="020B0604020202020204" pitchFamily="34" charset="0"/>
+              <a:buChar char="•"/>
+            </a:pPr>
+            <a:r>
+              <a:t>STRUCK AND KILLED by a tractor-trailer while cycling on October 10, 2018. He was 74.</a:t>
+            </a:r>
+          </a:p>
+          <a:p>
+            <a:pPr marL="285750" indent="-285750">
+              <a:spcBef>
+                <a:spcPts val="1200"/>
+              </a:spcBef>
+              <a:buFont typeface="Arial" panose="020B0604020202020204" pitchFamily="34" charset="0"/>
+              <a:buChar char="•"/>
+            </a:pPr>
+            <a:r>
+              <a:t>Former Air Force sergeant with TOP SECRET CRYPTO clearance who testified about structures on the far side of the MOON.</a:t>
+            </a:r>
+          </a:p>
+          <a:p>
+            <a:pPr marL="285750" indent="-285750">
+              <a:spcBef>
+                <a:spcPts val="1200"/>
+              </a:spcBef>
+              <a:buFont typeface="Arial" panose="020B0604020202020204" pitchFamily="34" charset="0"/>
+              <a:buChar char="•"/>
+            </a:pPr>
+            <a:r>
+              <a:t>At the 2001 Disclosure Project, he swore under oath that he was shown NASA Lunar Orbiter photos of ARTIFICIAL structures.</a:t>
+            </a:r>
+          </a:p>
+          <a:p>
+            <a:pPr marL="285750" indent="-285750">
+              <a:spcBef>
+                <a:spcPts val="1200"/>
+              </a:spcBef>
+              <a:buFont typeface="Arial" panose="020B0604020202020204" pitchFamily="34" charset="0"/>
+              <a:buChar char="•"/>
+            </a:pPr>
+            <a:r>
+              <a:t>Worked as a precision electronics technician at Langley Air Force Base processing CLASSIFIED imagery.</a:t>
+            </a:r>
+          </a:p>
+          <a:p>
+            <a:pPr marL="285750" indent="-285750">
+              <a:spcBef>
+                <a:spcPts val="1200"/>
+              </a:spcBef>
+              <a:buFont typeface="Arial" panose="020B0604020202020204" pitchFamily="34" charset="0"/>
+              <a:buChar char="•"/>
+            </a:pPr>
+            <a:r>
+              <a:t>Born and raised in Lansing, New York — killed in Lansing, New York. Youngest of seven children.</a:t>
+            </a:r>
+          </a:p>
+        </p:txBody>
+      </p:sp>
       <p:pic>
         <p:nvPicPr>
-          <p:cNvPr id="2" name="Picture 1">
-            <a:extLst>
-              <a:ext uri="{FF2B5EF4-FFF2-40B4-BE49-F238E27FC236}">
-                <a16:creationId xmlns:a16="http://schemas.microsoft.com/office/drawing/2014/main" id="{B39D3A02-22EC-4ADF-B31F-B6A75E9DC52A}"/>
-              </a:ext>
-            </a:extLst>
-          </p:cNvPr>
+          <p:cNvPr id="16" name="Picture 15" descr="Karl_Wolfe.jpg"/>
           <p:cNvPicPr>
             <a:picLocks noChangeAspect="1"/>
           </p:cNvPicPr>
@@ -6673,474 +7450,14 @@
         </p:blipFill>
         <p:spPr>
           <a:xfrm>
-            <a:off x="6672664" y="1095064"/>
-            <a:ext cx="5524359" cy="3105147"/>
+            <a:off x="8459451" y="1100088"/>
+            <a:ext cx="2363063" cy="3884876"/>
           </a:xfrm>
           <a:prstGeom prst="rect">
             <a:avLst/>
           </a:prstGeom>
         </p:spPr>
       </p:pic>
-      <p:sp>
-        <p:nvSpPr>
-          <p:cNvPr id="15" name="TextBox 14">
-            <a:extLst>
-              <a:ext uri="{FF2B5EF4-FFF2-40B4-BE49-F238E27FC236}">
-                <a16:creationId xmlns:a16="http://schemas.microsoft.com/office/drawing/2014/main" id="{E478240E-251B-5BA6-3C45-7E6620400769}"/>
-              </a:ext>
-            </a:extLst>
-          </p:cNvPr>
-          <p:cNvSpPr txBox="1"/>
-          <p:nvPr/>
-        </p:nvSpPr>
-        <p:spPr>
-          <a:xfrm>
-            <a:off x="312432" y="1288262"/>
-            <a:ext cx="6494294" cy="584775"/>
-          </a:xfrm>
-          <a:prstGeom prst="rect">
-            <a:avLst/>
-          </a:prstGeom>
-          <a:solidFill>
-            <a:schemeClr val="bg1">
-              <a:alpha val="84400"/>
-            </a:schemeClr>
-          </a:solidFill>
-        </p:spPr>
-        <p:txBody>
-          <a:bodyPr wrap="square" rtlCol="0">
-            <a:spAutoFit/>
-          </a:bodyPr>
-          <a:lstStyle/>
-          <a:p>
-            <a:r>
-              <a:rPr lang="en-US" sz="3200" b="1" dirty="0">
-                <a:solidFill>
-                  <a:schemeClr val="accent5"/>
-                </a:solidFill>
-              </a:rPr>
-              <a:t>Why / How they Mark McCandlish:</a:t>
-            </a:r>
-          </a:p>
-        </p:txBody>
-      </p:sp>
-      <p:sp>
-        <p:nvSpPr>
-          <p:cNvPr id="3" name="Google Shape;170;p31">
-            <a:extLst>
-              <a:ext uri="{FF2B5EF4-FFF2-40B4-BE49-F238E27FC236}">
-                <a16:creationId xmlns:a16="http://schemas.microsoft.com/office/drawing/2014/main" id="{A4695FE5-0AA5-AB05-98B1-B5B8E3FA8CBE}"/>
-              </a:ext>
-            </a:extLst>
-          </p:cNvPr>
-          <p:cNvSpPr/>
-          <p:nvPr/>
-        </p:nvSpPr>
-        <p:spPr>
-          <a:xfrm>
-            <a:off x="191731" y="5732890"/>
-            <a:ext cx="3431270" cy="496760"/>
-          </a:xfrm>
-          <a:prstGeom prst="rect">
-            <a:avLst/>
-          </a:prstGeom>
-          <a:solidFill>
-            <a:schemeClr val="accent5"/>
-          </a:solidFill>
-          <a:ln>
-            <a:noFill/>
-          </a:ln>
-        </p:spPr>
-        <p:txBody>
-          <a:bodyPr spcFirstLastPara="1" wrap="square" lIns="91425" tIns="45700" rIns="91425" bIns="45700" anchor="ctr" anchorCtr="0">
-            <a:noAutofit/>
-          </a:bodyPr>
-          <a:lstStyle/>
-          <a:p>
-            <a:pPr marL="0" marR="0" lvl="0" indent="0" algn="ctr" rtl="0">
-              <a:lnSpc>
-                <a:spcPct val="100000"/>
-              </a:lnSpc>
-              <a:spcBef>
-                <a:spcPts val="0"/>
-              </a:spcBef>
-              <a:spcAft>
-                <a:spcPts val="0"/>
-              </a:spcAft>
-              <a:buClr>
-                <a:srgbClr val="000000"/>
-              </a:buClr>
-              <a:buSzPts val="1600"/>
-              <a:buFont typeface="Arial"/>
-              <a:buNone/>
-            </a:pPr>
-            <a:r>
-              <a:rPr lang="en-US" sz="3600" dirty="0">
-                <a:solidFill>
-                  <a:schemeClr val="lt1"/>
-                </a:solidFill>
-              </a:rPr>
-              <a:t>Read List Here:</a:t>
-            </a:r>
-            <a:endParaRPr sz="2000" b="0" i="0" u="none" strike="noStrike" cap="none" dirty="0">
-              <a:solidFill>
-                <a:srgbClr val="000000"/>
-              </a:solidFill>
-              <a:latin typeface="Arial"/>
-              <a:ea typeface="Arial"/>
-              <a:cs typeface="Arial"/>
-              <a:sym typeface="Arial"/>
-            </a:endParaRPr>
-          </a:p>
-        </p:txBody>
-      </p:sp>
-      <p:sp>
-        <p:nvSpPr>
-          <p:cNvPr id="5" name="Google Shape;170;p31">
-            <a:extLst>
-              <a:ext uri="{FF2B5EF4-FFF2-40B4-BE49-F238E27FC236}">
-                <a16:creationId xmlns:a16="http://schemas.microsoft.com/office/drawing/2014/main" id="{98132413-6ED2-8B36-74B6-3C503B1A4634}"/>
-              </a:ext>
-            </a:extLst>
-          </p:cNvPr>
-          <p:cNvSpPr/>
-          <p:nvPr/>
-        </p:nvSpPr>
-        <p:spPr>
-          <a:xfrm>
-            <a:off x="0" y="-31518"/>
-            <a:ext cx="12192000" cy="1131606"/>
-          </a:xfrm>
-          <a:prstGeom prst="rect">
-            <a:avLst/>
-          </a:prstGeom>
-          <a:solidFill>
-            <a:srgbClr val="C00000"/>
-          </a:solidFill>
-          <a:ln>
-            <a:noFill/>
-          </a:ln>
-        </p:spPr>
-        <p:txBody>
-          <a:bodyPr spcFirstLastPara="1" wrap="square" lIns="91425" tIns="45700" rIns="91425" bIns="45700" anchor="ctr" anchorCtr="0">
-            <a:noAutofit/>
-          </a:bodyPr>
-          <a:lstStyle/>
-          <a:p>
-            <a:pPr marL="0" marR="0" lvl="0" indent="0" rtl="0">
-              <a:lnSpc>
-                <a:spcPct val="100000"/>
-              </a:lnSpc>
-              <a:spcBef>
-                <a:spcPts val="0"/>
-              </a:spcBef>
-              <a:spcAft>
-                <a:spcPts val="0"/>
-              </a:spcAft>
-              <a:buClr>
-                <a:srgbClr val="000000"/>
-              </a:buClr>
-              <a:buSzPts val="1600"/>
-              <a:buFont typeface="Arial"/>
-              <a:buNone/>
-            </a:pPr>
-            <a:r>
-              <a:rPr lang="en-US" sz="4400" dirty="0">
-                <a:solidFill>
-                  <a:schemeClr val="lt1"/>
-                </a:solidFill>
-              </a:rPr>
-              <a:t> 40+ Murdered: Physics Breakthroughs Hidden</a:t>
-            </a:r>
-            <a:endParaRPr sz="2800" b="0" i="0" u="none" strike="noStrike" cap="none" dirty="0">
-              <a:solidFill>
-                <a:srgbClr val="000000"/>
-              </a:solidFill>
-              <a:latin typeface="Arial"/>
-              <a:ea typeface="Arial"/>
-              <a:cs typeface="Arial"/>
-              <a:sym typeface="Arial"/>
-            </a:endParaRPr>
-          </a:p>
-        </p:txBody>
-      </p:sp>
-      <p:sp>
-        <p:nvSpPr>
-          <p:cNvPr id="4" name="TextBox 3">
-            <a:extLst>
-              <a:ext uri="{FF2B5EF4-FFF2-40B4-BE49-F238E27FC236}">
-                <a16:creationId xmlns:a16="http://schemas.microsoft.com/office/drawing/2014/main" id="{50D7621F-9D36-7894-7117-9F831EF5EFA6}"/>
-              </a:ext>
-            </a:extLst>
-          </p:cNvPr>
-          <p:cNvSpPr txBox="1"/>
-          <p:nvPr/>
-        </p:nvSpPr>
-        <p:spPr>
-          <a:xfrm>
-            <a:off x="107300" y="6229650"/>
-            <a:ext cx="11685989" cy="461665"/>
-          </a:xfrm>
-          <a:prstGeom prst="rect">
-            <a:avLst/>
-          </a:prstGeom>
-          <a:solidFill>
-            <a:schemeClr val="bg1">
-              <a:alpha val="84400"/>
-            </a:schemeClr>
-          </a:solidFill>
-        </p:spPr>
-        <p:txBody>
-          <a:bodyPr wrap="square" rtlCol="0">
-            <a:spAutoFit/>
-          </a:bodyPr>
-          <a:lstStyle/>
-          <a:p>
-            <a:r>
-              <a:rPr lang="en-US" sz="2400" dirty="0"/>
-              <a:t>https://uapmurders.com/physics</a:t>
-            </a:r>
-          </a:p>
-        </p:txBody>
-      </p:sp>
-      <p:sp>
-        <p:nvSpPr>
-          <p:cNvPr id="7" name="Google Shape;170;p31">
-            <a:extLst>
-              <a:ext uri="{FF2B5EF4-FFF2-40B4-BE49-F238E27FC236}">
-                <a16:creationId xmlns:a16="http://schemas.microsoft.com/office/drawing/2014/main" id="{4B582382-76AA-B49E-C611-39A37CE591B9}"/>
-              </a:ext>
-            </a:extLst>
-          </p:cNvPr>
-          <p:cNvSpPr/>
-          <p:nvPr/>
-        </p:nvSpPr>
-        <p:spPr>
-          <a:xfrm>
-            <a:off x="7506336" y="4925186"/>
-            <a:ext cx="4550222" cy="869505"/>
-          </a:xfrm>
-          <a:prstGeom prst="rect">
-            <a:avLst/>
-          </a:prstGeom>
-          <a:solidFill>
-            <a:srgbClr val="C00000"/>
-          </a:solidFill>
-          <a:ln>
-            <a:noFill/>
-          </a:ln>
-        </p:spPr>
-        <p:txBody>
-          <a:bodyPr spcFirstLastPara="1" wrap="square" lIns="91425" tIns="45700" rIns="91425" bIns="45700" anchor="ctr" anchorCtr="0">
-            <a:noAutofit/>
-          </a:bodyPr>
-          <a:lstStyle/>
-          <a:p>
-            <a:pPr marL="0" marR="0" lvl="0" indent="0" algn="ctr" rtl="0">
-              <a:lnSpc>
-                <a:spcPct val="100000"/>
-              </a:lnSpc>
-              <a:spcBef>
-                <a:spcPts val="0"/>
-              </a:spcBef>
-              <a:spcAft>
-                <a:spcPts val="0"/>
-              </a:spcAft>
-              <a:buClr>
-                <a:srgbClr val="000000"/>
-              </a:buClr>
-              <a:buSzPts val="1600"/>
-              <a:buFont typeface="Arial"/>
-              <a:buNone/>
-            </a:pPr>
-            <a:r>
-              <a:rPr lang="en-US" sz="4400" dirty="0">
-                <a:solidFill>
-                  <a:schemeClr val="lt1"/>
-                </a:solidFill>
-              </a:rPr>
-              <a:t>Mark McCandlish</a:t>
-            </a:r>
-            <a:endParaRPr sz="2800" b="0" i="0" u="none" strike="noStrike" cap="none" dirty="0">
-              <a:solidFill>
-                <a:srgbClr val="000000"/>
-              </a:solidFill>
-              <a:latin typeface="Arial"/>
-              <a:ea typeface="Arial"/>
-              <a:cs typeface="Arial"/>
-              <a:sym typeface="Arial"/>
-            </a:endParaRPr>
-          </a:p>
-        </p:txBody>
-      </p:sp>
-      <p:sp>
-        <p:nvSpPr>
-          <p:cNvPr id="8" name="Google Shape;170;p31">
-            <a:extLst>
-              <a:ext uri="{FF2B5EF4-FFF2-40B4-BE49-F238E27FC236}">
-                <a16:creationId xmlns:a16="http://schemas.microsoft.com/office/drawing/2014/main" id="{D328ABDE-E232-3EB7-C3F2-B4BB7B64262F}"/>
-              </a:ext>
-            </a:extLst>
-          </p:cNvPr>
-          <p:cNvSpPr/>
-          <p:nvPr/>
-        </p:nvSpPr>
-        <p:spPr>
-          <a:xfrm>
-            <a:off x="7526107" y="5681420"/>
-            <a:ext cx="4550222" cy="548230"/>
-          </a:xfrm>
-          <a:prstGeom prst="rect">
-            <a:avLst/>
-          </a:prstGeom>
-          <a:solidFill>
-            <a:srgbClr val="C00000"/>
-          </a:solidFill>
-          <a:ln>
-            <a:noFill/>
-          </a:ln>
-        </p:spPr>
-        <p:txBody>
-          <a:bodyPr spcFirstLastPara="1" wrap="square" lIns="91425" tIns="45700" rIns="91425" bIns="45700" anchor="ctr" anchorCtr="0">
-            <a:noAutofit/>
-          </a:bodyPr>
-          <a:lstStyle/>
-          <a:p>
-            <a:pPr marL="0" marR="0" lvl="0" indent="0" algn="ctr" rtl="0">
-              <a:lnSpc>
-                <a:spcPct val="100000"/>
-              </a:lnSpc>
-              <a:spcBef>
-                <a:spcPts val="0"/>
-              </a:spcBef>
-              <a:spcAft>
-                <a:spcPts val="0"/>
-              </a:spcAft>
-              <a:buClr>
-                <a:srgbClr val="000000"/>
-              </a:buClr>
-              <a:buSzPts val="1600"/>
-              <a:buFont typeface="Arial"/>
-              <a:buNone/>
-            </a:pPr>
-            <a:r>
-              <a:rPr lang="en-US" sz="3600" dirty="0">
-                <a:solidFill>
-                  <a:schemeClr val="lt1"/>
-                </a:solidFill>
-              </a:rPr>
-              <a:t>Dead at Age 66</a:t>
-            </a:r>
-            <a:endParaRPr sz="2000" b="0" i="0" u="none" strike="noStrike" cap="none" dirty="0">
-              <a:solidFill>
-                <a:srgbClr val="000000"/>
-              </a:solidFill>
-              <a:latin typeface="Arial"/>
-              <a:ea typeface="Arial"/>
-              <a:cs typeface="Arial"/>
-              <a:sym typeface="Arial"/>
-            </a:endParaRPr>
-          </a:p>
-        </p:txBody>
-      </p:sp>
-      <p:sp>
-        <p:nvSpPr>
-          <p:cNvPr id="10" name="TextBox 9">
-            <a:extLst>
-              <a:ext uri="{FF2B5EF4-FFF2-40B4-BE49-F238E27FC236}">
-                <a16:creationId xmlns:a16="http://schemas.microsoft.com/office/drawing/2014/main" id="{5FA0D8B2-6B55-D3DC-BCBB-6FEAD86B9E72}"/>
-              </a:ext>
-            </a:extLst>
-          </p:cNvPr>
-          <p:cNvSpPr txBox="1"/>
-          <p:nvPr/>
-        </p:nvSpPr>
-        <p:spPr>
-          <a:xfrm>
-            <a:off x="276331" y="1813727"/>
-            <a:ext cx="7024042" cy="3754874"/>
-          </a:xfrm>
-          <a:prstGeom prst="rect">
-            <a:avLst/>
-          </a:prstGeom>
-          <a:solidFill>
-            <a:schemeClr val="bg1">
-              <a:alpha val="84400"/>
-            </a:schemeClr>
-          </a:solidFill>
-        </p:spPr>
-        <p:txBody>
-          <a:bodyPr wrap="square" rtlCol="0">
-            <a:spAutoFit/>
-          </a:bodyPr>
-          <a:lstStyle/>
-          <a:p>
-            <a:pPr marL="285750" indent="-285750">
-              <a:spcBef>
-                <a:spcPts val="1200"/>
-              </a:spcBef>
-              <a:buFont typeface="Arial" panose="020B0604020202020204" pitchFamily="34" charset="0"/>
-              <a:buChar char="•"/>
-            </a:pPr>
-            <a:r>
-              <a:rPr dirty="0"/>
-              <a:t>DEAD from a GUNSHOT wound on April 13, 2021 — after reportedly offering to testify before the Senate Intelligence Committee.</a:t>
-            </a:r>
-          </a:p>
-          <a:p>
-            <a:pPr marL="285750" indent="-285750">
-              <a:spcBef>
-                <a:spcPts val="1200"/>
-              </a:spcBef>
-              <a:buFont typeface="Arial" panose="020B0604020202020204" pitchFamily="34" charset="0"/>
-              <a:buChar char="•"/>
-            </a:pPr>
-            <a:r>
-              <a:rPr dirty="0"/>
-              <a:t>Aerospace illustrator who spent 30 years producing the most detailed engineering analysis of a US-built ANTIGRAVITY craft.</a:t>
-            </a:r>
-          </a:p>
-          <a:p>
-            <a:pPr marL="285750" indent="-285750">
-              <a:spcBef>
-                <a:spcPts val="1200"/>
-              </a:spcBef>
-              <a:buFont typeface="Arial" panose="020B0604020202020204" pitchFamily="34" charset="0"/>
-              <a:buChar char="•"/>
-            </a:pPr>
-            <a:r>
-              <a:rPr dirty="0"/>
-              <a:t>His source saw THREE disc-shaped craft HOVERING silently at Norton Air Force Base in 1988.</a:t>
-            </a:r>
-          </a:p>
-          <a:p>
-            <a:pPr marL="285750" indent="-285750">
-              <a:spcBef>
-                <a:spcPts val="1200"/>
-              </a:spcBef>
-              <a:buFont typeface="Arial" panose="020B0604020202020204" pitchFamily="34" charset="0"/>
-              <a:buChar char="•"/>
-            </a:pPr>
-            <a:r>
-              <a:rPr dirty="0"/>
-              <a:t>Testified at the 2001 Disclosure Project describing the Alien Reproduction Vehicle with precise TECHNICAL specifications.</a:t>
-            </a:r>
-          </a:p>
-          <a:p>
-            <a:pPr marL="285750" indent="-285750">
-              <a:spcBef>
-                <a:spcPts val="1200"/>
-              </a:spcBef>
-              <a:buFont typeface="Arial" panose="020B0604020202020204" pitchFamily="34" charset="0"/>
-              <a:buChar char="•"/>
-            </a:pPr>
-            <a:r>
-              <a:rPr dirty="0"/>
-              <a:t>Killed in Redding, California. He had just presented his most detailed breakdown of the craft's CAPACITOR propulsion system.</a:t>
-            </a:r>
-          </a:p>
-        </p:txBody>
-      </p:sp>
     </p:spTree>
   </p:cSld>
   <p:clrMapOvr>
@@ -7168,49 +7485,32 @@
       </p:grpSpPr>
       <p:pic>
         <p:nvPicPr>
-          <p:cNvPr id="2050" name="Picture 2" descr="Christopher Fallen Profile Photo">
-            <a:extLst>
-              <a:ext uri="{FF2B5EF4-FFF2-40B4-BE49-F238E27FC236}">
-                <a16:creationId xmlns:a16="http://schemas.microsoft.com/office/drawing/2014/main" id="{B2AC06A7-2885-3C42-1FE4-2866A7130DFC}"/>
+          <p:cNvPr id="2" name="Picture 1">
+            <a:extLst>
+              <a:ext uri="{FF2B5EF4-FFF2-40B4-BE49-F238E27FC236}">
+                <a16:creationId xmlns:a16="http://schemas.microsoft.com/office/drawing/2014/main" id="{B39D3A02-22EC-4ADF-B31F-B6A75E9DC52A}"/>
               </a:ext>
             </a:extLst>
           </p:cNvPr>
           <p:cNvPicPr>
-            <a:picLocks noChangeAspect="1" noChangeArrowheads="1"/>
+            <a:picLocks noChangeAspect="1"/>
           </p:cNvPicPr>
           <p:nvPr/>
         </p:nvPicPr>
         <p:blipFill>
-          <a:blip r:embed="rId2">
-            <a:extLst>
-              <a:ext uri="{28A0092B-C50C-407E-A947-70E740481C1C}">
-                <a14:useLocalDpi xmlns:a14="http://schemas.microsoft.com/office/drawing/2010/main" val="0"/>
-              </a:ext>
-            </a:extLst>
-          </a:blip>
-          <a:srcRect/>
+          <a:blip r:embed="rId2"/>
           <a:stretch>
             <a:fillRect/>
           </a:stretch>
         </p:blipFill>
-        <p:spPr bwMode="auto">
-          <a:xfrm>
-            <a:off x="9013594" y="1100088"/>
-            <a:ext cx="3062736" cy="3825098"/>
+        <p:spPr>
+          <a:xfrm>
+            <a:off x="6672664" y="1095064"/>
+            <a:ext cx="5524359" cy="3105147"/>
           </a:xfrm>
           <a:prstGeom prst="rect">
             <a:avLst/>
           </a:prstGeom>
-          <a:noFill/>
-          <a:extLst>
-            <a:ext uri="{909E8E84-426E-40DD-AFC4-6F175D3DCCD1}">
-              <a14:hiddenFill xmlns:a14="http://schemas.microsoft.com/office/drawing/2010/main">
-                <a:solidFill>
-                  <a:srgbClr val="FFFFFF"/>
-                </a:solidFill>
-              </a14:hiddenFill>
-            </a:ext>
-          </a:extLst>
         </p:spPr>
       </p:pic>
       <p:sp>
@@ -7227,8 +7527,8 @@
         </p:nvSpPr>
         <p:spPr>
           <a:xfrm>
-            <a:off x="312431" y="1288262"/>
-            <a:ext cx="7213675" cy="584775"/>
+            <a:off x="312432" y="1288262"/>
+            <a:ext cx="6494294" cy="584775"/>
           </a:xfrm>
           <a:prstGeom prst="rect">
             <a:avLst/>
@@ -7251,7 +7551,7 @@
                   <a:schemeClr val="accent5"/>
                 </a:solidFill>
               </a:rPr>
-              <a:t>Why / How they Christopher Fallen:</a:t>
+              <a:t>Why / How they Mark McCandlish:</a:t>
             </a:r>
           </a:p>
         </p:txBody>
@@ -7377,14 +7677,14 @@
               <a:buNone/>
             </a:pPr>
             <a:r>
-              <a:rPr lang="en-US" sz="4800" dirty="0">
+              <a:rPr lang="en-US" sz="4400" dirty="0">
                 <a:solidFill>
                   <a:schemeClr val="lt1"/>
                 </a:solidFill>
               </a:rPr>
-              <a:t> 150+ Murdered: by Intelligence Services</a:t>
-            </a:r>
-            <a:endParaRPr sz="3200" b="0" i="0" u="none" strike="noStrike" cap="none" dirty="0">
+              <a:t> 40+ Murdered: Physics Breakthroughs Hidden</a:t>
+            </a:r>
+            <a:endParaRPr sz="2800" b="0" i="0" u="none" strike="noStrike" cap="none" dirty="0">
               <a:solidFill>
                 <a:srgbClr val="000000"/>
               </a:solidFill>
@@ -7430,17 +7730,17 @@
           <a:p>
             <a:r>
               <a:rPr lang="en-US" sz="2400" dirty="0"/>
-              <a:t>https://intelligencemurders.com/intel</a:t>
-            </a:r>
-          </a:p>
-        </p:txBody>
-      </p:sp>
-      <p:sp>
-        <p:nvSpPr>
-          <p:cNvPr id="8" name="Google Shape;170;p31">
-            <a:extLst>
-              <a:ext uri="{FF2B5EF4-FFF2-40B4-BE49-F238E27FC236}">
-                <a16:creationId xmlns:a16="http://schemas.microsoft.com/office/drawing/2014/main" id="{D328ABDE-E232-3EB7-C3F2-B4BB7B64262F}"/>
+              <a:t>https://uapmurders.com/physics</a:t>
+            </a:r>
+          </a:p>
+        </p:txBody>
+      </p:sp>
+      <p:sp>
+        <p:nvSpPr>
+          <p:cNvPr id="7" name="Google Shape;170;p31">
+            <a:extLst>
+              <a:ext uri="{FF2B5EF4-FFF2-40B4-BE49-F238E27FC236}">
+                <a16:creationId xmlns:a16="http://schemas.microsoft.com/office/drawing/2014/main" id="{4B582382-76AA-B49E-C611-39A37CE591B9}"/>
               </a:ext>
             </a:extLst>
           </p:cNvPr>
@@ -7449,8 +7749,8 @@
         </p:nvSpPr>
         <p:spPr>
           <a:xfrm>
-            <a:off x="7526106" y="6291451"/>
-            <a:ext cx="4550222" cy="548230"/>
+            <a:off x="7506336" y="4925186"/>
+            <a:ext cx="4550222" cy="869505"/>
           </a:xfrm>
           <a:prstGeom prst="rect">
             <a:avLst/>
@@ -7486,12 +7786,82 @@
               <a:buNone/>
             </a:pPr>
             <a:r>
+              <a:rPr lang="en-US" sz="4400" dirty="0">
+                <a:solidFill>
+                  <a:schemeClr val="lt1"/>
+                </a:solidFill>
+              </a:rPr>
+              <a:t>Mark McCandlish</a:t>
+            </a:r>
+            <a:endParaRPr sz="2800" b="0" i="0" u="none" strike="noStrike" cap="none" dirty="0">
+              <a:solidFill>
+                <a:srgbClr val="000000"/>
+              </a:solidFill>
+              <a:latin typeface="Arial"/>
+              <a:ea typeface="Arial"/>
+              <a:cs typeface="Arial"/>
+              <a:sym typeface="Arial"/>
+            </a:endParaRPr>
+          </a:p>
+        </p:txBody>
+      </p:sp>
+      <p:sp>
+        <p:nvSpPr>
+          <p:cNvPr id="8" name="Google Shape;170;p31">
+            <a:extLst>
+              <a:ext uri="{FF2B5EF4-FFF2-40B4-BE49-F238E27FC236}">
+                <a16:creationId xmlns:a16="http://schemas.microsoft.com/office/drawing/2014/main" id="{D328ABDE-E232-3EB7-C3F2-B4BB7B64262F}"/>
+              </a:ext>
+            </a:extLst>
+          </p:cNvPr>
+          <p:cNvSpPr/>
+          <p:nvPr/>
+        </p:nvSpPr>
+        <p:spPr>
+          <a:xfrm>
+            <a:off x="7526107" y="5681420"/>
+            <a:ext cx="4550222" cy="548230"/>
+          </a:xfrm>
+          <a:prstGeom prst="rect">
+            <a:avLst/>
+          </a:prstGeom>
+          <a:solidFill>
+            <a:srgbClr val="C00000"/>
+          </a:solidFill>
+          <a:ln>
+            <a:noFill/>
+          </a:ln>
+        </p:spPr>
+        <p:txBody>
+          <a:bodyPr spcFirstLastPara="1" wrap="square" lIns="91425" tIns="45700" rIns="91425" bIns="45700" anchor="ctr" anchorCtr="0">
+            <a:noAutofit/>
+          </a:bodyPr>
+          <a:lstStyle/>
+          <a:p>
+            <a:pPr marL="0" marR="0" lvl="0" indent="0" algn="ctr" rtl="0">
+              <a:lnSpc>
+                <a:spcPct val="100000"/>
+              </a:lnSpc>
+              <a:spcBef>
+                <a:spcPts val="0"/>
+              </a:spcBef>
+              <a:spcAft>
+                <a:spcPts val="0"/>
+              </a:spcAft>
+              <a:buClr>
+                <a:srgbClr val="000000"/>
+              </a:buClr>
+              <a:buSzPts val="1600"/>
+              <a:buFont typeface="Arial"/>
+              <a:buNone/>
+            </a:pPr>
+            <a:r>
               <a:rPr lang="en-US" sz="3600" dirty="0">
                 <a:solidFill>
                   <a:schemeClr val="lt1"/>
                 </a:solidFill>
               </a:rPr>
-              <a:t>Dead at Age 48</a:t>
+              <a:t>Dead at Age 66</a:t>
             </a:r>
             <a:endParaRPr sz="2000" b="0" i="0" u="none" strike="noStrike" cap="none" dirty="0">
               <a:solidFill>
@@ -7519,8 +7889,8 @@
         </p:nvSpPr>
         <p:spPr>
           <a:xfrm>
-            <a:off x="135442" y="1937976"/>
-            <a:ext cx="8354040" cy="3477875"/>
+            <a:off x="276331" y="1813727"/>
+            <a:ext cx="7024042" cy="3754874"/>
           </a:xfrm>
           <a:prstGeom prst="rect">
             <a:avLst/>
@@ -7546,7 +7916,7 @@
             </a:pPr>
             <a:r>
               <a:rPr dirty="0"/>
-              <a:t>Former HAARP chief scientist found BOUND with duct tape, belt around his neck, head wrapped in tape. ASPHYXIATED in his own home. Age 48.</a:t>
+              <a:t>DEAD from a GUNSHOT wound on April 13, 2021 — after reportedly offering to testify before the Senate Intelligence Committee.</a:t>
             </a:r>
           </a:p>
           <a:p>
@@ -7559,7 +7929,7 @@
             </a:pPr>
             <a:r>
               <a:rPr dirty="0"/>
-              <a:t>Senior physicist at the Air Force Research Laboratory working on CLASSIFIED ionospheric and plasma weapons research.</a:t>
+              <a:t>Aerospace illustrator who spent 30 years producing the most detailed engineering analysis of a US-built ANTIGRAVITY craft.</a:t>
             </a:r>
           </a:p>
           <a:p>
@@ -7572,7 +7942,7 @@
             </a:pPr>
             <a:r>
               <a:rPr dirty="0"/>
-              <a:t>One suspect convicted of FIRST-DEGREE murder. The co-defendant fled to El Paso and died of an OVERDOSE before trial.</a:t>
+              <a:t>His source saw THREE disc-shaped craft HOVERING silently at Norton Air Force Base in 1988.</a:t>
             </a:r>
           </a:p>
           <a:p>
@@ -7585,7 +7955,7 @@
             </a:pPr>
             <a:r>
               <a:rPr dirty="0"/>
-              <a:t>His death was the FIRST in a cluster of defense scientist deaths across New Mexico in 2024.</a:t>
+              <a:t>Testified at the 2001 Disclosure Project describing the Alien Reproduction Vehicle with precise TECHNICAL specifications.</a:t>
             </a:r>
           </a:p>
           <a:p>
@@ -7598,78 +7968,8 @@
             </a:pPr>
             <a:r>
               <a:rPr dirty="0"/>
-              <a:t>Worked at Kirtland Air Force Base — home to directed energy weapons, space vehicles, and some of America's most SECRET programs.</a:t>
-            </a:r>
-          </a:p>
-        </p:txBody>
-      </p:sp>
-      <p:sp>
-        <p:nvSpPr>
-          <p:cNvPr id="7" name="Google Shape;170;p31">
-            <a:extLst>
-              <a:ext uri="{FF2B5EF4-FFF2-40B4-BE49-F238E27FC236}">
-                <a16:creationId xmlns:a16="http://schemas.microsoft.com/office/drawing/2014/main" id="{4B582382-76AA-B49E-C611-39A37CE591B9}"/>
-              </a:ext>
-            </a:extLst>
-          </p:cNvPr>
-          <p:cNvSpPr/>
-          <p:nvPr/>
-        </p:nvSpPr>
-        <p:spPr>
-          <a:xfrm>
-            <a:off x="7506336" y="5055282"/>
-            <a:ext cx="4550222" cy="1236169"/>
-          </a:xfrm>
-          <a:prstGeom prst="rect">
-            <a:avLst/>
-          </a:prstGeom>
-          <a:solidFill>
-            <a:srgbClr val="C00000"/>
-          </a:solidFill>
-          <a:ln>
-            <a:noFill/>
-          </a:ln>
-        </p:spPr>
-        <p:txBody>
-          <a:bodyPr spcFirstLastPara="1" wrap="square" lIns="91425" tIns="45700" rIns="91425" bIns="45700" anchor="ctr" anchorCtr="0">
-            <a:noAutofit/>
-          </a:bodyPr>
-          <a:lstStyle/>
-          <a:p>
-            <a:pPr marL="0" marR="0" lvl="0" indent="0" algn="ctr" rtl="0">
-              <a:lnSpc>
-                <a:spcPct val="100000"/>
-              </a:lnSpc>
-              <a:spcBef>
-                <a:spcPts val="0"/>
-              </a:spcBef>
-              <a:spcAft>
-                <a:spcPts val="0"/>
-              </a:spcAft>
-              <a:buClr>
-                <a:srgbClr val="000000"/>
-              </a:buClr>
-              <a:buSzPts val="1600"/>
-              <a:buFont typeface="Arial"/>
-              <a:buNone/>
-            </a:pPr>
-            <a:r>
-              <a:rPr lang="en-US" sz="4800" dirty="0">
-                <a:solidFill>
-                  <a:schemeClr val="lt1"/>
-                </a:solidFill>
-              </a:rPr>
-              <a:t>Christopher Fallen</a:t>
-            </a:r>
-            <a:endParaRPr sz="3200" b="0" i="0" u="none" strike="noStrike" cap="none" dirty="0">
-              <a:solidFill>
-                <a:srgbClr val="000000"/>
-              </a:solidFill>
-              <a:latin typeface="Arial"/>
-              <a:ea typeface="Arial"/>
-              <a:cs typeface="Arial"/>
-              <a:sym typeface="Arial"/>
-            </a:endParaRPr>
+              <a:t>Killed in Redding, California. He had just presented his most detailed breakdown of the craft's CAPACITOR propulsion system.</a:t>
+            </a:r>
           </a:p>
         </p:txBody>
       </p:sp>
@@ -7698,6 +7998,53 @@
           <a:chExt cx="0" cy="0"/>
         </a:xfrm>
       </p:grpSpPr>
+      <p:pic>
+        <p:nvPicPr>
+          <p:cNvPr id="2050" name="Picture 2" descr="Christopher Fallen Profile Photo">
+            <a:extLst>
+              <a:ext uri="{FF2B5EF4-FFF2-40B4-BE49-F238E27FC236}">
+                <a16:creationId xmlns:a16="http://schemas.microsoft.com/office/drawing/2014/main" id="{B2AC06A7-2885-3C42-1FE4-2866A7130DFC}"/>
+              </a:ext>
+            </a:extLst>
+          </p:cNvPr>
+          <p:cNvPicPr>
+            <a:picLocks noChangeAspect="1" noChangeArrowheads="1"/>
+          </p:cNvPicPr>
+          <p:nvPr/>
+        </p:nvPicPr>
+        <p:blipFill>
+          <a:blip r:embed="rId2">
+            <a:extLst>
+              <a:ext uri="{28A0092B-C50C-407E-A947-70E740481C1C}">
+                <a14:useLocalDpi xmlns:a14="http://schemas.microsoft.com/office/drawing/2010/main" val="0"/>
+              </a:ext>
+            </a:extLst>
+          </a:blip>
+          <a:srcRect/>
+          <a:stretch>
+            <a:fillRect/>
+          </a:stretch>
+        </p:blipFill>
+        <p:spPr bwMode="auto">
+          <a:xfrm>
+            <a:off x="9013594" y="1100088"/>
+            <a:ext cx="3062736" cy="3825098"/>
+          </a:xfrm>
+          <a:prstGeom prst="rect">
+            <a:avLst/>
+          </a:prstGeom>
+          <a:noFill/>
+          <a:extLst>
+            <a:ext uri="{909E8E84-426E-40DD-AFC4-6F175D3DCCD1}">
+              <a14:hiddenFill xmlns:a14="http://schemas.microsoft.com/office/drawing/2010/main">
+                <a:solidFill>
+                  <a:srgbClr val="FFFFFF"/>
+                </a:solidFill>
+              </a14:hiddenFill>
+            </a:ext>
+          </a:extLst>
+        </p:spPr>
+      </p:pic>
       <p:sp>
         <p:nvSpPr>
           <p:cNvPr id="15" name="TextBox 14">
@@ -7712,8 +8059,8 @@
         </p:nvSpPr>
         <p:spPr>
           <a:xfrm>
-            <a:off x="312432" y="1288262"/>
-            <a:ext cx="6494294" cy="584775"/>
+            <a:off x="312431" y="1288262"/>
+            <a:ext cx="7213675" cy="584775"/>
           </a:xfrm>
           <a:prstGeom prst="rect">
             <a:avLst/>
@@ -7736,7 +8083,7 @@
                   <a:schemeClr val="accent5"/>
                 </a:solidFill>
               </a:rPr>
-              <a:t>Why / How they Max Spiers:</a:t>
+              <a:t>Why / How they Christopher Fallen:</a:t>
             </a:r>
           </a:p>
         </p:txBody>
@@ -7844,7 +8191,105 @@
           </a:bodyPr>
           <a:lstStyle/>
           <a:p>
-            <a:pPr marL="0" marR="0" lvl="0" indent="0" rtl="0">
+            <a:pPr lvl="0">
+              <a:buClr>
+                <a:srgbClr val="000000"/>
+              </a:buClr>
+              <a:buSzPts val="1600"/>
+            </a:pPr>
+            <a:r>
+              <a:rPr lang="en-US" sz="4400" dirty="0">
+                <a:solidFill>
+                  <a:schemeClr val="lt1"/>
+                </a:solidFill>
+              </a:rPr>
+              <a:t> 40+ Murdered: Physics Breakthroughs Hidden</a:t>
+            </a:r>
+            <a:endParaRPr lang="en-US" sz="2800" dirty="0">
+              <a:solidFill>
+                <a:srgbClr val="000000"/>
+              </a:solidFill>
+              <a:latin typeface="Arial"/>
+              <a:ea typeface="Arial"/>
+              <a:cs typeface="Arial"/>
+              <a:sym typeface="Arial"/>
+            </a:endParaRPr>
+          </a:p>
+        </p:txBody>
+      </p:sp>
+      <p:sp>
+        <p:nvSpPr>
+          <p:cNvPr id="4" name="TextBox 3">
+            <a:extLst>
+              <a:ext uri="{FF2B5EF4-FFF2-40B4-BE49-F238E27FC236}">
+                <a16:creationId xmlns:a16="http://schemas.microsoft.com/office/drawing/2014/main" id="{50D7621F-9D36-7894-7117-9F831EF5EFA6}"/>
+              </a:ext>
+            </a:extLst>
+          </p:cNvPr>
+          <p:cNvSpPr txBox="1"/>
+          <p:nvPr/>
+        </p:nvSpPr>
+        <p:spPr>
+          <a:xfrm>
+            <a:off x="107300" y="6229650"/>
+            <a:ext cx="11685989" cy="461665"/>
+          </a:xfrm>
+          <a:prstGeom prst="rect">
+            <a:avLst/>
+          </a:prstGeom>
+          <a:solidFill>
+            <a:schemeClr val="bg1">
+              <a:alpha val="84400"/>
+            </a:schemeClr>
+          </a:solidFill>
+        </p:spPr>
+        <p:txBody>
+          <a:bodyPr wrap="square" rtlCol="0">
+            <a:spAutoFit/>
+          </a:bodyPr>
+          <a:lstStyle/>
+          <a:p>
+            <a:r>
+              <a:rPr lang="en-US" sz="2400" dirty="0"/>
+              <a:t>https://intelligencemurders.com/intel</a:t>
+            </a:r>
+          </a:p>
+        </p:txBody>
+      </p:sp>
+      <p:sp>
+        <p:nvSpPr>
+          <p:cNvPr id="8" name="Google Shape;170;p31">
+            <a:extLst>
+              <a:ext uri="{FF2B5EF4-FFF2-40B4-BE49-F238E27FC236}">
+                <a16:creationId xmlns:a16="http://schemas.microsoft.com/office/drawing/2014/main" id="{D328ABDE-E232-3EB7-C3F2-B4BB7B64262F}"/>
+              </a:ext>
+            </a:extLst>
+          </p:cNvPr>
+          <p:cNvSpPr/>
+          <p:nvPr/>
+        </p:nvSpPr>
+        <p:spPr>
+          <a:xfrm>
+            <a:off x="7526106" y="6291451"/>
+            <a:ext cx="4550222" cy="548230"/>
+          </a:xfrm>
+          <a:prstGeom prst="rect">
+            <a:avLst/>
+          </a:prstGeom>
+          <a:solidFill>
+            <a:srgbClr val="C00000"/>
+          </a:solidFill>
+          <a:ln>
+            <a:noFill/>
+          </a:ln>
+        </p:spPr>
+        <p:txBody>
+          <a:bodyPr spcFirstLastPara="1" wrap="square" lIns="91425" tIns="45700" rIns="91425" bIns="45700" anchor="ctr" anchorCtr="0">
+            <a:noAutofit/>
+          </a:bodyPr>
+          <a:lstStyle/>
+          <a:p>
+            <a:pPr marL="0" marR="0" lvl="0" indent="0" algn="ctr" rtl="0">
               <a:lnSpc>
                 <a:spcPct val="100000"/>
               </a:lnSpc>
@@ -7862,14 +8307,14 @@
               <a:buNone/>
             </a:pPr>
             <a:r>
-              <a:rPr lang="en-US" sz="4400" dirty="0">
+              <a:rPr lang="en-US" sz="3600" dirty="0">
                 <a:solidFill>
                   <a:schemeClr val="lt1"/>
                 </a:solidFill>
               </a:rPr>
-              <a:t> 40+ Murdered: Physics Breakthroughs Hidden</a:t>
-            </a:r>
-            <a:endParaRPr sz="2800" b="0" i="0" u="none" strike="noStrike" cap="none" dirty="0">
+              <a:t>Dead at Age 48</a:t>
+            </a:r>
+            <a:endParaRPr sz="2000" b="0" i="0" u="none" strike="noStrike" cap="none" dirty="0">
               <a:solidFill>
                 <a:srgbClr val="000000"/>
               </a:solidFill>
@@ -7883,10 +8328,10 @@
       </p:sp>
       <p:sp>
         <p:nvSpPr>
-          <p:cNvPr id="4" name="TextBox 3">
-            <a:extLst>
-              <a:ext uri="{FF2B5EF4-FFF2-40B4-BE49-F238E27FC236}">
-                <a16:creationId xmlns:a16="http://schemas.microsoft.com/office/drawing/2014/main" id="{50D7621F-9D36-7894-7117-9F831EF5EFA6}"/>
+          <p:cNvPr id="10" name="TextBox 9">
+            <a:extLst>
+              <a:ext uri="{FF2B5EF4-FFF2-40B4-BE49-F238E27FC236}">
+                <a16:creationId xmlns:a16="http://schemas.microsoft.com/office/drawing/2014/main" id="{5FA0D8B2-6B55-D3DC-BCBB-6FEAD86B9E72}"/>
               </a:ext>
             </a:extLst>
           </p:cNvPr>
@@ -7895,8 +8340,8 @@
         </p:nvSpPr>
         <p:spPr>
           <a:xfrm>
-            <a:off x="107300" y="6229650"/>
-            <a:ext cx="11685989" cy="461665"/>
+            <a:off x="135442" y="1937976"/>
+            <a:ext cx="8354040" cy="3477875"/>
           </a:xfrm>
           <a:prstGeom prst="rect">
             <a:avLst/>
@@ -7913,9 +8358,68 @@
           </a:bodyPr>
           <a:lstStyle/>
           <a:p>
-            <a:r>
-              <a:rPr lang="en-US" sz="2400" dirty="0"/>
-              <a:t>https://uapmurders.com/physics</a:t>
+            <a:pPr marL="285750" indent="-285750">
+              <a:spcBef>
+                <a:spcPts val="1200"/>
+              </a:spcBef>
+              <a:buFont typeface="Arial" panose="020B0604020202020204" pitchFamily="34" charset="0"/>
+              <a:buChar char="•"/>
+            </a:pPr>
+            <a:r>
+              <a:rPr dirty="0"/>
+              <a:t>Former HAARP chief scientist found BOUND with duct tape, belt around his neck, head wrapped in tape. ASPHYXIATED in his own home. Age 48.</a:t>
+            </a:r>
+          </a:p>
+          <a:p>
+            <a:pPr marL="285750" indent="-285750">
+              <a:spcBef>
+                <a:spcPts val="1200"/>
+              </a:spcBef>
+              <a:buFont typeface="Arial" panose="020B0604020202020204" pitchFamily="34" charset="0"/>
+              <a:buChar char="•"/>
+            </a:pPr>
+            <a:r>
+              <a:rPr dirty="0"/>
+              <a:t>Senior physicist at the Air Force Research Laboratory working on CLASSIFIED ionospheric and plasma weapons research.</a:t>
+            </a:r>
+          </a:p>
+          <a:p>
+            <a:pPr marL="285750" indent="-285750">
+              <a:spcBef>
+                <a:spcPts val="1200"/>
+              </a:spcBef>
+              <a:buFont typeface="Arial" panose="020B0604020202020204" pitchFamily="34" charset="0"/>
+              <a:buChar char="•"/>
+            </a:pPr>
+            <a:r>
+              <a:rPr dirty="0"/>
+              <a:t>One suspect convicted of FIRST-DEGREE murder. The co-defendant fled to El Paso and died of an OVERDOSE before trial.</a:t>
+            </a:r>
+          </a:p>
+          <a:p>
+            <a:pPr marL="285750" indent="-285750">
+              <a:spcBef>
+                <a:spcPts val="1200"/>
+              </a:spcBef>
+              <a:buFont typeface="Arial" panose="020B0604020202020204" pitchFamily="34" charset="0"/>
+              <a:buChar char="•"/>
+            </a:pPr>
+            <a:r>
+              <a:rPr dirty="0"/>
+              <a:t>His death was the FIRST in a cluster of defense scientist deaths across New Mexico in 2024.</a:t>
+            </a:r>
+          </a:p>
+          <a:p>
+            <a:pPr marL="285750" indent="-285750">
+              <a:spcBef>
+                <a:spcPts val="1200"/>
+              </a:spcBef>
+              <a:buFont typeface="Arial" panose="020B0604020202020204" pitchFamily="34" charset="0"/>
+              <a:buChar char="•"/>
+            </a:pPr>
+            <a:r>
+              <a:rPr dirty="0"/>
+              <a:t>Worked at Kirtland Air Force Base — home to directed energy weapons, space vehicles, and some of America's most SECRET programs.</a:t>
             </a:r>
           </a:p>
         </p:txBody>
@@ -7934,8 +8438,8 @@
         </p:nvSpPr>
         <p:spPr>
           <a:xfrm>
-            <a:off x="7506336" y="4925186"/>
-            <a:ext cx="4550222" cy="869505"/>
+            <a:off x="7506336" y="5055282"/>
+            <a:ext cx="4550222" cy="1236169"/>
           </a:xfrm>
           <a:prstGeom prst="rect">
             <a:avLst/>
@@ -7976,7 +8480,7 @@
                   <a:schemeClr val="lt1"/>
                 </a:solidFill>
               </a:rPr>
-              <a:t>Max Spiers</a:t>
+              <a:t>Christopher Fallen</a:t>
             </a:r>
             <a:endParaRPr sz="3200" b="0" i="0" u="none" strike="noStrike" cap="none" dirty="0">
               <a:solidFill>
@@ -7990,193 +8494,6 @@
           </a:p>
         </p:txBody>
       </p:sp>
-      <p:sp>
-        <p:nvSpPr>
-          <p:cNvPr id="8" name="Google Shape;170;p31">
-            <a:extLst>
-              <a:ext uri="{FF2B5EF4-FFF2-40B4-BE49-F238E27FC236}">
-                <a16:creationId xmlns:a16="http://schemas.microsoft.com/office/drawing/2014/main" id="{D328ABDE-E232-3EB7-C3F2-B4BB7B64262F}"/>
-              </a:ext>
-            </a:extLst>
-          </p:cNvPr>
-          <p:cNvSpPr/>
-          <p:nvPr/>
-        </p:nvSpPr>
-        <p:spPr>
-          <a:xfrm>
-            <a:off x="7526107" y="5681420"/>
-            <a:ext cx="4550222" cy="548230"/>
-          </a:xfrm>
-          <a:prstGeom prst="rect">
-            <a:avLst/>
-          </a:prstGeom>
-          <a:solidFill>
-            <a:srgbClr val="C00000"/>
-          </a:solidFill>
-          <a:ln>
-            <a:noFill/>
-          </a:ln>
-        </p:spPr>
-        <p:txBody>
-          <a:bodyPr spcFirstLastPara="1" wrap="square" lIns="91425" tIns="45700" rIns="91425" bIns="45700" anchor="ctr" anchorCtr="0">
-            <a:noAutofit/>
-          </a:bodyPr>
-          <a:lstStyle/>
-          <a:p>
-            <a:pPr marL="0" marR="0" lvl="0" indent="0" algn="ctr" rtl="0">
-              <a:lnSpc>
-                <a:spcPct val="100000"/>
-              </a:lnSpc>
-              <a:spcBef>
-                <a:spcPts val="0"/>
-              </a:spcBef>
-              <a:spcAft>
-                <a:spcPts val="0"/>
-              </a:spcAft>
-              <a:buClr>
-                <a:srgbClr val="000000"/>
-              </a:buClr>
-              <a:buSzPts val="1600"/>
-              <a:buFont typeface="Arial"/>
-              <a:buNone/>
-            </a:pPr>
-            <a:r>
-              <a:rPr lang="en-US" sz="3600" dirty="0">
-                <a:solidFill>
-                  <a:schemeClr val="lt1"/>
-                </a:solidFill>
-              </a:rPr>
-              <a:t>Dead at Age 40</a:t>
-            </a:r>
-            <a:endParaRPr sz="2000" b="0" i="0" u="none" strike="noStrike" cap="none" dirty="0">
-              <a:solidFill>
-                <a:srgbClr val="000000"/>
-              </a:solidFill>
-              <a:latin typeface="Arial"/>
-              <a:ea typeface="Arial"/>
-              <a:cs typeface="Arial"/>
-              <a:sym typeface="Arial"/>
-            </a:endParaRPr>
-          </a:p>
-        </p:txBody>
-      </p:sp>
-      <p:sp>
-        <p:nvSpPr>
-          <p:cNvPr id="10" name="TextBox 9">
-            <a:extLst>
-              <a:ext uri="{FF2B5EF4-FFF2-40B4-BE49-F238E27FC236}">
-                <a16:creationId xmlns:a16="http://schemas.microsoft.com/office/drawing/2014/main" id="{5FA0D8B2-6B55-D3DC-BCBB-6FEAD86B9E72}"/>
-              </a:ext>
-            </a:extLst>
-          </p:cNvPr>
-          <p:cNvSpPr txBox="1"/>
-          <p:nvPr/>
-        </p:nvSpPr>
-        <p:spPr>
-          <a:xfrm>
-            <a:off x="312431" y="2175372"/>
-            <a:ext cx="6987941" cy="3046988"/>
-          </a:xfrm>
-          <a:prstGeom prst="rect">
-            <a:avLst/>
-          </a:prstGeom>
-          <a:solidFill>
-            <a:schemeClr val="bg1">
-              <a:alpha val="84400"/>
-            </a:schemeClr>
-          </a:solidFill>
-        </p:spPr>
-        <p:txBody>
-          <a:bodyPr wrap="square" rtlCol="0">
-            <a:spAutoFit/>
-          </a:bodyPr>
-          <a:lstStyle/>
-          <a:p>
-            <a:pPr marL="285750" indent="-285750">
-              <a:spcBef>
-                <a:spcPts val="1200"/>
-              </a:spcBef>
-              <a:buFont typeface="Arial" panose="020B0604020202020204" pitchFamily="34" charset="0"/>
-              <a:buChar char="•"/>
-            </a:pPr>
-            <a:r>
-              <a:t>DEAD at 39 in Warsaw, Poland — reportedly VOMITED liters of black liquid before dying on July 16, 2016.</a:t>
-            </a:r>
-          </a:p>
-          <a:p>
-            <a:pPr marL="285750" indent="-285750">
-              <a:spcBef>
-                <a:spcPts val="1200"/>
-              </a:spcBef>
-              <a:buFont typeface="Arial" panose="020B0604020202020204" pitchFamily="34" charset="0"/>
-              <a:buChar char="•"/>
-            </a:pPr>
-            <a:r>
-              <a:t>Days before, he texted his mother: "If anything happens to me, INVESTIGATE."</a:t>
-            </a:r>
-          </a:p>
-          <a:p>
-            <a:pPr marL="285750" indent="-285750">
-              <a:spcBef>
-                <a:spcPts val="1200"/>
-              </a:spcBef>
-              <a:buFont typeface="Arial" panose="020B0604020202020204" pitchFamily="34" charset="0"/>
-              <a:buChar char="•"/>
-            </a:pPr>
-            <a:r>
-              <a:t>British UFO researcher who investigated secret military MIND CONTROL programs and "super soldier" experiments.</a:t>
-            </a:r>
-          </a:p>
-          <a:p>
-            <a:pPr marL="285750" indent="-285750">
-              <a:spcBef>
-                <a:spcPts val="1200"/>
-              </a:spcBef>
-              <a:buFont typeface="Arial" panose="020B0604020202020204" pitchFamily="34" charset="0"/>
-              <a:buChar char="•"/>
-            </a:pPr>
-            <a:r>
-              <a:t>Father of two children. Born in Canterbury, England. His mother Vanessa fought publicly for answers.</a:t>
-            </a:r>
-          </a:p>
-          <a:p>
-            <a:pPr marL="285750" indent="-285750">
-              <a:spcBef>
-                <a:spcPts val="1200"/>
-              </a:spcBef>
-              <a:buFont typeface="Arial" panose="020B0604020202020204" pitchFamily="34" charset="0"/>
-              <a:buChar char="•"/>
-            </a:pPr>
-            <a:r>
-              <a:t>Polish authorities initially found "no evidence of a crime." His mother demanded a proper investigation.</a:t>
-            </a:r>
-          </a:p>
-        </p:txBody>
-      </p:sp>
-      <p:pic>
-        <p:nvPicPr>
-          <p:cNvPr id="16" name="Picture 15" descr="Max_Spiers.jpg"/>
-          <p:cNvPicPr>
-            <a:picLocks noChangeAspect="1"/>
-          </p:cNvPicPr>
-          <p:nvPr/>
-        </p:nvPicPr>
-        <p:blipFill>
-          <a:blip r:embed="rId2"/>
-          <a:stretch>
-            <a:fillRect/>
-          </a:stretch>
-        </p:blipFill>
-        <p:spPr>
-          <a:xfrm>
-            <a:off x="8193563" y="1100088"/>
-            <a:ext cx="2894840" cy="3884876"/>
-          </a:xfrm>
-          <a:prstGeom prst="rect">
-            <a:avLst/>
-          </a:prstGeom>
-        </p:spPr>
-      </p:pic>
     </p:spTree>
   </p:cSld>
   <p:clrMapOvr>
@@ -8240,7 +8557,7 @@
                   <a:schemeClr val="accent5"/>
                 </a:solidFill>
               </a:rPr>
-              <a:t>Why / How they Nikola Tesla:</a:t>
+              <a:t>Why / How they Max Spiers:</a:t>
             </a:r>
           </a:p>
         </p:txBody>
@@ -8480,7 +8797,7 @@
                   <a:schemeClr val="lt1"/>
                 </a:solidFill>
               </a:rPr>
-              <a:t>Nikola Tesla</a:t>
+              <a:t>Max Spiers</a:t>
             </a:r>
             <a:endParaRPr sz="3200" b="0" i="0" u="none" strike="noStrike" cap="none" dirty="0">
               <a:solidFill>
@@ -8550,7 +8867,7 @@
                   <a:schemeClr val="lt1"/>
                 </a:solidFill>
               </a:rPr>
-              <a:t>Dead at Age 87</a:t>
+              <a:t>Dead at Age 40</a:t>
             </a:r>
             <a:endParaRPr sz="2000" b="0" i="0" u="none" strike="noStrike" cap="none" dirty="0">
               <a:solidFill>
@@ -8578,8 +8895,8 @@
         </p:nvSpPr>
         <p:spPr>
           <a:xfrm>
-            <a:off x="237466" y="1867260"/>
-            <a:ext cx="7685659" cy="3477875"/>
+            <a:off x="312431" y="2175372"/>
+            <a:ext cx="6987941" cy="3046988"/>
           </a:xfrm>
           <a:prstGeom prst="rect">
             <a:avLst/>
@@ -8604,8 +8921,7 @@
               <a:buChar char="•"/>
             </a:pPr>
             <a:r>
-              <a:rPr dirty="0"/>
-              <a:t>DIED January 7, 1943 — the government SEIZED 80 trunks of his papers within hours. Twenty trunks were NEVER returned.</a:t>
+              <a:t>DEAD at 39 in Warsaw, Poland — reportedly VOMITED liters of black liquid before dying on July 16, 2016.</a:t>
             </a:r>
           </a:p>
           <a:p>
@@ -8617,8 +8933,7 @@
               <a:buChar char="•"/>
             </a:pPr>
             <a:r>
-              <a:rPr dirty="0"/>
-              <a:t>Inventor of AC electricity, wireless power, and directed energy weapons — 300+ PATENTS that built the modern world.</a:t>
+              <a:t>Days before, he texted his mother: "If anything happens to me, INVESTIGATE."</a:t>
             </a:r>
           </a:p>
           <a:p>
@@ -8630,8 +8945,7 @@
               <a:buChar char="•"/>
             </a:pPr>
             <a:r>
-              <a:rPr dirty="0"/>
-              <a:t>FBI Director Hoover personally ordered Tesla's papers classified TOP SECRET.</a:t>
+              <a:t>British UFO researcher who investigated secret military MIND CONTROL programs and "super soldier" experiments.</a:t>
             </a:r>
           </a:p>
           <a:p>
@@ -8643,8 +8957,7 @@
               <a:buChar char="•"/>
             </a:pPr>
             <a:r>
-              <a:rPr dirty="0"/>
-              <a:t>The government sent an MIT physicist to evaluate the papers and declared them "nothing of significant VALUE." Nobody believes it.</a:t>
+              <a:t>Father of two children. Born in Canterbury, England. His mother Vanessa fought publicly for answers.</a:t>
             </a:r>
           </a:p>
           <a:p>
@@ -8656,23 +8969,14 @@
               <a:buChar char="•"/>
             </a:pPr>
             <a:r>
-              <a:rPr dirty="0"/>
-              <a:t>He lit 200 lamps from 25 miles away WITHOUT WIRES in 1899. His </a:t>
-            </a:r>
-            <a:r>
-              <a:rPr dirty="0" err="1"/>
-              <a:t>Wardenclyffe</a:t>
-            </a:r>
-            <a:r>
-              <a:rPr dirty="0"/>
-              <a:t> Tower would have given the world FREE energy.</a:t>
+              <a:t>Polish authorities initially found "no evidence of a crime." His mother demanded a proper investigation.</a:t>
             </a:r>
           </a:p>
         </p:txBody>
       </p:sp>
       <p:pic>
         <p:nvPicPr>
-          <p:cNvPr id="16" name="Picture 15" descr="Nikola_Tesla.jpg"/>
+          <p:cNvPr id="16" name="Picture 15" descr="Max_Spiers.jpg"/>
           <p:cNvPicPr>
             <a:picLocks noChangeAspect="1"/>
           </p:cNvPicPr>
@@ -8686,8 +8990,8 @@
         </p:blipFill>
         <p:spPr>
           <a:xfrm>
-            <a:off x="9177168" y="1100088"/>
-            <a:ext cx="2899161" cy="3884876"/>
+            <a:off x="8193563" y="1100088"/>
+            <a:ext cx="2894840" cy="3884876"/>
           </a:xfrm>
           <a:prstGeom prst="rect">
             <a:avLst/>
@@ -8719,53 +9023,6 @@
           <a:chExt cx="0" cy="0"/>
         </a:xfrm>
       </p:grpSpPr>
-      <p:pic>
-        <p:nvPicPr>
-          <p:cNvPr id="1028" name="Picture 4" descr="Do High Frequency Gravitational Waves Explain Li &amp; Podkletnov's  Experimental Results? | by Tim Ventura | Dialogue &amp; Discourse | Medium">
-            <a:extLst>
-              <a:ext uri="{FF2B5EF4-FFF2-40B4-BE49-F238E27FC236}">
-                <a16:creationId xmlns:a16="http://schemas.microsoft.com/office/drawing/2014/main" id="{D4FB9850-B35A-1E3D-AFEB-CBF6D07248F5}"/>
-              </a:ext>
-            </a:extLst>
-          </p:cNvPr>
-          <p:cNvPicPr>
-            <a:picLocks noChangeAspect="1" noChangeArrowheads="1"/>
-          </p:cNvPicPr>
-          <p:nvPr/>
-        </p:nvPicPr>
-        <p:blipFill rotWithShape="1">
-          <a:blip r:embed="rId2">
-            <a:extLst>
-              <a:ext uri="{28A0092B-C50C-407E-A947-70E740481C1C}">
-                <a14:useLocalDpi xmlns:a14="http://schemas.microsoft.com/office/drawing/2010/main" val="0"/>
-              </a:ext>
-            </a:extLst>
-          </a:blip>
-          <a:srcRect l="26864" r="32742"/>
-          <a:stretch>
-            <a:fillRect/>
-          </a:stretch>
-        </p:blipFill>
-        <p:spPr bwMode="auto">
-          <a:xfrm>
-            <a:off x="9167204" y="926960"/>
-            <a:ext cx="2907132" cy="5004079"/>
-          </a:xfrm>
-          <a:prstGeom prst="rect">
-            <a:avLst/>
-          </a:prstGeom>
-          <a:noFill/>
-          <a:extLst>
-            <a:ext uri="{909E8E84-426E-40DD-AFC4-6F175D3DCCD1}">
-              <a14:hiddenFill xmlns:a14="http://schemas.microsoft.com/office/drawing/2010/main">
-                <a:solidFill>
-                  <a:srgbClr val="FFFFFF"/>
-                </a:solidFill>
-              </a14:hiddenFill>
-            </a:ext>
-          </a:extLst>
-        </p:spPr>
-      </p:pic>
       <p:sp>
         <p:nvSpPr>
           <p:cNvPr id="15" name="TextBox 14">
@@ -8804,7 +9061,7 @@
                   <a:schemeClr val="accent5"/>
                 </a:solidFill>
               </a:rPr>
-              <a:t>Why / How they Ning Li:</a:t>
+              <a:t>Why / How they Nikola Tesla:</a:t>
             </a:r>
           </a:p>
         </p:txBody>
@@ -9002,7 +9259,7 @@
         </p:nvSpPr>
         <p:spPr>
           <a:xfrm>
-            <a:off x="7437045" y="5409707"/>
+            <a:off x="7506336" y="4925186"/>
             <a:ext cx="4550222" cy="869505"/>
           </a:xfrm>
           <a:prstGeom prst="rect">
@@ -9044,7 +9301,7 @@
                   <a:schemeClr val="lt1"/>
                 </a:solidFill>
               </a:rPr>
-              <a:t>Ning Li</a:t>
+              <a:t>Nikola Tesla</a:t>
             </a:r>
             <a:endParaRPr sz="3200" b="0" i="0" u="none" strike="noStrike" cap="none" dirty="0">
               <a:solidFill>
@@ -9072,7 +9329,7 @@
         </p:nvSpPr>
         <p:spPr>
           <a:xfrm>
-            <a:off x="7456816" y="6165941"/>
+            <a:off x="7526107" y="5681420"/>
             <a:ext cx="4550222" cy="548230"/>
           </a:xfrm>
           <a:prstGeom prst="rect">
@@ -9114,7 +9371,7 @@
                   <a:schemeClr val="lt1"/>
                 </a:solidFill>
               </a:rPr>
-              <a:t>Dead at Age 78</a:t>
+              <a:t>Dead at Age 87</a:t>
             </a:r>
             <a:endParaRPr sz="2000" b="0" i="0" u="none" strike="noStrike" cap="none" dirty="0">
               <a:solidFill>
@@ -9142,8 +9399,8 @@
         </p:nvSpPr>
         <p:spPr>
           <a:xfrm>
-            <a:off x="191731" y="1992069"/>
-            <a:ext cx="8575144" cy="3477875"/>
+            <a:off x="237466" y="1867260"/>
+            <a:ext cx="7685659" cy="3477875"/>
           </a:xfrm>
           <a:prstGeom prst="rect">
             <a:avLst/>
@@ -9169,7 +9426,7 @@
             </a:pPr>
             <a:r>
               <a:rPr dirty="0"/>
-              <a:t>DIED July 27, 2021 — physicist who published PEER-REVIEWED theory on generating gravity using superconductors.</a:t>
+              <a:t>DIED January 7, 1943 — the government SEIZED 80 trunks of his papers within hours. Twenty trunks were NEVER returned.</a:t>
             </a:r>
           </a:p>
           <a:p>
@@ -9182,7 +9439,7 @@
             </a:pPr>
             <a:r>
               <a:rPr dirty="0"/>
-              <a:t>Received a 48,970 Department of Defense GRANT for antigravity research. Results were NEVER published.</a:t>
+              <a:t>Inventor of AC electricity, wireless power, and directed energy weapons — 300+ PATENTS that built the modern world.</a:t>
             </a:r>
           </a:p>
           <a:p>
@@ -9195,7 +9452,7 @@
             </a:pPr>
             <a:r>
               <a:rPr dirty="0"/>
-              <a:t>Her son confirmed she continued working for the DoD but stopped publishing after getting a TOP SECRET clearance.</a:t>
+              <a:t>FBI Director Hoover personally ordered Tesla's papers classified TOP SECRET.</a:t>
             </a:r>
           </a:p>
           <a:p>
@@ -9208,7 +9465,7 @@
             </a:pPr>
             <a:r>
               <a:rPr dirty="0"/>
-              <a:t>In 2014, a vehicle accident destroyed her COGNITIVE capacity — ending her ability to continue research.</a:t>
+              <a:t>The government sent an MIT physicist to evaluate the papers and declared them "nothing of significant VALUE." Nobody believes it.</a:t>
             </a:r>
           </a:p>
           <a:p>
@@ -9221,11 +9478,43 @@
             </a:pPr>
             <a:r>
               <a:rPr dirty="0"/>
-              <a:t>Chinese-American physicist at University of Alabama in Huntsville. Her work was CLASSIFIED, not abandoned.</a:t>
-            </a:r>
-          </a:p>
-        </p:txBody>
-      </p:sp>
+              <a:t>He lit 200 lamps from 25 miles away WITHOUT WIRES in 1899. His </a:t>
+            </a:r>
+            <a:r>
+              <a:rPr dirty="0" err="1"/>
+              <a:t>Wardenclyffe</a:t>
+            </a:r>
+            <a:r>
+              <a:rPr dirty="0"/>
+              <a:t> Tower would have given the world FREE energy.</a:t>
+            </a:r>
+          </a:p>
+        </p:txBody>
+      </p:sp>
+      <p:pic>
+        <p:nvPicPr>
+          <p:cNvPr id="16" name="Picture 15" descr="Nikola_Tesla.jpg"/>
+          <p:cNvPicPr>
+            <a:picLocks noChangeAspect="1"/>
+          </p:cNvPicPr>
+          <p:nvPr/>
+        </p:nvPicPr>
+        <p:blipFill>
+          <a:blip r:embed="rId2"/>
+          <a:stretch>
+            <a:fillRect/>
+          </a:stretch>
+        </p:blipFill>
+        <p:spPr>
+          <a:xfrm>
+            <a:off x="9177168" y="1100088"/>
+            <a:ext cx="2899161" cy="3884876"/>
+          </a:xfrm>
+          <a:prstGeom prst="rect">
+            <a:avLst/>
+          </a:prstGeom>
+        </p:spPr>
+      </p:pic>
     </p:spTree>
   </p:cSld>
   <p:clrMapOvr>

--- a/Physics/Physics_Murders.pptx
+++ b/Physics/Physics_Murders.pptx
@@ -4,6 +4,9 @@
   <p:sldMasterIdLst>
     <p:sldMasterId id="2147483648" r:id="rId1"/>
   </p:sldMasterIdLst>
+  <p:notesMasterIdLst>
+    <p:notesMasterId r:id="rId15"/>
+  </p:notesMasterIdLst>
   <p:sldIdLst>
     <p:sldId id="272" r:id="rId2"/>
     <p:sldId id="323" r:id="rId3"/>
@@ -124,6 +127,1447 @@
 </p:presentation>
 </file>
 
+<file path=ppt/notesMasters/notesMaster1.xml><?xml version="1.0" encoding="utf-8"?>
+<p:notesMaster xmlns:a="http://schemas.openxmlformats.org/drawingml/2006/main" xmlns:r="http://schemas.openxmlformats.org/officeDocument/2006/relationships" xmlns:p="http://schemas.openxmlformats.org/presentationml/2006/main">
+  <p:cSld>
+    <p:bg>
+      <p:bgRef idx="1001">
+        <a:schemeClr val="bg1"/>
+      </p:bgRef>
+    </p:bg>
+    <p:spTree>
+      <p:nvGrpSpPr>
+        <p:cNvPr id="1" name=""/>
+        <p:cNvGrpSpPr/>
+        <p:nvPr/>
+      </p:nvGrpSpPr>
+      <p:grpSpPr>
+        <a:xfrm>
+          <a:off x="0" y="0"/>
+          <a:ext cx="0" cy="0"/>
+          <a:chOff x="0" y="0"/>
+          <a:chExt cx="0" cy="0"/>
+        </a:xfrm>
+      </p:grpSpPr>
+      <p:sp>
+        <p:nvSpPr>
+          <p:cNvPr id="2" name="Header Placeholder 1"/>
+          <p:cNvSpPr>
+            <a:spLocks noGrp="1"/>
+          </p:cNvSpPr>
+          <p:nvPr>
+            <p:ph type="hdr" sz="quarter"/>
+          </p:nvPr>
+        </p:nvSpPr>
+        <p:spPr>
+          <a:xfrm>
+            <a:off x="0" y="0"/>
+            <a:ext cx="2971800" cy="458788"/>
+          </a:xfrm>
+          <a:prstGeom prst="rect">
+            <a:avLst/>
+          </a:prstGeom>
+        </p:spPr>
+        <p:txBody>
+          <a:bodyPr vert="horz" lIns="91440" tIns="45720" rIns="91440" bIns="45720" rtlCol="0"/>
+          <a:lstStyle>
+            <a:lvl1pPr algn="l">
+              <a:defRPr sz="1200"/>
+            </a:lvl1pPr>
+          </a:lstStyle>
+          <a:p>
+            <a:endParaRPr lang="en-US"/>
+          </a:p>
+        </p:txBody>
+      </p:sp>
+      <p:sp>
+        <p:nvSpPr>
+          <p:cNvPr id="3" name="Date Placeholder 2"/>
+          <p:cNvSpPr>
+            <a:spLocks noGrp="1"/>
+          </p:cNvSpPr>
+          <p:nvPr>
+            <p:ph type="dt" idx="1"/>
+          </p:nvPr>
+        </p:nvSpPr>
+        <p:spPr>
+          <a:xfrm>
+            <a:off x="3884613" y="0"/>
+            <a:ext cx="2971800" cy="458788"/>
+          </a:xfrm>
+          <a:prstGeom prst="rect">
+            <a:avLst/>
+          </a:prstGeom>
+        </p:spPr>
+        <p:txBody>
+          <a:bodyPr vert="horz" lIns="91440" tIns="45720" rIns="91440" bIns="45720" rtlCol="0"/>
+          <a:lstStyle>
+            <a:lvl1pPr algn="r">
+              <a:defRPr sz="1200"/>
+            </a:lvl1pPr>
+          </a:lstStyle>
+          <a:p>
+            <a:fld id="{EF338DA5-8184-4C47-BB83-93BD68CF2D63}" type="datetimeFigureOut">
+              <a:rPr lang="en-US" smtClean="0"/>
+              <a:t>3/31/26</a:t>
+            </a:fld>
+            <a:endParaRPr lang="en-US"/>
+          </a:p>
+        </p:txBody>
+      </p:sp>
+      <p:sp>
+        <p:nvSpPr>
+          <p:cNvPr id="4" name="Slide Image Placeholder 3"/>
+          <p:cNvSpPr>
+            <a:spLocks noGrp="1" noRot="1" noChangeAspect="1"/>
+          </p:cNvSpPr>
+          <p:nvPr>
+            <p:ph type="sldImg" idx="2"/>
+          </p:nvPr>
+        </p:nvSpPr>
+        <p:spPr>
+          <a:xfrm>
+            <a:off x="685800" y="1143000"/>
+            <a:ext cx="5486400" cy="3086100"/>
+          </a:xfrm>
+          <a:prstGeom prst="rect">
+            <a:avLst/>
+          </a:prstGeom>
+          <a:noFill/>
+          <a:ln w="12700">
+            <a:solidFill>
+              <a:prstClr val="black"/>
+            </a:solidFill>
+          </a:ln>
+        </p:spPr>
+        <p:txBody>
+          <a:bodyPr vert="horz" lIns="91440" tIns="45720" rIns="91440" bIns="45720" rtlCol="0" anchor="ctr"/>
+          <a:lstStyle/>
+          <a:p>
+            <a:endParaRPr lang="en-US"/>
+          </a:p>
+        </p:txBody>
+      </p:sp>
+      <p:sp>
+        <p:nvSpPr>
+          <p:cNvPr id="5" name="Notes Placeholder 4"/>
+          <p:cNvSpPr>
+            <a:spLocks noGrp="1"/>
+          </p:cNvSpPr>
+          <p:nvPr>
+            <p:ph type="body" sz="quarter" idx="3"/>
+          </p:nvPr>
+        </p:nvSpPr>
+        <p:spPr>
+          <a:xfrm>
+            <a:off x="685800" y="4400550"/>
+            <a:ext cx="5486400" cy="3600450"/>
+          </a:xfrm>
+          <a:prstGeom prst="rect">
+            <a:avLst/>
+          </a:prstGeom>
+        </p:spPr>
+        <p:txBody>
+          <a:bodyPr vert="horz" lIns="91440" tIns="45720" rIns="91440" bIns="45720" rtlCol="0"/>
+          <a:lstStyle/>
+          <a:p>
+            <a:pPr lvl="0"/>
+            <a:r>
+              <a:rPr lang="en-US"/>
+              <a:t>Click to edit Master text styles</a:t>
+            </a:r>
+          </a:p>
+          <a:p>
+            <a:pPr lvl="1"/>
+            <a:r>
+              <a:rPr lang="en-US"/>
+              <a:t>Second level</a:t>
+            </a:r>
+          </a:p>
+          <a:p>
+            <a:pPr lvl="2"/>
+            <a:r>
+              <a:rPr lang="en-US"/>
+              <a:t>Third level</a:t>
+            </a:r>
+          </a:p>
+          <a:p>
+            <a:pPr lvl="3"/>
+            <a:r>
+              <a:rPr lang="en-US"/>
+              <a:t>Fourth level</a:t>
+            </a:r>
+          </a:p>
+          <a:p>
+            <a:pPr lvl="4"/>
+            <a:r>
+              <a:rPr lang="en-US"/>
+              <a:t>Fifth level</a:t>
+            </a:r>
+          </a:p>
+        </p:txBody>
+      </p:sp>
+      <p:sp>
+        <p:nvSpPr>
+          <p:cNvPr id="6" name="Footer Placeholder 5"/>
+          <p:cNvSpPr>
+            <a:spLocks noGrp="1"/>
+          </p:cNvSpPr>
+          <p:nvPr>
+            <p:ph type="ftr" sz="quarter" idx="4"/>
+          </p:nvPr>
+        </p:nvSpPr>
+        <p:spPr>
+          <a:xfrm>
+            <a:off x="0" y="8685213"/>
+            <a:ext cx="2971800" cy="458787"/>
+          </a:xfrm>
+          <a:prstGeom prst="rect">
+            <a:avLst/>
+          </a:prstGeom>
+        </p:spPr>
+        <p:txBody>
+          <a:bodyPr vert="horz" lIns="91440" tIns="45720" rIns="91440" bIns="45720" rtlCol="0" anchor="b"/>
+          <a:lstStyle>
+            <a:lvl1pPr algn="l">
+              <a:defRPr sz="1200"/>
+            </a:lvl1pPr>
+          </a:lstStyle>
+          <a:p>
+            <a:endParaRPr lang="en-US"/>
+          </a:p>
+        </p:txBody>
+      </p:sp>
+      <p:sp>
+        <p:nvSpPr>
+          <p:cNvPr id="7" name="Slide Number Placeholder 6"/>
+          <p:cNvSpPr>
+            <a:spLocks noGrp="1"/>
+          </p:cNvSpPr>
+          <p:nvPr>
+            <p:ph type="sldNum" sz="quarter" idx="5"/>
+          </p:nvPr>
+        </p:nvSpPr>
+        <p:spPr>
+          <a:xfrm>
+            <a:off x="3884613" y="8685213"/>
+            <a:ext cx="2971800" cy="458787"/>
+          </a:xfrm>
+          <a:prstGeom prst="rect">
+            <a:avLst/>
+          </a:prstGeom>
+        </p:spPr>
+        <p:txBody>
+          <a:bodyPr vert="horz" lIns="91440" tIns="45720" rIns="91440" bIns="45720" rtlCol="0" anchor="b"/>
+          <a:lstStyle>
+            <a:lvl1pPr algn="r">
+              <a:defRPr sz="1200"/>
+            </a:lvl1pPr>
+          </a:lstStyle>
+          <a:p>
+            <a:fld id="{BA2AC833-F51B-3D43-A4DD-25ACF7110A58}" type="slidenum">
+              <a:rPr lang="en-US" smtClean="0"/>
+              <a:t>‹#›</a:t>
+            </a:fld>
+            <a:endParaRPr lang="en-US"/>
+          </a:p>
+        </p:txBody>
+      </p:sp>
+    </p:spTree>
+    <p:extLst>
+      <p:ext uri="{BB962C8B-B14F-4D97-AF65-F5344CB8AC3E}">
+        <p14:creationId xmlns:p14="http://schemas.microsoft.com/office/powerpoint/2010/main" val="3942480781"/>
+      </p:ext>
+    </p:extLst>
+  </p:cSld>
+  <p:clrMap bg1="lt1" tx1="dk1" bg2="lt2" tx2="dk2" accent1="accent1" accent2="accent2" accent3="accent3" accent4="accent4" accent5="accent5" accent6="accent6" hlink="hlink" folHlink="folHlink"/>
+  <p:notesStyle>
+    <a:lvl1pPr marL="0" algn="l" defTabSz="914400" rtl="0" eaLnBrk="1" latinLnBrk="0" hangingPunct="1">
+      <a:defRPr sz="1200" kern="1200">
+        <a:solidFill>
+          <a:schemeClr val="tx1"/>
+        </a:solidFill>
+        <a:latin typeface="+mn-lt"/>
+        <a:ea typeface="+mn-ea"/>
+        <a:cs typeface="+mn-cs"/>
+      </a:defRPr>
+    </a:lvl1pPr>
+    <a:lvl2pPr marL="457200" algn="l" defTabSz="914400" rtl="0" eaLnBrk="1" latinLnBrk="0" hangingPunct="1">
+      <a:defRPr sz="1200" kern="1200">
+        <a:solidFill>
+          <a:schemeClr val="tx1"/>
+        </a:solidFill>
+        <a:latin typeface="+mn-lt"/>
+        <a:ea typeface="+mn-ea"/>
+        <a:cs typeface="+mn-cs"/>
+      </a:defRPr>
+    </a:lvl2pPr>
+    <a:lvl3pPr marL="914400" algn="l" defTabSz="914400" rtl="0" eaLnBrk="1" latinLnBrk="0" hangingPunct="1">
+      <a:defRPr sz="1200" kern="1200">
+        <a:solidFill>
+          <a:schemeClr val="tx1"/>
+        </a:solidFill>
+        <a:latin typeface="+mn-lt"/>
+        <a:ea typeface="+mn-ea"/>
+        <a:cs typeface="+mn-cs"/>
+      </a:defRPr>
+    </a:lvl3pPr>
+    <a:lvl4pPr marL="1371600" algn="l" defTabSz="914400" rtl="0" eaLnBrk="1" latinLnBrk="0" hangingPunct="1">
+      <a:defRPr sz="1200" kern="1200">
+        <a:solidFill>
+          <a:schemeClr val="tx1"/>
+        </a:solidFill>
+        <a:latin typeface="+mn-lt"/>
+        <a:ea typeface="+mn-ea"/>
+        <a:cs typeface="+mn-cs"/>
+      </a:defRPr>
+    </a:lvl4pPr>
+    <a:lvl5pPr marL="1828800" algn="l" defTabSz="914400" rtl="0" eaLnBrk="1" latinLnBrk="0" hangingPunct="1">
+      <a:defRPr sz="1200" kern="1200">
+        <a:solidFill>
+          <a:schemeClr val="tx1"/>
+        </a:solidFill>
+        <a:latin typeface="+mn-lt"/>
+        <a:ea typeface="+mn-ea"/>
+        <a:cs typeface="+mn-cs"/>
+      </a:defRPr>
+    </a:lvl5pPr>
+    <a:lvl6pPr marL="2286000" algn="l" defTabSz="914400" rtl="0" eaLnBrk="1" latinLnBrk="0" hangingPunct="1">
+      <a:defRPr sz="1200" kern="1200">
+        <a:solidFill>
+          <a:schemeClr val="tx1"/>
+        </a:solidFill>
+        <a:latin typeface="+mn-lt"/>
+        <a:ea typeface="+mn-ea"/>
+        <a:cs typeface="+mn-cs"/>
+      </a:defRPr>
+    </a:lvl6pPr>
+    <a:lvl7pPr marL="2743200" algn="l" defTabSz="914400" rtl="0" eaLnBrk="1" latinLnBrk="0" hangingPunct="1">
+      <a:defRPr sz="1200" kern="1200">
+        <a:solidFill>
+          <a:schemeClr val="tx1"/>
+        </a:solidFill>
+        <a:latin typeface="+mn-lt"/>
+        <a:ea typeface="+mn-ea"/>
+        <a:cs typeface="+mn-cs"/>
+      </a:defRPr>
+    </a:lvl7pPr>
+    <a:lvl8pPr marL="3200400" algn="l" defTabSz="914400" rtl="0" eaLnBrk="1" latinLnBrk="0" hangingPunct="1">
+      <a:defRPr sz="1200" kern="1200">
+        <a:solidFill>
+          <a:schemeClr val="tx1"/>
+        </a:solidFill>
+        <a:latin typeface="+mn-lt"/>
+        <a:ea typeface="+mn-ea"/>
+        <a:cs typeface="+mn-cs"/>
+      </a:defRPr>
+    </a:lvl8pPr>
+    <a:lvl9pPr marL="3657600" algn="l" defTabSz="914400" rtl="0" eaLnBrk="1" latinLnBrk="0" hangingPunct="1">
+      <a:defRPr sz="1200" kern="1200">
+        <a:solidFill>
+          <a:schemeClr val="tx1"/>
+        </a:solidFill>
+        <a:latin typeface="+mn-lt"/>
+        <a:ea typeface="+mn-ea"/>
+        <a:cs typeface="+mn-cs"/>
+      </a:defRPr>
+    </a:lvl9pPr>
+  </p:notesStyle>
+</p:notesMaster>
+</file>
+
+<file path=ppt/notesSlides/notesSlide1.xml><?xml version="1.0" encoding="utf-8"?>
+<p:notes xmlns:a="http://schemas.openxmlformats.org/drawingml/2006/main" xmlns:r="http://schemas.openxmlformats.org/officeDocument/2006/relationships" xmlns:p="http://schemas.openxmlformats.org/presentationml/2006/main">
+  <p:cSld>
+    <p:spTree>
+      <p:nvGrpSpPr>
+        <p:cNvPr id="1" name=""/>
+        <p:cNvGrpSpPr/>
+        <p:nvPr/>
+      </p:nvGrpSpPr>
+      <p:grpSpPr>
+        <a:xfrm>
+          <a:off x="0" y="0"/>
+          <a:ext cx="0" cy="0"/>
+          <a:chOff x="0" y="0"/>
+          <a:chExt cx="0" cy="0"/>
+        </a:xfrm>
+      </p:grpSpPr>
+      <p:sp>
+        <p:nvSpPr>
+          <p:cNvPr id="2" name="Slide Image Placeholder 1"/>
+          <p:cNvSpPr>
+            <a:spLocks noGrp="1" noRot="1" noChangeAspect="1"/>
+          </p:cNvSpPr>
+          <p:nvPr>
+            <p:ph type="sldImg"/>
+          </p:nvPr>
+        </p:nvSpPr>
+        <p:spPr/>
+      </p:sp>
+      <p:sp>
+        <p:nvSpPr>
+          <p:cNvPr id="3" name="Notes Placeholder 2"/>
+          <p:cNvSpPr>
+            <a:spLocks noGrp="1"/>
+          </p:cNvSpPr>
+          <p:nvPr>
+            <p:ph type="body" idx="1"/>
+          </p:nvPr>
+        </p:nvSpPr>
+        <p:spPr/>
+        <p:txBody>
+          <a:bodyPr/>
+          <a:lstStyle/>
+          <a:p>
+            <a:endParaRPr lang="en-US"/>
+          </a:p>
+        </p:txBody>
+      </p:sp>
+      <p:sp>
+        <p:nvSpPr>
+          <p:cNvPr id="4" name="Slide Number Placeholder 3"/>
+          <p:cNvSpPr>
+            <a:spLocks noGrp="1"/>
+          </p:cNvSpPr>
+          <p:nvPr>
+            <p:ph type="sldNum" sz="quarter" idx="5"/>
+          </p:nvPr>
+        </p:nvSpPr>
+        <p:spPr/>
+        <p:txBody>
+          <a:bodyPr/>
+          <a:lstStyle/>
+          <a:p>
+            <a:fld id="{BA2AC833-F51B-3D43-A4DD-25ACF7110A58}" type="slidenum">
+              <a:rPr lang="en-US" smtClean="0"/>
+              <a:t>1</a:t>
+            </a:fld>
+            <a:endParaRPr lang="en-US"/>
+          </a:p>
+        </p:txBody>
+      </p:sp>
+    </p:spTree>
+    <p:extLst>
+      <p:ext uri="{BB962C8B-B14F-4D97-AF65-F5344CB8AC3E}">
+        <p14:creationId xmlns:p14="http://schemas.microsoft.com/office/powerpoint/2010/main" val="4073512951"/>
+      </p:ext>
+    </p:extLst>
+  </p:cSld>
+  <p:clrMapOvr>
+    <a:masterClrMapping/>
+  </p:clrMapOvr>
+</p:notes>
+</file>
+
+<file path=ppt/notesSlides/notesSlide10.xml><?xml version="1.0" encoding="utf-8"?>
+<p:notes xmlns:a="http://schemas.openxmlformats.org/drawingml/2006/main" xmlns:r="http://schemas.openxmlformats.org/officeDocument/2006/relationships" xmlns:p="http://schemas.openxmlformats.org/presentationml/2006/main">
+  <p:cSld>
+    <p:spTree>
+      <p:nvGrpSpPr>
+        <p:cNvPr id="1" name=""/>
+        <p:cNvGrpSpPr/>
+        <p:nvPr/>
+      </p:nvGrpSpPr>
+      <p:grpSpPr>
+        <a:xfrm>
+          <a:off x="0" y="0"/>
+          <a:ext cx="0" cy="0"/>
+          <a:chOff x="0" y="0"/>
+          <a:chExt cx="0" cy="0"/>
+        </a:xfrm>
+      </p:grpSpPr>
+      <p:sp>
+        <p:nvSpPr>
+          <p:cNvPr id="2" name="Slide Image Placeholder 1"/>
+          <p:cNvSpPr>
+            <a:spLocks noGrp="1" noRot="1" noChangeAspect="1"/>
+          </p:cNvSpPr>
+          <p:nvPr>
+            <p:ph type="sldImg"/>
+          </p:nvPr>
+        </p:nvSpPr>
+        <p:spPr/>
+      </p:sp>
+      <p:sp>
+        <p:nvSpPr>
+          <p:cNvPr id="3" name="Notes Placeholder 2"/>
+          <p:cNvSpPr>
+            <a:spLocks noGrp="1"/>
+          </p:cNvSpPr>
+          <p:nvPr>
+            <p:ph type="body" idx="1"/>
+          </p:nvPr>
+        </p:nvSpPr>
+        <p:spPr/>
+        <p:txBody>
+          <a:bodyPr/>
+          <a:lstStyle/>
+          <a:p>
+            <a:endParaRPr lang="en-US"/>
+          </a:p>
+        </p:txBody>
+      </p:sp>
+      <p:sp>
+        <p:nvSpPr>
+          <p:cNvPr id="4" name="Slide Number Placeholder 3"/>
+          <p:cNvSpPr>
+            <a:spLocks noGrp="1"/>
+          </p:cNvSpPr>
+          <p:nvPr>
+            <p:ph type="sldNum" sz="quarter" idx="5"/>
+          </p:nvPr>
+        </p:nvSpPr>
+        <p:spPr/>
+        <p:txBody>
+          <a:bodyPr/>
+          <a:lstStyle/>
+          <a:p>
+            <a:fld id="{BA2AC833-F51B-3D43-A4DD-25ACF7110A58}" type="slidenum">
+              <a:rPr lang="en-US" smtClean="0"/>
+              <a:t>10</a:t>
+            </a:fld>
+            <a:endParaRPr lang="en-US"/>
+          </a:p>
+        </p:txBody>
+      </p:sp>
+    </p:spTree>
+    <p:extLst>
+      <p:ext uri="{BB962C8B-B14F-4D97-AF65-F5344CB8AC3E}">
+        <p14:creationId xmlns:p14="http://schemas.microsoft.com/office/powerpoint/2010/main" val="2245599342"/>
+      </p:ext>
+    </p:extLst>
+  </p:cSld>
+  <p:clrMapOvr>
+    <a:masterClrMapping/>
+  </p:clrMapOvr>
+</p:notes>
+</file>
+
+<file path=ppt/notesSlides/notesSlide11.xml><?xml version="1.0" encoding="utf-8"?>
+<p:notes xmlns:a="http://schemas.openxmlformats.org/drawingml/2006/main" xmlns:r="http://schemas.openxmlformats.org/officeDocument/2006/relationships" xmlns:p="http://schemas.openxmlformats.org/presentationml/2006/main">
+  <p:cSld>
+    <p:spTree>
+      <p:nvGrpSpPr>
+        <p:cNvPr id="1" name=""/>
+        <p:cNvGrpSpPr/>
+        <p:nvPr/>
+      </p:nvGrpSpPr>
+      <p:grpSpPr>
+        <a:xfrm>
+          <a:off x="0" y="0"/>
+          <a:ext cx="0" cy="0"/>
+          <a:chOff x="0" y="0"/>
+          <a:chExt cx="0" cy="0"/>
+        </a:xfrm>
+      </p:grpSpPr>
+      <p:sp>
+        <p:nvSpPr>
+          <p:cNvPr id="2" name="Slide Image Placeholder 1"/>
+          <p:cNvSpPr>
+            <a:spLocks noGrp="1" noRot="1" noChangeAspect="1"/>
+          </p:cNvSpPr>
+          <p:nvPr>
+            <p:ph type="sldImg"/>
+          </p:nvPr>
+        </p:nvSpPr>
+        <p:spPr/>
+      </p:sp>
+      <p:sp>
+        <p:nvSpPr>
+          <p:cNvPr id="3" name="Notes Placeholder 2"/>
+          <p:cNvSpPr>
+            <a:spLocks noGrp="1"/>
+          </p:cNvSpPr>
+          <p:nvPr>
+            <p:ph type="body" idx="1"/>
+          </p:nvPr>
+        </p:nvSpPr>
+        <p:spPr/>
+        <p:txBody>
+          <a:bodyPr/>
+          <a:lstStyle/>
+          <a:p>
+            <a:endParaRPr lang="en-US"/>
+          </a:p>
+        </p:txBody>
+      </p:sp>
+      <p:sp>
+        <p:nvSpPr>
+          <p:cNvPr id="4" name="Slide Number Placeholder 3"/>
+          <p:cNvSpPr>
+            <a:spLocks noGrp="1"/>
+          </p:cNvSpPr>
+          <p:nvPr>
+            <p:ph type="sldNum" sz="quarter" idx="5"/>
+          </p:nvPr>
+        </p:nvSpPr>
+        <p:spPr/>
+        <p:txBody>
+          <a:bodyPr/>
+          <a:lstStyle/>
+          <a:p>
+            <a:fld id="{BA2AC833-F51B-3D43-A4DD-25ACF7110A58}" type="slidenum">
+              <a:rPr lang="en-US" smtClean="0"/>
+              <a:t>11</a:t>
+            </a:fld>
+            <a:endParaRPr lang="en-US"/>
+          </a:p>
+        </p:txBody>
+      </p:sp>
+    </p:spTree>
+    <p:extLst>
+      <p:ext uri="{BB962C8B-B14F-4D97-AF65-F5344CB8AC3E}">
+        <p14:creationId xmlns:p14="http://schemas.microsoft.com/office/powerpoint/2010/main" val="2239028395"/>
+      </p:ext>
+    </p:extLst>
+  </p:cSld>
+  <p:clrMapOvr>
+    <a:masterClrMapping/>
+  </p:clrMapOvr>
+</p:notes>
+</file>
+
+<file path=ppt/notesSlides/notesSlide12.xml><?xml version="1.0" encoding="utf-8"?>
+<p:notes xmlns:a="http://schemas.openxmlformats.org/drawingml/2006/main" xmlns:r="http://schemas.openxmlformats.org/officeDocument/2006/relationships" xmlns:p="http://schemas.openxmlformats.org/presentationml/2006/main">
+  <p:cSld>
+    <p:spTree>
+      <p:nvGrpSpPr>
+        <p:cNvPr id="1" name=""/>
+        <p:cNvGrpSpPr/>
+        <p:nvPr/>
+      </p:nvGrpSpPr>
+      <p:grpSpPr>
+        <a:xfrm>
+          <a:off x="0" y="0"/>
+          <a:ext cx="0" cy="0"/>
+          <a:chOff x="0" y="0"/>
+          <a:chExt cx="0" cy="0"/>
+        </a:xfrm>
+      </p:grpSpPr>
+      <p:sp>
+        <p:nvSpPr>
+          <p:cNvPr id="2" name="Slide Image Placeholder 1"/>
+          <p:cNvSpPr>
+            <a:spLocks noGrp="1" noRot="1" noChangeAspect="1"/>
+          </p:cNvSpPr>
+          <p:nvPr>
+            <p:ph type="sldImg"/>
+          </p:nvPr>
+        </p:nvSpPr>
+        <p:spPr/>
+      </p:sp>
+      <p:sp>
+        <p:nvSpPr>
+          <p:cNvPr id="3" name="Notes Placeholder 2"/>
+          <p:cNvSpPr>
+            <a:spLocks noGrp="1"/>
+          </p:cNvSpPr>
+          <p:nvPr>
+            <p:ph type="body" idx="1"/>
+          </p:nvPr>
+        </p:nvSpPr>
+        <p:spPr/>
+        <p:txBody>
+          <a:bodyPr/>
+          <a:lstStyle/>
+          <a:p>
+            <a:endParaRPr lang="en-US"/>
+          </a:p>
+        </p:txBody>
+      </p:sp>
+      <p:sp>
+        <p:nvSpPr>
+          <p:cNvPr id="4" name="Slide Number Placeholder 3"/>
+          <p:cNvSpPr>
+            <a:spLocks noGrp="1"/>
+          </p:cNvSpPr>
+          <p:nvPr>
+            <p:ph type="sldNum" sz="quarter" idx="5"/>
+          </p:nvPr>
+        </p:nvSpPr>
+        <p:spPr/>
+        <p:txBody>
+          <a:bodyPr/>
+          <a:lstStyle/>
+          <a:p>
+            <a:fld id="{BA2AC833-F51B-3D43-A4DD-25ACF7110A58}" type="slidenum">
+              <a:rPr lang="en-US" smtClean="0"/>
+              <a:t>12</a:t>
+            </a:fld>
+            <a:endParaRPr lang="en-US"/>
+          </a:p>
+        </p:txBody>
+      </p:sp>
+    </p:spTree>
+    <p:extLst>
+      <p:ext uri="{BB962C8B-B14F-4D97-AF65-F5344CB8AC3E}">
+        <p14:creationId xmlns:p14="http://schemas.microsoft.com/office/powerpoint/2010/main" val="1242183692"/>
+      </p:ext>
+    </p:extLst>
+  </p:cSld>
+  <p:clrMapOvr>
+    <a:masterClrMapping/>
+  </p:clrMapOvr>
+</p:notes>
+</file>
+
+<file path=ppt/notesSlides/notesSlide13.xml><?xml version="1.0" encoding="utf-8"?>
+<p:notes xmlns:a="http://schemas.openxmlformats.org/drawingml/2006/main" xmlns:r="http://schemas.openxmlformats.org/officeDocument/2006/relationships" xmlns:p="http://schemas.openxmlformats.org/presentationml/2006/main">
+  <p:cSld>
+    <p:spTree>
+      <p:nvGrpSpPr>
+        <p:cNvPr id="1" name=""/>
+        <p:cNvGrpSpPr/>
+        <p:nvPr/>
+      </p:nvGrpSpPr>
+      <p:grpSpPr>
+        <a:xfrm>
+          <a:off x="0" y="0"/>
+          <a:ext cx="0" cy="0"/>
+          <a:chOff x="0" y="0"/>
+          <a:chExt cx="0" cy="0"/>
+        </a:xfrm>
+      </p:grpSpPr>
+      <p:sp>
+        <p:nvSpPr>
+          <p:cNvPr id="2" name="Slide Image Placeholder 1"/>
+          <p:cNvSpPr>
+            <a:spLocks noGrp="1" noRot="1" noChangeAspect="1"/>
+          </p:cNvSpPr>
+          <p:nvPr>
+            <p:ph type="sldImg"/>
+          </p:nvPr>
+        </p:nvSpPr>
+        <p:spPr/>
+      </p:sp>
+      <p:sp>
+        <p:nvSpPr>
+          <p:cNvPr id="3" name="Notes Placeholder 2"/>
+          <p:cNvSpPr>
+            <a:spLocks noGrp="1"/>
+          </p:cNvSpPr>
+          <p:nvPr>
+            <p:ph type="body" idx="1"/>
+          </p:nvPr>
+        </p:nvSpPr>
+        <p:spPr/>
+        <p:txBody>
+          <a:bodyPr/>
+          <a:lstStyle/>
+          <a:p>
+            <a:endParaRPr lang="en-US"/>
+          </a:p>
+        </p:txBody>
+      </p:sp>
+      <p:sp>
+        <p:nvSpPr>
+          <p:cNvPr id="4" name="Slide Number Placeholder 3"/>
+          <p:cNvSpPr>
+            <a:spLocks noGrp="1"/>
+          </p:cNvSpPr>
+          <p:nvPr>
+            <p:ph type="sldNum" sz="quarter" idx="5"/>
+          </p:nvPr>
+        </p:nvSpPr>
+        <p:spPr/>
+        <p:txBody>
+          <a:bodyPr/>
+          <a:lstStyle/>
+          <a:p>
+            <a:fld id="{BA2AC833-F51B-3D43-A4DD-25ACF7110A58}" type="slidenum">
+              <a:rPr lang="en-US" smtClean="0"/>
+              <a:t>13</a:t>
+            </a:fld>
+            <a:endParaRPr lang="en-US"/>
+          </a:p>
+        </p:txBody>
+      </p:sp>
+    </p:spTree>
+    <p:extLst>
+      <p:ext uri="{BB962C8B-B14F-4D97-AF65-F5344CB8AC3E}">
+        <p14:creationId xmlns:p14="http://schemas.microsoft.com/office/powerpoint/2010/main" val="797437026"/>
+      </p:ext>
+    </p:extLst>
+  </p:cSld>
+  <p:clrMapOvr>
+    <a:masterClrMapping/>
+  </p:clrMapOvr>
+</p:notes>
+</file>
+
+<file path=ppt/notesSlides/notesSlide2.xml><?xml version="1.0" encoding="utf-8"?>
+<p:notes xmlns:a="http://schemas.openxmlformats.org/drawingml/2006/main" xmlns:r="http://schemas.openxmlformats.org/officeDocument/2006/relationships" xmlns:p="http://schemas.openxmlformats.org/presentationml/2006/main">
+  <p:cSld>
+    <p:spTree>
+      <p:nvGrpSpPr>
+        <p:cNvPr id="1" name=""/>
+        <p:cNvGrpSpPr/>
+        <p:nvPr/>
+      </p:nvGrpSpPr>
+      <p:grpSpPr>
+        <a:xfrm>
+          <a:off x="0" y="0"/>
+          <a:ext cx="0" cy="0"/>
+          <a:chOff x="0" y="0"/>
+          <a:chExt cx="0" cy="0"/>
+        </a:xfrm>
+      </p:grpSpPr>
+      <p:sp>
+        <p:nvSpPr>
+          <p:cNvPr id="2" name="Slide Image Placeholder 1"/>
+          <p:cNvSpPr>
+            <a:spLocks noGrp="1" noRot="1" noChangeAspect="1"/>
+          </p:cNvSpPr>
+          <p:nvPr>
+            <p:ph type="sldImg"/>
+          </p:nvPr>
+        </p:nvSpPr>
+        <p:spPr/>
+      </p:sp>
+      <p:sp>
+        <p:nvSpPr>
+          <p:cNvPr id="3" name="Notes Placeholder 2"/>
+          <p:cNvSpPr>
+            <a:spLocks noGrp="1"/>
+          </p:cNvSpPr>
+          <p:nvPr>
+            <p:ph type="body" idx="1"/>
+          </p:nvPr>
+        </p:nvSpPr>
+        <p:spPr/>
+        <p:txBody>
+          <a:bodyPr/>
+          <a:lstStyle/>
+          <a:p>
+            <a:endParaRPr lang="en-US"/>
+          </a:p>
+        </p:txBody>
+      </p:sp>
+      <p:sp>
+        <p:nvSpPr>
+          <p:cNvPr id="4" name="Slide Number Placeholder 3"/>
+          <p:cNvSpPr>
+            <a:spLocks noGrp="1"/>
+          </p:cNvSpPr>
+          <p:nvPr>
+            <p:ph type="sldNum" sz="quarter" idx="5"/>
+          </p:nvPr>
+        </p:nvSpPr>
+        <p:spPr/>
+        <p:txBody>
+          <a:bodyPr/>
+          <a:lstStyle/>
+          <a:p>
+            <a:fld id="{BA2AC833-F51B-3D43-A4DD-25ACF7110A58}" type="slidenum">
+              <a:rPr lang="en-US" smtClean="0"/>
+              <a:t>2</a:t>
+            </a:fld>
+            <a:endParaRPr lang="en-US"/>
+          </a:p>
+        </p:txBody>
+      </p:sp>
+    </p:spTree>
+    <p:extLst>
+      <p:ext uri="{BB962C8B-B14F-4D97-AF65-F5344CB8AC3E}">
+        <p14:creationId xmlns:p14="http://schemas.microsoft.com/office/powerpoint/2010/main" val="1378169919"/>
+      </p:ext>
+    </p:extLst>
+  </p:cSld>
+  <p:clrMapOvr>
+    <a:masterClrMapping/>
+  </p:clrMapOvr>
+</p:notes>
+</file>
+
+<file path=ppt/notesSlides/notesSlide3.xml><?xml version="1.0" encoding="utf-8"?>
+<p:notes xmlns:a="http://schemas.openxmlformats.org/drawingml/2006/main" xmlns:r="http://schemas.openxmlformats.org/officeDocument/2006/relationships" xmlns:p="http://schemas.openxmlformats.org/presentationml/2006/main">
+  <p:cSld>
+    <p:spTree>
+      <p:nvGrpSpPr>
+        <p:cNvPr id="1" name=""/>
+        <p:cNvGrpSpPr/>
+        <p:nvPr/>
+      </p:nvGrpSpPr>
+      <p:grpSpPr>
+        <a:xfrm>
+          <a:off x="0" y="0"/>
+          <a:ext cx="0" cy="0"/>
+          <a:chOff x="0" y="0"/>
+          <a:chExt cx="0" cy="0"/>
+        </a:xfrm>
+      </p:grpSpPr>
+      <p:sp>
+        <p:nvSpPr>
+          <p:cNvPr id="2" name="Slide Image Placeholder 1"/>
+          <p:cNvSpPr>
+            <a:spLocks noGrp="1" noRot="1" noChangeAspect="1"/>
+          </p:cNvSpPr>
+          <p:nvPr>
+            <p:ph type="sldImg"/>
+          </p:nvPr>
+        </p:nvSpPr>
+        <p:spPr/>
+      </p:sp>
+      <p:sp>
+        <p:nvSpPr>
+          <p:cNvPr id="3" name="Notes Placeholder 2"/>
+          <p:cNvSpPr>
+            <a:spLocks noGrp="1"/>
+          </p:cNvSpPr>
+          <p:nvPr>
+            <p:ph type="body" idx="1"/>
+          </p:nvPr>
+        </p:nvSpPr>
+        <p:spPr/>
+        <p:txBody>
+          <a:bodyPr/>
+          <a:lstStyle/>
+          <a:p>
+            <a:endParaRPr lang="en-US"/>
+          </a:p>
+        </p:txBody>
+      </p:sp>
+      <p:sp>
+        <p:nvSpPr>
+          <p:cNvPr id="4" name="Slide Number Placeholder 3"/>
+          <p:cNvSpPr>
+            <a:spLocks noGrp="1"/>
+          </p:cNvSpPr>
+          <p:nvPr>
+            <p:ph type="sldNum" sz="quarter" idx="5"/>
+          </p:nvPr>
+        </p:nvSpPr>
+        <p:spPr/>
+        <p:txBody>
+          <a:bodyPr/>
+          <a:lstStyle/>
+          <a:p>
+            <a:fld id="{BA2AC833-F51B-3D43-A4DD-25ACF7110A58}" type="slidenum">
+              <a:rPr lang="en-US" smtClean="0"/>
+              <a:t>3</a:t>
+            </a:fld>
+            <a:endParaRPr lang="en-US"/>
+          </a:p>
+        </p:txBody>
+      </p:sp>
+    </p:spTree>
+    <p:extLst>
+      <p:ext uri="{BB962C8B-B14F-4D97-AF65-F5344CB8AC3E}">
+        <p14:creationId xmlns:p14="http://schemas.microsoft.com/office/powerpoint/2010/main" val="4175306999"/>
+      </p:ext>
+    </p:extLst>
+  </p:cSld>
+  <p:clrMapOvr>
+    <a:masterClrMapping/>
+  </p:clrMapOvr>
+</p:notes>
+</file>
+
+<file path=ppt/notesSlides/notesSlide4.xml><?xml version="1.0" encoding="utf-8"?>
+<p:notes xmlns:a="http://schemas.openxmlformats.org/drawingml/2006/main" xmlns:r="http://schemas.openxmlformats.org/officeDocument/2006/relationships" xmlns:p="http://schemas.openxmlformats.org/presentationml/2006/main">
+  <p:cSld>
+    <p:spTree>
+      <p:nvGrpSpPr>
+        <p:cNvPr id="1" name=""/>
+        <p:cNvGrpSpPr/>
+        <p:nvPr/>
+      </p:nvGrpSpPr>
+      <p:grpSpPr>
+        <a:xfrm>
+          <a:off x="0" y="0"/>
+          <a:ext cx="0" cy="0"/>
+          <a:chOff x="0" y="0"/>
+          <a:chExt cx="0" cy="0"/>
+        </a:xfrm>
+      </p:grpSpPr>
+      <p:sp>
+        <p:nvSpPr>
+          <p:cNvPr id="2" name="Slide Image Placeholder 1"/>
+          <p:cNvSpPr>
+            <a:spLocks noGrp="1" noRot="1" noChangeAspect="1"/>
+          </p:cNvSpPr>
+          <p:nvPr>
+            <p:ph type="sldImg"/>
+          </p:nvPr>
+        </p:nvSpPr>
+        <p:spPr/>
+      </p:sp>
+      <p:sp>
+        <p:nvSpPr>
+          <p:cNvPr id="3" name="Notes Placeholder 2"/>
+          <p:cNvSpPr>
+            <a:spLocks noGrp="1"/>
+          </p:cNvSpPr>
+          <p:nvPr>
+            <p:ph type="body" idx="1"/>
+          </p:nvPr>
+        </p:nvSpPr>
+        <p:spPr/>
+        <p:txBody>
+          <a:bodyPr/>
+          <a:lstStyle/>
+          <a:p>
+            <a:endParaRPr lang="en-US"/>
+          </a:p>
+        </p:txBody>
+      </p:sp>
+      <p:sp>
+        <p:nvSpPr>
+          <p:cNvPr id="4" name="Slide Number Placeholder 3"/>
+          <p:cNvSpPr>
+            <a:spLocks noGrp="1"/>
+          </p:cNvSpPr>
+          <p:nvPr>
+            <p:ph type="sldNum" sz="quarter" idx="5"/>
+          </p:nvPr>
+        </p:nvSpPr>
+        <p:spPr/>
+        <p:txBody>
+          <a:bodyPr/>
+          <a:lstStyle/>
+          <a:p>
+            <a:fld id="{BA2AC833-F51B-3D43-A4DD-25ACF7110A58}" type="slidenum">
+              <a:rPr lang="en-US" smtClean="0"/>
+              <a:t>4</a:t>
+            </a:fld>
+            <a:endParaRPr lang="en-US"/>
+          </a:p>
+        </p:txBody>
+      </p:sp>
+    </p:spTree>
+    <p:extLst>
+      <p:ext uri="{BB962C8B-B14F-4D97-AF65-F5344CB8AC3E}">
+        <p14:creationId xmlns:p14="http://schemas.microsoft.com/office/powerpoint/2010/main" val="2096653866"/>
+      </p:ext>
+    </p:extLst>
+  </p:cSld>
+  <p:clrMapOvr>
+    <a:masterClrMapping/>
+  </p:clrMapOvr>
+</p:notes>
+</file>
+
+<file path=ppt/notesSlides/notesSlide5.xml><?xml version="1.0" encoding="utf-8"?>
+<p:notes xmlns:a="http://schemas.openxmlformats.org/drawingml/2006/main" xmlns:r="http://schemas.openxmlformats.org/officeDocument/2006/relationships" xmlns:p="http://schemas.openxmlformats.org/presentationml/2006/main">
+  <p:cSld>
+    <p:spTree>
+      <p:nvGrpSpPr>
+        <p:cNvPr id="1" name=""/>
+        <p:cNvGrpSpPr/>
+        <p:nvPr/>
+      </p:nvGrpSpPr>
+      <p:grpSpPr>
+        <a:xfrm>
+          <a:off x="0" y="0"/>
+          <a:ext cx="0" cy="0"/>
+          <a:chOff x="0" y="0"/>
+          <a:chExt cx="0" cy="0"/>
+        </a:xfrm>
+      </p:grpSpPr>
+      <p:sp>
+        <p:nvSpPr>
+          <p:cNvPr id="2" name="Slide Image Placeholder 1"/>
+          <p:cNvSpPr>
+            <a:spLocks noGrp="1" noRot="1" noChangeAspect="1"/>
+          </p:cNvSpPr>
+          <p:nvPr>
+            <p:ph type="sldImg"/>
+          </p:nvPr>
+        </p:nvSpPr>
+        <p:spPr/>
+      </p:sp>
+      <p:sp>
+        <p:nvSpPr>
+          <p:cNvPr id="3" name="Notes Placeholder 2"/>
+          <p:cNvSpPr>
+            <a:spLocks noGrp="1"/>
+          </p:cNvSpPr>
+          <p:nvPr>
+            <p:ph type="body" idx="1"/>
+          </p:nvPr>
+        </p:nvSpPr>
+        <p:spPr/>
+        <p:txBody>
+          <a:bodyPr/>
+          <a:lstStyle/>
+          <a:p>
+            <a:endParaRPr lang="en-US"/>
+          </a:p>
+        </p:txBody>
+      </p:sp>
+      <p:sp>
+        <p:nvSpPr>
+          <p:cNvPr id="4" name="Slide Number Placeholder 3"/>
+          <p:cNvSpPr>
+            <a:spLocks noGrp="1"/>
+          </p:cNvSpPr>
+          <p:nvPr>
+            <p:ph type="sldNum" sz="quarter" idx="5"/>
+          </p:nvPr>
+        </p:nvSpPr>
+        <p:spPr/>
+        <p:txBody>
+          <a:bodyPr/>
+          <a:lstStyle/>
+          <a:p>
+            <a:fld id="{BA2AC833-F51B-3D43-A4DD-25ACF7110A58}" type="slidenum">
+              <a:rPr lang="en-US" smtClean="0"/>
+              <a:t>5</a:t>
+            </a:fld>
+            <a:endParaRPr lang="en-US"/>
+          </a:p>
+        </p:txBody>
+      </p:sp>
+    </p:spTree>
+    <p:extLst>
+      <p:ext uri="{BB962C8B-B14F-4D97-AF65-F5344CB8AC3E}">
+        <p14:creationId xmlns:p14="http://schemas.microsoft.com/office/powerpoint/2010/main" val="2956187726"/>
+      </p:ext>
+    </p:extLst>
+  </p:cSld>
+  <p:clrMapOvr>
+    <a:masterClrMapping/>
+  </p:clrMapOvr>
+</p:notes>
+</file>
+
+<file path=ppt/notesSlides/notesSlide6.xml><?xml version="1.0" encoding="utf-8"?>
+<p:notes xmlns:a="http://schemas.openxmlformats.org/drawingml/2006/main" xmlns:r="http://schemas.openxmlformats.org/officeDocument/2006/relationships" xmlns:p="http://schemas.openxmlformats.org/presentationml/2006/main">
+  <p:cSld>
+    <p:spTree>
+      <p:nvGrpSpPr>
+        <p:cNvPr id="1" name=""/>
+        <p:cNvGrpSpPr/>
+        <p:nvPr/>
+      </p:nvGrpSpPr>
+      <p:grpSpPr>
+        <a:xfrm>
+          <a:off x="0" y="0"/>
+          <a:ext cx="0" cy="0"/>
+          <a:chOff x="0" y="0"/>
+          <a:chExt cx="0" cy="0"/>
+        </a:xfrm>
+      </p:grpSpPr>
+      <p:sp>
+        <p:nvSpPr>
+          <p:cNvPr id="2" name="Slide Image Placeholder 1"/>
+          <p:cNvSpPr>
+            <a:spLocks noGrp="1" noRot="1" noChangeAspect="1"/>
+          </p:cNvSpPr>
+          <p:nvPr>
+            <p:ph type="sldImg"/>
+          </p:nvPr>
+        </p:nvSpPr>
+        <p:spPr/>
+      </p:sp>
+      <p:sp>
+        <p:nvSpPr>
+          <p:cNvPr id="3" name="Notes Placeholder 2"/>
+          <p:cNvSpPr>
+            <a:spLocks noGrp="1"/>
+          </p:cNvSpPr>
+          <p:nvPr>
+            <p:ph type="body" idx="1"/>
+          </p:nvPr>
+        </p:nvSpPr>
+        <p:spPr/>
+        <p:txBody>
+          <a:bodyPr/>
+          <a:lstStyle/>
+          <a:p>
+            <a:endParaRPr lang="en-US"/>
+          </a:p>
+        </p:txBody>
+      </p:sp>
+      <p:sp>
+        <p:nvSpPr>
+          <p:cNvPr id="4" name="Slide Number Placeholder 3"/>
+          <p:cNvSpPr>
+            <a:spLocks noGrp="1"/>
+          </p:cNvSpPr>
+          <p:nvPr>
+            <p:ph type="sldNum" sz="quarter" idx="5"/>
+          </p:nvPr>
+        </p:nvSpPr>
+        <p:spPr/>
+        <p:txBody>
+          <a:bodyPr/>
+          <a:lstStyle/>
+          <a:p>
+            <a:fld id="{BA2AC833-F51B-3D43-A4DD-25ACF7110A58}" type="slidenum">
+              <a:rPr lang="en-US" smtClean="0"/>
+              <a:t>6</a:t>
+            </a:fld>
+            <a:endParaRPr lang="en-US"/>
+          </a:p>
+        </p:txBody>
+      </p:sp>
+    </p:spTree>
+    <p:extLst>
+      <p:ext uri="{BB962C8B-B14F-4D97-AF65-F5344CB8AC3E}">
+        <p14:creationId xmlns:p14="http://schemas.microsoft.com/office/powerpoint/2010/main" val="1735554936"/>
+      </p:ext>
+    </p:extLst>
+  </p:cSld>
+  <p:clrMapOvr>
+    <a:masterClrMapping/>
+  </p:clrMapOvr>
+</p:notes>
+</file>
+
+<file path=ppt/notesSlides/notesSlide7.xml><?xml version="1.0" encoding="utf-8"?>
+<p:notes xmlns:a="http://schemas.openxmlformats.org/drawingml/2006/main" xmlns:r="http://schemas.openxmlformats.org/officeDocument/2006/relationships" xmlns:p="http://schemas.openxmlformats.org/presentationml/2006/main">
+  <p:cSld>
+    <p:spTree>
+      <p:nvGrpSpPr>
+        <p:cNvPr id="1" name=""/>
+        <p:cNvGrpSpPr/>
+        <p:nvPr/>
+      </p:nvGrpSpPr>
+      <p:grpSpPr>
+        <a:xfrm>
+          <a:off x="0" y="0"/>
+          <a:ext cx="0" cy="0"/>
+          <a:chOff x="0" y="0"/>
+          <a:chExt cx="0" cy="0"/>
+        </a:xfrm>
+      </p:grpSpPr>
+      <p:sp>
+        <p:nvSpPr>
+          <p:cNvPr id="2" name="Slide Image Placeholder 1"/>
+          <p:cNvSpPr>
+            <a:spLocks noGrp="1" noRot="1" noChangeAspect="1"/>
+          </p:cNvSpPr>
+          <p:nvPr>
+            <p:ph type="sldImg"/>
+          </p:nvPr>
+        </p:nvSpPr>
+        <p:spPr/>
+      </p:sp>
+      <p:sp>
+        <p:nvSpPr>
+          <p:cNvPr id="3" name="Notes Placeholder 2"/>
+          <p:cNvSpPr>
+            <a:spLocks noGrp="1"/>
+          </p:cNvSpPr>
+          <p:nvPr>
+            <p:ph type="body" idx="1"/>
+          </p:nvPr>
+        </p:nvSpPr>
+        <p:spPr/>
+        <p:txBody>
+          <a:bodyPr/>
+          <a:lstStyle/>
+          <a:p>
+            <a:endParaRPr lang="en-US"/>
+          </a:p>
+        </p:txBody>
+      </p:sp>
+      <p:sp>
+        <p:nvSpPr>
+          <p:cNvPr id="4" name="Slide Number Placeholder 3"/>
+          <p:cNvSpPr>
+            <a:spLocks noGrp="1"/>
+          </p:cNvSpPr>
+          <p:nvPr>
+            <p:ph type="sldNum" sz="quarter" idx="5"/>
+          </p:nvPr>
+        </p:nvSpPr>
+        <p:spPr/>
+        <p:txBody>
+          <a:bodyPr/>
+          <a:lstStyle/>
+          <a:p>
+            <a:fld id="{BA2AC833-F51B-3D43-A4DD-25ACF7110A58}" type="slidenum">
+              <a:rPr lang="en-US" smtClean="0"/>
+              <a:t>7</a:t>
+            </a:fld>
+            <a:endParaRPr lang="en-US"/>
+          </a:p>
+        </p:txBody>
+      </p:sp>
+    </p:spTree>
+    <p:extLst>
+      <p:ext uri="{BB962C8B-B14F-4D97-AF65-F5344CB8AC3E}">
+        <p14:creationId xmlns:p14="http://schemas.microsoft.com/office/powerpoint/2010/main" val="2497013238"/>
+      </p:ext>
+    </p:extLst>
+  </p:cSld>
+  <p:clrMapOvr>
+    <a:masterClrMapping/>
+  </p:clrMapOvr>
+</p:notes>
+</file>
+
+<file path=ppt/notesSlides/notesSlide8.xml><?xml version="1.0" encoding="utf-8"?>
+<p:notes xmlns:a="http://schemas.openxmlformats.org/drawingml/2006/main" xmlns:r="http://schemas.openxmlformats.org/officeDocument/2006/relationships" xmlns:p="http://schemas.openxmlformats.org/presentationml/2006/main">
+  <p:cSld>
+    <p:spTree>
+      <p:nvGrpSpPr>
+        <p:cNvPr id="1" name=""/>
+        <p:cNvGrpSpPr/>
+        <p:nvPr/>
+      </p:nvGrpSpPr>
+      <p:grpSpPr>
+        <a:xfrm>
+          <a:off x="0" y="0"/>
+          <a:ext cx="0" cy="0"/>
+          <a:chOff x="0" y="0"/>
+          <a:chExt cx="0" cy="0"/>
+        </a:xfrm>
+      </p:grpSpPr>
+      <p:sp>
+        <p:nvSpPr>
+          <p:cNvPr id="2" name="Slide Image Placeholder 1"/>
+          <p:cNvSpPr>
+            <a:spLocks noGrp="1" noRot="1" noChangeAspect="1"/>
+          </p:cNvSpPr>
+          <p:nvPr>
+            <p:ph type="sldImg"/>
+          </p:nvPr>
+        </p:nvSpPr>
+        <p:spPr/>
+      </p:sp>
+      <p:sp>
+        <p:nvSpPr>
+          <p:cNvPr id="3" name="Notes Placeholder 2"/>
+          <p:cNvSpPr>
+            <a:spLocks noGrp="1"/>
+          </p:cNvSpPr>
+          <p:nvPr>
+            <p:ph type="body" idx="1"/>
+          </p:nvPr>
+        </p:nvSpPr>
+        <p:spPr/>
+        <p:txBody>
+          <a:bodyPr/>
+          <a:lstStyle/>
+          <a:p>
+            <a:endParaRPr lang="en-US"/>
+          </a:p>
+        </p:txBody>
+      </p:sp>
+      <p:sp>
+        <p:nvSpPr>
+          <p:cNvPr id="4" name="Slide Number Placeholder 3"/>
+          <p:cNvSpPr>
+            <a:spLocks noGrp="1"/>
+          </p:cNvSpPr>
+          <p:nvPr>
+            <p:ph type="sldNum" sz="quarter" idx="5"/>
+          </p:nvPr>
+        </p:nvSpPr>
+        <p:spPr/>
+        <p:txBody>
+          <a:bodyPr/>
+          <a:lstStyle/>
+          <a:p>
+            <a:fld id="{BA2AC833-F51B-3D43-A4DD-25ACF7110A58}" type="slidenum">
+              <a:rPr lang="en-US" smtClean="0"/>
+              <a:t>8</a:t>
+            </a:fld>
+            <a:endParaRPr lang="en-US"/>
+          </a:p>
+        </p:txBody>
+      </p:sp>
+    </p:spTree>
+    <p:extLst>
+      <p:ext uri="{BB962C8B-B14F-4D97-AF65-F5344CB8AC3E}">
+        <p14:creationId xmlns:p14="http://schemas.microsoft.com/office/powerpoint/2010/main" val="3139008040"/>
+      </p:ext>
+    </p:extLst>
+  </p:cSld>
+  <p:clrMapOvr>
+    <a:masterClrMapping/>
+  </p:clrMapOvr>
+</p:notes>
+</file>
+
+<file path=ppt/notesSlides/notesSlide9.xml><?xml version="1.0" encoding="utf-8"?>
+<p:notes xmlns:a="http://schemas.openxmlformats.org/drawingml/2006/main" xmlns:r="http://schemas.openxmlformats.org/officeDocument/2006/relationships" xmlns:p="http://schemas.openxmlformats.org/presentationml/2006/main">
+  <p:cSld>
+    <p:spTree>
+      <p:nvGrpSpPr>
+        <p:cNvPr id="1" name=""/>
+        <p:cNvGrpSpPr/>
+        <p:nvPr/>
+      </p:nvGrpSpPr>
+      <p:grpSpPr>
+        <a:xfrm>
+          <a:off x="0" y="0"/>
+          <a:ext cx="0" cy="0"/>
+          <a:chOff x="0" y="0"/>
+          <a:chExt cx="0" cy="0"/>
+        </a:xfrm>
+      </p:grpSpPr>
+      <p:sp>
+        <p:nvSpPr>
+          <p:cNvPr id="2" name="Slide Image Placeholder 1"/>
+          <p:cNvSpPr>
+            <a:spLocks noGrp="1" noRot="1" noChangeAspect="1"/>
+          </p:cNvSpPr>
+          <p:nvPr>
+            <p:ph type="sldImg"/>
+          </p:nvPr>
+        </p:nvSpPr>
+        <p:spPr/>
+      </p:sp>
+      <p:sp>
+        <p:nvSpPr>
+          <p:cNvPr id="3" name="Notes Placeholder 2"/>
+          <p:cNvSpPr>
+            <a:spLocks noGrp="1"/>
+          </p:cNvSpPr>
+          <p:nvPr>
+            <p:ph type="body" idx="1"/>
+          </p:nvPr>
+        </p:nvSpPr>
+        <p:spPr/>
+        <p:txBody>
+          <a:bodyPr/>
+          <a:lstStyle/>
+          <a:p>
+            <a:endParaRPr lang="en-US"/>
+          </a:p>
+        </p:txBody>
+      </p:sp>
+      <p:sp>
+        <p:nvSpPr>
+          <p:cNvPr id="4" name="Slide Number Placeholder 3"/>
+          <p:cNvSpPr>
+            <a:spLocks noGrp="1"/>
+          </p:cNvSpPr>
+          <p:nvPr>
+            <p:ph type="sldNum" sz="quarter" idx="5"/>
+          </p:nvPr>
+        </p:nvSpPr>
+        <p:spPr/>
+        <p:txBody>
+          <a:bodyPr/>
+          <a:lstStyle/>
+          <a:p>
+            <a:fld id="{BA2AC833-F51B-3D43-A4DD-25ACF7110A58}" type="slidenum">
+              <a:rPr lang="en-US" smtClean="0"/>
+              <a:t>9</a:t>
+            </a:fld>
+            <a:endParaRPr lang="en-US"/>
+          </a:p>
+        </p:txBody>
+      </p:sp>
+    </p:spTree>
+    <p:extLst>
+      <p:ext uri="{BB962C8B-B14F-4D97-AF65-F5344CB8AC3E}">
+        <p14:creationId xmlns:p14="http://schemas.microsoft.com/office/powerpoint/2010/main" val="2486007057"/>
+      </p:ext>
+    </p:extLst>
+  </p:cSld>
+  <p:clrMapOvr>
+    <a:masterClrMapping/>
+  </p:clrMapOvr>
+</p:notes>
+</file>
+
 <file path=ppt/slideLayouts/slideLayout1.xml><?xml version="1.0" encoding="utf-8"?>
 <p:sldLayout xmlns:a="http://schemas.openxmlformats.org/drawingml/2006/main" xmlns:r="http://schemas.openxmlformats.org/officeDocument/2006/relationships" xmlns:p="http://schemas.openxmlformats.org/presentationml/2006/main" type="title" preserve="1">
   <p:cSld name="Title Slide">
@@ -271,7 +1715,7 @@
           <a:p>
             <a:fld id="{220BD450-5107-424A-9054-544A25915243}" type="datetimeFigureOut">
               <a:rPr lang="en-US" smtClean="0"/>
-              <a:t>3/30/26</a:t>
+              <a:t>3/31/26</a:t>
             </a:fld>
             <a:endParaRPr lang="en-US"/>
           </a:p>
@@ -469,7 +1913,7 @@
           <a:p>
             <a:fld id="{220BD450-5107-424A-9054-544A25915243}" type="datetimeFigureOut">
               <a:rPr lang="en-US" smtClean="0"/>
-              <a:t>3/30/26</a:t>
+              <a:t>3/31/26</a:t>
             </a:fld>
             <a:endParaRPr lang="en-US"/>
           </a:p>
@@ -677,7 +2121,7 @@
           <a:p>
             <a:fld id="{220BD450-5107-424A-9054-544A25915243}" type="datetimeFigureOut">
               <a:rPr lang="en-US" smtClean="0"/>
-              <a:t>3/30/26</a:t>
+              <a:t>3/31/26</a:t>
             </a:fld>
             <a:endParaRPr lang="en-US"/>
           </a:p>
@@ -875,7 +2319,7 @@
           <a:p>
             <a:fld id="{220BD450-5107-424A-9054-544A25915243}" type="datetimeFigureOut">
               <a:rPr lang="en-US" smtClean="0"/>
-              <a:t>3/30/26</a:t>
+              <a:t>3/31/26</a:t>
             </a:fld>
             <a:endParaRPr lang="en-US"/>
           </a:p>
@@ -1150,7 +2594,7 @@
           <a:p>
             <a:fld id="{220BD450-5107-424A-9054-544A25915243}" type="datetimeFigureOut">
               <a:rPr lang="en-US" smtClean="0"/>
-              <a:t>3/30/26</a:t>
+              <a:t>3/31/26</a:t>
             </a:fld>
             <a:endParaRPr lang="en-US"/>
           </a:p>
@@ -1415,7 +2859,7 @@
           <a:p>
             <a:fld id="{220BD450-5107-424A-9054-544A25915243}" type="datetimeFigureOut">
               <a:rPr lang="en-US" smtClean="0"/>
-              <a:t>3/30/26</a:t>
+              <a:t>3/31/26</a:t>
             </a:fld>
             <a:endParaRPr lang="en-US"/>
           </a:p>
@@ -1827,7 +3271,7 @@
           <a:p>
             <a:fld id="{220BD450-5107-424A-9054-544A25915243}" type="datetimeFigureOut">
               <a:rPr lang="en-US" smtClean="0"/>
-              <a:t>3/30/26</a:t>
+              <a:t>3/31/26</a:t>
             </a:fld>
             <a:endParaRPr lang="en-US"/>
           </a:p>
@@ -1968,7 +3412,7 @@
           <a:p>
             <a:fld id="{220BD450-5107-424A-9054-544A25915243}" type="datetimeFigureOut">
               <a:rPr lang="en-US" smtClean="0"/>
-              <a:t>3/30/26</a:t>
+              <a:t>3/31/26</a:t>
             </a:fld>
             <a:endParaRPr lang="en-US"/>
           </a:p>
@@ -2081,7 +3525,7 @@
           <a:p>
             <a:fld id="{220BD450-5107-424A-9054-544A25915243}" type="datetimeFigureOut">
               <a:rPr lang="en-US" smtClean="0"/>
-              <a:t>3/30/26</a:t>
+              <a:t>3/31/26</a:t>
             </a:fld>
             <a:endParaRPr lang="en-US"/>
           </a:p>
@@ -2392,7 +3836,7 @@
           <a:p>
             <a:fld id="{220BD450-5107-424A-9054-544A25915243}" type="datetimeFigureOut">
               <a:rPr lang="en-US" smtClean="0"/>
-              <a:t>3/30/26</a:t>
+              <a:t>3/31/26</a:t>
             </a:fld>
             <a:endParaRPr lang="en-US"/>
           </a:p>
@@ -2680,7 +4124,7 @@
           <a:p>
             <a:fld id="{220BD450-5107-424A-9054-544A25915243}" type="datetimeFigureOut">
               <a:rPr lang="en-US" smtClean="0"/>
-              <a:t>3/30/26</a:t>
+              <a:t>3/31/26</a:t>
             </a:fld>
             <a:endParaRPr lang="en-US"/>
           </a:p>
@@ -2921,7 +4365,7 @@
           <a:p>
             <a:fld id="{220BD450-5107-424A-9054-544A25915243}" type="datetimeFigureOut">
               <a:rPr lang="en-US" smtClean="0"/>
-              <a:t>3/30/26</a:t>
+              <a:t>3/31/26</a:t>
             </a:fld>
             <a:endParaRPr lang="en-US"/>
           </a:p>
@@ -3353,7 +4797,7 @@
           <p:nvPr/>
         </p:nvPicPr>
         <p:blipFill>
-          <a:blip r:embed="rId2">
+          <a:blip r:embed="rId3">
             <a:extLst>
               <a:ext uri="{28A0092B-C50C-407E-A947-70E740481C1C}">
                 <a14:useLocalDpi xmlns:a14="http://schemas.microsoft.com/office/drawing/2010/main" val="0"/>
@@ -3815,7 +5259,7 @@
           <p:nvPr/>
         </p:nvPicPr>
         <p:blipFill rotWithShape="1">
-          <a:blip r:embed="rId2">
+          <a:blip r:embed="rId3">
             <a:extLst>
               <a:ext uri="{28A0092B-C50C-407E-A947-70E740481C1C}">
                 <a14:useLocalDpi xmlns:a14="http://schemas.microsoft.com/office/drawing/2010/main" val="0"/>
@@ -4731,7 +6175,7 @@
           <p:nvPr/>
         </p:nvPicPr>
         <p:blipFill>
-          <a:blip r:embed="rId2"/>
+          <a:blip r:embed="rId3"/>
           <a:stretch>
             <a:fillRect/>
           </a:stretch>
@@ -5100,7 +6544,7 @@
           <p:nvPr/>
         </p:nvPicPr>
         <p:blipFill>
-          <a:blip r:embed="rId2"/>
+          <a:blip r:embed="rId3"/>
           <a:stretch>
             <a:fillRect/>
           </a:stretch>
@@ -5684,7 +7128,7 @@
           <p:nvPr/>
         </p:nvPicPr>
         <p:blipFill>
-          <a:blip r:embed="rId2"/>
+          <a:blip r:embed="rId3"/>
           <a:stretch>
             <a:fillRect/>
           </a:stretch>
@@ -6435,7 +7879,7 @@
           <p:nvPr/>
         </p:nvPicPr>
         <p:blipFill>
-          <a:blip r:embed="rId2"/>
+          <a:blip r:embed="rId3"/>
           <a:stretch>
             <a:fillRect/>
           </a:stretch>
@@ -6939,7 +8383,7 @@
           <p:nvPr/>
         </p:nvPicPr>
         <p:blipFill>
-          <a:blip r:embed="rId2"/>
+          <a:blip r:embed="rId3"/>
           <a:stretch>
             <a:fillRect/>
           </a:stretch>
@@ -7381,6 +8825,7 @@
               <a:buChar char="•"/>
             </a:pPr>
             <a:r>
+              <a:rPr dirty="0"/>
               <a:t>STRUCK AND KILLED by a tractor-trailer while cycling on October 10, 2018. He was 74.</a:t>
             </a:r>
           </a:p>
@@ -7393,6 +8838,7 @@
               <a:buChar char="•"/>
             </a:pPr>
             <a:r>
+              <a:rPr dirty="0"/>
               <a:t>Former Air Force sergeant with TOP SECRET CRYPTO clearance who testified about structures on the far side of the MOON.</a:t>
             </a:r>
           </a:p>
@@ -7405,6 +8851,7 @@
               <a:buChar char="•"/>
             </a:pPr>
             <a:r>
+              <a:rPr dirty="0"/>
               <a:t>At the 2001 Disclosure Project, he swore under oath that he was shown NASA Lunar Orbiter photos of ARTIFICIAL structures.</a:t>
             </a:r>
           </a:p>
@@ -7417,6 +8864,7 @@
               <a:buChar char="•"/>
             </a:pPr>
             <a:r>
+              <a:rPr dirty="0"/>
               <a:t>Worked as a precision electronics technician at Langley Air Force Base processing CLASSIFIED imagery.</a:t>
             </a:r>
           </a:p>
@@ -7429,6 +8877,7 @@
               <a:buChar char="•"/>
             </a:pPr>
             <a:r>
+              <a:rPr dirty="0"/>
               <a:t>Born and raised in Lansing, New York — killed in Lansing, New York. Youngest of seven children.</a:t>
             </a:r>
           </a:p>
@@ -7443,7 +8892,7 @@
           <p:nvPr/>
         </p:nvPicPr>
         <p:blipFill>
-          <a:blip r:embed="rId2"/>
+          <a:blip r:embed="rId3"/>
           <a:stretch>
             <a:fillRect/>
           </a:stretch>
@@ -7498,7 +8947,7 @@
           <p:nvPr/>
         </p:nvPicPr>
         <p:blipFill>
-          <a:blip r:embed="rId2"/>
+          <a:blip r:embed="rId3"/>
           <a:stretch>
             <a:fillRect/>
           </a:stretch>
@@ -8013,7 +9462,7 @@
           <p:nvPr/>
         </p:nvPicPr>
         <p:blipFill>
-          <a:blip r:embed="rId2">
+          <a:blip r:embed="rId3">
             <a:extLst>
               <a:ext uri="{28A0092B-C50C-407E-A947-70E740481C1C}">
                 <a14:useLocalDpi xmlns:a14="http://schemas.microsoft.com/office/drawing/2010/main" val="0"/>
@@ -8983,7 +10432,7 @@
           <p:nvPr/>
         </p:nvPicPr>
         <p:blipFill>
-          <a:blip r:embed="rId2"/>
+          <a:blip r:embed="rId3"/>
           <a:stretch>
             <a:fillRect/>
           </a:stretch>
@@ -9500,7 +10949,7 @@
           <p:nvPr/>
         </p:nvPicPr>
         <p:blipFill>
-          <a:blip r:embed="rId2"/>
+          <a:blip r:embed="rId3"/>
           <a:stretch>
             <a:fillRect/>
           </a:stretch>
@@ -9836,4 +11285,319 @@
     </a:ext>
   </a:extLst>
 </a:theme>
+</file>
+
+<file path=ppt/theme/theme2.xml><?xml version="1.0" encoding="utf-8"?>
+<a:theme xmlns:a="http://schemas.openxmlformats.org/drawingml/2006/main" name="Office Theme">
+  <a:themeElements>
+    <a:clrScheme name="Office">
+      <a:dk1>
+        <a:sysClr val="windowText" lastClr="000000"/>
+      </a:dk1>
+      <a:lt1>
+        <a:sysClr val="window" lastClr="FFFFFF"/>
+      </a:lt1>
+      <a:dk2>
+        <a:srgbClr val="0E2841"/>
+      </a:dk2>
+      <a:lt2>
+        <a:srgbClr val="E8E8E8"/>
+      </a:lt2>
+      <a:accent1>
+        <a:srgbClr val="156082"/>
+      </a:accent1>
+      <a:accent2>
+        <a:srgbClr val="E97132"/>
+      </a:accent2>
+      <a:accent3>
+        <a:srgbClr val="196B24"/>
+      </a:accent3>
+      <a:accent4>
+        <a:srgbClr val="0F9ED5"/>
+      </a:accent4>
+      <a:accent5>
+        <a:srgbClr val="A02B93"/>
+      </a:accent5>
+      <a:accent6>
+        <a:srgbClr val="4EA72E"/>
+      </a:accent6>
+      <a:hlink>
+        <a:srgbClr val="467886"/>
+      </a:hlink>
+      <a:folHlink>
+        <a:srgbClr val="96607D"/>
+      </a:folHlink>
+    </a:clrScheme>
+    <a:fontScheme name="Office">
+      <a:majorFont>
+        <a:latin typeface="Aptos Display" panose="02110004020202020204"/>
+        <a:ea typeface=""/>
+        <a:cs typeface=""/>
+        <a:font script="Jpan" typeface="游ゴシック Light"/>
+        <a:font script="Hang" typeface="맑은 고딕"/>
+        <a:font script="Hans" typeface="等线 Light"/>
+        <a:font script="Hant" typeface="新細明體"/>
+        <a:font script="Arab" typeface="Times New Roman"/>
+        <a:font script="Hebr" typeface="Times New Roman"/>
+        <a:font script="Thai" typeface="Angsana New"/>
+        <a:font script="Ethi" typeface="Nyala"/>
+        <a:font script="Beng" typeface="Vrinda"/>
+        <a:font script="Gujr" typeface="Shruti"/>
+        <a:font script="Khmr" typeface="MoolBoran"/>
+        <a:font script="Knda" typeface="Tunga"/>
+        <a:font script="Guru" typeface="Raavi"/>
+        <a:font script="Cans" typeface="Euphemia"/>
+        <a:font script="Cher" typeface="Plantagenet Cherokee"/>
+        <a:font script="Yiii" typeface="Microsoft Yi Baiti"/>
+        <a:font script="Tibt" typeface="Microsoft Himalaya"/>
+        <a:font script="Thaa" typeface="MV Boli"/>
+        <a:font script="Deva" typeface="Mangal"/>
+        <a:font script="Telu" typeface="Gautami"/>
+        <a:font script="Taml" typeface="Latha"/>
+        <a:font script="Syrc" typeface="Estrangelo Edessa"/>
+        <a:font script="Orya" typeface="Kalinga"/>
+        <a:font script="Mlym" typeface="Kartika"/>
+        <a:font script="Laoo" typeface="DokChampa"/>
+        <a:font script="Sinh" typeface="Iskoola Pota"/>
+        <a:font script="Mong" typeface="Mongolian Baiti"/>
+        <a:font script="Viet" typeface="Times New Roman"/>
+        <a:font script="Uigh" typeface="Microsoft Uighur"/>
+        <a:font script="Geor" typeface="Sylfaen"/>
+        <a:font script="Armn" typeface="Arial"/>
+        <a:font script="Bugi" typeface="Leelawadee UI"/>
+        <a:font script="Bopo" typeface="Microsoft JhengHei"/>
+        <a:font script="Java" typeface="Javanese Text"/>
+        <a:font script="Lisu" typeface="Segoe UI"/>
+        <a:font script="Mymr" typeface="Myanmar Text"/>
+        <a:font script="Nkoo" typeface="Ebrima"/>
+        <a:font script="Olck" typeface="Nirmala UI"/>
+        <a:font script="Osma" typeface="Ebrima"/>
+        <a:font script="Phag" typeface="Phagspa"/>
+        <a:font script="Syrn" typeface="Estrangelo Edessa"/>
+        <a:font script="Syrj" typeface="Estrangelo Edessa"/>
+        <a:font script="Syre" typeface="Estrangelo Edessa"/>
+        <a:font script="Sora" typeface="Nirmala UI"/>
+        <a:font script="Tale" typeface="Microsoft Tai Le"/>
+        <a:font script="Talu" typeface="Microsoft New Tai Lue"/>
+        <a:font script="Tfng" typeface="Ebrima"/>
+      </a:majorFont>
+      <a:minorFont>
+        <a:latin typeface="Aptos" panose="02110004020202020204"/>
+        <a:ea typeface=""/>
+        <a:cs typeface=""/>
+        <a:font script="Jpan" typeface="游ゴシック"/>
+        <a:font script="Hang" typeface="맑은 고딕"/>
+        <a:font script="Hans" typeface="等线"/>
+        <a:font script="Hant" typeface="新細明體"/>
+        <a:font script="Arab" typeface="Arial"/>
+        <a:font script="Hebr" typeface="Arial"/>
+        <a:font script="Thai" typeface="Cordia New"/>
+        <a:font script="Ethi" typeface="Nyala"/>
+        <a:font script="Beng" typeface="Vrinda"/>
+        <a:font script="Gujr" typeface="Shruti"/>
+        <a:font script="Khmr" typeface="DaunPenh"/>
+        <a:font script="Knda" typeface="Tunga"/>
+        <a:font script="Guru" typeface="Raavi"/>
+        <a:font script="Cans" typeface="Euphemia"/>
+        <a:font script="Cher" typeface="Plantagenet Cherokee"/>
+        <a:font script="Yiii" typeface="Microsoft Yi Baiti"/>
+        <a:font script="Tibt" typeface="Microsoft Himalaya"/>
+        <a:font script="Thaa" typeface="MV Boli"/>
+        <a:font script="Deva" typeface="Mangal"/>
+        <a:font script="Telu" typeface="Gautami"/>
+        <a:font script="Taml" typeface="Latha"/>
+        <a:font script="Syrc" typeface="Estrangelo Edessa"/>
+        <a:font script="Orya" typeface="Kalinga"/>
+        <a:font script="Mlym" typeface="Kartika"/>
+        <a:font script="Laoo" typeface="DokChampa"/>
+        <a:font script="Sinh" typeface="Iskoola Pota"/>
+        <a:font script="Mong" typeface="Mongolian Baiti"/>
+        <a:font script="Viet" typeface="Arial"/>
+        <a:font script="Uigh" typeface="Microsoft Uighur"/>
+        <a:font script="Geor" typeface="Sylfaen"/>
+        <a:font script="Armn" typeface="Arial"/>
+        <a:font script="Bugi" typeface="Leelawadee UI"/>
+        <a:font script="Bopo" typeface="Microsoft JhengHei"/>
+        <a:font script="Java" typeface="Javanese Text"/>
+        <a:font script="Lisu" typeface="Segoe UI"/>
+        <a:font script="Mymr" typeface="Myanmar Text"/>
+        <a:font script="Nkoo" typeface="Ebrima"/>
+        <a:font script="Olck" typeface="Nirmala UI"/>
+        <a:font script="Osma" typeface="Ebrima"/>
+        <a:font script="Phag" typeface="Phagspa"/>
+        <a:font script="Syrn" typeface="Estrangelo Edessa"/>
+        <a:font script="Syrj" typeface="Estrangelo Edessa"/>
+        <a:font script="Syre" typeface="Estrangelo Edessa"/>
+        <a:font script="Sora" typeface="Nirmala UI"/>
+        <a:font script="Tale" typeface="Microsoft Tai Le"/>
+        <a:font script="Talu" typeface="Microsoft New Tai Lue"/>
+        <a:font script="Tfng" typeface="Ebrima"/>
+      </a:minorFont>
+    </a:fontScheme>
+    <a:fmtScheme name="Office">
+      <a:fillStyleLst>
+        <a:solidFill>
+          <a:schemeClr val="phClr"/>
+        </a:solidFill>
+        <a:gradFill rotWithShape="1">
+          <a:gsLst>
+            <a:gs pos="0">
+              <a:schemeClr val="phClr">
+                <a:lumMod val="110000"/>
+                <a:satMod val="105000"/>
+                <a:tint val="67000"/>
+              </a:schemeClr>
+            </a:gs>
+            <a:gs pos="50000">
+              <a:schemeClr val="phClr">
+                <a:lumMod val="105000"/>
+                <a:satMod val="103000"/>
+                <a:tint val="73000"/>
+              </a:schemeClr>
+            </a:gs>
+            <a:gs pos="100000">
+              <a:schemeClr val="phClr">
+                <a:lumMod val="105000"/>
+                <a:satMod val="109000"/>
+                <a:tint val="81000"/>
+              </a:schemeClr>
+            </a:gs>
+          </a:gsLst>
+          <a:lin ang="5400000" scaled="0"/>
+        </a:gradFill>
+        <a:gradFill rotWithShape="1">
+          <a:gsLst>
+            <a:gs pos="0">
+              <a:schemeClr val="phClr">
+                <a:satMod val="103000"/>
+                <a:lumMod val="102000"/>
+                <a:tint val="94000"/>
+              </a:schemeClr>
+            </a:gs>
+            <a:gs pos="50000">
+              <a:schemeClr val="phClr">
+                <a:satMod val="110000"/>
+                <a:lumMod val="100000"/>
+                <a:shade val="100000"/>
+              </a:schemeClr>
+            </a:gs>
+            <a:gs pos="100000">
+              <a:schemeClr val="phClr">
+                <a:lumMod val="99000"/>
+                <a:satMod val="120000"/>
+                <a:shade val="78000"/>
+              </a:schemeClr>
+            </a:gs>
+          </a:gsLst>
+          <a:lin ang="5400000" scaled="0"/>
+        </a:gradFill>
+      </a:fillStyleLst>
+      <a:lnStyleLst>
+        <a:ln w="12700" cap="flat" cmpd="sng" algn="ctr">
+          <a:solidFill>
+            <a:schemeClr val="phClr"/>
+          </a:solidFill>
+          <a:prstDash val="solid"/>
+          <a:miter lim="800000"/>
+        </a:ln>
+        <a:ln w="19050" cap="flat" cmpd="sng" algn="ctr">
+          <a:solidFill>
+            <a:schemeClr val="phClr"/>
+          </a:solidFill>
+          <a:prstDash val="solid"/>
+          <a:miter lim="800000"/>
+        </a:ln>
+        <a:ln w="25400" cap="flat" cmpd="sng" algn="ctr">
+          <a:solidFill>
+            <a:schemeClr val="phClr"/>
+          </a:solidFill>
+          <a:prstDash val="solid"/>
+          <a:miter lim="800000"/>
+        </a:ln>
+      </a:lnStyleLst>
+      <a:effectStyleLst>
+        <a:effectStyle>
+          <a:effectLst/>
+        </a:effectStyle>
+        <a:effectStyle>
+          <a:effectLst/>
+        </a:effectStyle>
+        <a:effectStyle>
+          <a:effectLst>
+            <a:outerShdw blurRad="57150" dist="19050" dir="5400000" algn="ctr" rotWithShape="0">
+              <a:srgbClr val="000000">
+                <a:alpha val="63000"/>
+              </a:srgbClr>
+            </a:outerShdw>
+          </a:effectLst>
+        </a:effectStyle>
+      </a:effectStyleLst>
+      <a:bgFillStyleLst>
+        <a:solidFill>
+          <a:schemeClr val="phClr"/>
+        </a:solidFill>
+        <a:solidFill>
+          <a:schemeClr val="phClr">
+            <a:tint val="95000"/>
+            <a:satMod val="170000"/>
+          </a:schemeClr>
+        </a:solidFill>
+        <a:gradFill rotWithShape="1">
+          <a:gsLst>
+            <a:gs pos="0">
+              <a:schemeClr val="phClr">
+                <a:tint val="93000"/>
+                <a:satMod val="150000"/>
+                <a:shade val="98000"/>
+                <a:lumMod val="102000"/>
+              </a:schemeClr>
+            </a:gs>
+            <a:gs pos="50000">
+              <a:schemeClr val="phClr">
+                <a:tint val="98000"/>
+                <a:satMod val="130000"/>
+                <a:shade val="90000"/>
+                <a:lumMod val="103000"/>
+              </a:schemeClr>
+            </a:gs>
+            <a:gs pos="100000">
+              <a:schemeClr val="phClr">
+                <a:shade val="63000"/>
+                <a:satMod val="120000"/>
+              </a:schemeClr>
+            </a:gs>
+          </a:gsLst>
+          <a:lin ang="5400000" scaled="0"/>
+        </a:gradFill>
+      </a:bgFillStyleLst>
+    </a:fmtScheme>
+  </a:themeElements>
+  <a:objectDefaults>
+    <a:lnDef>
+      <a:spPr/>
+      <a:bodyPr/>
+      <a:lstStyle/>
+      <a:style>
+        <a:lnRef idx="2">
+          <a:schemeClr val="accent1"/>
+        </a:lnRef>
+        <a:fillRef idx="0">
+          <a:schemeClr val="accent1"/>
+        </a:fillRef>
+        <a:effectRef idx="1">
+          <a:schemeClr val="accent1"/>
+        </a:effectRef>
+        <a:fontRef idx="minor">
+          <a:schemeClr val="tx1"/>
+        </a:fontRef>
+      </a:style>
+    </a:lnDef>
+  </a:objectDefaults>
+  <a:extraClrSchemeLst/>
+  <a:extLst>
+    <a:ext uri="{05A4C25C-085E-4340-85A3-A5531E510DB2}">
+      <thm15:themeFamily xmlns:thm15="http://schemas.microsoft.com/office/thememl/2012/main" name="Office Theme" id="{2E142A2C-CD16-42D6-873A-C26D2A0506FA}" vid="{1BDDFF52-6CD6-40A5-AB3C-68EB2F1E4D0A}"/>
+    </a:ext>
+  </a:extLst>
+</a:theme>
 </file>
--- a/Physics/Physics_Murders.pptx
+++ b/Physics/Physics_Murders.pptx
@@ -209,7 +209,7 @@
           <a:p>
             <a:fld id="{EF338DA5-8184-4C47-BB83-93BD68CF2D63}" type="datetimeFigureOut">
               <a:rPr lang="en-US" smtClean="0"/>
-              <a:t>3/31/26</a:t>
+              <a:t>4/2/26</a:t>
             </a:fld>
             <a:endParaRPr lang="en-US"/>
           </a:p>
@@ -1715,7 +1715,7 @@
           <a:p>
             <a:fld id="{220BD450-5107-424A-9054-544A25915243}" type="datetimeFigureOut">
               <a:rPr lang="en-US" smtClean="0"/>
-              <a:t>3/31/26</a:t>
+              <a:t>4/2/26</a:t>
             </a:fld>
             <a:endParaRPr lang="en-US"/>
           </a:p>
@@ -1913,7 +1913,7 @@
           <a:p>
             <a:fld id="{220BD450-5107-424A-9054-544A25915243}" type="datetimeFigureOut">
               <a:rPr lang="en-US" smtClean="0"/>
-              <a:t>3/31/26</a:t>
+              <a:t>4/2/26</a:t>
             </a:fld>
             <a:endParaRPr lang="en-US"/>
           </a:p>
@@ -2121,7 +2121,7 @@
           <a:p>
             <a:fld id="{220BD450-5107-424A-9054-544A25915243}" type="datetimeFigureOut">
               <a:rPr lang="en-US" smtClean="0"/>
-              <a:t>3/31/26</a:t>
+              <a:t>4/2/26</a:t>
             </a:fld>
             <a:endParaRPr lang="en-US"/>
           </a:p>
@@ -2319,7 +2319,7 @@
           <a:p>
             <a:fld id="{220BD450-5107-424A-9054-544A25915243}" type="datetimeFigureOut">
               <a:rPr lang="en-US" smtClean="0"/>
-              <a:t>3/31/26</a:t>
+              <a:t>4/2/26</a:t>
             </a:fld>
             <a:endParaRPr lang="en-US"/>
           </a:p>
@@ -2594,7 +2594,7 @@
           <a:p>
             <a:fld id="{220BD450-5107-424A-9054-544A25915243}" type="datetimeFigureOut">
               <a:rPr lang="en-US" smtClean="0"/>
-              <a:t>3/31/26</a:t>
+              <a:t>4/2/26</a:t>
             </a:fld>
             <a:endParaRPr lang="en-US"/>
           </a:p>
@@ -2859,7 +2859,7 @@
           <a:p>
             <a:fld id="{220BD450-5107-424A-9054-544A25915243}" type="datetimeFigureOut">
               <a:rPr lang="en-US" smtClean="0"/>
-              <a:t>3/31/26</a:t>
+              <a:t>4/2/26</a:t>
             </a:fld>
             <a:endParaRPr lang="en-US"/>
           </a:p>
@@ -3271,7 +3271,7 @@
           <a:p>
             <a:fld id="{220BD450-5107-424A-9054-544A25915243}" type="datetimeFigureOut">
               <a:rPr lang="en-US" smtClean="0"/>
-              <a:t>3/31/26</a:t>
+              <a:t>4/2/26</a:t>
             </a:fld>
             <a:endParaRPr lang="en-US"/>
           </a:p>
@@ -3412,7 +3412,7 @@
           <a:p>
             <a:fld id="{220BD450-5107-424A-9054-544A25915243}" type="datetimeFigureOut">
               <a:rPr lang="en-US" smtClean="0"/>
-              <a:t>3/31/26</a:t>
+              <a:t>4/2/26</a:t>
             </a:fld>
             <a:endParaRPr lang="en-US"/>
           </a:p>
@@ -3525,7 +3525,7 @@
           <a:p>
             <a:fld id="{220BD450-5107-424A-9054-544A25915243}" type="datetimeFigureOut">
               <a:rPr lang="en-US" smtClean="0"/>
-              <a:t>3/31/26</a:t>
+              <a:t>4/2/26</a:t>
             </a:fld>
             <a:endParaRPr lang="en-US"/>
           </a:p>
@@ -3836,7 +3836,7 @@
           <a:p>
             <a:fld id="{220BD450-5107-424A-9054-544A25915243}" type="datetimeFigureOut">
               <a:rPr lang="en-US" smtClean="0"/>
-              <a:t>3/31/26</a:t>
+              <a:t>4/2/26</a:t>
             </a:fld>
             <a:endParaRPr lang="en-US"/>
           </a:p>
@@ -4124,7 +4124,7 @@
           <a:p>
             <a:fld id="{220BD450-5107-424A-9054-544A25915243}" type="datetimeFigureOut">
               <a:rPr lang="en-US" smtClean="0"/>
-              <a:t>3/31/26</a:t>
+              <a:t>4/2/26</a:t>
             </a:fld>
             <a:endParaRPr lang="en-US"/>
           </a:p>
@@ -4365,7 +4365,7 @@
           <a:p>
             <a:fld id="{220BD450-5107-424A-9054-544A25915243}" type="datetimeFigureOut">
               <a:rPr lang="en-US" smtClean="0"/>
-              <a:t>3/31/26</a:t>
+              <a:t>4/2/26</a:t>
             </a:fld>
             <a:endParaRPr lang="en-US"/>
           </a:p>
@@ -4782,53 +4782,6 @@
           <a:chExt cx="0" cy="0"/>
         </a:xfrm>
       </p:grpSpPr>
-      <p:pic>
-        <p:nvPicPr>
-          <p:cNvPr id="2" name="Picture 2" descr="The Silenced Spark: Dr. Amy Eskridge's Final Stand Against the Gravity of  Secrets | by Thumars | Medium">
-            <a:extLst>
-              <a:ext uri="{FF2B5EF4-FFF2-40B4-BE49-F238E27FC236}">
-                <a16:creationId xmlns:a16="http://schemas.microsoft.com/office/drawing/2014/main" id="{32955344-6D94-2946-0F8D-B5DD94CBE32B}"/>
-              </a:ext>
-            </a:extLst>
-          </p:cNvPr>
-          <p:cNvPicPr>
-            <a:picLocks noChangeAspect="1" noChangeArrowheads="1"/>
-          </p:cNvPicPr>
-          <p:nvPr/>
-        </p:nvPicPr>
-        <p:blipFill>
-          <a:blip r:embed="rId3">
-            <a:extLst>
-              <a:ext uri="{28A0092B-C50C-407E-A947-70E740481C1C}">
-                <a14:useLocalDpi xmlns:a14="http://schemas.microsoft.com/office/drawing/2010/main" val="0"/>
-              </a:ext>
-            </a:extLst>
-          </a:blip>
-          <a:srcRect/>
-          <a:stretch>
-            <a:fillRect/>
-          </a:stretch>
-        </p:blipFill>
-        <p:spPr bwMode="auto">
-          <a:xfrm>
-            <a:off x="7473985" y="1096340"/>
-            <a:ext cx="4668179" cy="3828846"/>
-          </a:xfrm>
-          <a:prstGeom prst="rect">
-            <a:avLst/>
-          </a:prstGeom>
-          <a:noFill/>
-          <a:extLst>
-            <a:ext uri="{909E8E84-426E-40DD-AFC4-6F175D3DCCD1}">
-              <a14:hiddenFill xmlns:a14="http://schemas.microsoft.com/office/drawing/2010/main">
-                <a:solidFill>
-                  <a:srgbClr val="FFFFFF"/>
-                </a:solidFill>
-              </a14:hiddenFill>
-            </a:ext>
-          </a:extLst>
-        </p:spPr>
-      </p:pic>
       <p:sp>
         <p:nvSpPr>
           <p:cNvPr id="15" name="TextBox 14">
@@ -5053,6 +5006,151 @@
       </p:sp>
       <p:sp>
         <p:nvSpPr>
+          <p:cNvPr id="10" name="TextBox 9">
+            <a:extLst>
+              <a:ext uri="{FF2B5EF4-FFF2-40B4-BE49-F238E27FC236}">
+                <a16:creationId xmlns:a16="http://schemas.microsoft.com/office/drawing/2014/main" id="{5FA0D8B2-6B55-D3DC-BCBB-6FEAD86B9E72}"/>
+              </a:ext>
+            </a:extLst>
+          </p:cNvPr>
+          <p:cNvSpPr txBox="1"/>
+          <p:nvPr/>
+        </p:nvSpPr>
+        <p:spPr>
+          <a:xfrm>
+            <a:off x="107300" y="1873037"/>
+            <a:ext cx="7564361" cy="3477875"/>
+          </a:xfrm>
+          <a:prstGeom prst="rect">
+            <a:avLst/>
+          </a:prstGeom>
+          <a:solidFill>
+            <a:schemeClr val="bg1">
+              <a:alpha val="84400"/>
+            </a:schemeClr>
+          </a:solidFill>
+        </p:spPr>
+        <p:txBody>
+          <a:bodyPr wrap="square" rtlCol="0">
+            <a:spAutoFit/>
+          </a:bodyPr>
+          <a:lstStyle/>
+          <a:p>
+            <a:pPr marL="285750" indent="-285750">
+              <a:spcBef>
+                <a:spcPts val="1200"/>
+              </a:spcBef>
+              <a:buFont typeface="Arial" panose="020B0604020202020204" pitchFamily="34" charset="0"/>
+              <a:buChar char="•"/>
+            </a:pPr>
+            <a:r>
+              <a:rPr dirty="0"/>
+              <a:t>DEAD at 34 in Huntsville, Alabama — a retired UK intelligence officer told Congress she was MURDERED with DIRECTED ENERGY WEAPONS.</a:t>
+            </a:r>
+          </a:p>
+          <a:p>
+            <a:pPr marL="285750" indent="-285750">
+              <a:spcBef>
+                <a:spcPts val="1200"/>
+              </a:spcBef>
+              <a:buFont typeface="Arial" panose="020B0604020202020204" pitchFamily="34" charset="0"/>
+              <a:buChar char="•"/>
+            </a:pPr>
+            <a:r>
+              <a:rPr dirty="0"/>
+              <a:t>Co-founded the Institute for Exotic Science researching ANTIGRAVITY, metamaterials, and gravity modification.</a:t>
+            </a:r>
+          </a:p>
+          <a:p>
+            <a:pPr marL="285750" indent="-285750">
+              <a:spcBef>
+                <a:spcPts val="1200"/>
+              </a:spcBef>
+              <a:buFont typeface="Arial" panose="020B0604020202020204" pitchFamily="34" charset="0"/>
+              <a:buChar char="•"/>
+            </a:pPr>
+            <a:r>
+              <a:rPr dirty="0"/>
+              <a:t>Her father was a retired NASA plasma physics engineer — she needed NASA APPROVAL before presenting her antigravity findings.</a:t>
+            </a:r>
+          </a:p>
+          <a:p>
+            <a:pPr marL="285750" indent="-285750">
+              <a:spcBef>
+                <a:spcPts val="1200"/>
+              </a:spcBef>
+              <a:buFont typeface="Arial" panose="020B0604020202020204" pitchFamily="34" charset="0"/>
+              <a:buChar char="•"/>
+            </a:pPr>
+            <a:r>
+              <a:rPr dirty="0"/>
+              <a:t>Based at University of Alabama in Huntsville — same campus where another antigravity researcher, Ning Li, was targeted and SILENCED.</a:t>
+            </a:r>
+          </a:p>
+          <a:p>
+            <a:pPr marL="285750" indent="-285750">
+              <a:spcBef>
+                <a:spcPts val="1200"/>
+              </a:spcBef>
+              <a:buFont typeface="Arial" panose="020B0604020202020204" pitchFamily="34" charset="0"/>
+              <a:buChar char="•"/>
+            </a:pPr>
+            <a:r>
+              <a:rPr dirty="0"/>
+              <a:t>She told colleagues she was ready to bring antigravity research "into the open." She never got the chance.</a:t>
+            </a:r>
+          </a:p>
+        </p:txBody>
+      </p:sp>
+      <p:pic>
+        <p:nvPicPr>
+          <p:cNvPr id="2" name="Picture 2" descr="The Silenced Spark: Dr. Amy Eskridge's Final Stand Against the Gravity of  Secrets | by Thumars | Medium">
+            <a:extLst>
+              <a:ext uri="{FF2B5EF4-FFF2-40B4-BE49-F238E27FC236}">
+                <a16:creationId xmlns:a16="http://schemas.microsoft.com/office/drawing/2014/main" id="{32955344-6D94-2946-0F8D-B5DD94CBE32B}"/>
+              </a:ext>
+            </a:extLst>
+          </p:cNvPr>
+          <p:cNvPicPr>
+            <a:picLocks noChangeAspect="1" noChangeArrowheads="1"/>
+          </p:cNvPicPr>
+          <p:nvPr/>
+        </p:nvPicPr>
+        <p:blipFill>
+          <a:blip r:embed="rId3">
+            <a:extLst>
+              <a:ext uri="{28A0092B-C50C-407E-A947-70E740481C1C}">
+                <a14:useLocalDpi xmlns:a14="http://schemas.microsoft.com/office/drawing/2010/main" val="0"/>
+              </a:ext>
+            </a:extLst>
+          </a:blip>
+          <a:srcRect/>
+          <a:stretch>
+            <a:fillRect/>
+          </a:stretch>
+        </p:blipFill>
+        <p:spPr bwMode="auto">
+          <a:xfrm>
+            <a:off x="7473985" y="1096340"/>
+            <a:ext cx="4668179" cy="3828846"/>
+          </a:xfrm>
+          <a:prstGeom prst="rect">
+            <a:avLst/>
+          </a:prstGeom>
+          <a:noFill/>
+          <a:extLst>
+            <a:ext uri="{909E8E84-426E-40DD-AFC4-6F175D3DCCD1}">
+              <a14:hiddenFill xmlns:a14="http://schemas.microsoft.com/office/drawing/2010/main">
+                <a:solidFill>
+                  <a:srgbClr val="FFFFFF"/>
+                </a:solidFill>
+              </a14:hiddenFill>
+            </a:ext>
+          </a:extLst>
+        </p:spPr>
+      </p:pic>
+      <p:sp>
+        <p:nvSpPr>
           <p:cNvPr id="7" name="Google Shape;170;p31">
             <a:extLst>
               <a:ext uri="{FF2B5EF4-FFF2-40B4-BE49-F238E27FC236}">
@@ -5123,99 +5221,71 @@
       </p:sp>
       <p:sp>
         <p:nvSpPr>
-          <p:cNvPr id="10" name="TextBox 9">
-            <a:extLst>
-              <a:ext uri="{FF2B5EF4-FFF2-40B4-BE49-F238E27FC236}">
-                <a16:creationId xmlns:a16="http://schemas.microsoft.com/office/drawing/2014/main" id="{5FA0D8B2-6B55-D3DC-BCBB-6FEAD86B9E72}"/>
-              </a:ext>
-            </a:extLst>
-          </p:cNvPr>
-          <p:cNvSpPr txBox="1"/>
+          <p:cNvPr id="6" name="Google Shape;170;p31">
+            <a:extLst>
+              <a:ext uri="{FF2B5EF4-FFF2-40B4-BE49-F238E27FC236}">
+                <a16:creationId xmlns:a16="http://schemas.microsoft.com/office/drawing/2014/main" id="{BE2670AC-86BF-BED1-9DFD-F3BAACB46752}"/>
+              </a:ext>
+            </a:extLst>
+          </p:cNvPr>
+          <p:cNvSpPr/>
           <p:nvPr/>
         </p:nvSpPr>
         <p:spPr>
           <a:xfrm>
-            <a:off x="107300" y="1873037"/>
-            <a:ext cx="7564361" cy="3477875"/>
+            <a:off x="7526107" y="5681420"/>
+            <a:ext cx="4550222" cy="548230"/>
           </a:xfrm>
           <a:prstGeom prst="rect">
             <a:avLst/>
           </a:prstGeom>
           <a:solidFill>
-            <a:schemeClr val="bg1">
-              <a:alpha val="84400"/>
-            </a:schemeClr>
+            <a:srgbClr val="C00000"/>
           </a:solidFill>
-        </p:spPr>
-        <p:txBody>
-          <a:bodyPr wrap="square" rtlCol="0">
-            <a:spAutoFit/>
+          <a:ln>
+            <a:noFill/>
+          </a:ln>
+        </p:spPr>
+        <p:txBody>
+          <a:bodyPr spcFirstLastPara="1" wrap="square" lIns="91425" tIns="45700" rIns="91425" bIns="45700" anchor="ctr" anchorCtr="0">
+            <a:noAutofit/>
           </a:bodyPr>
           <a:lstStyle/>
           <a:p>
-            <a:pPr marL="285750" indent="-285750">
+            <a:pPr marL="0" marR="0" lvl="0" indent="0" algn="ctr" rtl="0">
+              <a:lnSpc>
+                <a:spcPct val="100000"/>
+              </a:lnSpc>
               <a:spcBef>
-                <a:spcPts val="1200"/>
+                <a:spcPts val="0"/>
               </a:spcBef>
-              <a:buFont typeface="Arial" panose="020B0604020202020204" pitchFamily="34" charset="0"/>
-              <a:buChar char="•"/>
+              <a:spcAft>
+                <a:spcPts val="0"/>
+              </a:spcAft>
+              <a:buClr>
+                <a:srgbClr val="000000"/>
+              </a:buClr>
+              <a:buSzPts val="1600"/>
+              <a:buFont typeface="Arial"/>
+              <a:buNone/>
             </a:pPr>
             <a:r>
-              <a:rPr dirty="0"/>
-              <a:t>DEAD at 34 in Huntsville, Alabama — a retired UK intelligence officer told Congress she was MURDERED with DIRECTED ENERGY WEAPONS.</a:t>
-            </a:r>
-          </a:p>
-          <a:p>
-            <a:pPr marL="285750" indent="-285750">
-              <a:spcBef>
-                <a:spcPts val="1200"/>
-              </a:spcBef>
-              <a:buFont typeface="Arial" panose="020B0604020202020204" pitchFamily="34" charset="0"/>
-              <a:buChar char="•"/>
-            </a:pPr>
-            <a:r>
-              <a:rPr dirty="0"/>
-              <a:t>Co-founded the Institute for Exotic Science researching ANTIGRAVITY, metamaterials, and gravity modification.</a:t>
-            </a:r>
-          </a:p>
-          <a:p>
-            <a:pPr marL="285750" indent="-285750">
-              <a:spcBef>
-                <a:spcPts val="1200"/>
-              </a:spcBef>
-              <a:buFont typeface="Arial" panose="020B0604020202020204" pitchFamily="34" charset="0"/>
-              <a:buChar char="•"/>
-            </a:pPr>
-            <a:r>
-              <a:rPr dirty="0"/>
-              <a:t>Her father was a retired NASA plasma physics engineer — she needed NASA APPROVAL before presenting her antigravity findings.</a:t>
-            </a:r>
-          </a:p>
-          <a:p>
-            <a:pPr marL="285750" indent="-285750">
-              <a:spcBef>
-                <a:spcPts val="1200"/>
-              </a:spcBef>
-              <a:buFont typeface="Arial" panose="020B0604020202020204" pitchFamily="34" charset="0"/>
-              <a:buChar char="•"/>
-            </a:pPr>
-            <a:r>
-              <a:rPr dirty="0"/>
-              <a:t>Based at University of Alabama in Huntsville — same campus where another antigravity researcher, Ning Li, was targeted and SILENCED.</a:t>
-            </a:r>
-          </a:p>
-          <a:p>
-            <a:pPr marL="285750" indent="-285750">
-              <a:spcBef>
-                <a:spcPts val="1200"/>
-              </a:spcBef>
-              <a:buFont typeface="Arial" panose="020B0604020202020204" pitchFamily="34" charset="0"/>
-              <a:buChar char="•"/>
-            </a:pPr>
-            <a:r>
-              <a:rPr dirty="0"/>
-              <a:t>She told colleagues she was ready to bring antigravity research "into the open." She never got the chance.</a:t>
-            </a:r>
+              <a:rPr lang="en-US" sz="3600" dirty="0">
+                <a:solidFill>
+                  <a:schemeClr val="lt1"/>
+                </a:solidFill>
+              </a:rPr>
+              <a:t>Dead at Age 34</a:t>
+            </a:r>
+            <a:endParaRPr sz="2000" b="0" i="0" u="none" strike="noStrike" cap="none" dirty="0">
+              <a:solidFill>
+                <a:srgbClr val="000000"/>
+              </a:solidFill>
+              <a:latin typeface="Arial"/>
+              <a:ea typeface="Arial"/>
+              <a:cs typeface="Arial"/>
+              <a:sym typeface="Arial"/>
+            </a:endParaRPr>
           </a:p>
         </p:txBody>
       </p:sp>
@@ -6883,6 +6953,128 @@
       </p:sp>
       <p:sp>
         <p:nvSpPr>
+          <p:cNvPr id="10" name="TextBox 9">
+            <a:extLst>
+              <a:ext uri="{FF2B5EF4-FFF2-40B4-BE49-F238E27FC236}">
+                <a16:creationId xmlns:a16="http://schemas.microsoft.com/office/drawing/2014/main" id="{5FA0D8B2-6B55-D3DC-BCBB-6FEAD86B9E72}"/>
+              </a:ext>
+            </a:extLst>
+          </p:cNvPr>
+          <p:cNvSpPr txBox="1"/>
+          <p:nvPr/>
+        </p:nvSpPr>
+        <p:spPr>
+          <a:xfrm>
+            <a:off x="107300" y="1878198"/>
+            <a:ext cx="7863995" cy="3477875"/>
+          </a:xfrm>
+          <a:prstGeom prst="rect">
+            <a:avLst/>
+          </a:prstGeom>
+          <a:solidFill>
+            <a:schemeClr val="bg1">
+              <a:alpha val="84400"/>
+            </a:schemeClr>
+          </a:solidFill>
+        </p:spPr>
+        <p:txBody>
+          <a:bodyPr wrap="square" rtlCol="0">
+            <a:spAutoFit/>
+          </a:bodyPr>
+          <a:lstStyle/>
+          <a:p>
+            <a:pPr marL="285750" indent="-285750">
+              <a:spcBef>
+                <a:spcPts val="1200"/>
+              </a:spcBef>
+              <a:buFont typeface="Arial" panose="020B0604020202020204" pitchFamily="34" charset="0"/>
+              <a:buChar char="•"/>
+            </a:pPr>
+            <a:r>
+              <a:rPr dirty="0"/>
+              <a:t>DIED November 5, 2016, at age 67 in Coeur d'Alene, Idaho — free energy inventor for four decades.</a:t>
+            </a:r>
+          </a:p>
+          <a:p>
+            <a:pPr marL="285750" indent="-285750">
+              <a:spcBef>
+                <a:spcPts val="1200"/>
+              </a:spcBef>
+              <a:buFont typeface="Arial" panose="020B0604020202020204" pitchFamily="34" charset="0"/>
+              <a:buChar char="•"/>
+            </a:pPr>
+            <a:r>
+              <a:rPr dirty="0"/>
+              <a:t>Built electromagnetic motor-generators that allegedly pulled energy from the QUANTUM VACUUM.</a:t>
+            </a:r>
+          </a:p>
+          <a:p>
+            <a:pPr marL="285750" indent="-285750">
+              <a:spcBef>
+                <a:spcPts val="1200"/>
+              </a:spcBef>
+              <a:buFont typeface="Arial" panose="020B0604020202020204" pitchFamily="34" charset="0"/>
+              <a:buChar char="•"/>
+            </a:pPr>
+            <a:r>
+              <a:rPr dirty="0"/>
+              <a:t>His Bedini Motor design was replicated by thousands of experimenters worldwide — the most OPEN-SOURCE free energy device ever.</a:t>
+            </a:r>
+          </a:p>
+          <a:p>
+            <a:pPr marL="285750" indent="-285750">
+              <a:spcBef>
+                <a:spcPts val="1200"/>
+              </a:spcBef>
+              <a:buFont typeface="Arial" panose="020B0604020202020204" pitchFamily="34" charset="0"/>
+              <a:buChar char="•"/>
+            </a:pPr>
+            <a:r>
+              <a:rPr dirty="0"/>
+              <a:t>Former audio engineer who founded Bedini Electronics — his amplifiers OUTPERFORMED the industry.</a:t>
+            </a:r>
+          </a:p>
+          <a:p>
+            <a:pPr marL="285750" indent="-285750">
+              <a:spcBef>
+                <a:spcPts val="1200"/>
+              </a:spcBef>
+              <a:buFont typeface="Arial" panose="020B0604020202020204" pitchFamily="34" charset="0"/>
+              <a:buChar char="•"/>
+            </a:pPr>
+            <a:r>
+              <a:rPr dirty="0"/>
+              <a:t>Collaborated with Tom Bearden on scalar electromagnetics. Claimed the energy establishment had SUPPRESSED radiant energy for a century.</a:t>
+            </a:r>
+          </a:p>
+        </p:txBody>
+      </p:sp>
+      <p:pic>
+        <p:nvPicPr>
+          <p:cNvPr id="16" name="Picture 15" descr="John_Bedini.jpg"/>
+          <p:cNvPicPr>
+            <a:picLocks noChangeAspect="1"/>
+          </p:cNvPicPr>
+          <p:nvPr/>
+        </p:nvPicPr>
+        <p:blipFill>
+          <a:blip r:embed="rId3"/>
+          <a:stretch>
+            <a:fillRect/>
+          </a:stretch>
+        </p:blipFill>
+        <p:spPr>
+          <a:xfrm>
+            <a:off x="7925048" y="1100088"/>
+            <a:ext cx="3431869" cy="3884876"/>
+          </a:xfrm>
+          <a:prstGeom prst="rect">
+            <a:avLst/>
+          </a:prstGeom>
+        </p:spPr>
+      </p:pic>
+      <p:sp>
+        <p:nvSpPr>
           <p:cNvPr id="7" name="Google Shape;170;p31">
             <a:extLst>
               <a:ext uri="{FF2B5EF4-FFF2-40B4-BE49-F238E27FC236}">
@@ -7021,128 +7213,6 @@
           </a:p>
         </p:txBody>
       </p:sp>
-      <p:sp>
-        <p:nvSpPr>
-          <p:cNvPr id="10" name="TextBox 9">
-            <a:extLst>
-              <a:ext uri="{FF2B5EF4-FFF2-40B4-BE49-F238E27FC236}">
-                <a16:creationId xmlns:a16="http://schemas.microsoft.com/office/drawing/2014/main" id="{5FA0D8B2-6B55-D3DC-BCBB-6FEAD86B9E72}"/>
-              </a:ext>
-            </a:extLst>
-          </p:cNvPr>
-          <p:cNvSpPr txBox="1"/>
-          <p:nvPr/>
-        </p:nvSpPr>
-        <p:spPr>
-          <a:xfrm>
-            <a:off x="107300" y="1878198"/>
-            <a:ext cx="7863995" cy="3477875"/>
-          </a:xfrm>
-          <a:prstGeom prst="rect">
-            <a:avLst/>
-          </a:prstGeom>
-          <a:solidFill>
-            <a:schemeClr val="bg1">
-              <a:alpha val="84400"/>
-            </a:schemeClr>
-          </a:solidFill>
-        </p:spPr>
-        <p:txBody>
-          <a:bodyPr wrap="square" rtlCol="0">
-            <a:spAutoFit/>
-          </a:bodyPr>
-          <a:lstStyle/>
-          <a:p>
-            <a:pPr marL="285750" indent="-285750">
-              <a:spcBef>
-                <a:spcPts val="1200"/>
-              </a:spcBef>
-              <a:buFont typeface="Arial" panose="020B0604020202020204" pitchFamily="34" charset="0"/>
-              <a:buChar char="•"/>
-            </a:pPr>
-            <a:r>
-              <a:rPr dirty="0"/>
-              <a:t>DIED November 5, 2016, at age 67 in Coeur d'Alene, Idaho — free energy inventor for four decades.</a:t>
-            </a:r>
-          </a:p>
-          <a:p>
-            <a:pPr marL="285750" indent="-285750">
-              <a:spcBef>
-                <a:spcPts val="1200"/>
-              </a:spcBef>
-              <a:buFont typeface="Arial" panose="020B0604020202020204" pitchFamily="34" charset="0"/>
-              <a:buChar char="•"/>
-            </a:pPr>
-            <a:r>
-              <a:rPr dirty="0"/>
-              <a:t>Built electromagnetic motor-generators that allegedly pulled energy from the QUANTUM VACUUM.</a:t>
-            </a:r>
-          </a:p>
-          <a:p>
-            <a:pPr marL="285750" indent="-285750">
-              <a:spcBef>
-                <a:spcPts val="1200"/>
-              </a:spcBef>
-              <a:buFont typeface="Arial" panose="020B0604020202020204" pitchFamily="34" charset="0"/>
-              <a:buChar char="•"/>
-            </a:pPr>
-            <a:r>
-              <a:rPr dirty="0"/>
-              <a:t>His Bedini Motor design was replicated by thousands of experimenters worldwide — the most OPEN-SOURCE free energy device ever.</a:t>
-            </a:r>
-          </a:p>
-          <a:p>
-            <a:pPr marL="285750" indent="-285750">
-              <a:spcBef>
-                <a:spcPts val="1200"/>
-              </a:spcBef>
-              <a:buFont typeface="Arial" panose="020B0604020202020204" pitchFamily="34" charset="0"/>
-              <a:buChar char="•"/>
-            </a:pPr>
-            <a:r>
-              <a:rPr dirty="0"/>
-              <a:t>Former audio engineer who founded Bedini Electronics — his amplifiers OUTPERFORMED the industry.</a:t>
-            </a:r>
-          </a:p>
-          <a:p>
-            <a:pPr marL="285750" indent="-285750">
-              <a:spcBef>
-                <a:spcPts val="1200"/>
-              </a:spcBef>
-              <a:buFont typeface="Arial" panose="020B0604020202020204" pitchFamily="34" charset="0"/>
-              <a:buChar char="•"/>
-            </a:pPr>
-            <a:r>
-              <a:rPr dirty="0"/>
-              <a:t>Collaborated with Tom Bearden on scalar electromagnetics. Claimed the energy establishment had SUPPRESSED radiant energy for a century.</a:t>
-            </a:r>
-          </a:p>
-        </p:txBody>
-      </p:sp>
-      <p:pic>
-        <p:nvPicPr>
-          <p:cNvPr id="16" name="Picture 15" descr="John_Bedini.jpg"/>
-          <p:cNvPicPr>
-            <a:picLocks noChangeAspect="1"/>
-          </p:cNvPicPr>
-          <p:nvPr/>
-        </p:nvPicPr>
-        <p:blipFill>
-          <a:blip r:embed="rId3"/>
-          <a:stretch>
-            <a:fillRect/>
-          </a:stretch>
-        </p:blipFill>
-        <p:spPr>
-          <a:xfrm>
-            <a:off x="7925048" y="1100088"/>
-            <a:ext cx="3431869" cy="3884876"/>
-          </a:xfrm>
-          <a:prstGeom prst="rect">
-            <a:avLst/>
-          </a:prstGeom>
-        </p:spPr>
-      </p:pic>
     </p:spTree>
     <p:extLst>
       <p:ext uri="{BB962C8B-B14F-4D97-AF65-F5344CB8AC3E}">
@@ -8295,7 +8365,7 @@
         </p:nvSpPr>
         <p:spPr>
           <a:xfrm>
-            <a:off x="312431" y="2175372"/>
+            <a:off x="256862" y="1878198"/>
             <a:ext cx="6987941" cy="3046988"/>
           </a:xfrm>
           <a:prstGeom prst="rect">
@@ -8321,6 +8391,7 @@
               <a:buChar char="•"/>
             </a:pPr>
             <a:r>
+              <a:rPr dirty="0"/>
               <a:t>DEAD at 52 — found in her Manhattan townhouse. Ruled "CIRCUMSTANCES UNDETERMINED" by the medical examiner.</a:t>
             </a:r>
           </a:p>
@@ -8333,6 +8404,7 @@
               <a:buChar char="•"/>
             </a:pPr>
             <a:r>
+              <a:rPr dirty="0"/>
               <a:t>America's most famous female journalist — 20 MILLION readers, CBS star of What's My Line? for 15 years.</a:t>
             </a:r>
           </a:p>
@@ -8345,6 +8417,7 @@
               <a:buChar char="•"/>
             </a:pPr>
             <a:r>
+              <a:rPr dirty="0"/>
               <a:t>In 1955 she published a front-page story: a British Cabinet official confirmed UFOs were REAL and had been examined.</a:t>
             </a:r>
           </a:p>
@@ -8357,6 +8430,7 @@
               <a:buChar char="•"/>
             </a:pPr>
             <a:r>
+              <a:rPr dirty="0"/>
               <a:t>She was also investigating the JFK ASSASSINATION and had a private interview with Jack Ruby.</a:t>
             </a:r>
           </a:p>
@@ -8369,6 +8443,7 @@
               <a:buChar char="•"/>
             </a:pPr>
             <a:r>
+              <a:rPr dirty="0"/>
               <a:t>Told her lawyer: "I'm going to break the real story and have the biggest SCOOP of the century." She never did.</a:t>
             </a:r>
           </a:p>
@@ -8423,6 +8498,30 @@
           <a:chExt cx="0" cy="0"/>
         </a:xfrm>
       </p:grpSpPr>
+      <p:pic>
+        <p:nvPicPr>
+          <p:cNvPr id="16" name="Picture 15" descr="Karl_Wolfe.jpg"/>
+          <p:cNvPicPr>
+            <a:picLocks noChangeAspect="1"/>
+          </p:cNvPicPr>
+          <p:nvPr/>
+        </p:nvPicPr>
+        <p:blipFill>
+          <a:blip r:embed="rId3"/>
+          <a:stretch>
+            <a:fillRect/>
+          </a:stretch>
+        </p:blipFill>
+        <p:spPr>
+          <a:xfrm>
+            <a:off x="8459451" y="1100088"/>
+            <a:ext cx="2363063" cy="3884876"/>
+          </a:xfrm>
+          <a:prstGeom prst="rect">
+            <a:avLst/>
+          </a:prstGeom>
+        </p:spPr>
+      </p:pic>
       <p:sp>
         <p:nvSpPr>
           <p:cNvPr id="15" name="TextBox 14">
@@ -8799,7 +8898,7 @@
         </p:nvSpPr>
         <p:spPr>
           <a:xfrm>
-            <a:off x="312431" y="2175372"/>
+            <a:off x="238579" y="1867260"/>
             <a:ext cx="6987941" cy="3046988"/>
           </a:xfrm>
           <a:prstGeom prst="rect">
@@ -8883,30 +8982,6 @@
           </a:p>
         </p:txBody>
       </p:sp>
-      <p:pic>
-        <p:nvPicPr>
-          <p:cNvPr id="16" name="Picture 15" descr="Karl_Wolfe.jpg"/>
-          <p:cNvPicPr>
-            <a:picLocks noChangeAspect="1"/>
-          </p:cNvPicPr>
-          <p:nvPr/>
-        </p:nvPicPr>
-        <p:blipFill>
-          <a:blip r:embed="rId3"/>
-          <a:stretch>
-            <a:fillRect/>
-          </a:stretch>
-        </p:blipFill>
-        <p:spPr>
-          <a:xfrm>
-            <a:off x="8459451" y="1100088"/>
-            <a:ext cx="2363063" cy="3884876"/>
-          </a:xfrm>
-          <a:prstGeom prst="rect">
-            <a:avLst/>
-          </a:prstGeom>
-        </p:spPr>
-      </p:pic>
     </p:spTree>
   </p:cSld>
   <p:clrMapOvr>
@@ -9761,7 +9836,7 @@
                   <a:schemeClr val="lt1"/>
                 </a:solidFill>
               </a:rPr>
-              <a:t>Dead at Age 48</a:t>
+              <a:t>Dead at Age 46</a:t>
             </a:r>
             <a:endParaRPr sz="2000" b="0" i="0" u="none" strike="noStrike" cap="none" dirty="0">
               <a:solidFill>
@@ -9816,7 +9891,15 @@
             </a:pPr>
             <a:r>
               <a:rPr dirty="0"/>
-              <a:t>Former HAARP chief scientist found BOUND with duct tape, belt around his neck, head wrapped in tape. ASPHYXIATED in his own home. Age 48.</a:t>
+              <a:t>Former HAARP chief scientist found BOUND with duct tape, belt around his neck, head wrapped in tape. ASPHYXIATED in his own home. Age 4</a:t>
+            </a:r>
+            <a:r>
+              <a:rPr lang="en-US" dirty="0"/>
+              <a:t>6</a:t>
+            </a:r>
+            <a:r>
+              <a:rPr dirty="0"/>
+              <a:t>.</a:t>
             </a:r>
           </a:p>
           <a:p>
@@ -10344,7 +10427,7 @@
         </p:nvSpPr>
         <p:spPr>
           <a:xfrm>
-            <a:off x="312431" y="2175372"/>
+            <a:off x="312432" y="1905506"/>
             <a:ext cx="6987941" cy="3046988"/>
           </a:xfrm>
           <a:prstGeom prst="rect">
@@ -10370,6 +10453,7 @@
               <a:buChar char="•"/>
             </a:pPr>
             <a:r>
+              <a:rPr dirty="0"/>
               <a:t>DEAD at 39 in Warsaw, Poland — reportedly VOMITED liters of black liquid before dying on July 16, 2016.</a:t>
             </a:r>
           </a:p>
@@ -10382,6 +10466,7 @@
               <a:buChar char="•"/>
             </a:pPr>
             <a:r>
+              <a:rPr dirty="0"/>
               <a:t>Days before, he texted his mother: "If anything happens to me, INVESTIGATE."</a:t>
             </a:r>
           </a:p>
@@ -10394,6 +10479,7 @@
               <a:buChar char="•"/>
             </a:pPr>
             <a:r>
+              <a:rPr dirty="0"/>
               <a:t>British UFO researcher who investigated secret military MIND CONTROL programs and "super soldier" experiments.</a:t>
             </a:r>
           </a:p>
@@ -10406,6 +10492,7 @@
               <a:buChar char="•"/>
             </a:pPr>
             <a:r>
+              <a:rPr dirty="0"/>
               <a:t>Father of two children. Born in Canterbury, England. His mother Vanessa fought publicly for answers.</a:t>
             </a:r>
           </a:p>
@@ -10418,6 +10505,7 @@
               <a:buChar char="•"/>
             </a:pPr>
             <a:r>
+              <a:rPr dirty="0"/>
               <a:t>Polish authorities initially found "no evidence of a crime." His mother demanded a proper investigation.</a:t>
             </a:r>
           </a:p>
